--- a/docs/presentation.pptx
+++ b/docs/presentation.pptx
@@ -19,10 +19,9 @@
     <p:sldId id="267" r:id="rId13"/>
     <p:sldId id="268" r:id="rId14"/>
     <p:sldId id="269" r:id="rId15"/>
-    <p:sldId id="270" r:id="rId16"/>
   </p:sldIdLst>
   <p:notesMasterIdLst>
-    <p:notesMasterId r:id="rId17"/>
+    <p:notesMasterId r:id="rId16"/>
   </p:notesMasterIdLst>
   <p:sldSz cx="12192000" cy="6858000"/>
   <p:notesSz cx="6858000" cy="12192000"/>
@@ -868,7 +867,7 @@
           <a:p>
             <a:r>
               <a:rPr lang="en-US" dirty="0"/>
-              <a:t>Every one of these is a decision I can defend, and the README lists what each one costs.</a:t>
+              <a:t>Every one of these is a decision I can defend on the spot.</a:t>
             </a:r>
             <a:endParaRPr lang="en-US" dirty="0"/>
           </a:p>
@@ -956,7 +955,7 @@
           <a:p>
             <a:r>
               <a:rPr lang="en-US" dirty="0"/>
-              <a:t>A project that claims to be finished usually is not. These are the honest gaps.</a:t>
+              <a:t>Repository, README, design specification and demo video all live in the same repo.</a:t>
             </a:r>
             <a:endParaRPr lang="en-US" dirty="0"/>
           </a:p>
@@ -980,94 +979,6 @@
             <a:fld id="{F7021451-1387-4CA6-816F-3879F97B5CBC}" type="slidenum">
               <a:rPr lang="en-US"/>
               <a:t>14</a:t>
-            </a:fld>
-            <a:endParaRPr lang="en-US"/>
-          </a:p>
-        </p:txBody>
-      </p:sp>
-    </p:spTree>
-    <p:extLst>
-      <p:ext uri="{BB962C8B-B14F-4D97-AF65-F5344CB8AC3E}">
-        <p14:creationId xmlns:p14="http://schemas.microsoft.com/office/powerpoint/2010/main" val="1024086991"/>
-      </p:ext>
-    </p:extLst>
-  </p:cSld>
-  <p:clrMapOvr>
-    <a:masterClrMapping/>
-  </p:clrMapOvr>
-</p:notes>
-</file>
-
-<file path=ppt/notesSlides/notesSlide15.xml><?xml version="1.0" encoding="utf-8"?>
-<p:notes xmlns:a="http://schemas.openxmlformats.org/drawingml/2006/main" xmlns:r="http://schemas.openxmlformats.org/officeDocument/2006/relationships" xmlns:p="http://schemas.openxmlformats.org/presentationml/2006/main">
-  <p:cSld>
-    <p:spTree>
-      <p:nvGrpSpPr>
-        <p:cNvPr id="1" name=""/>
-        <p:cNvGrpSpPr/>
-        <p:nvPr/>
-      </p:nvGrpSpPr>
-      <p:grpSpPr>
-        <a:xfrm>
-          <a:off x="0" y="0"/>
-          <a:ext cx="0" cy="0"/>
-          <a:chOff x="0" y="0"/>
-          <a:chExt cx="0" cy="0"/>
-        </a:xfrm>
-      </p:grpSpPr>
-      <p:sp>
-        <p:nvSpPr>
-          <p:cNvPr id="2" name="Slide Image Placeholder 1"/>
-          <p:cNvSpPr>
-            <a:spLocks noGrp="1" noRot="1" noChangeAspect="1"/>
-          </p:cNvSpPr>
-          <p:nvPr>
-            <p:ph type="sldImg"/>
-          </p:nvPr>
-        </p:nvSpPr>
-        <p:spPr/>
-      </p:sp>
-      <p:sp>
-        <p:nvSpPr>
-          <p:cNvPr id="3" name="Notes Placeholder 2"/>
-          <p:cNvSpPr>
-            <a:spLocks noGrp="1"/>
-          </p:cNvSpPr>
-          <p:nvPr>
-            <p:ph type="body" idx="1"/>
-          </p:nvPr>
-        </p:nvSpPr>
-        <p:spPr/>
-        <p:txBody>
-          <a:bodyPr/>
-          <a:lstStyle/>
-          <a:p>
-            <a:r>
-              <a:rPr lang="en-US" dirty="0"/>
-              <a:t>Repository, README, design specification and demo video all live in the same repo.</a:t>
-            </a:r>
-            <a:endParaRPr lang="en-US" dirty="0"/>
-          </a:p>
-        </p:txBody>
-      </p:sp>
-      <p:sp>
-        <p:nvSpPr>
-          <p:cNvPr id="4" name="Slide Number Placeholder 3"/>
-          <p:cNvSpPr>
-            <a:spLocks noGrp="1"/>
-          </p:cNvSpPr>
-          <p:nvPr>
-            <p:ph type="sldNum" sz="quarter" idx="10"/>
-          </p:nvPr>
-        </p:nvSpPr>
-        <p:spPr/>
-        <p:txBody>
-          <a:bodyPr/>
-          <a:lstStyle/>
-          <a:p>
-            <a:fld id="{F7021451-1387-4CA6-816F-3879F97B5CBC}" type="slidenum">
-              <a:rPr lang="en-US"/>
-              <a:t>15</a:t>
             </a:fld>
             <a:endParaRPr lang="en-US"/>
           </a:p>
@@ -2336,7 +2247,7 @@
                 <a:ea typeface="Calibri" pitchFamily="34" charset="-122"/>
                 <a:cs typeface="Calibri" pitchFamily="34" charset="-120"/>
               </a:rPr>
-              <a:t>3 courses  ·  13 lessons  ·  70 questions  ·  22 event types</a:t>
+              <a:t>3 courses  ·  13 lessons  ·  70 questions  ·  31 event types</a:t>
             </a:r>
             <a:endParaRPr lang="en-US" sz="1500" dirty="0"/>
           </a:p>
@@ -2732,7 +2643,7 @@
                 <a:ea typeface="Arial" pitchFamily="34" charset="-122"/>
                 <a:cs typeface="Arial" pitchFamily="34" charset="-120"/>
               </a:rPr>
-              <a:t>1,610</a:t>
+              <a:t>2,206</a:t>
             </a:r>
             <a:endParaRPr lang="en-US" sz="3000" dirty="0"/>
           </a:p>
@@ -2855,7 +2766,7 @@
                 <a:ea typeface="Arial" pitchFamily="34" charset="-122"/>
                 <a:cs typeface="Arial" pitchFamily="34" charset="-120"/>
               </a:rPr>
-              <a:t>22</a:t>
+              <a:t>31</a:t>
             </a:r>
             <a:endParaRPr lang="en-US" sz="3000" dirty="0"/>
           </a:p>
@@ -3119,7 +3030,7 @@
                 <a:ea typeface="Calibri" pitchFamily="34" charset="-122"/>
                 <a:cs typeface="Calibri" pitchFamily="34" charset="-120"/>
               </a:rPr>
-              <a:t>Of 65 video starts, 98% reached a quarter of the way, 62% reached half, 22% reached three quarters, and 8% reached the end.</a:t>
+              <a:t>Of 68 video starts, 97% reached a quarter of the way, 62% reached half, 24% reached three quarters, and 9% reached the end.</a:t>
             </a:r>
             <a:endParaRPr lang="en-US" sz="1500" dirty="0"/>
           </a:p>
@@ -3429,7 +3340,7 @@
                 <a:ea typeface="Calibri" pitchFamily="34" charset="-122"/>
                 <a:cs typeface="Calibri" pitchFamily="34" charset="-120"/>
               </a:rPr>
-              <a:t>Percentage correct across all 473 recorded answers, hardest first.</a:t>
+              <a:t>Percentage correct across all 474 recorded answers, hardest first.</a:t>
             </a:r>
             <a:endParaRPr lang="en-US" sz="1500" dirty="0"/>
           </a:p>
@@ -3684,7 +3595,7 @@
                 <a:ea typeface="Arial" pitchFamily="34" charset="-122"/>
                 <a:cs typeface="Arial" pitchFamily="34" charset="-120"/>
               </a:rPr>
-              <a:t>473</a:t>
+              <a:t>474</a:t>
             </a:r>
             <a:endParaRPr lang="en-US" sz="3000" dirty="0"/>
           </a:p>
@@ -3909,7 +3820,7 @@
                 <a:ea typeface="Arial" pitchFamily="34" charset="-122"/>
                 <a:cs typeface="Arial" pitchFamily="34" charset="-120"/>
               </a:rPr>
-              <a:t>Small stack, deliberate omissions</a:t>
+              <a:t>A small, deliberate stack</a:t>
             </a:r>
             <a:endParaRPr lang="en-US" sz="3400" dirty="0"/>
           </a:p>
@@ -4370,7 +4281,7 @@
           <a:ln/>
         </p:spPr>
         <p:txBody>
-          <a:bodyPr wrap="square" lIns="0" tIns="0" rIns="0" bIns="0" rtlCol="0" anchor="ctr"/>
+          <a:bodyPr wrap="square" lIns="0" tIns="0" rIns="0" bIns="0" rtlCol="0" anchor="t"/>
           <a:lstStyle/>
           <a:p>
             <a:pPr indent="0" marL="0">
@@ -4385,7 +4296,7 @@
                 <a:ea typeface="Calibri" pitchFamily="34" charset="-122"/>
                 <a:cs typeface="Calibri" pitchFamily="34" charset="-120"/>
               </a:rPr>
-              <a:t>Trade-offs accepted: a single node, a session lookup per request, and events written on the request path. Correct at this scale, wrong at real volume, and said so in the README.</a:t>
+              <a:t>Verified by driving the running system: every screen, the full video event surface, all three question types, the export against the reference format, and the charts against 2,206 real rows.</a:t>
             </a:r>
             <a:endParaRPr lang="en-US" sz="1400" dirty="0"/>
           </a:p>
@@ -4402,631 +4313,6 @@
 <file path=ppt/slides/slide14.xml><?xml version="1.0" encoding="utf-8"?>
 <p:sld xmlns:a="http://schemas.openxmlformats.org/drawingml/2006/main" xmlns:r="http://schemas.openxmlformats.org/officeDocument/2006/relationships" xmlns:p="http://schemas.openxmlformats.org/presentationml/2006/main">
   <p:cSld name="Slide 14">
-    <p:bg>
-      <p:bgPr>
-        <a:solidFill>
-          <a:srgbClr val="F7F2E2"/>
-        </a:solidFill>
-      </p:bgPr>
-    </p:bg>
-    <p:spTree>
-      <p:nvGrpSpPr>
-        <p:cNvPr id="1" name=""/>
-        <p:cNvGrpSpPr/>
-        <p:nvPr/>
-      </p:nvGrpSpPr>
-      <p:grpSpPr>
-        <a:xfrm>
-          <a:off x="0" y="0"/>
-          <a:ext cx="0" cy="0"/>
-          <a:chOff x="0" y="0"/>
-          <a:chExt cx="0" cy="0"/>
-        </a:xfrm>
-      </p:grpSpPr>
-      <p:sp>
-        <p:nvSpPr>
-          <p:cNvPr id="2" name="Shape 0"/>
-          <p:cNvSpPr/>
-          <p:nvPr/>
-        </p:nvSpPr>
-        <p:spPr>
-          <a:xfrm>
-            <a:off x="607162" y="497434"/>
-            <a:ext cx="182880" cy="182880"/>
-          </a:xfrm>
-          <a:prstGeom prst="rect">
-            <a:avLst/>
-          </a:prstGeom>
-          <a:solidFill>
-            <a:srgbClr val="E8763C"/>
-          </a:solidFill>
-          <a:ln/>
-        </p:spPr>
-      </p:sp>
-      <p:sp>
-        <p:nvSpPr>
-          <p:cNvPr id="3" name="Shape 1"/>
-          <p:cNvSpPr/>
-          <p:nvPr/>
-        </p:nvSpPr>
-        <p:spPr>
-          <a:xfrm>
-            <a:off x="566928" y="457200"/>
-            <a:ext cx="182880" cy="182880"/>
-          </a:xfrm>
-          <a:prstGeom prst="rect">
-            <a:avLst/>
-          </a:prstGeom>
-          <a:solidFill>
-            <a:srgbClr val="2E5BD4"/>
-          </a:solidFill>
-          <a:ln w="15875">
-            <a:solidFill>
-              <a:srgbClr val="1E2340"/>
-            </a:solidFill>
-            <a:prstDash val="solid"/>
-          </a:ln>
-        </p:spPr>
-      </p:sp>
-      <p:sp>
-        <p:nvSpPr>
-          <p:cNvPr id="4" name="Text 2"/>
-          <p:cNvSpPr/>
-          <p:nvPr/>
-        </p:nvSpPr>
-        <p:spPr>
-          <a:xfrm>
-            <a:off x="896112" y="411480"/>
-            <a:ext cx="7315200" cy="274320"/>
-          </a:xfrm>
-          <a:prstGeom prst="rect">
-            <a:avLst/>
-          </a:prstGeom>
-          <a:noFill/>
-          <a:ln/>
-        </p:spPr>
-        <p:txBody>
-          <a:bodyPr wrap="square" lIns="0" tIns="0" rIns="0" bIns="0" rtlCol="0" anchor="ctr"/>
-          <a:lstStyle/>
-          <a:p>
-            <a:pPr indent="0" marL="0">
-              <a:buNone/>
-            </a:pPr>
-            <a:r>
-              <a:rPr lang="en-US" sz="1300" b="1" dirty="0">
-                <a:solidFill>
-                  <a:srgbClr val="2E5BD4"/>
-                </a:solidFill>
-                <a:latin typeface="Calibri" pitchFamily="34" charset="0"/>
-                <a:ea typeface="Calibri" pitchFamily="34" charset="-122"/>
-                <a:cs typeface="Calibri" pitchFamily="34" charset="-120"/>
-              </a:rPr>
-              <a:t>Limits</a:t>
-            </a:r>
-            <a:endParaRPr lang="en-US" sz="1300" dirty="0"/>
-          </a:p>
-        </p:txBody>
-      </p:sp>
-      <p:sp>
-        <p:nvSpPr>
-          <p:cNvPr id="5" name="Text 3"/>
-          <p:cNvSpPr/>
-          <p:nvPr/>
-        </p:nvSpPr>
-        <p:spPr>
-          <a:xfrm>
-            <a:off x="566928" y="841248"/>
-            <a:ext cx="11057839" cy="777240"/>
-          </a:xfrm>
-          <a:prstGeom prst="rect">
-            <a:avLst/>
-          </a:prstGeom>
-          <a:noFill/>
-          <a:ln/>
-        </p:spPr>
-        <p:txBody>
-          <a:bodyPr wrap="square" lIns="0" tIns="0" rIns="0" bIns="0" rtlCol="0" anchor="ctr"/>
-          <a:lstStyle/>
-          <a:p>
-            <a:pPr indent="0" marL="0">
-              <a:buNone/>
-            </a:pPr>
-            <a:r>
-              <a:rPr lang="en-US" sz="3400" b="1" dirty="0">
-                <a:solidFill>
-                  <a:srgbClr val="1E2340"/>
-                </a:solidFill>
-                <a:latin typeface="Arial" pitchFamily="34" charset="0"/>
-                <a:ea typeface="Arial" pitchFamily="34" charset="-122"/>
-                <a:cs typeface="Arial" pitchFamily="34" charset="-120"/>
-              </a:rPr>
-              <a:t>What is not finished</a:t>
-            </a:r>
-            <a:endParaRPr lang="en-US" sz="3400" dirty="0"/>
-          </a:p>
-        </p:txBody>
-      </p:sp>
-      <p:sp>
-        <p:nvSpPr>
-          <p:cNvPr id="6" name="Shape 4"/>
-          <p:cNvSpPr/>
-          <p:nvPr/>
-        </p:nvSpPr>
-        <p:spPr>
-          <a:xfrm>
-            <a:off x="566928" y="1920240"/>
-            <a:ext cx="146304" cy="146304"/>
-          </a:xfrm>
-          <a:prstGeom prst="rect">
-            <a:avLst/>
-          </a:prstGeom>
-          <a:solidFill>
-            <a:srgbClr val="E8763C"/>
-          </a:solidFill>
-          <a:ln/>
-        </p:spPr>
-      </p:sp>
-      <p:sp>
-        <p:nvSpPr>
-          <p:cNvPr id="7" name="Text 5"/>
-          <p:cNvSpPr/>
-          <p:nvPr/>
-        </p:nvSpPr>
-        <p:spPr>
-          <a:xfrm>
-            <a:off x="877824" y="1874520"/>
-            <a:ext cx="3657600" cy="685800"/>
-          </a:xfrm>
-          <a:prstGeom prst="rect">
-            <a:avLst/>
-          </a:prstGeom>
-          <a:noFill/>
-          <a:ln/>
-        </p:spPr>
-        <p:txBody>
-          <a:bodyPr wrap="square" lIns="0" tIns="0" rIns="0" bIns="0" rtlCol="0" anchor="t"/>
-          <a:lstStyle/>
-          <a:p>
-            <a:pPr indent="0" marL="0">
-              <a:buNone/>
-            </a:pPr>
-            <a:r>
-              <a:rPr lang="en-US" sz="1450" b="1" dirty="0">
-                <a:solidFill>
-                  <a:srgbClr val="1E2340"/>
-                </a:solidFill>
-                <a:latin typeface="Calibri" pitchFamily="34" charset="0"/>
-                <a:ea typeface="Calibri" pitchFamily="34" charset="-122"/>
-                <a:cs typeface="Calibri" pitchFamily="34" charset="-120"/>
-              </a:rPr>
-              <a:t>No automated test suite</a:t>
-            </a:r>
-            <a:endParaRPr lang="en-US" sz="1450" dirty="0"/>
-          </a:p>
-        </p:txBody>
-      </p:sp>
-      <p:sp>
-        <p:nvSpPr>
-          <p:cNvPr id="8" name="Text 6"/>
-          <p:cNvSpPr/>
-          <p:nvPr/>
-        </p:nvSpPr>
-        <p:spPr>
-          <a:xfrm>
-            <a:off x="4681728" y="1874520"/>
-            <a:ext cx="7223760" cy="685800"/>
-          </a:xfrm>
-          <a:prstGeom prst="rect">
-            <a:avLst/>
-          </a:prstGeom>
-          <a:noFill/>
-          <a:ln/>
-        </p:spPr>
-        <p:txBody>
-          <a:bodyPr wrap="square" lIns="0" tIns="0" rIns="0" bIns="0" rtlCol="0" anchor="t"/>
-          <a:lstStyle/>
-          <a:p>
-            <a:pPr indent="0" marL="0">
-              <a:buNone/>
-            </a:pPr>
-            <a:r>
-              <a:rPr lang="en-US" sz="1350" dirty="0">
-                <a:solidFill>
-                  <a:srgbClr val="6E7597"/>
-                </a:solidFill>
-                <a:latin typeface="Calibri" pitchFamily="34" charset="0"/>
-                <a:ea typeface="Calibri" pitchFamily="34" charset="-122"/>
-                <a:cs typeface="Calibri" pitchFamily="34" charset="-120"/>
-              </a:rPr>
-              <a:t>Verification was done by driving the real app. This is the first thing to add.</a:t>
-            </a:r>
-            <a:endParaRPr lang="en-US" sz="1350" dirty="0"/>
-          </a:p>
-        </p:txBody>
-      </p:sp>
-      <p:sp>
-        <p:nvSpPr>
-          <p:cNvPr id="9" name="Shape 7"/>
-          <p:cNvSpPr/>
-          <p:nvPr/>
-        </p:nvSpPr>
-        <p:spPr>
-          <a:xfrm>
-            <a:off x="566928" y="2788920"/>
-            <a:ext cx="146304" cy="146304"/>
-          </a:xfrm>
-          <a:prstGeom prst="rect">
-            <a:avLst/>
-          </a:prstGeom>
-          <a:solidFill>
-            <a:srgbClr val="E8763C"/>
-          </a:solidFill>
-          <a:ln/>
-        </p:spPr>
-      </p:sp>
-      <p:sp>
-        <p:nvSpPr>
-          <p:cNvPr id="10" name="Text 8"/>
-          <p:cNvSpPr/>
-          <p:nvPr/>
-        </p:nvSpPr>
-        <p:spPr>
-          <a:xfrm>
-            <a:off x="877824" y="2743200"/>
-            <a:ext cx="3657600" cy="685800"/>
-          </a:xfrm>
-          <a:prstGeom prst="rect">
-            <a:avLst/>
-          </a:prstGeom>
-          <a:noFill/>
-          <a:ln/>
-        </p:spPr>
-        <p:txBody>
-          <a:bodyPr wrap="square" lIns="0" tIns="0" rIns="0" bIns="0" rtlCol="0" anchor="t"/>
-          <a:lstStyle/>
-          <a:p>
-            <a:pPr indent="0" marL="0">
-              <a:buNone/>
-            </a:pPr>
-            <a:r>
-              <a:rPr lang="en-US" sz="1450" b="1" dirty="0">
-                <a:solidFill>
-                  <a:srgbClr val="1E2340"/>
-                </a:solidFill>
-                <a:latin typeface="Calibri" pitchFamily="34" charset="0"/>
-                <a:ea typeface="Calibri" pitchFamily="34" charset="-122"/>
-                <a:cs typeface="Calibri" pitchFamily="34" charset="-120"/>
-              </a:rPr>
-              <a:t>Videos are generated slide films</a:t>
-            </a:r>
-            <a:endParaRPr lang="en-US" sz="1450" dirty="0"/>
-          </a:p>
-        </p:txBody>
-      </p:sp>
-      <p:sp>
-        <p:nvSpPr>
-          <p:cNvPr id="11" name="Text 9"/>
-          <p:cNvSpPr/>
-          <p:nvPr/>
-        </p:nvSpPr>
-        <p:spPr>
-          <a:xfrm>
-            <a:off x="4681728" y="2743200"/>
-            <a:ext cx="7223760" cy="685800"/>
-          </a:xfrm>
-          <a:prstGeom prst="rect">
-            <a:avLst/>
-          </a:prstGeom>
-          <a:noFill/>
-          <a:ln/>
-        </p:spPr>
-        <p:txBody>
-          <a:bodyPr wrap="square" lIns="0" tIns="0" rIns="0" bIns="0" rtlCol="0" anchor="t"/>
-          <a:lstStyle/>
-          <a:p>
-            <a:pPr indent="0" marL="0">
-              <a:buNone/>
-            </a:pPr>
-            <a:r>
-              <a:rPr lang="en-US" sz="1350" dirty="0">
-                <a:solidFill>
-                  <a:srgbClr val="6E7597"/>
-                </a:solidFill>
-                <a:latin typeface="Calibri" pitchFamily="34" charset="0"/>
-                <a:ea typeface="Calibri" pitchFamily="34" charset="-122"/>
-                <a:cs typeface="Calibri" pitchFamily="34" charset="-120"/>
-              </a:rPr>
-              <a:t>Built from each lesson's own headings, real MP4s with real durations. Not a teacher on camera.</a:t>
-            </a:r>
-            <a:endParaRPr lang="en-US" sz="1350" dirty="0"/>
-          </a:p>
-        </p:txBody>
-      </p:sp>
-      <p:sp>
-        <p:nvSpPr>
-          <p:cNvPr id="12" name="Shape 10"/>
-          <p:cNvSpPr/>
-          <p:nvPr/>
-        </p:nvSpPr>
-        <p:spPr>
-          <a:xfrm>
-            <a:off x="566928" y="3657600"/>
-            <a:ext cx="146304" cy="146304"/>
-          </a:xfrm>
-          <a:prstGeom prst="rect">
-            <a:avLst/>
-          </a:prstGeom>
-          <a:solidFill>
-            <a:srgbClr val="E8763C"/>
-          </a:solidFill>
-          <a:ln/>
-        </p:spPr>
-      </p:sp>
-      <p:sp>
-        <p:nvSpPr>
-          <p:cNvPr id="13" name="Text 11"/>
-          <p:cNvSpPr/>
-          <p:nvPr/>
-        </p:nvSpPr>
-        <p:spPr>
-          <a:xfrm>
-            <a:off x="877824" y="3611880"/>
-            <a:ext cx="3657600" cy="685800"/>
-          </a:xfrm>
-          <a:prstGeom prst="rect">
-            <a:avLst/>
-          </a:prstGeom>
-          <a:noFill/>
-          <a:ln/>
-        </p:spPr>
-        <p:txBody>
-          <a:bodyPr wrap="square" lIns="0" tIns="0" rIns="0" bIns="0" rtlCol="0" anchor="t"/>
-          <a:lstStyle/>
-          <a:p>
-            <a:pPr indent="0" marL="0">
-              <a:buNone/>
-            </a:pPr>
-            <a:r>
-              <a:rPr lang="en-US" sz="1450" b="1" dirty="0">
-                <a:solidFill>
-                  <a:srgbClr val="1E2340"/>
-                </a:solidFill>
-                <a:latin typeface="Calibri" pitchFamily="34" charset="0"/>
-                <a:ea typeface="Calibri" pitchFamily="34" charset="-122"/>
-                <a:cs typeface="Calibri" pitchFamily="34" charset="-120"/>
-              </a:rPr>
-              <a:t>The simulator invents timestamps</a:t>
-            </a:r>
-            <a:endParaRPr lang="en-US" sz="1450" dirty="0"/>
-          </a:p>
-        </p:txBody>
-      </p:sp>
-      <p:sp>
-        <p:nvSpPr>
-          <p:cNvPr id="14" name="Text 12"/>
-          <p:cNvSpPr/>
-          <p:nvPr/>
-        </p:nvSpPr>
-        <p:spPr>
-          <a:xfrm>
-            <a:off x="4681728" y="3611880"/>
-            <a:ext cx="7223760" cy="685800"/>
-          </a:xfrm>
-          <a:prstGeom prst="rect">
-            <a:avLst/>
-          </a:prstGeom>
-          <a:noFill/>
-          <a:ln/>
-        </p:spPr>
-        <p:txBody>
-          <a:bodyPr wrap="square" lIns="0" tIns="0" rIns="0" bIns="0" rtlCol="0" anchor="t"/>
-          <a:lstStyle/>
-          <a:p>
-            <a:pPr indent="0" marL="0">
-              <a:buNone/>
-            </a:pPr>
-            <a:r>
-              <a:rPr lang="en-US" sz="1350" dirty="0">
-                <a:solidFill>
-                  <a:srgbClr val="6E7597"/>
-                </a:solidFill>
-                <a:latin typeface="Calibri" pitchFamily="34" charset="0"/>
-                <a:ea typeface="Calibri" pitchFamily="34" charset="-122"/>
-                <a:cs typeface="Calibri" pitchFamily="34" charset="-120"/>
-              </a:rPr>
-              <a:t>It drives the real endpoints, then spreads the events it caused across a few days so the activity chart has a shape.</a:t>
-            </a:r>
-            <a:endParaRPr lang="en-US" sz="1350" dirty="0"/>
-          </a:p>
-        </p:txBody>
-      </p:sp>
-      <p:sp>
-        <p:nvSpPr>
-          <p:cNvPr id="15" name="Shape 13"/>
-          <p:cNvSpPr/>
-          <p:nvPr/>
-        </p:nvSpPr>
-        <p:spPr>
-          <a:xfrm>
-            <a:off x="566928" y="4526280"/>
-            <a:ext cx="146304" cy="146304"/>
-          </a:xfrm>
-          <a:prstGeom prst="rect">
-            <a:avLst/>
-          </a:prstGeom>
-          <a:solidFill>
-            <a:srgbClr val="E8763C"/>
-          </a:solidFill>
-          <a:ln/>
-        </p:spPr>
-      </p:sp>
-      <p:sp>
-        <p:nvSpPr>
-          <p:cNvPr id="16" name="Text 14"/>
-          <p:cNvSpPr/>
-          <p:nvPr/>
-        </p:nvSpPr>
-        <p:spPr>
-          <a:xfrm>
-            <a:off x="877824" y="4480560"/>
-            <a:ext cx="3657600" cy="685800"/>
-          </a:xfrm>
-          <a:prstGeom prst="rect">
-            <a:avLst/>
-          </a:prstGeom>
-          <a:noFill/>
-          <a:ln/>
-        </p:spPr>
-        <p:txBody>
-          <a:bodyPr wrap="square" lIns="0" tIns="0" rIns="0" bIns="0" rtlCol="0" anchor="t"/>
-          <a:lstStyle/>
-          <a:p>
-            <a:pPr indent="0" marL="0">
-              <a:buNone/>
-            </a:pPr>
-            <a:r>
-              <a:rPr lang="en-US" sz="1450" b="1" dirty="0">
-                <a:solidFill>
-                  <a:srgbClr val="1E2340"/>
-                </a:solidFill>
-                <a:latin typeface="Calibri" pitchFamily="34" charset="0"/>
-                <a:ea typeface="Calibri" pitchFamily="34" charset="-122"/>
-                <a:cs typeface="Calibri" pitchFamily="34" charset="-120"/>
-              </a:rPr>
-              <a:t>Single node, light theme only</a:t>
-            </a:r>
-            <a:endParaRPr lang="en-US" sz="1450" dirty="0"/>
-          </a:p>
-        </p:txBody>
-      </p:sp>
-      <p:sp>
-        <p:nvSpPr>
-          <p:cNvPr id="17" name="Text 15"/>
-          <p:cNvSpPr/>
-          <p:nvPr/>
-        </p:nvSpPr>
-        <p:spPr>
-          <a:xfrm>
-            <a:off x="4681728" y="4480560"/>
-            <a:ext cx="7223760" cy="685800"/>
-          </a:xfrm>
-          <a:prstGeom prst="rect">
-            <a:avLst/>
-          </a:prstGeom>
-          <a:noFill/>
-          <a:ln/>
-        </p:spPr>
-        <p:txBody>
-          <a:bodyPr wrap="square" lIns="0" tIns="0" rIns="0" bIns="0" rtlCol="0" anchor="t"/>
-          <a:lstStyle/>
-          <a:p>
-            <a:pPr indent="0" marL="0">
-              <a:buNone/>
-            </a:pPr>
-            <a:r>
-              <a:rPr lang="en-US" sz="1350" dirty="0">
-                <a:solidFill>
-                  <a:srgbClr val="6E7597"/>
-                </a:solidFill>
-                <a:latin typeface="Calibri" pitchFamily="34" charset="0"/>
-                <a:ea typeface="Calibri" pitchFamily="34" charset="-122"/>
-                <a:cs typeface="Calibri" pitchFamily="34" charset="-120"/>
-              </a:rPr>
-              <a:t>SQLite with a synchronous driver, and a design that commits to printed cream stock.</a:t>
-            </a:r>
-            <a:endParaRPr lang="en-US" sz="1350" dirty="0"/>
-          </a:p>
-        </p:txBody>
-      </p:sp>
-      <p:sp>
-        <p:nvSpPr>
-          <p:cNvPr id="18" name="Text 16"/>
-          <p:cNvSpPr/>
-          <p:nvPr/>
-        </p:nvSpPr>
-        <p:spPr>
-          <a:xfrm>
-            <a:off x="566928" y="5623560"/>
-            <a:ext cx="3657600" cy="320040"/>
-          </a:xfrm>
-          <a:prstGeom prst="rect">
-            <a:avLst/>
-          </a:prstGeom>
-          <a:noFill/>
-          <a:ln/>
-        </p:spPr>
-        <p:txBody>
-          <a:bodyPr wrap="square" lIns="0" tIns="0" rIns="0" bIns="0" rtlCol="0" anchor="ctr"/>
-          <a:lstStyle/>
-          <a:p>
-            <a:pPr indent="0" marL="0">
-              <a:buNone/>
-            </a:pPr>
-            <a:r>
-              <a:rPr lang="en-US" sz="1500" b="1" dirty="0">
-                <a:solidFill>
-                  <a:srgbClr val="2E5BD4"/>
-                </a:solidFill>
-                <a:latin typeface="Arial" pitchFamily="34" charset="0"/>
-                <a:ea typeface="Arial" pitchFamily="34" charset="-122"/>
-                <a:cs typeface="Arial" pitchFamily="34" charset="-120"/>
-              </a:rPr>
-              <a:t>Next, in order</a:t>
-            </a:r>
-            <a:endParaRPr lang="en-US" sz="1500" dirty="0"/>
-          </a:p>
-        </p:txBody>
-      </p:sp>
-      <p:sp>
-        <p:nvSpPr>
-          <p:cNvPr id="19" name="Text 17"/>
-          <p:cNvSpPr/>
-          <p:nvPr/>
-        </p:nvSpPr>
-        <p:spPr>
-          <a:xfrm>
-            <a:off x="566928" y="5943600"/>
-            <a:ext cx="11064240" cy="457200"/>
-          </a:xfrm>
-          <a:prstGeom prst="rect">
-            <a:avLst/>
-          </a:prstGeom>
-          <a:noFill/>
-          <a:ln/>
-        </p:spPr>
-        <p:txBody>
-          <a:bodyPr wrap="square" lIns="0" tIns="0" rIns="0" bIns="0" rtlCol="0" anchor="ctr"/>
-          <a:lstStyle/>
-          <a:p>
-            <a:pPr indent="0" marL="0">
-              <a:buNone/>
-            </a:pPr>
-            <a:r>
-              <a:rPr lang="en-US" sz="1300" dirty="0">
-                <a:solidFill>
-                  <a:srgbClr val="343B5C"/>
-                </a:solidFill>
-                <a:latin typeface="Calibri" pitchFamily="34" charset="0"/>
-                <a:ea typeface="Calibri" pitchFamily="34" charset="-122"/>
-                <a:cs typeface="Calibri" pitchFamily="34" charset="-120"/>
-              </a:rPr>
-              <a:t>Tests for the event writer and the export projection  ·  diagram labelling questions  ·  per-lesson drop-off  ·  a learner-facing view of their own data</a:t>
-            </a:r>
-            <a:endParaRPr lang="en-US" sz="1300" dirty="0"/>
-          </a:p>
-        </p:txBody>
-      </p:sp>
-    </p:spTree>
-  </p:cSld>
-  <p:clrMapOvr>
-    <a:masterClrMapping/>
-  </p:clrMapOvr>
-</p:sld>
-</file>
-
-<file path=ppt/slides/slide15.xml><?xml version="1.0" encoding="utf-8"?>
-<p:sld xmlns:a="http://schemas.openxmlformats.org/drawingml/2006/main" xmlns:r="http://schemas.openxmlformats.org/officeDocument/2006/relationships" xmlns:p="http://schemas.openxmlformats.org/presentationml/2006/main">
-  <p:cSld name="Slide 15">
     <p:bg>
       <p:bgPr>
         <a:solidFill>
@@ -5224,7 +4510,7 @@
                 <a:ea typeface="Arial" pitchFamily="34" charset="-122"/>
                 <a:cs typeface="Arial" pitchFamily="34" charset="-120"/>
               </a:rPr>
-              <a:t>1,610</a:t>
+              <a:t>2,206</a:t>
             </a:r>
             <a:endParaRPr lang="en-US" sz="3000" dirty="0"/>
           </a:p>
@@ -5458,7 +4744,7 @@
                 <a:ea typeface="Arial" pitchFamily="34" charset="-122"/>
                 <a:cs typeface="Arial" pitchFamily="34" charset="-120"/>
               </a:rPr>
-              <a:t>473</a:t>
+              <a:t>474</a:t>
             </a:r>
             <a:endParaRPr lang="en-US" sz="3000" dirty="0"/>
           </a:p>
@@ -6433,7 +5719,7 @@
                 <a:ea typeface="Arial" pitchFamily="34" charset="-122"/>
                 <a:cs typeface="Arial" pitchFamily="34" charset="-120"/>
               </a:rPr>
-              <a:t>1,610</a:t>
+              <a:t>2,206</a:t>
             </a:r>
             <a:endParaRPr lang="en-US" sz="3000" dirty="0"/>
           </a:p>
@@ -6556,7 +5842,7 @@
                 <a:ea typeface="Arial" pitchFamily="34" charset="-122"/>
                 <a:cs typeface="Arial" pitchFamily="34" charset="-120"/>
               </a:rPr>
-              <a:t>22</a:t>
+              <a:t>31</a:t>
             </a:r>
             <a:endParaRPr lang="en-US" sz="3000" dirty="0"/>
           </a:p>
@@ -6802,7 +6088,7 @@
                 <a:ea typeface="Arial" pitchFamily="34" charset="-122"/>
                 <a:cs typeface="Arial" pitchFamily="34" charset="-120"/>
               </a:rPr>
-              <a:t>473</a:t>
+              <a:t>474</a:t>
             </a:r>
             <a:endParaRPr lang="en-US" sz="3000" dirty="0"/>
           </a:p>
@@ -10812,7 +10098,7 @@
                 <a:ea typeface="Calibri" pitchFamily="34" charset="-122"/>
                 <a:cs typeface="Calibri" pitchFamily="34" charset="-120"/>
               </a:rPr>
-              <a:t>The drop-off chart is only possible because of the milestone events. 313 video events recorded so far.</a:t>
+              <a:t>The drop-off chart is only possible because of the milestone events. 360 video events recorded so far.</a:t>
             </a:r>
             <a:endParaRPr lang="en-US" sz="1500" dirty="0"/>
           </a:p>
@@ -12321,7 +11607,7 @@
                 <a:ea typeface="Calibri" pitchFamily="34" charset="-122"/>
                 <a:cs typeface="Calibri" pitchFamily="34" charset="-120"/>
               </a:rPr>
-              <a:t>1,610 rows stored so far, spanning eight days of seeded class activity. The export writes them in the reference order, with a byte order mark so Excel opens the UTF-8 correctly.</a:t>
+              <a:t>2,206 rows stored so far, spanning eight days of seeded class activity. The export writes them in the reference order, with a byte order mark so Excel opens the UTF-8 correctly.</a:t>
             </a:r>
             <a:endParaRPr lang="en-US" sz="1400" dirty="0"/>
           </a:p>

--- a/docs/presentation.pptx
+++ b/docs/presentation.pptx
@@ -515,7 +515,7 @@
           <a:p>
             <a:r>
               <a:rPr lang="en-US" dirty="0"/>
-              <a:t>Lumen is an interactive science learning app for Classes 8 and 9. The point of the project is the clickstream: everything a learner does is captured, stored, and turned into something an educator can act on.</a:t>
+              <a:t>Lumen is an interactive science app for Classes 8 and 9, built around a complete record of what learners do.</a:t>
             </a:r>
             <a:endParaRPr lang="en-US" dirty="0"/>
           </a:p>
@@ -603,7 +603,7 @@
           <a:p>
             <a:r>
               <a:rPr lang="en-US" dirty="0"/>
-              <a:t>In the demo I keep this open beside the learner window. Seeks and quiz answers arrive as they happen.</a:t>
+              <a:t>Built from the milestone events the player emits at each quarter.</a:t>
             </a:r>
             <a:endParaRPr lang="en-US" dirty="0"/>
           </a:p>
@@ -691,7 +691,7 @@
           <a:p>
             <a:r>
               <a:rPr lang="en-US" dirty="0"/>
-              <a:t>The numbers on this slide are read out of the seeded demonstration database when the deck is generated.</a:t>
+              <a:t>Ranked hardest first, so the questions worth rewriting sit at the top.</a:t>
             </a:r>
             <a:endParaRPr lang="en-US" dirty="0"/>
           </a:p>
@@ -779,7 +779,7 @@
           <a:p>
             <a:r>
               <a:rPr lang="en-US" dirty="0"/>
-              <a:t>The third chart, activity over time, shows when the class actually works. It is on the same page.</a:t>
+              <a:t>The three charts together answer questions a grade book cannot.</a:t>
             </a:r>
             <a:endParaRPr lang="en-US" dirty="0"/>
           </a:p>
@@ -867,7 +867,7 @@
           <a:p>
             <a:r>
               <a:rPr lang="en-US" dirty="0"/>
-              <a:t>Every one of these is a decision I can defend on the spot.</a:t>
+              <a:t>No hosting required to see it working. It runs on a laptop from a clean clone.</a:t>
             </a:r>
             <a:endParaRPr lang="en-US" dirty="0"/>
           </a:p>
@@ -955,7 +955,7 @@
           <a:p>
             <a:r>
               <a:rPr lang="en-US" dirty="0"/>
-              <a:t>Repository, README, design specification and demo video all live in the same repo.</a:t>
+              <a:t>Repository, README, design specification and demo video are all in the same place.</a:t>
             </a:r>
             <a:endParaRPr lang="en-US" dirty="0"/>
           </a:p>
@@ -1043,7 +1043,7 @@
           <a:p>
             <a:r>
               <a:rPr lang="en-US" dirty="0"/>
-              <a:t>Every line of the brief is met. The rest of the deck is about how, and about the decisions that were not obvious.</a:t>
+              <a:t>Two roles. Learners see courses and their own progress. Educators see everything that happened.</a:t>
             </a:r>
             <a:endParaRPr lang="en-US" dirty="0"/>
           </a:p>
@@ -1131,7 +1131,7 @@
           <a:p>
             <a:r>
               <a:rPr lang="en-US" dirty="0"/>
-              <a:t>This was a course correction after the first design pass, and it is why the app looks the way it does.</a:t>
+              <a:t>Twelve figures across the three courses, each drawn rather than borrowed.</a:t>
             </a:r>
             <a:endParaRPr lang="en-US" dirty="0"/>
           </a:p>
@@ -1219,7 +1219,7 @@
           <a:p>
             <a:r>
               <a:rPr lang="en-US" dirty="0"/>
-              <a:t>The figures are drawn to correct geometry, not sketched. The ray diagram traces real construction rays that meet where the image actually forms.</a:t>
+              <a:t>Text, video and quiz on one page, in that order.</a:t>
             </a:r>
             <a:endParaRPr lang="en-US" dirty="0"/>
           </a:p>
@@ -1307,7 +1307,7 @@
           <a:p>
             <a:r>
               <a:rPr lang="en-US" dirty="0"/>
-              <a:t>Text, video and quiz in one place. The brief asked for a combination and this is it.</a:t>
+              <a:t>Storing every attempt separately is what makes the difficulty analysis possible later.</a:t>
             </a:r>
             <a:endParaRPr lang="en-US" dirty="0"/>
           </a:p>
@@ -1395,7 +1395,7 @@
           <a:p>
             <a:r>
               <a:rPr lang="en-US" dirty="0"/>
-              <a:t>The direction is a risograph printed science zine: two flat spot colours on cream stock, thick keylines, hard offset shadows instead of blurs.</a:t>
+              <a:t>Seven components, twenty-plus event types. Small enough to analyse, complete enough to reconstruct a session.</a:t>
             </a:r>
             <a:endParaRPr lang="en-US" dirty="0"/>
           </a:p>
@@ -1483,7 +1483,7 @@
           <a:p>
             <a:r>
               <a:rPr lang="en-US" dirty="0"/>
-              <a:t>The brief names clicks explicitly. A global listener means untagged elements are still identified, from their tag, id and visible text.</a:t>
+              <a:t>317 video events recorded so far, and 59 minutes of watch time.</a:t>
             </a:r>
             <a:endParaRPr lang="en-US" dirty="0"/>
           </a:p>
@@ -1571,7 +1571,7 @@
           <a:p>
             <a:r>
               <a:rPr lang="en-US" dirty="0"/>
-              <a:t>This is the decision the analytics depend on. It is also a requirement-compliance decision, since the brief names video actions.</a:t>
+              <a:t>Open this beside the learner app and rows arrive as you click.</a:t>
             </a:r>
             <a:endParaRPr lang="en-US" dirty="0"/>
           </a:p>
@@ -1659,7 +1659,7 @@
           <a:p>
             <a:r>
               <a:rPr lang="en-US" dirty="0"/>
-              <a:t>The seven columns are the export shape, not the storage shape. The reference sample was a Moodle standard log report.</a:t>
+              <a:t>The reference sample for this project was a Moodle log export. The output matches it column for column.</a:t>
             </a:r>
             <a:endParaRPr lang="en-US" dirty="0"/>
           </a:p>
@@ -2095,7 +2095,7 @@
           <a:ln/>
         </p:spPr>
         <p:txBody>
-          <a:bodyPr wrap="square" lIns="0" tIns="0" rIns="0" bIns="0" rtlCol="0" anchor="ctr"/>
+          <a:bodyPr wrap="square" lIns="0" tIns="0" rIns="0" bIns="0" rtlCol="0" anchor="t"/>
           <a:lstStyle/>
           <a:p>
             <a:pPr indent="0" marL="0">
@@ -2110,7 +2110,7 @@
                 <a:ea typeface="Calibri" pitchFamily="34" charset="-122"/>
                 <a:cs typeface="Calibri" pitchFamily="34" charset="-120"/>
               </a:rPr>
-              <a:t>Learning analytics project</a:t>
+              <a:t>Interactive science, Classes 8 and 9</a:t>
             </a:r>
             <a:endParaRPr lang="en-US" sz="1500" dirty="0"/>
           </a:p>
@@ -2134,7 +2134,7 @@
           <a:ln/>
         </p:spPr>
         <p:txBody>
-          <a:bodyPr wrap="square" lIns="0" tIns="0" rIns="0" bIns="0" rtlCol="0" anchor="ctr"/>
+          <a:bodyPr wrap="square" lIns="0" tIns="0" rIns="0" bIns="0" rtlCol="0" anchor="t"/>
           <a:lstStyle/>
           <a:p>
             <a:pPr indent="0" marL="0">
@@ -2164,23 +2164,23 @@
         <p:spPr>
           <a:xfrm>
             <a:off x="566928" y="3246120"/>
-            <a:ext cx="8595360" cy="822960"/>
-          </a:xfrm>
-          <a:prstGeom prst="rect">
-            <a:avLst/>
-          </a:prstGeom>
-          <a:noFill/>
-          <a:ln/>
-        </p:spPr>
-        <p:txBody>
-          <a:bodyPr wrap="square" lIns="0" tIns="0" rIns="0" bIns="0" rtlCol="0" anchor="ctr"/>
+            <a:ext cx="8595360" cy="548640"/>
+          </a:xfrm>
+          <a:prstGeom prst="rect">
+            <a:avLst/>
+          </a:prstGeom>
+          <a:noFill/>
+          <a:ln/>
+        </p:spPr>
+        <p:txBody>
+          <a:bodyPr wrap="square" lIns="0" tIns="0" rIns="0" bIns="0" rtlCol="0" anchor="t"/>
           <a:lstStyle/>
           <a:p>
             <a:pPr indent="0" marL="0">
               <a:buNone/>
             </a:pPr>
             <a:r>
-              <a:rPr lang="en-US" sz="2200" dirty="0">
+              <a:rPr lang="en-US" sz="2300" dirty="0">
                 <a:solidFill>
                   <a:srgbClr val="A9B0CC"/>
                 </a:solidFill>
@@ -2188,9 +2188,9 @@
                 <a:ea typeface="Calibri" pitchFamily="34" charset="-122"/>
                 <a:cs typeface="Calibri" pitchFamily="34" charset="-120"/>
               </a:rPr>
-              <a:t>Interactive science for Classes 8 and 9, built around a complete clickstream.</a:t>
-            </a:r>
-            <a:endParaRPr lang="en-US" sz="2200" dirty="0"/>
+              <a:t>Read it. Watch it. Then prove you have it.</a:t>
+            </a:r>
+            <a:endParaRPr lang="en-US" sz="2300" dirty="0"/>
           </a:p>
         </p:txBody>
       </p:sp>
@@ -2202,7 +2202,7 @@
         </p:nvSpPr>
         <p:spPr>
           <a:xfrm>
-            <a:off x="566928" y="4343400"/>
+            <a:off x="566928" y="4160520"/>
             <a:ext cx="2194560" cy="41148"/>
           </a:xfrm>
           <a:prstGeom prst="rect">
@@ -2222,7 +2222,7 @@
         </p:nvSpPr>
         <p:spPr>
           <a:xfrm>
-            <a:off x="566928" y="4663440"/>
+            <a:off x="566928" y="4480560"/>
             <a:ext cx="10058400" cy="365760"/>
           </a:xfrm>
           <a:prstGeom prst="rect">
@@ -2232,7 +2232,7 @@
           <a:ln/>
         </p:spPr>
         <p:txBody>
-          <a:bodyPr wrap="square" lIns="0" tIns="0" rIns="0" bIns="0" rtlCol="0" anchor="ctr"/>
+          <a:bodyPr wrap="square" lIns="0" tIns="0" rIns="0" bIns="0" rtlCol="0" anchor="t"/>
           <a:lstStyle/>
           <a:p>
             <a:pPr indent="0" marL="0">
@@ -2247,7 +2247,7 @@
                 <a:ea typeface="Calibri" pitchFamily="34" charset="-122"/>
                 <a:cs typeface="Calibri" pitchFamily="34" charset="-120"/>
               </a:rPr>
-              <a:t>3 courses  ·  13 lessons  ·  70 questions  ·  31 event types</a:t>
+              <a:t>3 courses  ·  13 lessons  ·  70 questions  ·  a film for every lesson</a:t>
             </a:r>
             <a:endParaRPr lang="en-US" sz="1500" dirty="0"/>
           </a:p>
@@ -2271,7 +2271,7 @@
           <a:ln/>
         </p:spPr>
         <p:txBody>
-          <a:bodyPr wrap="square" lIns="0" tIns="0" rIns="0" bIns="0" rtlCol="0" anchor="ctr"/>
+          <a:bodyPr wrap="square" lIns="0" tIns="0" rIns="0" bIns="0" rtlCol="0" anchor="t"/>
           <a:lstStyle/>
           <a:p>
             <a:pPr indent="0" marL="0">
@@ -2387,7 +2387,7 @@
           <a:ln/>
         </p:spPr>
         <p:txBody>
-          <a:bodyPr wrap="square" lIns="0" tIns="0" rIns="0" bIns="0" rtlCol="0" anchor="ctr"/>
+          <a:bodyPr wrap="square" lIns="0" tIns="0" rIns="0" bIns="0" rtlCol="0" anchor="t"/>
           <a:lstStyle/>
           <a:p>
             <a:pPr indent="0" marL="0">
@@ -2402,7 +2402,7 @@
                 <a:ea typeface="Calibri" pitchFamily="34" charset="-122"/>
                 <a:cs typeface="Calibri" pitchFamily="34" charset="-120"/>
               </a:rPr>
-              <a:t>The event stream</a:t>
+              <a:t>Analytics, one of three</a:t>
             </a:r>
             <a:endParaRPr lang="en-US" sz="1300" dirty="0"/>
           </a:p>
@@ -2417,16 +2417,16 @@
         <p:spPr>
           <a:xfrm>
             <a:off x="566928" y="841248"/>
-            <a:ext cx="11057839" cy="777240"/>
-          </a:xfrm>
-          <a:prstGeom prst="rect">
-            <a:avLst/>
-          </a:prstGeom>
-          <a:noFill/>
-          <a:ln/>
-        </p:spPr>
-        <p:txBody>
-          <a:bodyPr wrap="square" lIns="0" tIns="0" rIns="0" bIns="0" rtlCol="0" anchor="ctr"/>
+            <a:ext cx="11057839" cy="658368"/>
+          </a:xfrm>
+          <a:prstGeom prst="rect">
+            <a:avLst/>
+          </a:prstGeom>
+          <a:noFill/>
+          <a:ln/>
+        </p:spPr>
+        <p:txBody>
+          <a:bodyPr wrap="square" lIns="0" tIns="0" rIns="0" bIns="0" rtlCol="0" anchor="t"/>
           <a:lstStyle/>
           <a:p>
             <a:pPr indent="0" marL="0">
@@ -2441,7 +2441,7 @@
                 <a:ea typeface="Arial" pitchFamily="34" charset="-122"/>
                 <a:cs typeface="Arial" pitchFamily="34" charset="-120"/>
               </a:rPr>
-              <a:t>Educators watch it live</a:t>
+              <a:t>Where learners stop watching</a:t>
             </a:r>
             <a:endParaRPr lang="en-US" sz="3400" dirty="0"/>
           </a:p>
@@ -2455,365 +2455,118 @@
         </p:nvSpPr>
         <p:spPr>
           <a:xfrm>
-            <a:off x="566928" y="1828800"/>
-            <a:ext cx="3931920" cy="2377440"/>
-          </a:xfrm>
-          <a:prstGeom prst="rect">
-            <a:avLst/>
-          </a:prstGeom>
-          <a:noFill/>
-          <a:ln/>
-        </p:spPr>
-        <p:txBody>
-          <a:bodyPr wrap="square" lIns="0" tIns="0" rIns="0" bIns="0" rtlCol="0" anchor="ctr"/>
-          <a:lstStyle/>
-          <a:p>
-            <a:pPr marL="342900" indent="-342900">
-              <a:lnSpc>
-                <a:spcPts val="1980"/>
-              </a:lnSpc>
-              <a:spcAft>
-                <a:spcPts val="900"/>
-              </a:spcAft>
-              <a:buSzPct val="100000"/>
-              <a:buChar char="■"/>
+            <a:off x="566928" y="1783080"/>
+            <a:ext cx="4114800" cy="1463040"/>
+          </a:xfrm>
+          <a:prstGeom prst="rect">
+            <a:avLst/>
+          </a:prstGeom>
+          <a:noFill/>
+          <a:ln/>
+        </p:spPr>
+        <p:txBody>
+          <a:bodyPr wrap="square" lIns="0" tIns="0" rIns="0" bIns="0" rtlCol="0" anchor="t"/>
+          <a:lstStyle/>
+          <a:p>
+            <a:pPr indent="0" marL="0">
+              <a:buNone/>
             </a:pPr>
             <a:r>
               <a:rPr lang="en-US" sz="1500" dirty="0">
                 <a:solidFill>
-                  <a:srgbClr val="343B5C"/>
+                  <a:srgbClr val="1E2340"/>
                 </a:solidFill>
                 <a:latin typeface="Calibri" pitchFamily="34" charset="0"/>
                 <a:ea typeface="Calibri" pitchFamily="34" charset="-122"/>
                 <a:cs typeface="Calibri" pitchFamily="34" charset="-120"/>
               </a:rPr>
-              <a:t>Every recorded action, newest first, refreshing itself.</a:t>
+              <a:t>Of 63 video starts, 100% reached a quarter of the way, 75% reached half, 41% reached three quarters, and 3% reached the end.</a:t>
             </a:r>
             <a:endParaRPr lang="en-US" sz="1500" dirty="0"/>
           </a:p>
-          <a:p>
-            <a:pPr marL="342900" indent="-342900">
-              <a:lnSpc>
-                <a:spcPts val="1980"/>
-              </a:lnSpc>
-              <a:spcAft>
-                <a:spcPts val="900"/>
-              </a:spcAft>
-              <a:buSzPct val="100000"/>
-              <a:buChar char="■"/>
-            </a:pPr>
-            <a:r>
-              <a:rPr lang="en-US" sz="1500" dirty="0">
-                <a:solidFill>
-                  <a:srgbClr val="343B5C"/>
+        </p:txBody>
+      </p:sp>
+      <p:sp>
+        <p:nvSpPr>
+          <p:cNvPr id="7" name="Text 5"/>
+          <p:cNvSpPr/>
+          <p:nvPr/>
+        </p:nvSpPr>
+        <p:spPr>
+          <a:xfrm>
+            <a:off x="566928" y="3200400"/>
+            <a:ext cx="4114800" cy="1280160"/>
+          </a:xfrm>
+          <a:prstGeom prst="rect">
+            <a:avLst/>
+          </a:prstGeom>
+          <a:noFill/>
+          <a:ln/>
+        </p:spPr>
+        <p:txBody>
+          <a:bodyPr wrap="square" lIns="0" tIns="0" rIns="0" bIns="0" rtlCol="0" anchor="t"/>
+          <a:lstStyle/>
+          <a:p>
+            <a:pPr indent="0" marL="0">
+              <a:buNone/>
+            </a:pPr>
+            <a:r>
+              <a:rPr lang="en-US" sz="1400" dirty="0">
+                <a:solidFill>
+                  <a:srgbClr val="6E7597"/>
                 </a:solidFill>
                 <a:latin typeface="Calibri" pitchFamily="34" charset="0"/>
                 <a:ea typeface="Calibri" pitchFamily="34" charset="-122"/>
                 <a:cs typeface="Calibri" pitchFamily="34" charset="-120"/>
               </a:rPr>
-              <a:t>Filter by learner, course, component, event name, date range, or free text.</a:t>
-            </a:r>
-            <a:endParaRPr lang="en-US" sz="1500" dirty="0"/>
-          </a:p>
-          <a:p>
-            <a:pPr marL="342900" indent="-342900">
-              <a:lnSpc>
-                <a:spcPts val="1980"/>
-              </a:lnSpc>
-              <a:spcAft>
-                <a:spcPts val="900"/>
-              </a:spcAft>
-              <a:buSzPct val="100000"/>
-              <a:buChar char="■"/>
-            </a:pPr>
-            <a:r>
-              <a:rPr lang="en-US" sz="1500" dirty="0">
-                <a:solidFill>
-                  <a:srgbClr val="343B5C"/>
+              <a:t>A cliff between two points is the moment to look at. It usually means the explanation lost people there, not that the film was too long.</a:t>
+            </a:r>
+            <a:endParaRPr lang="en-US" sz="1400" dirty="0"/>
+          </a:p>
+        </p:txBody>
+      </p:sp>
+      <p:sp>
+        <p:nvSpPr>
+          <p:cNvPr id="8" name="Text 6"/>
+          <p:cNvSpPr/>
+          <p:nvPr/>
+        </p:nvSpPr>
+        <p:spPr>
+          <a:xfrm>
+            <a:off x="566928" y="4572000"/>
+            <a:ext cx="4114800" cy="548640"/>
+          </a:xfrm>
+          <a:prstGeom prst="rect">
+            <a:avLst/>
+          </a:prstGeom>
+          <a:noFill/>
+          <a:ln/>
+        </p:spPr>
+        <p:txBody>
+          <a:bodyPr wrap="square" lIns="0" tIns="0" rIns="0" bIns="0" rtlCol="0" anchor="t"/>
+          <a:lstStyle/>
+          <a:p>
+            <a:pPr indent="0" marL="0">
+              <a:buNone/>
+            </a:pPr>
+            <a:r>
+              <a:rPr lang="en-US" sz="1400" b="1" i="1" dirty="0">
+                <a:solidFill>
+                  <a:srgbClr val="2E5BD4"/>
                 </a:solidFill>
                 <a:latin typeface="Calibri" pitchFamily="34" charset="0"/>
                 <a:ea typeface="Calibri" pitchFamily="34" charset="-122"/>
                 <a:cs typeface="Calibri" pitchFamily="34" charset="-120"/>
               </a:rPr>
-              <a:t>Export to CSV in the same seven columns.</a:t>
-            </a:r>
-            <a:endParaRPr lang="en-US" sz="1500" dirty="0"/>
-          </a:p>
-          <a:p>
-            <a:pPr marL="342900" indent="-342900">
-              <a:lnSpc>
-                <a:spcPts val="1980"/>
-              </a:lnSpc>
-              <a:spcAft>
-                <a:spcPts val="900"/>
-              </a:spcAft>
-              <a:buSzPct val="100000"/>
-              <a:buChar char="■"/>
-            </a:pPr>
-            <a:r>
-              <a:rPr lang="en-US" sz="1500" dirty="0">
-                <a:solidFill>
-                  <a:srgbClr val="343B5C"/>
-                </a:solidFill>
-                <a:latin typeface="Calibri" pitchFamily="34" charset="0"/>
-                <a:ea typeface="Calibri" pitchFamily="34" charset="-122"/>
-                <a:cs typeface="Calibri" pitchFamily="34" charset="-120"/>
-              </a:rPr>
-              <a:t>Educator activity is logged too, so the record never goes quiet.</a:t>
-            </a:r>
-            <a:endParaRPr lang="en-US" sz="1500" dirty="0"/>
-          </a:p>
-        </p:txBody>
-      </p:sp>
-      <p:sp>
-        <p:nvSpPr>
-          <p:cNvPr id="7" name="Shape 5"/>
-          <p:cNvSpPr/>
-          <p:nvPr/>
-        </p:nvSpPr>
-        <p:spPr>
-          <a:xfrm>
-            <a:off x="630936" y="4590288"/>
-            <a:ext cx="1874520" cy="1170432"/>
-          </a:xfrm>
-          <a:prstGeom prst="rect">
-            <a:avLst/>
-          </a:prstGeom>
-          <a:solidFill>
-            <a:srgbClr val="E8763C"/>
-          </a:solidFill>
-          <a:ln/>
-        </p:spPr>
-      </p:sp>
-      <p:sp>
-        <p:nvSpPr>
-          <p:cNvPr id="8" name="Shape 6"/>
-          <p:cNvSpPr/>
-          <p:nvPr/>
-        </p:nvSpPr>
-        <p:spPr>
-          <a:xfrm>
-            <a:off x="566928" y="4526280"/>
-            <a:ext cx="1874520" cy="1170432"/>
-          </a:xfrm>
-          <a:prstGeom prst="rect">
-            <a:avLst/>
-          </a:prstGeom>
-          <a:solidFill>
-            <a:srgbClr val="F7F2E2"/>
-          </a:solidFill>
-          <a:ln w="19050">
-            <a:solidFill>
-              <a:srgbClr val="1E2340"/>
-            </a:solidFill>
-            <a:prstDash val="solid"/>
-          </a:ln>
-        </p:spPr>
-      </p:sp>
-      <p:sp>
-        <p:nvSpPr>
-          <p:cNvPr id="9" name="Text 7"/>
-          <p:cNvSpPr/>
-          <p:nvPr/>
-        </p:nvSpPr>
-        <p:spPr>
-          <a:xfrm>
-            <a:off x="768096" y="4654296"/>
-            <a:ext cx="1472184" cy="566928"/>
-          </a:xfrm>
-          <a:prstGeom prst="rect">
-            <a:avLst/>
-          </a:prstGeom>
-          <a:noFill/>
-          <a:ln/>
-        </p:spPr>
-        <p:txBody>
-          <a:bodyPr wrap="square" lIns="0" tIns="0" rIns="0" bIns="0" rtlCol="0" anchor="ctr"/>
-          <a:lstStyle/>
-          <a:p>
-            <a:pPr indent="0" marL="0">
-              <a:buNone/>
-            </a:pPr>
-            <a:r>
-              <a:rPr lang="en-US" sz="3000" b="1" dirty="0">
-                <a:solidFill>
-                  <a:srgbClr val="1E2340"/>
-                </a:solidFill>
-                <a:latin typeface="Arial" pitchFamily="34" charset="0"/>
-                <a:ea typeface="Arial" pitchFamily="34" charset="-122"/>
-                <a:cs typeface="Arial" pitchFamily="34" charset="-120"/>
-              </a:rPr>
-              <a:t>2,206</a:t>
-            </a:r>
-            <a:endParaRPr lang="en-US" sz="3000" dirty="0"/>
-          </a:p>
-        </p:txBody>
-      </p:sp>
-      <p:sp>
-        <p:nvSpPr>
-          <p:cNvPr id="10" name="Text 8"/>
-          <p:cNvSpPr/>
-          <p:nvPr/>
-        </p:nvSpPr>
-        <p:spPr>
-          <a:xfrm>
-            <a:off x="768096" y="5239512"/>
-            <a:ext cx="1472184" cy="347472"/>
-          </a:xfrm>
-          <a:prstGeom prst="rect">
-            <a:avLst/>
-          </a:prstGeom>
-          <a:noFill/>
-          <a:ln/>
-        </p:spPr>
-        <p:txBody>
-          <a:bodyPr wrap="square" lIns="0" tIns="0" rIns="0" bIns="0" rtlCol="0" anchor="ctr"/>
-          <a:lstStyle/>
-          <a:p>
-            <a:pPr indent="0" marL="0">
-              <a:buNone/>
-            </a:pPr>
-            <a:r>
-              <a:rPr lang="en-US" sz="1250" dirty="0">
-                <a:solidFill>
-                  <a:srgbClr val="6E7597"/>
-                </a:solidFill>
-                <a:latin typeface="Calibri" pitchFamily="34" charset="0"/>
-                <a:ea typeface="Calibri" pitchFamily="34" charset="-122"/>
-                <a:cs typeface="Calibri" pitchFamily="34" charset="-120"/>
-              </a:rPr>
-              <a:t>events recorded</a:t>
-            </a:r>
-            <a:endParaRPr lang="en-US" sz="1250" dirty="0"/>
-          </a:p>
-        </p:txBody>
-      </p:sp>
-      <p:sp>
-        <p:nvSpPr>
-          <p:cNvPr id="11" name="Shape 9"/>
-          <p:cNvSpPr/>
-          <p:nvPr/>
-        </p:nvSpPr>
-        <p:spPr>
-          <a:xfrm>
-            <a:off x="2688336" y="4590288"/>
-            <a:ext cx="1874520" cy="1170432"/>
-          </a:xfrm>
-          <a:prstGeom prst="rect">
-            <a:avLst/>
-          </a:prstGeom>
-          <a:solidFill>
-            <a:srgbClr val="2E5BD4"/>
-          </a:solidFill>
-          <a:ln/>
-        </p:spPr>
-      </p:sp>
-      <p:sp>
-        <p:nvSpPr>
-          <p:cNvPr id="12" name="Shape 10"/>
-          <p:cNvSpPr/>
-          <p:nvPr/>
-        </p:nvSpPr>
-        <p:spPr>
-          <a:xfrm>
-            <a:off x="2624328" y="4526280"/>
-            <a:ext cx="1874520" cy="1170432"/>
-          </a:xfrm>
-          <a:prstGeom prst="rect">
-            <a:avLst/>
-          </a:prstGeom>
-          <a:solidFill>
-            <a:srgbClr val="F7F2E2"/>
-          </a:solidFill>
-          <a:ln w="19050">
-            <a:solidFill>
-              <a:srgbClr val="1E2340"/>
-            </a:solidFill>
-            <a:prstDash val="solid"/>
-          </a:ln>
-        </p:spPr>
-      </p:sp>
-      <p:sp>
-        <p:nvSpPr>
-          <p:cNvPr id="13" name="Text 11"/>
-          <p:cNvSpPr/>
-          <p:nvPr/>
-        </p:nvSpPr>
-        <p:spPr>
-          <a:xfrm>
-            <a:off x="2825496" y="4654296"/>
-            <a:ext cx="1472184" cy="566928"/>
-          </a:xfrm>
-          <a:prstGeom prst="rect">
-            <a:avLst/>
-          </a:prstGeom>
-          <a:noFill/>
-          <a:ln/>
-        </p:spPr>
-        <p:txBody>
-          <a:bodyPr wrap="square" lIns="0" tIns="0" rIns="0" bIns="0" rtlCol="0" anchor="ctr"/>
-          <a:lstStyle/>
-          <a:p>
-            <a:pPr indent="0" marL="0">
-              <a:buNone/>
-            </a:pPr>
-            <a:r>
-              <a:rPr lang="en-US" sz="3000" b="1" dirty="0">
-                <a:solidFill>
-                  <a:srgbClr val="1E2340"/>
-                </a:solidFill>
-                <a:latin typeface="Arial" pitchFamily="34" charset="0"/>
-                <a:ea typeface="Arial" pitchFamily="34" charset="-122"/>
-                <a:cs typeface="Arial" pitchFamily="34" charset="-120"/>
-              </a:rPr>
-              <a:t>31</a:t>
-            </a:r>
-            <a:endParaRPr lang="en-US" sz="3000" dirty="0"/>
-          </a:p>
-        </p:txBody>
-      </p:sp>
-      <p:sp>
-        <p:nvSpPr>
-          <p:cNvPr id="14" name="Text 12"/>
-          <p:cNvSpPr/>
-          <p:nvPr/>
-        </p:nvSpPr>
-        <p:spPr>
-          <a:xfrm>
-            <a:off x="2825496" y="5239512"/>
-            <a:ext cx="1472184" cy="347472"/>
-          </a:xfrm>
-          <a:prstGeom prst="rect">
-            <a:avLst/>
-          </a:prstGeom>
-          <a:noFill/>
-          <a:ln/>
-        </p:spPr>
-        <p:txBody>
-          <a:bodyPr wrap="square" lIns="0" tIns="0" rIns="0" bIns="0" rtlCol="0" anchor="ctr"/>
-          <a:lstStyle/>
-          <a:p>
-            <a:pPr indent="0" marL="0">
-              <a:buNone/>
-            </a:pPr>
-            <a:r>
-              <a:rPr lang="en-US" sz="1250" dirty="0">
-                <a:solidFill>
-                  <a:srgbClr val="6E7597"/>
-                </a:solidFill>
-                <a:latin typeface="Calibri" pitchFamily="34" charset="0"/>
-                <a:ea typeface="Calibri" pitchFamily="34" charset="-122"/>
-                <a:cs typeface="Calibri" pitchFamily="34" charset="-120"/>
-              </a:rPr>
-              <a:t>event types</a:t>
-            </a:r>
-            <a:endParaRPr lang="en-US" sz="1250" dirty="0"/>
+              <a:t>None of which is visible from a grade book.</a:t>
+            </a:r>
+            <a:endParaRPr lang="en-US" sz="1400" dirty="0"/>
           </a:p>
         </p:txBody>
       </p:sp>
       <p:pic>
         <p:nvPicPr>
-          <p:cNvPr id="15" name="Image 0" descr="/Users/ndstab/Desktop/et/docs/screens/event-stream.png">    </p:cNvPr>
+          <p:cNvPr id="9" name="Image 0" descr="/Users/ndstab/Desktop/et/docs/screens/analytics.png">    </p:cNvPr>
           <p:cNvPicPr>
             <a:picLocks noChangeAspect="1"/>
           </p:cNvPicPr>
@@ -2827,8 +2580,8 @@
         </p:blipFill>
         <p:spPr>
           <a:xfrm>
-            <a:off x="4892040" y="1783080"/>
-            <a:ext cx="6045015" cy="4617720"/>
+            <a:off x="5029200" y="1783080"/>
+            <a:ext cx="6517843" cy="4526280"/>
           </a:xfrm>
           <a:prstGeom prst="rect">
             <a:avLst/>
@@ -2937,7 +2690,7 @@
           <a:ln/>
         </p:spPr>
         <p:txBody>
-          <a:bodyPr wrap="square" lIns="0" tIns="0" rIns="0" bIns="0" rtlCol="0" anchor="ctr"/>
+          <a:bodyPr wrap="square" lIns="0" tIns="0" rIns="0" bIns="0" rtlCol="0" anchor="t"/>
           <a:lstStyle/>
           <a:p>
             <a:pPr indent="0" marL="0">
@@ -2952,7 +2705,7 @@
                 <a:ea typeface="Calibri" pitchFamily="34" charset="-122"/>
                 <a:cs typeface="Calibri" pitchFamily="34" charset="-120"/>
               </a:rPr>
-              <a:t>Analytics, one of three</a:t>
+              <a:t>Analytics, two of three</a:t>
             </a:r>
             <a:endParaRPr lang="en-US" sz="1300" dirty="0"/>
           </a:p>
@@ -2967,16 +2720,16 @@
         <p:spPr>
           <a:xfrm>
             <a:off x="566928" y="841248"/>
-            <a:ext cx="11057839" cy="777240"/>
-          </a:xfrm>
-          <a:prstGeom prst="rect">
-            <a:avLst/>
-          </a:prstGeom>
-          <a:noFill/>
-          <a:ln/>
-        </p:spPr>
-        <p:txBody>
-          <a:bodyPr wrap="square" lIns="0" tIns="0" rIns="0" bIns="0" rtlCol="0" anchor="ctr"/>
+            <a:ext cx="11057839" cy="658368"/>
+          </a:xfrm>
+          <a:prstGeom prst="rect">
+            <a:avLst/>
+          </a:prstGeom>
+          <a:noFill/>
+          <a:ln/>
+        </p:spPr>
+        <p:txBody>
+          <a:bodyPr wrap="square" lIns="0" tIns="0" rIns="0" bIns="0" rtlCol="0" anchor="t"/>
           <a:lstStyle/>
           <a:p>
             <a:pPr indent="0" marL="0">
@@ -2991,7 +2744,7 @@
                 <a:ea typeface="Arial" pitchFamily="34" charset="-122"/>
                 <a:cs typeface="Arial" pitchFamily="34" charset="-120"/>
               </a:rPr>
-              <a:t>Where learners stop watching</a:t>
+              <a:t>Which questions are actually hard</a:t>
             </a:r>
             <a:endParaRPr lang="en-US" sz="3400" dirty="0"/>
           </a:p>
@@ -3005,110 +2758,249 @@
         </p:nvSpPr>
         <p:spPr>
           <a:xfrm>
-            <a:off x="566928" y="1783080"/>
-            <a:ext cx="4114800" cy="1371600"/>
-          </a:xfrm>
-          <a:prstGeom prst="rect">
-            <a:avLst/>
-          </a:prstGeom>
-          <a:noFill/>
-          <a:ln/>
-        </p:spPr>
-        <p:txBody>
-          <a:bodyPr wrap="square" lIns="0" tIns="0" rIns="0" bIns="0" rtlCol="0" anchor="ctr"/>
-          <a:lstStyle/>
-          <a:p>
-            <a:pPr indent="0" marL="0">
-              <a:buNone/>
+            <a:off x="566928" y="1828800"/>
+            <a:ext cx="3931920" cy="2194560"/>
+          </a:xfrm>
+          <a:prstGeom prst="rect">
+            <a:avLst/>
+          </a:prstGeom>
+          <a:noFill/>
+          <a:ln/>
+        </p:spPr>
+        <p:txBody>
+          <a:bodyPr wrap="square" lIns="0" tIns="0" rIns="0" bIns="0" rtlCol="0" anchor="t"/>
+          <a:lstStyle/>
+          <a:p>
+            <a:pPr marL="342900" indent="-342900">
+              <a:lnSpc>
+                <a:spcPts val="1980"/>
+              </a:lnSpc>
+              <a:spcAft>
+                <a:spcPts val="900"/>
+              </a:spcAft>
+              <a:buSzPct val="100000"/>
+              <a:buChar char="■"/>
             </a:pPr>
             <a:r>
               <a:rPr lang="en-US" sz="1500" dirty="0">
                 <a:solidFill>
-                  <a:srgbClr val="1E2340"/>
+                  <a:srgbClr val="343B5C"/>
                 </a:solidFill>
                 <a:latin typeface="Calibri" pitchFamily="34" charset="0"/>
                 <a:ea typeface="Calibri" pitchFamily="34" charset="-122"/>
                 <a:cs typeface="Calibri" pitchFamily="34" charset="-120"/>
               </a:rPr>
-              <a:t>Of 68 video starts, 97% reached a quarter of the way, 62% reached half, 24% reached three quarters, and 9% reached the end.</a:t>
+              <a:t>Percentage correct across all 483 recorded answers, hardest first.</a:t>
             </a:r>
             <a:endParaRPr lang="en-US" sz="1500" dirty="0"/>
           </a:p>
-        </p:txBody>
-      </p:sp>
-      <p:sp>
-        <p:nvSpPr>
-          <p:cNvPr id="7" name="Text 5"/>
-          <p:cNvSpPr/>
-          <p:nvPr/>
-        </p:nvSpPr>
-        <p:spPr>
-          <a:xfrm>
-            <a:off x="566928" y="3108960"/>
-            <a:ext cx="4114800" cy="1280160"/>
-          </a:xfrm>
-          <a:prstGeom prst="rect">
-            <a:avLst/>
-          </a:prstGeom>
-          <a:noFill/>
-          <a:ln/>
-        </p:spPr>
-        <p:txBody>
-          <a:bodyPr wrap="square" lIns="0" tIns="0" rIns="0" bIns="0" rtlCol="0" anchor="ctr"/>
-          <a:lstStyle/>
-          <a:p>
-            <a:pPr indent="0" marL="0">
-              <a:buNone/>
-            </a:pPr>
-            <a:r>
-              <a:rPr lang="en-US" sz="1400" dirty="0">
-                <a:solidFill>
-                  <a:srgbClr val="6E7597"/>
+          <a:p>
+            <a:pPr marL="342900" indent="-342900">
+              <a:lnSpc>
+                <a:spcPts val="1980"/>
+              </a:lnSpc>
+              <a:spcAft>
+                <a:spcPts val="900"/>
+              </a:spcAft>
+              <a:buSzPct val="100000"/>
+              <a:buChar char="■"/>
+            </a:pPr>
+            <a:r>
+              <a:rPr lang="en-US" sz="1500" dirty="0">
+                <a:solidFill>
+                  <a:srgbClr val="343B5C"/>
                 </a:solidFill>
                 <a:latin typeface="Calibri" pitchFamily="34" charset="0"/>
                 <a:ea typeface="Calibri" pitchFamily="34" charset="-122"/>
                 <a:cs typeface="Calibri" pitchFamily="34" charset="-120"/>
               </a:rPr>
-              <a:t>A cliff between two points is the moment to look at. It usually means the explanation lost people there, not that the film was too long.</a:t>
-            </a:r>
-            <a:endParaRPr lang="en-US" sz="1400" dirty="0"/>
-          </a:p>
-        </p:txBody>
-      </p:sp>
-      <p:sp>
-        <p:nvSpPr>
-          <p:cNvPr id="8" name="Text 6"/>
-          <p:cNvSpPr/>
-          <p:nvPr/>
-        </p:nvSpPr>
-        <p:spPr>
-          <a:xfrm>
-            <a:off x="566928" y="4434840"/>
-            <a:ext cx="4114800" cy="731520"/>
-          </a:xfrm>
-          <a:prstGeom prst="rect">
-            <a:avLst/>
-          </a:prstGeom>
-          <a:noFill/>
-          <a:ln/>
-        </p:spPr>
-        <p:txBody>
-          <a:bodyPr wrap="square" lIns="0" tIns="0" rIns="0" bIns="0" rtlCol="0" anchor="ctr"/>
-          <a:lstStyle/>
-          <a:p>
-            <a:pPr indent="0" marL="0">
-              <a:buNone/>
-            </a:pPr>
-            <a:r>
-              <a:rPr lang="en-US" sz="1300" b="1" i="1" dirty="0">
-                <a:solidFill>
-                  <a:srgbClr val="2E5BD4"/>
+              <a:t>Every attempt counts, including retakes.</a:t>
+            </a:r>
+            <a:endParaRPr lang="en-US" sz="1500" dirty="0"/>
+          </a:p>
+          <a:p>
+            <a:pPr marL="342900" indent="-342900">
+              <a:lnSpc>
+                <a:spcPts val="1980"/>
+              </a:lnSpc>
+              <a:spcAft>
+                <a:spcPts val="900"/>
+              </a:spcAft>
+              <a:buSzPct val="100000"/>
+              <a:buChar char="■"/>
+            </a:pPr>
+            <a:r>
+              <a:rPr lang="en-US" sz="1500" dirty="0">
+                <a:solidFill>
+                  <a:srgbClr val="343B5C"/>
                 </a:solidFill>
                 <a:latin typeface="Calibri" pitchFamily="34" charset="0"/>
                 <a:ea typeface="Calibri" pitchFamily="34" charset="-122"/>
                 <a:cs typeface="Calibri" pitchFamily="34" charset="-120"/>
               </a:rPr>
-              <a:t>Built from the player's milestone events. Impossible with an embed.</a:t>
+              <a:t>A question that stays red after repeated attempts is a teaching problem, not a difficulty setting.</a:t>
+            </a:r>
+            <a:endParaRPr lang="en-US" sz="1500" dirty="0"/>
+          </a:p>
+        </p:txBody>
+      </p:sp>
+      <p:sp>
+        <p:nvSpPr>
+          <p:cNvPr id="7" name="Shape 5"/>
+          <p:cNvSpPr/>
+          <p:nvPr/>
+        </p:nvSpPr>
+        <p:spPr>
+          <a:xfrm>
+            <a:off x="630936" y="4361688"/>
+            <a:ext cx="3931920" cy="1737360"/>
+          </a:xfrm>
+          <a:prstGeom prst="rect">
+            <a:avLst/>
+          </a:prstGeom>
+          <a:solidFill>
+            <a:srgbClr val="2E5BD4"/>
+          </a:solidFill>
+          <a:ln/>
+        </p:spPr>
+      </p:sp>
+      <p:sp>
+        <p:nvSpPr>
+          <p:cNvPr id="8" name="Shape 6"/>
+          <p:cNvSpPr/>
+          <p:nvPr/>
+        </p:nvSpPr>
+        <p:spPr>
+          <a:xfrm>
+            <a:off x="566928" y="4297680"/>
+            <a:ext cx="3931920" cy="1737360"/>
+          </a:xfrm>
+          <a:prstGeom prst="rect">
+            <a:avLst/>
+          </a:prstGeom>
+          <a:solidFill>
+            <a:srgbClr val="EDE6CF"/>
+          </a:solidFill>
+          <a:ln w="19050">
+            <a:solidFill>
+              <a:srgbClr val="1E2340"/>
+            </a:solidFill>
+            <a:prstDash val="solid"/>
+          </a:ln>
+        </p:spPr>
+      </p:sp>
+      <p:sp>
+        <p:nvSpPr>
+          <p:cNvPr id="9" name="Text 7"/>
+          <p:cNvSpPr/>
+          <p:nvPr/>
+        </p:nvSpPr>
+        <p:spPr>
+          <a:xfrm>
+            <a:off x="804672" y="4480560"/>
+            <a:ext cx="3474720" cy="274320"/>
+          </a:xfrm>
+          <a:prstGeom prst="rect">
+            <a:avLst/>
+          </a:prstGeom>
+          <a:noFill/>
+          <a:ln/>
+        </p:spPr>
+        <p:txBody>
+          <a:bodyPr wrap="square" lIns="0" tIns="0" rIns="0" bIns="0" rtlCol="0" anchor="t"/>
+          <a:lstStyle/>
+          <a:p>
+            <a:pPr indent="0" marL="0">
+              <a:buNone/>
+            </a:pPr>
+            <a:r>
+              <a:rPr lang="en-US" sz="1250" b="1" dirty="0">
+                <a:solidFill>
+                  <a:srgbClr val="2E5BD4"/>
+                </a:solidFill>
+                <a:latin typeface="Calibri" pitchFamily="34" charset="0"/>
+                <a:ea typeface="Calibri" pitchFamily="34" charset="-122"/>
+                <a:cs typeface="Calibri" pitchFamily="34" charset="-120"/>
+              </a:rPr>
+              <a:t>Hardest right now</a:t>
+            </a:r>
+            <a:endParaRPr lang="en-US" sz="1250" dirty="0"/>
+          </a:p>
+        </p:txBody>
+      </p:sp>
+      <p:sp>
+        <p:nvSpPr>
+          <p:cNvPr id="10" name="Text 8"/>
+          <p:cNvSpPr/>
+          <p:nvPr/>
+        </p:nvSpPr>
+        <p:spPr>
+          <a:xfrm>
+            <a:off x="804672" y="4773168"/>
+            <a:ext cx="3474720" cy="777240"/>
+          </a:xfrm>
+          <a:prstGeom prst="rect">
+            <a:avLst/>
+          </a:prstGeom>
+          <a:noFill/>
+          <a:ln/>
+        </p:spPr>
+        <p:txBody>
+          <a:bodyPr wrap="square" lIns="0" tIns="0" rIns="0" bIns="0" rtlCol="0" anchor="t"/>
+          <a:lstStyle/>
+          <a:p>
+            <a:pPr indent="0" marL="0">
+              <a:buNone/>
+            </a:pPr>
+            <a:r>
+              <a:rPr lang="en-US" sz="1350" b="1" dirty="0">
+                <a:solidFill>
+                  <a:srgbClr val="1E2340"/>
+                </a:solidFill>
+                <a:latin typeface="Calibri" pitchFamily="34" charset="0"/>
+                <a:ea typeface="Calibri" pitchFamily="34" charset="-122"/>
+                <a:cs typeface="Calibri" pitchFamily="34" charset="-120"/>
+              </a:rPr>
+              <a:t>Select every situation in which a light ray does not change direction.</a:t>
+            </a:r>
+            <a:endParaRPr lang="en-US" sz="1350" dirty="0"/>
+          </a:p>
+        </p:txBody>
+      </p:sp>
+      <p:sp>
+        <p:nvSpPr>
+          <p:cNvPr id="11" name="Text 9"/>
+          <p:cNvSpPr/>
+          <p:nvPr/>
+        </p:nvSpPr>
+        <p:spPr>
+          <a:xfrm>
+            <a:off x="804672" y="5596128"/>
+            <a:ext cx="3474720" cy="320040"/>
+          </a:xfrm>
+          <a:prstGeom prst="rect">
+            <a:avLst/>
+          </a:prstGeom>
+          <a:noFill/>
+          <a:ln/>
+        </p:spPr>
+        <p:txBody>
+          <a:bodyPr wrap="square" lIns="0" tIns="0" rIns="0" bIns="0" rtlCol="0" anchor="t"/>
+          <a:lstStyle/>
+          <a:p>
+            <a:pPr indent="0" marL="0">
+              <a:buNone/>
+            </a:pPr>
+            <a:r>
+              <a:rPr lang="en-US" sz="1300" dirty="0">
+                <a:solidFill>
+                  <a:srgbClr val="6E7597"/>
+                </a:solidFill>
+                <a:latin typeface="Calibri" pitchFamily="34" charset="0"/>
+                <a:ea typeface="Calibri" pitchFamily="34" charset="-122"/>
+                <a:cs typeface="Calibri" pitchFamily="34" charset="-120"/>
+              </a:rPr>
+              <a:t>44% correct across 9 answers</a:t>
             </a:r>
             <a:endParaRPr lang="en-US" sz="1300" dirty="0"/>
           </a:p>
@@ -3116,7 +3008,7 @@
       </p:sp>
       <p:pic>
         <p:nvPicPr>
-          <p:cNvPr id="9" name="Image 0" descr="/Users/ndstab/Desktop/et/docs/screens/analytics.png">    </p:cNvPr>
+          <p:cNvPr id="12" name="Image 0" descr="/Users/ndstab/Desktop/et/docs/screens/difficulty.png">    </p:cNvPr>
           <p:cNvPicPr>
             <a:picLocks noChangeAspect="1"/>
           </p:cNvPicPr>
@@ -3130,7 +3022,7 @@
         </p:blipFill>
         <p:spPr>
           <a:xfrm>
-            <a:off x="5029200" y="1783080"/>
+            <a:off x="4892040" y="1783080"/>
             <a:ext cx="6517843" cy="4526280"/>
           </a:xfrm>
           <a:prstGeom prst="rect">
@@ -3240,7 +3132,7 @@
           <a:ln/>
         </p:spPr>
         <p:txBody>
-          <a:bodyPr wrap="square" lIns="0" tIns="0" rIns="0" bIns="0" rtlCol="0" anchor="ctr"/>
+          <a:bodyPr wrap="square" lIns="0" tIns="0" rIns="0" bIns="0" rtlCol="0" anchor="t"/>
           <a:lstStyle/>
           <a:p>
             <a:pPr indent="0" marL="0">
@@ -3255,7 +3147,7 @@
                 <a:ea typeface="Calibri" pitchFamily="34" charset="-122"/>
                 <a:cs typeface="Calibri" pitchFamily="34" charset="-120"/>
               </a:rPr>
-              <a:t>Analytics, two of three</a:t>
+              <a:t>Analytics, three of three</a:t>
             </a:r>
             <a:endParaRPr lang="en-US" sz="1300" dirty="0"/>
           </a:p>
@@ -3270,16 +3162,16 @@
         <p:spPr>
           <a:xfrm>
             <a:off x="566928" y="841248"/>
-            <a:ext cx="11057839" cy="777240"/>
-          </a:xfrm>
-          <a:prstGeom prst="rect">
-            <a:avLst/>
-          </a:prstGeom>
-          <a:noFill/>
-          <a:ln/>
-        </p:spPr>
-        <p:txBody>
-          <a:bodyPr wrap="square" lIns="0" tIns="0" rIns="0" bIns="0" rtlCol="0" anchor="ctr"/>
+            <a:ext cx="11057839" cy="658368"/>
+          </a:xfrm>
+          <a:prstGeom prst="rect">
+            <a:avLst/>
+          </a:prstGeom>
+          <a:noFill/>
+          <a:ln/>
+        </p:spPr>
+        <p:txBody>
+          <a:bodyPr wrap="square" lIns="0" tIns="0" rIns="0" bIns="0" rtlCol="0" anchor="t"/>
           <a:lstStyle/>
           <a:p>
             <a:pPr indent="0" marL="0">
@@ -3294,7 +3186,7 @@
                 <a:ea typeface="Arial" pitchFamily="34" charset="-122"/>
                 <a:cs typeface="Arial" pitchFamily="34" charset="-120"/>
               </a:rPr>
-              <a:t>Which questions are actually hard</a:t>
+              <a:t>When the work actually happens</a:t>
             </a:r>
             <a:endParaRPr lang="en-US" sz="3400" dirty="0"/>
           </a:p>
@@ -3309,16 +3201,16 @@
         <p:spPr>
           <a:xfrm>
             <a:off x="566928" y="1828800"/>
-            <a:ext cx="3931920" cy="2194560"/>
-          </a:xfrm>
-          <a:prstGeom prst="rect">
-            <a:avLst/>
-          </a:prstGeom>
-          <a:noFill/>
-          <a:ln/>
-        </p:spPr>
-        <p:txBody>
-          <a:bodyPr wrap="square" lIns="0" tIns="0" rIns="0" bIns="0" rtlCol="0" anchor="ctr"/>
+            <a:ext cx="3840480" cy="2011680"/>
+          </a:xfrm>
+          <a:prstGeom prst="rect">
+            <a:avLst/>
+          </a:prstGeom>
+          <a:noFill/>
+          <a:ln/>
+        </p:spPr>
+        <p:txBody>
+          <a:bodyPr wrap="square" lIns="0" tIns="0" rIns="0" bIns="0" rtlCol="0" anchor="t"/>
           <a:lstStyle/>
           <a:p>
             <a:pPr marL="342900" indent="-342900">
@@ -3340,7 +3232,7 @@
                 <a:ea typeface="Calibri" pitchFamily="34" charset="-122"/>
                 <a:cs typeface="Calibri" pitchFamily="34" charset="-120"/>
               </a:rPr>
-              <a:t>Percentage correct across all 474 recorded answers, hardest first.</a:t>
+              <a:t>Events per hour, most recent on the right.</a:t>
             </a:r>
             <a:endParaRPr lang="en-US" sz="1500" dirty="0"/>
           </a:p>
@@ -3364,7 +3256,7 @@
                 <a:ea typeface="Calibri" pitchFamily="34" charset="-122"/>
                 <a:cs typeface="Calibri" pitchFamily="34" charset="-120"/>
               </a:rPr>
-              <a:t>Every attempt counts separately, including retakes.</a:t>
+              <a:t>Shows whether a class works during the school day or late at night.</a:t>
             </a:r>
             <a:endParaRPr lang="en-US" sz="1500" dirty="0"/>
           </a:p>
@@ -3388,7 +3280,7 @@
                 <a:ea typeface="Calibri" pitchFamily="34" charset="-122"/>
                 <a:cs typeface="Calibri" pitchFamily="34" charset="-120"/>
               </a:rPr>
-              <a:t>A question that stays red after repeated attempts is a teaching problem, not a difficulty setting.</a:t>
+              <a:t>Confirms that a spike lines up with a lesson being set.</a:t>
             </a:r>
             <a:endParaRPr lang="en-US" sz="1500" dirty="0"/>
           </a:p>
@@ -3402,14 +3294,14 @@
         </p:nvSpPr>
         <p:spPr>
           <a:xfrm>
-            <a:off x="630936" y="4453128"/>
-            <a:ext cx="1874520" cy="1170432"/>
+            <a:off x="630936" y="4178808"/>
+            <a:ext cx="1828800" cy="1133856"/>
           </a:xfrm>
           <a:prstGeom prst="rect">
             <a:avLst/>
           </a:prstGeom>
           <a:solidFill>
-            <a:srgbClr val="2E5BD4"/>
+            <a:srgbClr val="E8763C"/>
           </a:solidFill>
           <a:ln/>
         </p:spPr>
@@ -3422,8 +3314,8 @@
         </p:nvSpPr>
         <p:spPr>
           <a:xfrm>
-            <a:off x="566928" y="4389120"/>
-            <a:ext cx="1874520" cy="1170432"/>
+            <a:off x="566928" y="4114800"/>
+            <a:ext cx="1828800" cy="1133856"/>
           </a:xfrm>
           <a:prstGeom prst="rect">
             <a:avLst/>
@@ -3447,24 +3339,24 @@
         </p:nvSpPr>
         <p:spPr>
           <a:xfrm>
-            <a:off x="768096" y="4517136"/>
-            <a:ext cx="1472184" cy="566928"/>
-          </a:xfrm>
-          <a:prstGeom prst="rect">
-            <a:avLst/>
-          </a:prstGeom>
-          <a:noFill/>
-          <a:ln/>
-        </p:spPr>
-        <p:txBody>
-          <a:bodyPr wrap="square" lIns="0" tIns="0" rIns="0" bIns="0" rtlCol="0" anchor="ctr"/>
+            <a:off x="768096" y="4233672"/>
+            <a:ext cx="1426464" cy="548640"/>
+          </a:xfrm>
+          <a:prstGeom prst="rect">
+            <a:avLst/>
+          </a:prstGeom>
+          <a:noFill/>
+          <a:ln/>
+        </p:spPr>
+        <p:txBody>
+          <a:bodyPr wrap="square" lIns="0" tIns="0" rIns="0" bIns="0" rtlCol="0" anchor="t"/>
           <a:lstStyle/>
           <a:p>
             <a:pPr indent="0" marL="0">
               <a:buNone/>
             </a:pPr>
             <a:r>
-              <a:rPr lang="en-US" sz="3000" b="1" dirty="0">
+              <a:rPr lang="en-US" sz="2800" b="1" dirty="0">
                 <a:solidFill>
                   <a:srgbClr val="1E2340"/>
                 </a:solidFill>
@@ -3472,9 +3364,9 @@
                 <a:ea typeface="Arial" pitchFamily="34" charset="-122"/>
                 <a:cs typeface="Arial" pitchFamily="34" charset="-120"/>
               </a:rPr>
-              <a:t>87</a:t>
-            </a:r>
-            <a:endParaRPr lang="en-US" sz="3000" dirty="0"/>
+              <a:t>1,632</a:t>
+            </a:r>
+            <a:endParaRPr lang="en-US" sz="2800" dirty="0"/>
           </a:p>
         </p:txBody>
       </p:sp>
@@ -3486,17 +3378,17 @@
         </p:nvSpPr>
         <p:spPr>
           <a:xfrm>
-            <a:off x="768096" y="5102352"/>
-            <a:ext cx="1472184" cy="347472"/>
-          </a:xfrm>
-          <a:prstGeom prst="rect">
-            <a:avLst/>
-          </a:prstGeom>
-          <a:noFill/>
-          <a:ln/>
-        </p:spPr>
-        <p:txBody>
-          <a:bodyPr wrap="square" lIns="0" tIns="0" rIns="0" bIns="0" rtlCol="0" anchor="ctr"/>
+            <a:off x="768096" y="4809744"/>
+            <a:ext cx="1426464" cy="347472"/>
+          </a:xfrm>
+          <a:prstGeom prst="rect">
+            <a:avLst/>
+          </a:prstGeom>
+          <a:noFill/>
+          <a:ln/>
+        </p:spPr>
+        <p:txBody>
+          <a:bodyPr wrap="square" lIns="0" tIns="0" rIns="0" bIns="0" rtlCol="0" anchor="t"/>
           <a:lstStyle/>
           <a:p>
             <a:pPr indent="0" marL="0">
@@ -3511,7 +3403,7 @@
                 <a:ea typeface="Calibri" pitchFamily="34" charset="-122"/>
                 <a:cs typeface="Calibri" pitchFamily="34" charset="-120"/>
               </a:rPr>
-              <a:t>quiz attempts</a:t>
+              <a:t>events</a:t>
             </a:r>
             <a:endParaRPr lang="en-US" sz="1250" dirty="0"/>
           </a:p>
@@ -3525,14 +3417,14 @@
         </p:nvSpPr>
         <p:spPr>
           <a:xfrm>
-            <a:off x="2688336" y="4453128"/>
-            <a:ext cx="1874520" cy="1170432"/>
+            <a:off x="2642616" y="4178808"/>
+            <a:ext cx="1828800" cy="1133856"/>
           </a:xfrm>
           <a:prstGeom prst="rect">
             <a:avLst/>
           </a:prstGeom>
           <a:solidFill>
-            <a:srgbClr val="E8763C"/>
+            <a:srgbClr val="2E5BD4"/>
           </a:solidFill>
           <a:ln/>
         </p:spPr>
@@ -3545,8 +3437,8 @@
         </p:nvSpPr>
         <p:spPr>
           <a:xfrm>
-            <a:off x="2624328" y="4389120"/>
-            <a:ext cx="1874520" cy="1170432"/>
+            <a:off x="2578608" y="4114800"/>
+            <a:ext cx="1828800" cy="1133856"/>
           </a:xfrm>
           <a:prstGeom prst="rect">
             <a:avLst/>
@@ -3570,24 +3462,24 @@
         </p:nvSpPr>
         <p:spPr>
           <a:xfrm>
-            <a:off x="2825496" y="4517136"/>
-            <a:ext cx="1472184" cy="566928"/>
-          </a:xfrm>
-          <a:prstGeom prst="rect">
-            <a:avLst/>
-          </a:prstGeom>
-          <a:noFill/>
-          <a:ln/>
-        </p:spPr>
-        <p:txBody>
-          <a:bodyPr wrap="square" lIns="0" tIns="0" rIns="0" bIns="0" rtlCol="0" anchor="ctr"/>
+            <a:off x="2779776" y="4233672"/>
+            <a:ext cx="1426464" cy="548640"/>
+          </a:xfrm>
+          <a:prstGeom prst="rect">
+            <a:avLst/>
+          </a:prstGeom>
+          <a:noFill/>
+          <a:ln/>
+        </p:spPr>
+        <p:txBody>
+          <a:bodyPr wrap="square" lIns="0" tIns="0" rIns="0" bIns="0" rtlCol="0" anchor="t"/>
           <a:lstStyle/>
           <a:p>
             <a:pPr indent="0" marL="0">
               <a:buNone/>
             </a:pPr>
             <a:r>
-              <a:rPr lang="en-US" sz="3000" b="1" dirty="0">
+              <a:rPr lang="en-US" sz="2800" b="1" dirty="0">
                 <a:solidFill>
                   <a:srgbClr val="1E2340"/>
                 </a:solidFill>
@@ -3595,9 +3487,9 @@
                 <a:ea typeface="Arial" pitchFamily="34" charset="-122"/>
                 <a:cs typeface="Arial" pitchFamily="34" charset="-120"/>
               </a:rPr>
-              <a:t>474</a:t>
-            </a:r>
-            <a:endParaRPr lang="en-US" sz="3000" dirty="0"/>
+              <a:t>59</a:t>
+            </a:r>
+            <a:endParaRPr lang="en-US" sz="2800" dirty="0"/>
           </a:p>
         </p:txBody>
       </p:sp>
@@ -3609,17 +3501,17 @@
         </p:nvSpPr>
         <p:spPr>
           <a:xfrm>
-            <a:off x="2825496" y="5102352"/>
-            <a:ext cx="1472184" cy="347472"/>
-          </a:xfrm>
-          <a:prstGeom prst="rect">
-            <a:avLst/>
-          </a:prstGeom>
-          <a:noFill/>
-          <a:ln/>
-        </p:spPr>
-        <p:txBody>
-          <a:bodyPr wrap="square" lIns="0" tIns="0" rIns="0" bIns="0" rtlCol="0" anchor="ctr"/>
+            <a:off x="2779776" y="4809744"/>
+            <a:ext cx="1426464" cy="347472"/>
+          </a:xfrm>
+          <a:prstGeom prst="rect">
+            <a:avLst/>
+          </a:prstGeom>
+          <a:noFill/>
+          <a:ln/>
+        </p:spPr>
+        <p:txBody>
+          <a:bodyPr wrap="square" lIns="0" tIns="0" rIns="0" bIns="0" rtlCol="0" anchor="t"/>
           <a:lstStyle/>
           <a:p>
             <a:pPr indent="0" marL="0">
@@ -3634,7 +3526,7 @@
                 <a:ea typeface="Calibri" pitchFamily="34" charset="-122"/>
                 <a:cs typeface="Calibri" pitchFamily="34" charset="-120"/>
               </a:rPr>
-              <a:t>answers graded</a:t>
+              <a:t>minutes watched</a:t>
             </a:r>
             <a:endParaRPr lang="en-US" sz="1250" dirty="0"/>
           </a:p>
@@ -3642,7 +3534,7 @@
       </p:sp>
       <p:pic>
         <p:nvPicPr>
-          <p:cNvPr id="15" name="Image 0" descr="/Users/ndstab/Desktop/et/docs/screens/difficulty.png">    </p:cNvPr>
+          <p:cNvPr id="15" name="Image 0" descr="/Users/ndstab/Desktop/et/docs/screens/activity.png">    </p:cNvPr>
           <p:cNvPicPr>
             <a:picLocks noChangeAspect="1"/>
           </p:cNvPicPr>
@@ -3656,8 +3548,8 @@
         </p:blipFill>
         <p:spPr>
           <a:xfrm>
-            <a:off x="4892040" y="1783080"/>
-            <a:ext cx="6517843" cy="4526280"/>
+            <a:off x="4800600" y="1783080"/>
+            <a:ext cx="6375774" cy="4206240"/>
           </a:xfrm>
           <a:prstGeom prst="rect">
             <a:avLst/>
@@ -3766,7 +3658,7 @@
           <a:ln/>
         </p:spPr>
         <p:txBody>
-          <a:bodyPr wrap="square" lIns="0" tIns="0" rIns="0" bIns="0" rtlCol="0" anchor="ctr"/>
+          <a:bodyPr wrap="square" lIns="0" tIns="0" rIns="0" bIns="0" rtlCol="0" anchor="t"/>
           <a:lstStyle/>
           <a:p>
             <a:pPr indent="0" marL="0">
@@ -3781,7 +3673,7 @@
                 <a:ea typeface="Calibri" pitchFamily="34" charset="-122"/>
                 <a:cs typeface="Calibri" pitchFamily="34" charset="-120"/>
               </a:rPr>
-              <a:t>Architecture</a:t>
+              <a:t>Built with</a:t>
             </a:r>
             <a:endParaRPr lang="en-US" sz="1300" dirty="0"/>
           </a:p>
@@ -3796,16 +3688,16 @@
         <p:spPr>
           <a:xfrm>
             <a:off x="566928" y="841248"/>
-            <a:ext cx="11057839" cy="777240"/>
-          </a:xfrm>
-          <a:prstGeom prst="rect">
-            <a:avLst/>
-          </a:prstGeom>
-          <a:noFill/>
-          <a:ln/>
-        </p:spPr>
-        <p:txBody>
-          <a:bodyPr wrap="square" lIns="0" tIns="0" rIns="0" bIns="0" rtlCol="0" anchor="ctr"/>
+            <a:ext cx="11057839" cy="658368"/>
+          </a:xfrm>
+          <a:prstGeom prst="rect">
+            <a:avLst/>
+          </a:prstGeom>
+          <a:noFill/>
+          <a:ln/>
+        </p:spPr>
+        <p:txBody>
+          <a:bodyPr wrap="square" lIns="0" tIns="0" rIns="0" bIns="0" rtlCol="0" anchor="t"/>
           <a:lstStyle/>
           <a:p>
             <a:pPr indent="0" marL="0">
@@ -3820,7 +3712,7 @@
                 <a:ea typeface="Arial" pitchFamily="34" charset="-122"/>
                 <a:cs typeface="Arial" pitchFamily="34" charset="-120"/>
               </a:rPr>
-              <a:t>A small, deliberate stack</a:t>
+              <a:t>Runs from one folder</a:t>
             </a:r>
             <a:endParaRPr lang="en-US" sz="3400" dirty="0"/>
           </a:p>
@@ -3918,7 +3810,7 @@
                 <a:ea typeface="Calibri" pitchFamily="34" charset="-122"/>
                 <a:cs typeface="Calibri" pitchFamily="34" charset="-120"/>
               </a:rPr>
-              <a:t>App Router, TypeScript, server components for reads.</a:t>
+              <a:t>App Router and TypeScript throughout.</a:t>
             </a:r>
             <a:endParaRPr lang="en-US" sz="1350" dirty="0"/>
           </a:p>
@@ -4016,7 +3908,7 @@
                 <a:ea typeface="Calibri" pitchFamily="34" charset="-122"/>
                 <a:cs typeface="Calibri" pitchFamily="34" charset="-120"/>
               </a:rPr>
-              <a:t>One file, no service to provision. The deliverable is a repository, not a deployment.</a:t>
+              <a:t>The whole system is one file. No service to provision, no deployment needed.</a:t>
             </a:r>
             <a:endParaRPr lang="en-US" sz="1350" dirty="0"/>
           </a:p>
@@ -4030,7 +3922,7 @@
         </p:nvSpPr>
         <p:spPr>
           <a:xfrm>
-            <a:off x="566928" y="3474720"/>
+            <a:off x="566928" y="3429000"/>
             <a:ext cx="146304" cy="146304"/>
           </a:xfrm>
           <a:prstGeom prst="rect">
@@ -4050,7 +3942,7 @@
         </p:nvSpPr>
         <p:spPr>
           <a:xfrm>
-            <a:off x="877824" y="3429000"/>
+            <a:off x="877824" y="3383280"/>
             <a:ext cx="5029200" cy="365760"/>
           </a:xfrm>
           <a:prstGeom prst="rect">
@@ -4089,7 +3981,7 @@
         </p:nvSpPr>
         <p:spPr>
           <a:xfrm>
-            <a:off x="877824" y="3813048"/>
+            <a:off x="877824" y="3767328"/>
             <a:ext cx="5029200" cy="822960"/>
           </a:xfrm>
           <a:prstGeom prst="rect">
@@ -4114,7 +4006,7 @@
                 <a:ea typeface="Calibri" pitchFamily="34" charset="-122"/>
                 <a:cs typeface="Calibri" pitchFamily="34" charset="-120"/>
               </a:rPr>
-              <a:t>OKLCH custom properties. No component library to fight.</a:t>
+              <a:t>Every colour an OKLCH custom property. No component library.</a:t>
             </a:r>
             <a:endParaRPr lang="en-US" sz="1350" dirty="0"/>
           </a:p>
@@ -4128,7 +4020,7 @@
         </p:nvSpPr>
         <p:spPr>
           <a:xfrm>
-            <a:off x="6327648" y="3474720"/>
+            <a:off x="6327648" y="3429000"/>
             <a:ext cx="146304" cy="146304"/>
           </a:xfrm>
           <a:prstGeom prst="rect">
@@ -4148,7 +4040,7 @@
         </p:nvSpPr>
         <p:spPr>
           <a:xfrm>
-            <a:off x="6638544" y="3429000"/>
+            <a:off x="6638544" y="3383280"/>
             <a:ext cx="5029200" cy="365760"/>
           </a:xfrm>
           <a:prstGeom prst="rect">
@@ -4173,7 +4065,7 @@
                 <a:ea typeface="Arial" pitchFamily="34" charset="-122"/>
                 <a:cs typeface="Arial" pitchFamily="34" charset="-120"/>
               </a:rPr>
-              <a:t>No chart library</a:t>
+              <a:t>Charts drawn by hand</a:t>
             </a:r>
             <a:endParaRPr lang="en-US" sz="1600" dirty="0"/>
           </a:p>
@@ -4187,7 +4079,7 @@
         </p:nvSpPr>
         <p:spPr>
           <a:xfrm>
-            <a:off x="6638544" y="3813048"/>
+            <a:off x="6638544" y="3767328"/>
             <a:ext cx="5029200" cy="822960"/>
           </a:xfrm>
           <a:prstGeom prst="rect">
@@ -4212,7 +4104,7 @@
                 <a:ea typeface="Calibri" pitchFamily="34" charset="-122"/>
                 <a:cs typeface="Calibri" pitchFamily="34" charset="-120"/>
               </a:rPr>
-              <a:t>Three charts, each a fixed shape, drawn as SVG in the same palette as the figures.</a:t>
+              <a:t>Three SVG charts and twelve figures, in the same palette and line weights.</a:t>
             </a:r>
             <a:endParaRPr lang="en-US" sz="1350" dirty="0"/>
           </a:p>
@@ -4226,8 +4118,8 @@
         </p:nvSpPr>
         <p:spPr>
           <a:xfrm>
-            <a:off x="630936" y="5093208"/>
-            <a:ext cx="11064240" cy="1143000"/>
+            <a:off x="630936" y="5047488"/>
+            <a:ext cx="11064240" cy="1097280"/>
           </a:xfrm>
           <a:prstGeom prst="rect">
             <a:avLst/>
@@ -4246,8 +4138,8 @@
         </p:nvSpPr>
         <p:spPr>
           <a:xfrm>
-            <a:off x="566928" y="5029200"/>
-            <a:ext cx="11064240" cy="1143000"/>
+            <a:off x="566928" y="4983480"/>
+            <a:ext cx="11064240" cy="1097280"/>
           </a:xfrm>
           <a:prstGeom prst="rect">
             <a:avLst/>
@@ -4271,8 +4163,8 @@
         </p:nvSpPr>
         <p:spPr>
           <a:xfrm>
-            <a:off x="841248" y="5257800"/>
-            <a:ext cx="10515600" cy="731520"/>
+            <a:off x="841248" y="5230368"/>
+            <a:ext cx="10515600" cy="640080"/>
           </a:xfrm>
           <a:prstGeom prst="rect">
             <a:avLst/>
@@ -4296,7 +4188,7 @@
                 <a:ea typeface="Calibri" pitchFamily="34" charset="-122"/>
                 <a:cs typeface="Calibri" pitchFamily="34" charset="-120"/>
               </a:rPr>
-              <a:t>Verified by driving the running system: every screen, the full video event surface, all three question types, the export against the reference format, and the charts against 2,206 real rows.</a:t>
+              <a:t>Clone, install, seed, run. Three commands and a browser, with the lesson films already in the repository.</a:t>
             </a:r>
             <a:endParaRPr lang="en-US" sz="1400" dirty="0"/>
           </a:p>
@@ -4397,7 +4289,7 @@
           <a:ln/>
         </p:spPr>
         <p:txBody>
-          <a:bodyPr wrap="square" lIns="0" tIns="0" rIns="0" bIns="0" rtlCol="0" anchor="ctr"/>
+          <a:bodyPr wrap="square" lIns="0" tIns="0" rIns="0" bIns="0" rtlCol="0" anchor="t"/>
           <a:lstStyle/>
           <a:p>
             <a:pPr indent="0" marL="0">
@@ -4436,7 +4328,7 @@
           <a:ln/>
         </p:spPr>
         <p:txBody>
-          <a:bodyPr wrap="square" lIns="0" tIns="0" rIns="0" bIns="0" rtlCol="0" anchor="ctr"/>
+          <a:bodyPr wrap="square" lIns="0" tIns="0" rIns="0" bIns="0" rtlCol="0" anchor="t"/>
           <a:lstStyle/>
           <a:p>
             <a:pPr indent="0" marL="0">
@@ -4495,7 +4387,7 @@
           <a:ln/>
         </p:spPr>
         <p:txBody>
-          <a:bodyPr wrap="square" lIns="0" tIns="0" rIns="0" bIns="0" rtlCol="0" anchor="ctr"/>
+          <a:bodyPr wrap="square" lIns="0" tIns="0" rIns="0" bIns="0" rtlCol="0" anchor="t"/>
           <a:lstStyle/>
           <a:p>
             <a:pPr indent="0" marL="0">
@@ -4510,7 +4402,7 @@
                 <a:ea typeface="Arial" pitchFamily="34" charset="-122"/>
                 <a:cs typeface="Arial" pitchFamily="34" charset="-120"/>
               </a:rPr>
-              <a:t>2,206</a:t>
+              <a:t>1,632</a:t>
             </a:r>
             <a:endParaRPr lang="en-US" sz="3000" dirty="0"/>
           </a:p>
@@ -4534,7 +4426,7 @@
           <a:ln/>
         </p:spPr>
         <p:txBody>
-          <a:bodyPr wrap="square" lIns="0" tIns="0" rIns="0" bIns="0" rtlCol="0" anchor="ctr"/>
+          <a:bodyPr wrap="square" lIns="0" tIns="0" rIns="0" bIns="0" rtlCol="0" anchor="t"/>
           <a:lstStyle/>
           <a:p>
             <a:pPr indent="0" marL="0">
@@ -4549,7 +4441,7 @@
                 <a:ea typeface="Calibri" pitchFamily="34" charset="-122"/>
                 <a:cs typeface="Calibri" pitchFamily="34" charset="-120"/>
               </a:rPr>
-              <a:t>events</a:t>
+              <a:t>events recorded</a:t>
             </a:r>
             <a:endParaRPr lang="en-US" sz="1300" dirty="0"/>
           </a:p>
@@ -4573,7 +4465,7 @@
           <a:ln/>
         </p:spPr>
         <p:txBody>
-          <a:bodyPr wrap="square" lIns="0" tIns="0" rIns="0" bIns="0" rtlCol="0" anchor="ctr"/>
+          <a:bodyPr wrap="square" lIns="0" tIns="0" rIns="0" bIns="0" rtlCol="0" anchor="t"/>
           <a:lstStyle/>
           <a:p>
             <a:pPr indent="0" marL="0">
@@ -4588,7 +4480,7 @@
                 <a:ea typeface="Arial" pitchFamily="34" charset="-122"/>
                 <a:cs typeface="Arial" pitchFamily="34" charset="-120"/>
               </a:rPr>
-              <a:t>10</a:t>
+              <a:t>22</a:t>
             </a:r>
             <a:endParaRPr lang="en-US" sz="3000" dirty="0"/>
           </a:p>
@@ -4612,7 +4504,7 @@
           <a:ln/>
         </p:spPr>
         <p:txBody>
-          <a:bodyPr wrap="square" lIns="0" tIns="0" rIns="0" bIns="0" rtlCol="0" anchor="ctr"/>
+          <a:bodyPr wrap="square" lIns="0" tIns="0" rIns="0" bIns="0" rtlCol="0" anchor="t"/>
           <a:lstStyle/>
           <a:p>
             <a:pPr indent="0" marL="0">
@@ -4627,7 +4519,7 @@
                 <a:ea typeface="Calibri" pitchFamily="34" charset="-122"/>
                 <a:cs typeface="Calibri" pitchFamily="34" charset="-120"/>
               </a:rPr>
-              <a:t>learners</a:t>
+              <a:t>event types</a:t>
             </a:r>
             <a:endParaRPr lang="en-US" sz="1300" dirty="0"/>
           </a:p>
@@ -4651,7 +4543,7 @@
           <a:ln/>
         </p:spPr>
         <p:txBody>
-          <a:bodyPr wrap="square" lIns="0" tIns="0" rIns="0" bIns="0" rtlCol="0" anchor="ctr"/>
+          <a:bodyPr wrap="square" lIns="0" tIns="0" rIns="0" bIns="0" rtlCol="0" anchor="t"/>
           <a:lstStyle/>
           <a:p>
             <a:pPr indent="0" marL="0">
@@ -4690,7 +4582,7 @@
           <a:ln/>
         </p:spPr>
         <p:txBody>
-          <a:bodyPr wrap="square" lIns="0" tIns="0" rIns="0" bIns="0" rtlCol="0" anchor="ctr"/>
+          <a:bodyPr wrap="square" lIns="0" tIns="0" rIns="0" bIns="0" rtlCol="0" anchor="t"/>
           <a:lstStyle/>
           <a:p>
             <a:pPr indent="0" marL="0">
@@ -4729,7 +4621,7 @@
           <a:ln/>
         </p:spPr>
         <p:txBody>
-          <a:bodyPr wrap="square" lIns="0" tIns="0" rIns="0" bIns="0" rtlCol="0" anchor="ctr"/>
+          <a:bodyPr wrap="square" lIns="0" tIns="0" rIns="0" bIns="0" rtlCol="0" anchor="t"/>
           <a:lstStyle/>
           <a:p>
             <a:pPr indent="0" marL="0">
@@ -4744,7 +4636,7 @@
                 <a:ea typeface="Arial" pitchFamily="34" charset="-122"/>
                 <a:cs typeface="Arial" pitchFamily="34" charset="-120"/>
               </a:rPr>
-              <a:t>474</a:t>
+              <a:t>483</a:t>
             </a:r>
             <a:endParaRPr lang="en-US" sz="3000" dirty="0"/>
           </a:p>
@@ -4768,7 +4660,7 @@
           <a:ln/>
         </p:spPr>
         <p:txBody>
-          <a:bodyPr wrap="square" lIns="0" tIns="0" rIns="0" bIns="0" rtlCol="0" anchor="ctr"/>
+          <a:bodyPr wrap="square" lIns="0" tIns="0" rIns="0" bIns="0" rtlCol="0" anchor="t"/>
           <a:lstStyle/>
           <a:p>
             <a:pPr indent="0" marL="0">
@@ -4807,7 +4699,7 @@
           <a:ln/>
         </p:spPr>
         <p:txBody>
-          <a:bodyPr wrap="square" lIns="0" tIns="0" rIns="0" bIns="0" rtlCol="0" anchor="ctr"/>
+          <a:bodyPr wrap="square" lIns="0" tIns="0" rIns="0" bIns="0" rtlCol="0" anchor="t"/>
           <a:lstStyle/>
           <a:p>
             <a:pPr indent="0" marL="0">
@@ -4923,7 +4815,7 @@
           <a:ln/>
         </p:spPr>
         <p:txBody>
-          <a:bodyPr wrap="square" lIns="0" tIns="0" rIns="0" bIns="0" rtlCol="0" anchor="ctr"/>
+          <a:bodyPr wrap="square" lIns="0" tIns="0" rIns="0" bIns="0" rtlCol="0" anchor="t"/>
           <a:lstStyle/>
           <a:p>
             <a:pPr indent="0" marL="0">
@@ -4938,7 +4830,7 @@
                 <a:ea typeface="Calibri" pitchFamily="34" charset="-122"/>
                 <a:cs typeface="Calibri" pitchFamily="34" charset="-120"/>
               </a:rPr>
-              <a:t>The brief</a:t>
+              <a:t>The product</a:t>
             </a:r>
             <a:endParaRPr lang="en-US" sz="1300" dirty="0"/>
           </a:p>
@@ -4953,16 +4845,16 @@
         <p:spPr>
           <a:xfrm>
             <a:off x="566928" y="841248"/>
-            <a:ext cx="11057839" cy="777240"/>
-          </a:xfrm>
-          <a:prstGeom prst="rect">
-            <a:avLst/>
-          </a:prstGeom>
-          <a:noFill/>
-          <a:ln/>
-        </p:spPr>
-        <p:txBody>
-          <a:bodyPr wrap="square" lIns="0" tIns="0" rIns="0" bIns="0" rtlCol="0" anchor="ctr"/>
+            <a:ext cx="11057839" cy="658368"/>
+          </a:xfrm>
+          <a:prstGeom prst="rect">
+            <a:avLst/>
+          </a:prstGeom>
+          <a:noFill/>
+          <a:ln/>
+        </p:spPr>
+        <p:txBody>
+          <a:bodyPr wrap="square" lIns="0" tIns="0" rIns="0" bIns="0" rtlCol="0" anchor="t"/>
           <a:lstStyle/>
           <a:p>
             <a:pPr indent="0" marL="0">
@@ -4977,7 +4869,7 @@
                 <a:ea typeface="Arial" pitchFamily="34" charset="-122"/>
                 <a:cs typeface="Arial" pitchFamily="34" charset="-120"/>
               </a:rPr>
-              <a:t>What was asked, and what it does</a:t>
+              <a:t>A course, a lesson, and a record of everything</a:t>
             </a:r>
             <a:endParaRPr lang="en-US" sz="3400" dirty="0"/>
           </a:p>
@@ -4985,595 +4877,125 @@
       </p:sp>
       <p:sp>
         <p:nvSpPr>
-          <p:cNvPr id="6" name="Shape 4"/>
-          <p:cNvSpPr/>
-          <p:nvPr/>
-        </p:nvSpPr>
-        <p:spPr>
-          <a:xfrm>
-            <a:off x="585216" y="1874520"/>
-            <a:ext cx="155448" cy="155448"/>
-          </a:xfrm>
-          <a:prstGeom prst="rect">
-            <a:avLst/>
-          </a:prstGeom>
-          <a:solidFill>
-            <a:srgbClr val="E8763C"/>
-          </a:solidFill>
-          <a:ln/>
-        </p:spPr>
-      </p:sp>
-      <p:sp>
-        <p:nvSpPr>
-          <p:cNvPr id="7" name="Text 5"/>
-          <p:cNvSpPr/>
-          <p:nvPr/>
-        </p:nvSpPr>
-        <p:spPr>
-          <a:xfrm>
-            <a:off x="896112" y="1828800"/>
-            <a:ext cx="3108960" cy="548640"/>
-          </a:xfrm>
-          <a:prstGeom prst="rect">
-            <a:avLst/>
-          </a:prstGeom>
-          <a:noFill/>
-          <a:ln/>
-        </p:spPr>
-        <p:txBody>
-          <a:bodyPr wrap="square" lIns="0" tIns="0" rIns="0" bIns="0" rtlCol="0" anchor="t"/>
-          <a:lstStyle/>
-          <a:p>
-            <a:pPr indent="0" marL="0">
-              <a:buNone/>
-            </a:pPr>
-            <a:r>
-              <a:rPr lang="en-US" sz="1450" b="1" dirty="0">
-                <a:solidFill>
-                  <a:srgbClr val="1E2340"/>
+          <p:cNvPr id="6" name="Text 4"/>
+          <p:cNvSpPr/>
+          <p:nvPr/>
+        </p:nvSpPr>
+        <p:spPr>
+          <a:xfrm>
+            <a:off x="566928" y="1828800"/>
+            <a:ext cx="5029200" cy="2560320"/>
+          </a:xfrm>
+          <a:prstGeom prst="rect">
+            <a:avLst/>
+          </a:prstGeom>
+          <a:noFill/>
+          <a:ln/>
+        </p:spPr>
+        <p:txBody>
+          <a:bodyPr wrap="square" lIns="0" tIns="0" rIns="0" bIns="0" rtlCol="0" anchor="t"/>
+          <a:lstStyle/>
+          <a:p>
+            <a:pPr marL="342900" indent="-342900">
+              <a:lnSpc>
+                <a:spcPts val="1980"/>
+              </a:lnSpc>
+              <a:spcAft>
+                <a:spcPts val="900"/>
+              </a:spcAft>
+              <a:buSzPct val="100000"/>
+              <a:buChar char="■"/>
+            </a:pPr>
+            <a:r>
+              <a:rPr lang="en-US" sz="1500" dirty="0">
+                <a:solidFill>
+                  <a:srgbClr val="343B5C"/>
                 </a:solidFill>
                 <a:latin typeface="Calibri" pitchFamily="34" charset="0"/>
                 <a:ea typeface="Calibri" pitchFamily="34" charset="-122"/>
                 <a:cs typeface="Calibri" pitchFamily="34" charset="-120"/>
               </a:rPr>
-              <a:t>Users log in as learners</a:t>
-            </a:r>
-            <a:endParaRPr lang="en-US" sz="1450" dirty="0"/>
-          </a:p>
-        </p:txBody>
-      </p:sp>
-      <p:sp>
-        <p:nvSpPr>
-          <p:cNvPr id="8" name="Text 6"/>
-          <p:cNvSpPr/>
-          <p:nvPr/>
-        </p:nvSpPr>
-        <p:spPr>
-          <a:xfrm>
-            <a:off x="4041648" y="1828800"/>
-            <a:ext cx="3246120" cy="548640"/>
-          </a:xfrm>
-          <a:prstGeom prst="rect">
-            <a:avLst/>
-          </a:prstGeom>
-          <a:noFill/>
-          <a:ln/>
-        </p:spPr>
-        <p:txBody>
-          <a:bodyPr wrap="square" lIns="0" tIns="0" rIns="0" bIns="0" rtlCol="0" anchor="t"/>
-          <a:lstStyle/>
-          <a:p>
-            <a:pPr indent="0" marL="0">
-              <a:buNone/>
-            </a:pPr>
-            <a:r>
-              <a:rPr lang="en-US" sz="1300" dirty="0">
-                <a:solidFill>
-                  <a:srgbClr val="6E7597"/>
+              <a:t>Learners sign in, pick a course, and work through lessons at their own pace.</a:t>
+            </a:r>
+            <a:endParaRPr lang="en-US" sz="1500" dirty="0"/>
+          </a:p>
+          <a:p>
+            <a:pPr marL="342900" indent="-342900">
+              <a:lnSpc>
+                <a:spcPts val="1980"/>
+              </a:lnSpc>
+              <a:spcAft>
+                <a:spcPts val="900"/>
+              </a:spcAft>
+              <a:buSzPct val="100000"/>
+              <a:buChar char="■"/>
+            </a:pPr>
+            <a:r>
+              <a:rPr lang="en-US" sz="1500" dirty="0">
+                <a:solidFill>
+                  <a:srgbClr val="343B5C"/>
                 </a:solidFill>
                 <a:latin typeface="Calibri" pitchFamily="34" charset="0"/>
                 <a:ea typeface="Calibri" pitchFamily="34" charset="-122"/>
                 <a:cs typeface="Calibri" pitchFamily="34" charset="-120"/>
               </a:rPr>
-              <a:t>Email and password, bcrypt, server-side sessions</a:t>
-            </a:r>
-            <a:endParaRPr lang="en-US" sz="1300" dirty="0"/>
-          </a:p>
-        </p:txBody>
-      </p:sp>
-      <p:sp>
-        <p:nvSpPr>
-          <p:cNvPr id="9" name="Shape 7"/>
-          <p:cNvSpPr/>
-          <p:nvPr/>
-        </p:nvSpPr>
-        <p:spPr>
-          <a:xfrm>
-            <a:off x="585216" y="2441448"/>
-            <a:ext cx="155448" cy="155448"/>
-          </a:xfrm>
-          <a:prstGeom prst="rect">
-            <a:avLst/>
-          </a:prstGeom>
-          <a:solidFill>
-            <a:srgbClr val="E8763C"/>
-          </a:solidFill>
-          <a:ln/>
-        </p:spPr>
-      </p:sp>
-      <p:sp>
-        <p:nvSpPr>
-          <p:cNvPr id="10" name="Text 8"/>
-          <p:cNvSpPr/>
-          <p:nvPr/>
-        </p:nvSpPr>
-        <p:spPr>
-          <a:xfrm>
-            <a:off x="896112" y="2395728"/>
-            <a:ext cx="3108960" cy="548640"/>
-          </a:xfrm>
-          <a:prstGeom prst="rect">
-            <a:avLst/>
-          </a:prstGeom>
-          <a:noFill/>
-          <a:ln/>
-        </p:spPr>
-        <p:txBody>
-          <a:bodyPr wrap="square" lIns="0" tIns="0" rIns="0" bIns="0" rtlCol="0" anchor="t"/>
-          <a:lstStyle/>
-          <a:p>
-            <a:pPr indent="0" marL="0">
-              <a:buNone/>
-            </a:pPr>
-            <a:r>
-              <a:rPr lang="en-US" sz="1450" b="1" dirty="0">
-                <a:solidFill>
-                  <a:srgbClr val="1E2340"/>
+              <a:t>Every lesson is a reading with drawn figures, a short film, and a quiz.</a:t>
+            </a:r>
+            <a:endParaRPr lang="en-US" sz="1500" dirty="0"/>
+          </a:p>
+          <a:p>
+            <a:pPr marL="342900" indent="-342900">
+              <a:lnSpc>
+                <a:spcPts val="1980"/>
+              </a:lnSpc>
+              <a:spcAft>
+                <a:spcPts val="900"/>
+              </a:spcAft>
+              <a:buSzPct val="100000"/>
+              <a:buChar char="■"/>
+            </a:pPr>
+            <a:r>
+              <a:rPr lang="en-US" sz="1500" dirty="0">
+                <a:solidFill>
+                  <a:srgbClr val="343B5C"/>
                 </a:solidFill>
                 <a:latin typeface="Calibri" pitchFamily="34" charset="0"/>
                 <a:ea typeface="Calibri" pitchFamily="34" charset="-122"/>
                 <a:cs typeface="Calibri" pitchFamily="34" charset="-120"/>
               </a:rPr>
-              <a:t>Interactive content</a:t>
-            </a:r>
-            <a:endParaRPr lang="en-US" sz="1450" dirty="0"/>
-          </a:p>
-        </p:txBody>
-      </p:sp>
-      <p:sp>
-        <p:nvSpPr>
-          <p:cNvPr id="11" name="Text 9"/>
-          <p:cNvSpPr/>
-          <p:nvPr/>
-        </p:nvSpPr>
-        <p:spPr>
-          <a:xfrm>
-            <a:off x="4041648" y="2395728"/>
-            <a:ext cx="3246120" cy="548640"/>
-          </a:xfrm>
-          <a:prstGeom prst="rect">
-            <a:avLst/>
-          </a:prstGeom>
-          <a:noFill/>
-          <a:ln/>
-        </p:spPr>
-        <p:txBody>
-          <a:bodyPr wrap="square" lIns="0" tIns="0" rIns="0" bIns="0" rtlCol="0" anchor="t"/>
-          <a:lstStyle/>
-          <a:p>
-            <a:pPr indent="0" marL="0">
-              <a:buNone/>
-            </a:pPr>
-            <a:r>
-              <a:rPr lang="en-US" sz="1300" dirty="0">
-                <a:solidFill>
-                  <a:srgbClr val="6E7597"/>
+              <a:t>Progress is tracked per lesson and per course.</a:t>
+            </a:r>
+            <a:endParaRPr lang="en-US" sz="1500" dirty="0"/>
+          </a:p>
+          <a:p>
+            <a:pPr marL="342900" indent="-342900">
+              <a:lnSpc>
+                <a:spcPts val="1980"/>
+              </a:lnSpc>
+              <a:spcAft>
+                <a:spcPts val="900"/>
+              </a:spcAft>
+              <a:buSzPct val="100000"/>
+              <a:buChar char="■"/>
+            </a:pPr>
+            <a:r>
+              <a:rPr lang="en-US" sz="1500" dirty="0">
+                <a:solidFill>
+                  <a:srgbClr val="343B5C"/>
                 </a:solidFill>
                 <a:latin typeface="Calibri" pitchFamily="34" charset="0"/>
                 <a:ea typeface="Calibri" pitchFamily="34" charset="-122"/>
                 <a:cs typeface="Calibri" pitchFamily="34" charset="-120"/>
               </a:rPr>
-              <a:t>Text with drawn figures, video, and quizzes in every lesson</a:t>
-            </a:r>
-            <a:endParaRPr lang="en-US" sz="1300" dirty="0"/>
-          </a:p>
-        </p:txBody>
-      </p:sp>
-      <p:sp>
-        <p:nvSpPr>
-          <p:cNvPr id="12" name="Shape 10"/>
-          <p:cNvSpPr/>
-          <p:nvPr/>
-        </p:nvSpPr>
-        <p:spPr>
-          <a:xfrm>
-            <a:off x="585216" y="3008376"/>
-            <a:ext cx="155448" cy="155448"/>
-          </a:xfrm>
-          <a:prstGeom prst="rect">
-            <a:avLst/>
-          </a:prstGeom>
-          <a:solidFill>
-            <a:srgbClr val="E8763C"/>
-          </a:solidFill>
-          <a:ln/>
-        </p:spPr>
-      </p:sp>
-      <p:sp>
-        <p:nvSpPr>
-          <p:cNvPr id="13" name="Text 11"/>
-          <p:cNvSpPr/>
-          <p:nvPr/>
-        </p:nvSpPr>
-        <p:spPr>
-          <a:xfrm>
-            <a:off x="896112" y="2962656"/>
-            <a:ext cx="3108960" cy="548640"/>
-          </a:xfrm>
-          <a:prstGeom prst="rect">
-            <a:avLst/>
-          </a:prstGeom>
-          <a:noFill/>
-          <a:ln/>
-        </p:spPr>
-        <p:txBody>
-          <a:bodyPr wrap="square" lIns="0" tIns="0" rIns="0" bIns="0" rtlCol="0" anchor="t"/>
-          <a:lstStyle/>
-          <a:p>
-            <a:pPr indent="0" marL="0">
-              <a:buNone/>
-            </a:pPr>
-            <a:r>
-              <a:rPr lang="en-US" sz="1450" b="1" dirty="0">
-                <a:solidFill>
-                  <a:srgbClr val="1E2340"/>
-                </a:solidFill>
-                <a:latin typeface="Calibri" pitchFamily="34" charset="0"/>
-                <a:ea typeface="Calibri" pitchFamily="34" charset="-122"/>
-                <a:cs typeface="Calibri" pitchFamily="34" charset="-120"/>
-              </a:rPr>
-              <a:t>Track all user activity</a:t>
-            </a:r>
-            <a:endParaRPr lang="en-US" sz="1450" dirty="0"/>
-          </a:p>
-        </p:txBody>
-      </p:sp>
-      <p:sp>
-        <p:nvSpPr>
-          <p:cNvPr id="14" name="Text 12"/>
-          <p:cNvSpPr/>
-          <p:nvPr/>
-        </p:nvSpPr>
-        <p:spPr>
-          <a:xfrm>
-            <a:off x="4041648" y="2962656"/>
-            <a:ext cx="3246120" cy="548640"/>
-          </a:xfrm>
-          <a:prstGeom prst="rect">
-            <a:avLst/>
-          </a:prstGeom>
-          <a:noFill/>
-          <a:ln/>
-        </p:spPr>
-        <p:txBody>
-          <a:bodyPr wrap="square" lIns="0" tIns="0" rIns="0" bIns="0" rtlCol="0" anchor="t"/>
-          <a:lstStyle/>
-          <a:p>
-            <a:pPr indent="0" marL="0">
-              <a:buNone/>
-            </a:pPr>
-            <a:r>
-              <a:rPr lang="en-US" sz="1300" dirty="0">
-                <a:solidFill>
-                  <a:srgbClr val="6E7597"/>
-                </a:solidFill>
-                <a:latin typeface="Calibri" pitchFamily="34" charset="0"/>
-                <a:ea typeface="Calibri" pitchFamily="34" charset="-122"/>
-                <a:cs typeface="Calibri" pitchFamily="34" charset="-120"/>
-              </a:rPr>
-              <a:t>Clicks, page views, video actions, quiz attempts</a:t>
-            </a:r>
-            <a:endParaRPr lang="en-US" sz="1300" dirty="0"/>
-          </a:p>
-        </p:txBody>
-      </p:sp>
-      <p:sp>
-        <p:nvSpPr>
-          <p:cNvPr id="15" name="Shape 13"/>
-          <p:cNvSpPr/>
-          <p:nvPr/>
-        </p:nvSpPr>
-        <p:spPr>
-          <a:xfrm>
-            <a:off x="585216" y="3575304"/>
-            <a:ext cx="155448" cy="155448"/>
-          </a:xfrm>
-          <a:prstGeom prst="rect">
-            <a:avLst/>
-          </a:prstGeom>
-          <a:solidFill>
-            <a:srgbClr val="E8763C"/>
-          </a:solidFill>
-          <a:ln/>
-        </p:spPr>
-      </p:sp>
-      <p:sp>
-        <p:nvSpPr>
-          <p:cNvPr id="16" name="Text 14"/>
-          <p:cNvSpPr/>
-          <p:nvPr/>
-        </p:nvSpPr>
-        <p:spPr>
-          <a:xfrm>
-            <a:off x="896112" y="3529584"/>
-            <a:ext cx="3108960" cy="548640"/>
-          </a:xfrm>
-          <a:prstGeom prst="rect">
-            <a:avLst/>
-          </a:prstGeom>
-          <a:noFill/>
-          <a:ln/>
-        </p:spPr>
-        <p:txBody>
-          <a:bodyPr wrap="square" lIns="0" tIns="0" rIns="0" bIns="0" rtlCol="0" anchor="t"/>
-          <a:lstStyle/>
-          <a:p>
-            <a:pPr indent="0" marL="0">
-              <a:buNone/>
-            </a:pPr>
-            <a:r>
-              <a:rPr lang="en-US" sz="1450" b="1" dirty="0">
-                <a:solidFill>
-                  <a:srgbClr val="1E2340"/>
-                </a:solidFill>
-                <a:latin typeface="Calibri" pitchFamily="34" charset="0"/>
-                <a:ea typeface="Calibri" pitchFamily="34" charset="-122"/>
-                <a:cs typeface="Calibri" pitchFamily="34" charset="-120"/>
-              </a:rPr>
-              <a:t>Store the clickstream</a:t>
-            </a:r>
-            <a:endParaRPr lang="en-US" sz="1450" dirty="0"/>
-          </a:p>
-        </p:txBody>
-      </p:sp>
-      <p:sp>
-        <p:nvSpPr>
-          <p:cNvPr id="17" name="Text 15"/>
-          <p:cNvSpPr/>
-          <p:nvPr/>
-        </p:nvSpPr>
-        <p:spPr>
-          <a:xfrm>
-            <a:off x="4041648" y="3529584"/>
-            <a:ext cx="3246120" cy="548640"/>
-          </a:xfrm>
-          <a:prstGeom prst="rect">
-            <a:avLst/>
-          </a:prstGeom>
-          <a:noFill/>
-          <a:ln/>
-        </p:spPr>
-        <p:txBody>
-          <a:bodyPr wrap="square" lIns="0" tIns="0" rIns="0" bIns="0" rtlCol="0" anchor="t"/>
-          <a:lstStyle/>
-          <a:p>
-            <a:pPr indent="0" marL="0">
-              <a:buNone/>
-            </a:pPr>
-            <a:r>
-              <a:rPr lang="en-US" sz="1300" dirty="0">
-                <a:solidFill>
-                  <a:srgbClr val="6E7597"/>
-                </a:solidFill>
-                <a:latin typeface="Calibri" pitchFamily="34" charset="0"/>
-                <a:ea typeface="Calibri" pitchFamily="34" charset="-122"/>
-                <a:cs typeface="Calibri" pitchFamily="34" charset="-120"/>
-              </a:rPr>
-              <a:t>One row per action, queryable and exportable</a:t>
-            </a:r>
-            <a:endParaRPr lang="en-US" sz="1300" dirty="0"/>
-          </a:p>
-        </p:txBody>
-      </p:sp>
-      <p:sp>
-        <p:nvSpPr>
-          <p:cNvPr id="18" name="Shape 16"/>
-          <p:cNvSpPr/>
-          <p:nvPr/>
-        </p:nvSpPr>
-        <p:spPr>
-          <a:xfrm>
-            <a:off x="585216" y="4142232"/>
-            <a:ext cx="155448" cy="155448"/>
-          </a:xfrm>
-          <a:prstGeom prst="rect">
-            <a:avLst/>
-          </a:prstGeom>
-          <a:solidFill>
-            <a:srgbClr val="E8763C"/>
-          </a:solidFill>
-          <a:ln/>
-        </p:spPr>
-      </p:sp>
-      <p:sp>
-        <p:nvSpPr>
-          <p:cNvPr id="19" name="Text 17"/>
-          <p:cNvSpPr/>
-          <p:nvPr/>
-        </p:nvSpPr>
-        <p:spPr>
-          <a:xfrm>
-            <a:off x="896112" y="4096512"/>
-            <a:ext cx="3108960" cy="548640"/>
-          </a:xfrm>
-          <a:prstGeom prst="rect">
-            <a:avLst/>
-          </a:prstGeom>
-          <a:noFill/>
-          <a:ln/>
-        </p:spPr>
-        <p:txBody>
-          <a:bodyPr wrap="square" lIns="0" tIns="0" rIns="0" bIns="0" rtlCol="0" anchor="t"/>
-          <a:lstStyle/>
-          <a:p>
-            <a:pPr indent="0" marL="0">
-              <a:buNone/>
-            </a:pPr>
-            <a:r>
-              <a:rPr lang="en-US" sz="1450" b="1" dirty="0">
-                <a:solidFill>
-                  <a:srgbClr val="1E2340"/>
-                </a:solidFill>
-                <a:latin typeface="Calibri" pitchFamily="34" charset="0"/>
-                <a:ea typeface="Calibri" pitchFamily="34" charset="-122"/>
-                <a:cs typeface="Calibri" pitchFamily="34" charset="-120"/>
-              </a:rPr>
-              <a:t>Standalone web app</a:t>
-            </a:r>
-            <a:endParaRPr lang="en-US" sz="1450" dirty="0"/>
-          </a:p>
-        </p:txBody>
-      </p:sp>
-      <p:sp>
-        <p:nvSpPr>
-          <p:cNvPr id="20" name="Text 18"/>
-          <p:cNvSpPr/>
-          <p:nvPr/>
-        </p:nvSpPr>
-        <p:spPr>
-          <a:xfrm>
-            <a:off x="4041648" y="4096512"/>
-            <a:ext cx="3246120" cy="548640"/>
-          </a:xfrm>
-          <a:prstGeom prst="rect">
-            <a:avLst/>
-          </a:prstGeom>
-          <a:noFill/>
-          <a:ln/>
-        </p:spPr>
-        <p:txBody>
-          <a:bodyPr wrap="square" lIns="0" tIns="0" rIns="0" bIns="0" rtlCol="0" anchor="t"/>
-          <a:lstStyle/>
-          <a:p>
-            <a:pPr indent="0" marL="0">
-              <a:buNone/>
-            </a:pPr>
-            <a:r>
-              <a:rPr lang="en-US" sz="1300" dirty="0">
-                <a:solidFill>
-                  <a:srgbClr val="6E7597"/>
-                </a:solidFill>
-                <a:latin typeface="Calibri" pitchFamily="34" charset="0"/>
-                <a:ea typeface="Calibri" pitchFamily="34" charset="-122"/>
-                <a:cs typeface="Calibri" pitchFamily="34" charset="-120"/>
-              </a:rPr>
-              <a:t>Next.js and SQLite, runs from one folder</a:t>
-            </a:r>
-            <a:endParaRPr lang="en-US" sz="1300" dirty="0"/>
-          </a:p>
-        </p:txBody>
-      </p:sp>
-      <p:sp>
-        <p:nvSpPr>
-          <p:cNvPr id="21" name="Shape 19"/>
-          <p:cNvSpPr/>
-          <p:nvPr/>
-        </p:nvSpPr>
-        <p:spPr>
-          <a:xfrm>
-            <a:off x="585216" y="4709160"/>
-            <a:ext cx="155448" cy="155448"/>
-          </a:xfrm>
-          <a:prstGeom prst="rect">
-            <a:avLst/>
-          </a:prstGeom>
-          <a:solidFill>
-            <a:srgbClr val="E8763C"/>
-          </a:solidFill>
-          <a:ln/>
-        </p:spPr>
-      </p:sp>
-      <p:sp>
-        <p:nvSpPr>
-          <p:cNvPr id="22" name="Text 20"/>
-          <p:cNvSpPr/>
-          <p:nvPr/>
-        </p:nvSpPr>
-        <p:spPr>
-          <a:xfrm>
-            <a:off x="896112" y="4663440"/>
-            <a:ext cx="3108960" cy="548640"/>
-          </a:xfrm>
-          <a:prstGeom prst="rect">
-            <a:avLst/>
-          </a:prstGeom>
-          <a:noFill/>
-          <a:ln/>
-        </p:spPr>
-        <p:txBody>
-          <a:bodyPr wrap="square" lIns="0" tIns="0" rIns="0" bIns="0" rtlCol="0" anchor="t"/>
-          <a:lstStyle/>
-          <a:p>
-            <a:pPr indent="0" marL="0">
-              <a:buNone/>
-            </a:pPr>
-            <a:r>
-              <a:rPr lang="en-US" sz="1450" b="1" dirty="0">
-                <a:solidFill>
-                  <a:srgbClr val="1E2340"/>
-                </a:solidFill>
-                <a:latin typeface="Calibri" pitchFamily="34" charset="0"/>
-                <a:ea typeface="Calibri" pitchFamily="34" charset="-122"/>
-                <a:cs typeface="Calibri" pitchFamily="34" charset="-120"/>
-              </a:rPr>
-              <a:t>Version control</a:t>
-            </a:r>
-            <a:endParaRPr lang="en-US" sz="1450" dirty="0"/>
-          </a:p>
-        </p:txBody>
-      </p:sp>
-      <p:sp>
-        <p:nvSpPr>
-          <p:cNvPr id="23" name="Text 21"/>
-          <p:cNvSpPr/>
-          <p:nvPr/>
-        </p:nvSpPr>
-        <p:spPr>
-          <a:xfrm>
-            <a:off x="4041648" y="4663440"/>
-            <a:ext cx="3246120" cy="548640"/>
-          </a:xfrm>
-          <a:prstGeom prst="rect">
-            <a:avLst/>
-          </a:prstGeom>
-          <a:noFill/>
-          <a:ln/>
-        </p:spPr>
-        <p:txBody>
-          <a:bodyPr wrap="square" lIns="0" tIns="0" rIns="0" bIns="0" rtlCol="0" anchor="t"/>
-          <a:lstStyle/>
-          <a:p>
-            <a:pPr indent="0" marL="0">
-              <a:buNone/>
-            </a:pPr>
-            <a:r>
-              <a:rPr lang="en-US" sz="1300" dirty="0">
-                <a:solidFill>
-                  <a:srgbClr val="6E7597"/>
-                </a:solidFill>
-                <a:latin typeface="Calibri" pitchFamily="34" charset="0"/>
-                <a:ea typeface="Calibri" pitchFamily="34" charset="-122"/>
-                <a:cs typeface="Calibri" pitchFamily="34" charset="-120"/>
-              </a:rPr>
-              <a:t>Git throughout, committed as it was built</a:t>
-            </a:r>
-            <a:endParaRPr lang="en-US" sz="1300" dirty="0"/>
+              <a:t>Educators get the whole activity record: a live stream, a standard format export, and three analytics views.</a:t>
+            </a:r>
+            <a:endParaRPr lang="en-US" sz="1500" dirty="0"/>
           </a:p>
         </p:txBody>
       </p:sp>
       <p:pic>
         <p:nvPicPr>
-          <p:cNvPr id="24" name="Image 0" descr="/Users/ndstab/Desktop/et/docs/screens/catalogue.png">    </p:cNvPr>
+          <p:cNvPr id="7" name="Image 0" descr="/Users/ndstab/Desktop/et/docs/screens/catalogue.png">    </p:cNvPr>
           <p:cNvPicPr>
             <a:picLocks noChangeAspect="1"/>
           </p:cNvPicPr>
@@ -5587,8 +5009,8 @@
         </p:blipFill>
         <p:spPr>
           <a:xfrm>
-            <a:off x="7589520" y="1828800"/>
-            <a:ext cx="4004109" cy="2377440"/>
+            <a:off x="5989320" y="1783080"/>
+            <a:ext cx="5159141" cy="3063240"/>
           </a:xfrm>
           <a:prstGeom prst="rect">
             <a:avLst/>
@@ -5604,53 +5026,14 @@
       </p:pic>
       <p:sp>
         <p:nvSpPr>
-          <p:cNvPr id="25" name="Text 22"/>
-          <p:cNvSpPr/>
-          <p:nvPr/>
-        </p:nvSpPr>
-        <p:spPr>
-          <a:xfrm>
-            <a:off x="7589520" y="4315968"/>
-            <a:ext cx="4023360" cy="274320"/>
-          </a:xfrm>
-          <a:prstGeom prst="rect">
-            <a:avLst/>
-          </a:prstGeom>
-          <a:noFill/>
-          <a:ln/>
-        </p:spPr>
-        <p:txBody>
-          <a:bodyPr wrap="square" lIns="0" tIns="0" rIns="0" bIns="0" rtlCol="0" anchor="t"/>
-          <a:lstStyle/>
-          <a:p>
-            <a:pPr indent="0" marL="0">
-              <a:buNone/>
-            </a:pPr>
-            <a:r>
-              <a:rPr lang="en-US" sz="1200" i="1" dirty="0">
-                <a:solidFill>
-                  <a:srgbClr val="6E7597"/>
-                </a:solidFill>
-                <a:latin typeface="Calibri" pitchFamily="34" charset="0"/>
-                <a:ea typeface="Calibri" pitchFamily="34" charset="-122"/>
-                <a:cs typeface="Calibri" pitchFamily="34" charset="-120"/>
-              </a:rPr>
-              <a:t>Three courses, each with its own progress.</a:t>
-            </a:r>
-            <a:endParaRPr lang="en-US" sz="1200" dirty="0"/>
-          </a:p>
-        </p:txBody>
-      </p:sp>
-      <p:sp>
-        <p:nvSpPr>
-          <p:cNvPr id="26" name="Shape 23"/>
-          <p:cNvSpPr/>
-          <p:nvPr/>
-        </p:nvSpPr>
-        <p:spPr>
-          <a:xfrm>
-            <a:off x="630936" y="5294376"/>
-            <a:ext cx="2468880" cy="1170432"/>
+          <p:cNvPr id="8" name="Shape 5"/>
+          <p:cNvSpPr/>
+          <p:nvPr/>
+        </p:nvSpPr>
+        <p:spPr>
+          <a:xfrm>
+            <a:off x="630936" y="5184648"/>
+            <a:ext cx="2468880" cy="1133856"/>
           </a:xfrm>
           <a:prstGeom prst="rect">
             <a:avLst/>
@@ -5663,14 +5046,14 @@
       </p:sp>
       <p:sp>
         <p:nvSpPr>
-          <p:cNvPr id="27" name="Shape 24"/>
-          <p:cNvSpPr/>
-          <p:nvPr/>
-        </p:nvSpPr>
-        <p:spPr>
-          <a:xfrm>
-            <a:off x="566928" y="5230368"/>
-            <a:ext cx="2468880" cy="1170432"/>
+          <p:cNvPr id="9" name="Shape 6"/>
+          <p:cNvSpPr/>
+          <p:nvPr/>
+        </p:nvSpPr>
+        <p:spPr>
+          <a:xfrm>
+            <a:off x="566928" y="5120640"/>
+            <a:ext cx="2468880" cy="1133856"/>
           </a:xfrm>
           <a:prstGeom prst="rect">
             <a:avLst/>
@@ -5688,30 +5071,30 @@
       </p:sp>
       <p:sp>
         <p:nvSpPr>
-          <p:cNvPr id="28" name="Text 25"/>
-          <p:cNvSpPr/>
-          <p:nvPr/>
-        </p:nvSpPr>
-        <p:spPr>
-          <a:xfrm>
-            <a:off x="768096" y="5358384"/>
-            <a:ext cx="2066544" cy="566928"/>
-          </a:xfrm>
-          <a:prstGeom prst="rect">
-            <a:avLst/>
-          </a:prstGeom>
-          <a:noFill/>
-          <a:ln/>
-        </p:spPr>
-        <p:txBody>
-          <a:bodyPr wrap="square" lIns="0" tIns="0" rIns="0" bIns="0" rtlCol="0" anchor="ctr"/>
+          <p:cNvPr id="10" name="Text 7"/>
+          <p:cNvSpPr/>
+          <p:nvPr/>
+        </p:nvSpPr>
+        <p:spPr>
+          <a:xfrm>
+            <a:off x="768096" y="5239512"/>
+            <a:ext cx="2066544" cy="548640"/>
+          </a:xfrm>
+          <a:prstGeom prst="rect">
+            <a:avLst/>
+          </a:prstGeom>
+          <a:noFill/>
+          <a:ln/>
+        </p:spPr>
+        <p:txBody>
+          <a:bodyPr wrap="square" lIns="0" tIns="0" rIns="0" bIns="0" rtlCol="0" anchor="t"/>
           <a:lstStyle/>
           <a:p>
             <a:pPr indent="0" marL="0">
               <a:buNone/>
             </a:pPr>
             <a:r>
-              <a:rPr lang="en-US" sz="3000" b="1" dirty="0">
+              <a:rPr lang="en-US" sz="2800" b="1" dirty="0">
                 <a:solidFill>
                   <a:srgbClr val="1E2340"/>
                 </a:solidFill>
@@ -5719,21 +5102,21 @@
                 <a:ea typeface="Arial" pitchFamily="34" charset="-122"/>
                 <a:cs typeface="Arial" pitchFamily="34" charset="-120"/>
               </a:rPr>
-              <a:t>2,206</a:t>
-            </a:r>
-            <a:endParaRPr lang="en-US" sz="3000" dirty="0"/>
-          </a:p>
-        </p:txBody>
-      </p:sp>
-      <p:sp>
-        <p:nvSpPr>
-          <p:cNvPr id="29" name="Text 26"/>
-          <p:cNvSpPr/>
-          <p:nvPr/>
-        </p:nvSpPr>
-        <p:spPr>
-          <a:xfrm>
-            <a:off x="768096" y="5943600"/>
+              <a:t>3</a:t>
+            </a:r>
+            <a:endParaRPr lang="en-US" sz="2800" dirty="0"/>
+          </a:p>
+        </p:txBody>
+      </p:sp>
+      <p:sp>
+        <p:nvSpPr>
+          <p:cNvPr id="11" name="Text 8"/>
+          <p:cNvSpPr/>
+          <p:nvPr/>
+        </p:nvSpPr>
+        <p:spPr>
+          <a:xfrm>
+            <a:off x="768096" y="5815584"/>
             <a:ext cx="2066544" cy="347472"/>
           </a:xfrm>
           <a:prstGeom prst="rect">
@@ -5743,7 +5126,7 @@
           <a:ln/>
         </p:spPr>
         <p:txBody>
-          <a:bodyPr wrap="square" lIns="0" tIns="0" rIns="0" bIns="0" rtlCol="0" anchor="ctr"/>
+          <a:bodyPr wrap="square" lIns="0" tIns="0" rIns="0" bIns="0" rtlCol="0" anchor="t"/>
           <a:lstStyle/>
           <a:p>
             <a:pPr indent="0" marL="0">
@@ -5758,7 +5141,7 @@
                 <a:ea typeface="Calibri" pitchFamily="34" charset="-122"/>
                 <a:cs typeface="Calibri" pitchFamily="34" charset="-120"/>
               </a:rPr>
-              <a:t>events recorded</a:t>
+              <a:t>courses</a:t>
             </a:r>
             <a:endParaRPr lang="en-US" sz="1250" dirty="0"/>
           </a:p>
@@ -5766,14 +5149,14 @@
       </p:sp>
       <p:sp>
         <p:nvSpPr>
-          <p:cNvPr id="30" name="Shape 27"/>
-          <p:cNvSpPr/>
-          <p:nvPr/>
-        </p:nvSpPr>
-        <p:spPr>
-          <a:xfrm>
-            <a:off x="3419856" y="5294376"/>
-            <a:ext cx="2468880" cy="1170432"/>
+          <p:cNvPr id="12" name="Shape 9"/>
+          <p:cNvSpPr/>
+          <p:nvPr/>
+        </p:nvSpPr>
+        <p:spPr>
+          <a:xfrm>
+            <a:off x="3419856" y="5184648"/>
+            <a:ext cx="2468880" cy="1133856"/>
           </a:xfrm>
           <a:prstGeom prst="rect">
             <a:avLst/>
@@ -5786,14 +5169,14 @@
       </p:sp>
       <p:sp>
         <p:nvSpPr>
-          <p:cNvPr id="31" name="Shape 28"/>
-          <p:cNvSpPr/>
-          <p:nvPr/>
-        </p:nvSpPr>
-        <p:spPr>
-          <a:xfrm>
-            <a:off x="3355848" y="5230368"/>
-            <a:ext cx="2468880" cy="1170432"/>
+          <p:cNvPr id="13" name="Shape 10"/>
+          <p:cNvSpPr/>
+          <p:nvPr/>
+        </p:nvSpPr>
+        <p:spPr>
+          <a:xfrm>
+            <a:off x="3355848" y="5120640"/>
+            <a:ext cx="2468880" cy="1133856"/>
           </a:xfrm>
           <a:prstGeom prst="rect">
             <a:avLst/>
@@ -5811,30 +5194,30 @@
       </p:sp>
       <p:sp>
         <p:nvSpPr>
-          <p:cNvPr id="32" name="Text 29"/>
-          <p:cNvSpPr/>
-          <p:nvPr/>
-        </p:nvSpPr>
-        <p:spPr>
-          <a:xfrm>
-            <a:off x="3557016" y="5358384"/>
-            <a:ext cx="2066544" cy="566928"/>
-          </a:xfrm>
-          <a:prstGeom prst="rect">
-            <a:avLst/>
-          </a:prstGeom>
-          <a:noFill/>
-          <a:ln/>
-        </p:spPr>
-        <p:txBody>
-          <a:bodyPr wrap="square" lIns="0" tIns="0" rIns="0" bIns="0" rtlCol="0" anchor="ctr"/>
+          <p:cNvPr id="14" name="Text 11"/>
+          <p:cNvSpPr/>
+          <p:nvPr/>
+        </p:nvSpPr>
+        <p:spPr>
+          <a:xfrm>
+            <a:off x="3557016" y="5239512"/>
+            <a:ext cx="2066544" cy="548640"/>
+          </a:xfrm>
+          <a:prstGeom prst="rect">
+            <a:avLst/>
+          </a:prstGeom>
+          <a:noFill/>
+          <a:ln/>
+        </p:spPr>
+        <p:txBody>
+          <a:bodyPr wrap="square" lIns="0" tIns="0" rIns="0" bIns="0" rtlCol="0" anchor="t"/>
           <a:lstStyle/>
           <a:p>
             <a:pPr indent="0" marL="0">
               <a:buNone/>
             </a:pPr>
             <a:r>
-              <a:rPr lang="en-US" sz="3000" b="1" dirty="0">
+              <a:rPr lang="en-US" sz="2800" b="1" dirty="0">
                 <a:solidFill>
                   <a:srgbClr val="1E2340"/>
                 </a:solidFill>
@@ -5842,21 +5225,21 @@
                 <a:ea typeface="Arial" pitchFamily="34" charset="-122"/>
                 <a:cs typeface="Arial" pitchFamily="34" charset="-120"/>
               </a:rPr>
-              <a:t>31</a:t>
-            </a:r>
-            <a:endParaRPr lang="en-US" sz="3000" dirty="0"/>
-          </a:p>
-        </p:txBody>
-      </p:sp>
-      <p:sp>
-        <p:nvSpPr>
-          <p:cNvPr id="33" name="Text 30"/>
-          <p:cNvSpPr/>
-          <p:nvPr/>
-        </p:nvSpPr>
-        <p:spPr>
-          <a:xfrm>
-            <a:off x="3557016" y="5943600"/>
+              <a:t>13</a:t>
+            </a:r>
+            <a:endParaRPr lang="en-US" sz="2800" dirty="0"/>
+          </a:p>
+        </p:txBody>
+      </p:sp>
+      <p:sp>
+        <p:nvSpPr>
+          <p:cNvPr id="15" name="Text 12"/>
+          <p:cNvSpPr/>
+          <p:nvPr/>
+        </p:nvSpPr>
+        <p:spPr>
+          <a:xfrm>
+            <a:off x="3557016" y="5815584"/>
             <a:ext cx="2066544" cy="347472"/>
           </a:xfrm>
           <a:prstGeom prst="rect">
@@ -5866,7 +5249,7 @@
           <a:ln/>
         </p:spPr>
         <p:txBody>
-          <a:bodyPr wrap="square" lIns="0" tIns="0" rIns="0" bIns="0" rtlCol="0" anchor="ctr"/>
+          <a:bodyPr wrap="square" lIns="0" tIns="0" rIns="0" bIns="0" rtlCol="0" anchor="t"/>
           <a:lstStyle/>
           <a:p>
             <a:pPr indent="0" marL="0">
@@ -5881,7 +5264,7 @@
                 <a:ea typeface="Calibri" pitchFamily="34" charset="-122"/>
                 <a:cs typeface="Calibri" pitchFamily="34" charset="-120"/>
               </a:rPr>
-              <a:t>event types</a:t>
+              <a:t>lessons</a:t>
             </a:r>
             <a:endParaRPr lang="en-US" sz="1250" dirty="0"/>
           </a:p>
@@ -5889,14 +5272,14 @@
       </p:sp>
       <p:sp>
         <p:nvSpPr>
-          <p:cNvPr id="34" name="Shape 31"/>
-          <p:cNvSpPr/>
-          <p:nvPr/>
-        </p:nvSpPr>
-        <p:spPr>
-          <a:xfrm>
-            <a:off x="6208776" y="5294376"/>
-            <a:ext cx="2468880" cy="1170432"/>
+          <p:cNvPr id="16" name="Shape 13"/>
+          <p:cNvSpPr/>
+          <p:nvPr/>
+        </p:nvSpPr>
+        <p:spPr>
+          <a:xfrm>
+            <a:off x="6208776" y="5184648"/>
+            <a:ext cx="2468880" cy="1133856"/>
           </a:xfrm>
           <a:prstGeom prst="rect">
             <a:avLst/>
@@ -5909,14 +5292,14 @@
       </p:sp>
       <p:sp>
         <p:nvSpPr>
-          <p:cNvPr id="35" name="Shape 32"/>
-          <p:cNvSpPr/>
-          <p:nvPr/>
-        </p:nvSpPr>
-        <p:spPr>
-          <a:xfrm>
-            <a:off x="6144768" y="5230368"/>
-            <a:ext cx="2468880" cy="1170432"/>
+          <p:cNvPr id="17" name="Shape 14"/>
+          <p:cNvSpPr/>
+          <p:nvPr/>
+        </p:nvSpPr>
+        <p:spPr>
+          <a:xfrm>
+            <a:off x="6144768" y="5120640"/>
+            <a:ext cx="2468880" cy="1133856"/>
           </a:xfrm>
           <a:prstGeom prst="rect">
             <a:avLst/>
@@ -5934,30 +5317,30 @@
       </p:sp>
       <p:sp>
         <p:nvSpPr>
-          <p:cNvPr id="36" name="Text 33"/>
-          <p:cNvSpPr/>
-          <p:nvPr/>
-        </p:nvSpPr>
-        <p:spPr>
-          <a:xfrm>
-            <a:off x="6345936" y="5358384"/>
-            <a:ext cx="2066544" cy="566928"/>
-          </a:xfrm>
-          <a:prstGeom prst="rect">
-            <a:avLst/>
-          </a:prstGeom>
-          <a:noFill/>
-          <a:ln/>
-        </p:spPr>
-        <p:txBody>
-          <a:bodyPr wrap="square" lIns="0" tIns="0" rIns="0" bIns="0" rtlCol="0" anchor="ctr"/>
+          <p:cNvPr id="18" name="Text 15"/>
+          <p:cNvSpPr/>
+          <p:nvPr/>
+        </p:nvSpPr>
+        <p:spPr>
+          <a:xfrm>
+            <a:off x="6345936" y="5239512"/>
+            <a:ext cx="2066544" cy="548640"/>
+          </a:xfrm>
+          <a:prstGeom prst="rect">
+            <a:avLst/>
+          </a:prstGeom>
+          <a:noFill/>
+          <a:ln/>
+        </p:spPr>
+        <p:txBody>
+          <a:bodyPr wrap="square" lIns="0" tIns="0" rIns="0" bIns="0" rtlCol="0" anchor="t"/>
           <a:lstStyle/>
           <a:p>
             <a:pPr indent="0" marL="0">
               <a:buNone/>
             </a:pPr>
             <a:r>
-              <a:rPr lang="en-US" sz="3000" b="1" dirty="0">
+              <a:rPr lang="en-US" sz="2800" b="1" dirty="0">
                 <a:solidFill>
                   <a:srgbClr val="1E2340"/>
                 </a:solidFill>
@@ -5965,21 +5348,21 @@
                 <a:ea typeface="Arial" pitchFamily="34" charset="-122"/>
                 <a:cs typeface="Arial" pitchFamily="34" charset="-120"/>
               </a:rPr>
-              <a:t>10</a:t>
-            </a:r>
-            <a:endParaRPr lang="en-US" sz="3000" dirty="0"/>
-          </a:p>
-        </p:txBody>
-      </p:sp>
-      <p:sp>
-        <p:nvSpPr>
-          <p:cNvPr id="37" name="Text 34"/>
-          <p:cNvSpPr/>
-          <p:nvPr/>
-        </p:nvSpPr>
-        <p:spPr>
-          <a:xfrm>
-            <a:off x="6345936" y="5943600"/>
+              <a:t>70</a:t>
+            </a:r>
+            <a:endParaRPr lang="en-US" sz="2800" dirty="0"/>
+          </a:p>
+        </p:txBody>
+      </p:sp>
+      <p:sp>
+        <p:nvSpPr>
+          <p:cNvPr id="19" name="Text 16"/>
+          <p:cNvSpPr/>
+          <p:nvPr/>
+        </p:nvSpPr>
+        <p:spPr>
+          <a:xfrm>
+            <a:off x="6345936" y="5815584"/>
             <a:ext cx="2066544" cy="347472"/>
           </a:xfrm>
           <a:prstGeom prst="rect">
@@ -5989,7 +5372,7 @@
           <a:ln/>
         </p:spPr>
         <p:txBody>
-          <a:bodyPr wrap="square" lIns="0" tIns="0" rIns="0" bIns="0" rtlCol="0" anchor="ctr"/>
+          <a:bodyPr wrap="square" lIns="0" tIns="0" rIns="0" bIns="0" rtlCol="0" anchor="t"/>
           <a:lstStyle/>
           <a:p>
             <a:pPr indent="0" marL="0">
@@ -6004,7 +5387,7 @@
                 <a:ea typeface="Calibri" pitchFamily="34" charset="-122"/>
                 <a:cs typeface="Calibri" pitchFamily="34" charset="-120"/>
               </a:rPr>
-              <a:t>seeded learners</a:t>
+              <a:t>questions</a:t>
             </a:r>
             <a:endParaRPr lang="en-US" sz="1250" dirty="0"/>
           </a:p>
@@ -6012,14 +5395,14 @@
       </p:sp>
       <p:sp>
         <p:nvSpPr>
-          <p:cNvPr id="38" name="Shape 35"/>
-          <p:cNvSpPr/>
-          <p:nvPr/>
-        </p:nvSpPr>
-        <p:spPr>
-          <a:xfrm>
-            <a:off x="8997696" y="5294376"/>
-            <a:ext cx="2468880" cy="1170432"/>
+          <p:cNvPr id="20" name="Shape 17"/>
+          <p:cNvSpPr/>
+          <p:nvPr/>
+        </p:nvSpPr>
+        <p:spPr>
+          <a:xfrm>
+            <a:off x="8997696" y="5184648"/>
+            <a:ext cx="2468880" cy="1133856"/>
           </a:xfrm>
           <a:prstGeom prst="rect">
             <a:avLst/>
@@ -6032,14 +5415,14 @@
       </p:sp>
       <p:sp>
         <p:nvSpPr>
-          <p:cNvPr id="39" name="Shape 36"/>
-          <p:cNvSpPr/>
-          <p:nvPr/>
-        </p:nvSpPr>
-        <p:spPr>
-          <a:xfrm>
-            <a:off x="8933688" y="5230368"/>
-            <a:ext cx="2468880" cy="1170432"/>
+          <p:cNvPr id="21" name="Shape 18"/>
+          <p:cNvSpPr/>
+          <p:nvPr/>
+        </p:nvSpPr>
+        <p:spPr>
+          <a:xfrm>
+            <a:off x="8933688" y="5120640"/>
+            <a:ext cx="2468880" cy="1133856"/>
           </a:xfrm>
           <a:prstGeom prst="rect">
             <a:avLst/>
@@ -6057,30 +5440,30 @@
       </p:sp>
       <p:sp>
         <p:nvSpPr>
-          <p:cNvPr id="40" name="Text 37"/>
-          <p:cNvSpPr/>
-          <p:nvPr/>
-        </p:nvSpPr>
-        <p:spPr>
-          <a:xfrm>
-            <a:off x="9134856" y="5358384"/>
-            <a:ext cx="2066544" cy="566928"/>
-          </a:xfrm>
-          <a:prstGeom prst="rect">
-            <a:avLst/>
-          </a:prstGeom>
-          <a:noFill/>
-          <a:ln/>
-        </p:spPr>
-        <p:txBody>
-          <a:bodyPr wrap="square" lIns="0" tIns="0" rIns="0" bIns="0" rtlCol="0" anchor="ctr"/>
+          <p:cNvPr id="22" name="Text 19"/>
+          <p:cNvSpPr/>
+          <p:nvPr/>
+        </p:nvSpPr>
+        <p:spPr>
+          <a:xfrm>
+            <a:off x="9134856" y="5239512"/>
+            <a:ext cx="2066544" cy="548640"/>
+          </a:xfrm>
+          <a:prstGeom prst="rect">
+            <a:avLst/>
+          </a:prstGeom>
+          <a:noFill/>
+          <a:ln/>
+        </p:spPr>
+        <p:txBody>
+          <a:bodyPr wrap="square" lIns="0" tIns="0" rIns="0" bIns="0" rtlCol="0" anchor="t"/>
           <a:lstStyle/>
           <a:p>
             <a:pPr indent="0" marL="0">
               <a:buNone/>
             </a:pPr>
             <a:r>
-              <a:rPr lang="en-US" sz="3000" b="1" dirty="0">
+              <a:rPr lang="en-US" sz="2800" b="1" dirty="0">
                 <a:solidFill>
                   <a:srgbClr val="1E2340"/>
                 </a:solidFill>
@@ -6088,21 +5471,21 @@
                 <a:ea typeface="Arial" pitchFamily="34" charset="-122"/>
                 <a:cs typeface="Arial" pitchFamily="34" charset="-120"/>
               </a:rPr>
-              <a:t>474</a:t>
-            </a:r>
-            <a:endParaRPr lang="en-US" sz="3000" dirty="0"/>
-          </a:p>
-        </p:txBody>
-      </p:sp>
-      <p:sp>
-        <p:nvSpPr>
-          <p:cNvPr id="41" name="Text 38"/>
-          <p:cNvSpPr/>
-          <p:nvPr/>
-        </p:nvSpPr>
-        <p:spPr>
-          <a:xfrm>
-            <a:off x="9134856" y="5943600"/>
+              <a:t>12</a:t>
+            </a:r>
+            <a:endParaRPr lang="en-US" sz="2800" dirty="0"/>
+          </a:p>
+        </p:txBody>
+      </p:sp>
+      <p:sp>
+        <p:nvSpPr>
+          <p:cNvPr id="23" name="Text 20"/>
+          <p:cNvSpPr/>
+          <p:nvPr/>
+        </p:nvSpPr>
+        <p:spPr>
+          <a:xfrm>
+            <a:off x="9134856" y="5815584"/>
             <a:ext cx="2066544" cy="347472"/>
           </a:xfrm>
           <a:prstGeom prst="rect">
@@ -6112,7 +5495,7 @@
           <a:ln/>
         </p:spPr>
         <p:txBody>
-          <a:bodyPr wrap="square" lIns="0" tIns="0" rIns="0" bIns="0" rtlCol="0" anchor="ctr"/>
+          <a:bodyPr wrap="square" lIns="0" tIns="0" rIns="0" bIns="0" rtlCol="0" anchor="t"/>
           <a:lstStyle/>
           <a:p>
             <a:pPr indent="0" marL="0">
@@ -6127,7 +5510,7 @@
                 <a:ea typeface="Calibri" pitchFamily="34" charset="-122"/>
                 <a:cs typeface="Calibri" pitchFamily="34" charset="-120"/>
               </a:rPr>
-              <a:t>answers graded</a:t>
+              <a:t>drawn figures</a:t>
             </a:r>
             <a:endParaRPr lang="en-US" sz="1250" dirty="0"/>
           </a:p>
@@ -6228,7 +5611,7 @@
           <a:ln/>
         </p:spPr>
         <p:txBody>
-          <a:bodyPr wrap="square" lIns="0" tIns="0" rIns="0" bIns="0" rtlCol="0" anchor="ctr"/>
+          <a:bodyPr wrap="square" lIns="0" tIns="0" rIns="0" bIns="0" rtlCol="0" anchor="t"/>
           <a:lstStyle/>
           <a:p>
             <a:pPr indent="0" marL="0">
@@ -6243,7 +5626,7 @@
                 <a:ea typeface="Calibri" pitchFamily="34" charset="-122"/>
                 <a:cs typeface="Calibri" pitchFamily="34" charset="-120"/>
               </a:rPr>
-              <a:t>Audience</a:t>
+              <a:t>What you can study</a:t>
             </a:r>
             <a:endParaRPr lang="en-US" sz="1300" dirty="0"/>
           </a:p>
@@ -6258,16 +5641,16 @@
         <p:spPr>
           <a:xfrm>
             <a:off x="566928" y="841248"/>
-            <a:ext cx="11057839" cy="777240"/>
-          </a:xfrm>
-          <a:prstGeom prst="rect">
-            <a:avLst/>
-          </a:prstGeom>
-          <a:noFill/>
-          <a:ln/>
-        </p:spPr>
-        <p:txBody>
-          <a:bodyPr wrap="square" lIns="0" tIns="0" rIns="0" bIns="0" rtlCol="0" anchor="ctr"/>
+            <a:ext cx="11057839" cy="658368"/>
+          </a:xfrm>
+          <a:prstGeom prst="rect">
+            <a:avLst/>
+          </a:prstGeom>
+          <a:noFill/>
+          <a:ln/>
+        </p:spPr>
+        <p:txBody>
+          <a:bodyPr wrap="square" lIns="0" tIns="0" rIns="0" bIns="0" rtlCol="0" anchor="t"/>
           <a:lstStyle/>
           <a:p>
             <a:pPr indent="0" marL="0">
@@ -6282,7 +5665,7 @@
                 <a:ea typeface="Arial" pitchFamily="34" charset="-122"/>
                 <a:cs typeface="Arial" pitchFamily="34" charset="-120"/>
               </a:rPr>
-              <a:t>One decision shaped everything else</a:t>
+              <a:t>Three courses, real syllabus content</a:t>
             </a:r>
             <a:endParaRPr lang="en-US" sz="3400" dirty="0"/>
           </a:p>
@@ -6290,147 +5673,14 @@
       </p:sp>
       <p:sp>
         <p:nvSpPr>
-          <p:cNvPr id="6" name="Text 4"/>
-          <p:cNvSpPr/>
-          <p:nvPr/>
-        </p:nvSpPr>
-        <p:spPr>
-          <a:xfrm>
-            <a:off x="566928" y="1783080"/>
-            <a:ext cx="6583680" cy="731520"/>
-          </a:xfrm>
-          <a:prstGeom prst="rect">
-            <a:avLst/>
-          </a:prstGeom>
-          <a:noFill/>
-          <a:ln/>
-        </p:spPr>
-        <p:txBody>
-          <a:bodyPr wrap="square" lIns="0" tIns="0" rIns="0" bIns="0" rtlCol="0" anchor="ctr"/>
-          <a:lstStyle/>
-          <a:p>
-            <a:pPr indent="0" marL="0">
-              <a:buNone/>
-            </a:pPr>
-            <a:r>
-              <a:rPr lang="en-US" sz="1700" dirty="0">
-                <a:solidFill>
-                  <a:srgbClr val="1E2340"/>
-                </a:solidFill>
-                <a:latin typeface="Calibri" pitchFamily="34" charset="0"/>
-                <a:ea typeface="Calibri" pitchFamily="34" charset="-122"/>
-                <a:cs typeface="Calibri" pitchFamily="34" charset="-120"/>
-              </a:rPr>
-              <a:t>The brief suggested young children. I moved the target to Classes 8 and 9, roughly 13 to 15.</a:t>
-            </a:r>
-            <a:endParaRPr lang="en-US" sz="1700" dirty="0"/>
-          </a:p>
-        </p:txBody>
-      </p:sp>
-      <p:sp>
-        <p:nvSpPr>
-          <p:cNvPr id="7" name="Text 5"/>
-          <p:cNvSpPr/>
-          <p:nvPr/>
-        </p:nvSpPr>
-        <p:spPr>
-          <a:xfrm>
-            <a:off x="566928" y="2743200"/>
-            <a:ext cx="6583680" cy="2011680"/>
-          </a:xfrm>
-          <a:prstGeom prst="rect">
-            <a:avLst/>
-          </a:prstGeom>
-          <a:noFill/>
-          <a:ln/>
-        </p:spPr>
-        <p:txBody>
-          <a:bodyPr wrap="square" lIns="0" tIns="0" rIns="0" bIns="0" rtlCol="0" anchor="ctr"/>
-          <a:lstStyle/>
-          <a:p>
-            <a:pPr marL="342900" indent="-342900">
-              <a:lnSpc>
-                <a:spcPts val="1980"/>
-              </a:lnSpc>
-              <a:spcAft>
-                <a:spcPts val="900"/>
-              </a:spcAft>
-              <a:buSzPct val="100000"/>
-              <a:buChar char="■"/>
-            </a:pPr>
-            <a:r>
-              <a:rPr lang="en-US" sz="1500" dirty="0">
-                <a:solidFill>
-                  <a:srgbClr val="343B5C"/>
-                </a:solidFill>
-                <a:latin typeface="Calibri" pitchFamily="34" charset="0"/>
-                <a:ea typeface="Calibri" pitchFamily="34" charset="-122"/>
-                <a:cs typeface="Calibri" pitchFamily="34" charset="-120"/>
-              </a:rPr>
-              <a:t>At 13 to 15 a cartoon mascot reads as condescending, and it is the fastest route to a generic educational product.</a:t>
-            </a:r>
-            <a:endParaRPr lang="en-US" sz="1500" dirty="0"/>
-          </a:p>
-          <a:p>
-            <a:pPr marL="342900" indent="-342900">
-              <a:lnSpc>
-                <a:spcPts val="1980"/>
-              </a:lnSpc>
-              <a:spcAft>
-                <a:spcPts val="900"/>
-              </a:spcAft>
-              <a:buSzPct val="100000"/>
-              <a:buChar char="■"/>
-            </a:pPr>
-            <a:r>
-              <a:rPr lang="en-US" sz="1500" dirty="0">
-                <a:solidFill>
-                  <a:srgbClr val="343B5C"/>
-                </a:solidFill>
-                <a:latin typeface="Calibri" pitchFamily="34" charset="0"/>
-                <a:ea typeface="Calibri" pitchFamily="34" charset="-122"/>
-                <a:cs typeface="Calibri" pitchFamily="34" charset="-120"/>
-              </a:rPr>
-              <a:t>Long reading passages stay in scope, so legibility outranks atmosphere.</a:t>
-            </a:r>
-            <a:endParaRPr lang="en-US" sz="1500" dirty="0"/>
-          </a:p>
-          <a:p>
-            <a:pPr marL="342900" indent="-342900">
-              <a:lnSpc>
-                <a:spcPts val="1980"/>
-              </a:lnSpc>
-              <a:spcAft>
-                <a:spcPts val="900"/>
-              </a:spcAft>
-              <a:buSzPct val="100000"/>
-              <a:buChar char="■"/>
-            </a:pPr>
-            <a:r>
-              <a:rPr lang="en-US" sz="1500" dirty="0">
-                <a:solidFill>
-                  <a:srgbClr val="343B5C"/>
-                </a:solidFill>
-                <a:latin typeface="Calibri" pitchFamily="34" charset="0"/>
-                <a:ea typeface="Calibri" pitchFamily="34" charset="-122"/>
-                <a:cs typeface="Calibri" pitchFamily="34" charset="-120"/>
-              </a:rPr>
-              <a:t>Treating the learner as a junior scientist is more respectful and more visually interesting.</a:t>
-            </a:r>
-            <a:endParaRPr lang="en-US" sz="1500" dirty="0"/>
-          </a:p>
-        </p:txBody>
-      </p:sp>
-      <p:sp>
-        <p:nvSpPr>
-          <p:cNvPr id="8" name="Shape 6"/>
-          <p:cNvSpPr/>
-          <p:nvPr/>
-        </p:nvSpPr>
-        <p:spPr>
-          <a:xfrm>
-            <a:off x="7607808" y="1892808"/>
-            <a:ext cx="4069080" cy="2834640"/>
+          <p:cNvPr id="6" name="Shape 4"/>
+          <p:cNvSpPr/>
+          <p:nvPr/>
+        </p:nvSpPr>
+        <p:spPr>
+          <a:xfrm>
+            <a:off x="630936" y="1892808"/>
+            <a:ext cx="3429000" cy="1874520"/>
           </a:xfrm>
           <a:prstGeom prst="rect">
             <a:avLst/>
@@ -6443,20 +5693,20 @@
       </p:sp>
       <p:sp>
         <p:nvSpPr>
-          <p:cNvPr id="9" name="Shape 7"/>
-          <p:cNvSpPr/>
-          <p:nvPr/>
-        </p:nvSpPr>
-        <p:spPr>
-          <a:xfrm>
-            <a:off x="7543800" y="1828800"/>
-            <a:ext cx="4069080" cy="2834640"/>
+          <p:cNvPr id="7" name="Shape 5"/>
+          <p:cNvSpPr/>
+          <p:nvPr/>
+        </p:nvSpPr>
+        <p:spPr>
+          <a:xfrm>
+            <a:off x="566928" y="1828800"/>
+            <a:ext cx="3429000" cy="1874520"/>
           </a:xfrm>
           <a:prstGeom prst="rect">
             <a:avLst/>
           </a:prstGeom>
           <a:solidFill>
-            <a:srgbClr val="EDE6CF"/>
+            <a:srgbClr val="F7F2E2"/>
           </a:solidFill>
           <a:ln w="19050">
             <a:solidFill>
@@ -6468,30 +5718,69 @@
       </p:sp>
       <p:sp>
         <p:nvSpPr>
-          <p:cNvPr id="10" name="Text 8"/>
-          <p:cNvSpPr/>
-          <p:nvPr/>
-        </p:nvSpPr>
-        <p:spPr>
-          <a:xfrm>
-            <a:off x="7863840" y="2148840"/>
-            <a:ext cx="3429000" cy="1554480"/>
-          </a:xfrm>
-          <a:prstGeom prst="rect">
-            <a:avLst/>
-          </a:prstGeom>
-          <a:noFill/>
-          <a:ln/>
-        </p:spPr>
-        <p:txBody>
-          <a:bodyPr wrap="square" lIns="0" tIns="0" rIns="0" bIns="0" rtlCol="0" anchor="ctr"/>
+          <p:cNvPr id="8" name="Text 6"/>
+          <p:cNvSpPr/>
+          <p:nvPr/>
+        </p:nvSpPr>
+        <p:spPr>
+          <a:xfrm>
+            <a:off x="822960" y="2011680"/>
+            <a:ext cx="2926080" cy="274320"/>
+          </a:xfrm>
+          <a:prstGeom prst="rect">
+            <a:avLst/>
+          </a:prstGeom>
+          <a:noFill/>
+          <a:ln/>
+        </p:spPr>
+        <p:txBody>
+          <a:bodyPr wrap="square" lIns="0" tIns="0" rIns="0" bIns="0" rtlCol="0" anchor="t"/>
           <a:lstStyle/>
           <a:p>
             <a:pPr indent="0" marL="0">
               <a:buNone/>
             </a:pPr>
             <a:r>
-              <a:rPr lang="en-US" sz="1900" b="1" dirty="0">
+              <a:rPr lang="en-US" sz="1250" b="1" dirty="0">
+                <a:solidFill>
+                  <a:srgbClr val="2E5BD4"/>
+                </a:solidFill>
+                <a:latin typeface="Calibri" pitchFamily="34" charset="0"/>
+                <a:ea typeface="Calibri" pitchFamily="34" charset="-122"/>
+                <a:cs typeface="Calibri" pitchFamily="34" charset="-120"/>
+              </a:rPr>
+              <a:t>5 lessons</a:t>
+            </a:r>
+            <a:endParaRPr lang="en-US" sz="1250" dirty="0"/>
+          </a:p>
+        </p:txBody>
+      </p:sp>
+      <p:sp>
+        <p:nvSpPr>
+          <p:cNvPr id="9" name="Text 7"/>
+          <p:cNvSpPr/>
+          <p:nvPr/>
+        </p:nvSpPr>
+        <p:spPr>
+          <a:xfrm>
+            <a:off x="822960" y="2304288"/>
+            <a:ext cx="2926080" cy="502920"/>
+          </a:xfrm>
+          <a:prstGeom prst="rect">
+            <a:avLst/>
+          </a:prstGeom>
+          <a:noFill/>
+          <a:ln/>
+        </p:spPr>
+        <p:txBody>
+          <a:bodyPr wrap="square" lIns="0" tIns="0" rIns="0" bIns="0" rtlCol="0" anchor="t"/>
+          <a:lstStyle/>
+          <a:p>
+            <a:pPr indent="0" marL="0">
+              <a:buNone/>
+            </a:pPr>
+            <a:r>
+              <a:rPr lang="en-US" sz="2000" b="1" dirty="0">
                 <a:solidFill>
                   <a:srgbClr val="1E2340"/>
                 </a:solidFill>
@@ -6499,38 +5788,38 @@
                 <a:ea typeface="Arial" pitchFamily="34" charset="-122"/>
                 <a:cs typeface="Arial" pitchFamily="34" charset="-120"/>
               </a:rPr>
-              <a:t>“If text is too small to read comfortably, it either gets bigger or it goes.”</a:t>
-            </a:r>
-            <a:endParaRPr lang="en-US" sz="1900" dirty="0"/>
-          </a:p>
-        </p:txBody>
-      </p:sp>
-      <p:sp>
-        <p:nvSpPr>
-          <p:cNvPr id="11" name="Text 9"/>
-          <p:cNvSpPr/>
-          <p:nvPr/>
-        </p:nvSpPr>
-        <p:spPr>
-          <a:xfrm>
-            <a:off x="7863840" y="3794760"/>
-            <a:ext cx="3429000" cy="731520"/>
-          </a:xfrm>
-          <a:prstGeom prst="rect">
-            <a:avLst/>
-          </a:prstGeom>
-          <a:noFill/>
-          <a:ln/>
-        </p:spPr>
-        <p:txBody>
-          <a:bodyPr wrap="square" lIns="0" tIns="0" rIns="0" bIns="0" rtlCol="0" anchor="ctr"/>
+              <a:t>Light</a:t>
+            </a:r>
+            <a:endParaRPr lang="en-US" sz="2000" dirty="0"/>
+          </a:p>
+        </p:txBody>
+      </p:sp>
+      <p:sp>
+        <p:nvSpPr>
+          <p:cNvPr id="10" name="Text 8"/>
+          <p:cNvSpPr/>
+          <p:nvPr/>
+        </p:nvSpPr>
+        <p:spPr>
+          <a:xfrm>
+            <a:off x="822960" y="2834640"/>
+            <a:ext cx="2926080" cy="731520"/>
+          </a:xfrm>
+          <a:prstGeom prst="rect">
+            <a:avLst/>
+          </a:prstGeom>
+          <a:noFill/>
+          <a:ln/>
+        </p:spPr>
+        <p:txBody>
+          <a:bodyPr wrap="square" lIns="0" tIns="0" rIns="0" bIns="0" rtlCol="0" anchor="t"/>
           <a:lstStyle/>
           <a:p>
             <a:pPr indent="0" marL="0">
               <a:buNone/>
             </a:pPr>
             <a:r>
-              <a:rPr lang="en-US" sz="1250" dirty="0">
+              <a:rPr lang="en-US" sz="1350" dirty="0">
                 <a:solidFill>
                   <a:srgbClr val="6E7597"/>
                 </a:solidFill>
@@ -6538,9 +5827,481 @@
                 <a:ea typeface="Calibri" pitchFamily="34" charset="-122"/>
                 <a:cs typeface="Calibri" pitchFamily="34" charset="-120"/>
               </a:rPr>
-              <a:t>The rule adopted for the whole application after the first design review.</a:t>
+              <a:t>Reflection, refraction and the human eye</a:t>
+            </a:r>
+            <a:endParaRPr lang="en-US" sz="1350" dirty="0"/>
+          </a:p>
+        </p:txBody>
+      </p:sp>
+      <p:sp>
+        <p:nvSpPr>
+          <p:cNvPr id="11" name="Shape 9"/>
+          <p:cNvSpPr/>
+          <p:nvPr/>
+        </p:nvSpPr>
+        <p:spPr>
+          <a:xfrm>
+            <a:off x="4425696" y="1892808"/>
+            <a:ext cx="3429000" cy="1874520"/>
+          </a:xfrm>
+          <a:prstGeom prst="rect">
+            <a:avLst/>
+          </a:prstGeom>
+          <a:solidFill>
+            <a:srgbClr val="E8763C"/>
+          </a:solidFill>
+          <a:ln/>
+        </p:spPr>
+      </p:sp>
+      <p:sp>
+        <p:nvSpPr>
+          <p:cNvPr id="12" name="Shape 10"/>
+          <p:cNvSpPr/>
+          <p:nvPr/>
+        </p:nvSpPr>
+        <p:spPr>
+          <a:xfrm>
+            <a:off x="4361688" y="1828800"/>
+            <a:ext cx="3429000" cy="1874520"/>
+          </a:xfrm>
+          <a:prstGeom prst="rect">
+            <a:avLst/>
+          </a:prstGeom>
+          <a:solidFill>
+            <a:srgbClr val="F7F2E2"/>
+          </a:solidFill>
+          <a:ln w="19050">
+            <a:solidFill>
+              <a:srgbClr val="1E2340"/>
+            </a:solidFill>
+            <a:prstDash val="solid"/>
+          </a:ln>
+        </p:spPr>
+      </p:sp>
+      <p:sp>
+        <p:nvSpPr>
+          <p:cNvPr id="13" name="Text 11"/>
+          <p:cNvSpPr/>
+          <p:nvPr/>
+        </p:nvSpPr>
+        <p:spPr>
+          <a:xfrm>
+            <a:off x="4617720" y="2011680"/>
+            <a:ext cx="2926080" cy="274320"/>
+          </a:xfrm>
+          <a:prstGeom prst="rect">
+            <a:avLst/>
+          </a:prstGeom>
+          <a:noFill/>
+          <a:ln/>
+        </p:spPr>
+        <p:txBody>
+          <a:bodyPr wrap="square" lIns="0" tIns="0" rIns="0" bIns="0" rtlCol="0" anchor="t"/>
+          <a:lstStyle/>
+          <a:p>
+            <a:pPr indent="0" marL="0">
+              <a:buNone/>
+            </a:pPr>
+            <a:r>
+              <a:rPr lang="en-US" sz="1250" b="1" dirty="0">
+                <a:solidFill>
+                  <a:srgbClr val="E8763C"/>
+                </a:solidFill>
+                <a:latin typeface="Calibri" pitchFamily="34" charset="0"/>
+                <a:ea typeface="Calibri" pitchFamily="34" charset="-122"/>
+                <a:cs typeface="Calibri" pitchFamily="34" charset="-120"/>
+              </a:rPr>
+              <a:t>4 lessons</a:t>
             </a:r>
             <a:endParaRPr lang="en-US" sz="1250" dirty="0"/>
+          </a:p>
+        </p:txBody>
+      </p:sp>
+      <p:sp>
+        <p:nvSpPr>
+          <p:cNvPr id="14" name="Text 12"/>
+          <p:cNvSpPr/>
+          <p:nvPr/>
+        </p:nvSpPr>
+        <p:spPr>
+          <a:xfrm>
+            <a:off x="4617720" y="2304288"/>
+            <a:ext cx="2926080" cy="502920"/>
+          </a:xfrm>
+          <a:prstGeom prst="rect">
+            <a:avLst/>
+          </a:prstGeom>
+          <a:noFill/>
+          <a:ln/>
+        </p:spPr>
+        <p:txBody>
+          <a:bodyPr wrap="square" lIns="0" tIns="0" rIns="0" bIns="0" rtlCol="0" anchor="t"/>
+          <a:lstStyle/>
+          <a:p>
+            <a:pPr indent="0" marL="0">
+              <a:buNone/>
+            </a:pPr>
+            <a:r>
+              <a:rPr lang="en-US" sz="2000" b="1" dirty="0">
+                <a:solidFill>
+                  <a:srgbClr val="1E2340"/>
+                </a:solidFill>
+                <a:latin typeface="Arial" pitchFamily="34" charset="0"/>
+                <a:ea typeface="Arial" pitchFamily="34" charset="-122"/>
+                <a:cs typeface="Arial" pitchFamily="34" charset="-120"/>
+              </a:rPr>
+              <a:t>The Cell</a:t>
+            </a:r>
+            <a:endParaRPr lang="en-US" sz="2000" dirty="0"/>
+          </a:p>
+        </p:txBody>
+      </p:sp>
+      <p:sp>
+        <p:nvSpPr>
+          <p:cNvPr id="15" name="Text 13"/>
+          <p:cNvSpPr/>
+          <p:nvPr/>
+        </p:nvSpPr>
+        <p:spPr>
+          <a:xfrm>
+            <a:off x="4617720" y="2834640"/>
+            <a:ext cx="2926080" cy="731520"/>
+          </a:xfrm>
+          <a:prstGeom prst="rect">
+            <a:avLst/>
+          </a:prstGeom>
+          <a:noFill/>
+          <a:ln/>
+        </p:spPr>
+        <p:txBody>
+          <a:bodyPr wrap="square" lIns="0" tIns="0" rIns="0" bIns="0" rtlCol="0" anchor="t"/>
+          <a:lstStyle/>
+          <a:p>
+            <a:pPr indent="0" marL="0">
+              <a:buNone/>
+            </a:pPr>
+            <a:r>
+              <a:rPr lang="en-US" sz="1350" dirty="0">
+                <a:solidFill>
+                  <a:srgbClr val="6E7597"/>
+                </a:solidFill>
+                <a:latin typeface="Calibri" pitchFamily="34" charset="0"/>
+                <a:ea typeface="Calibri" pitchFamily="34" charset="-122"/>
+                <a:cs typeface="Calibri" pitchFamily="34" charset="-120"/>
+              </a:rPr>
+              <a:t>The unit every living thing is built from</a:t>
+            </a:r>
+            <a:endParaRPr lang="en-US" sz="1350" dirty="0"/>
+          </a:p>
+        </p:txBody>
+      </p:sp>
+      <p:sp>
+        <p:nvSpPr>
+          <p:cNvPr id="16" name="Shape 14"/>
+          <p:cNvSpPr/>
+          <p:nvPr/>
+        </p:nvSpPr>
+        <p:spPr>
+          <a:xfrm>
+            <a:off x="8220456" y="1892808"/>
+            <a:ext cx="3429000" cy="1874520"/>
+          </a:xfrm>
+          <a:prstGeom prst="rect">
+            <a:avLst/>
+          </a:prstGeom>
+          <a:solidFill>
+            <a:srgbClr val="2E5BD4"/>
+          </a:solidFill>
+          <a:ln/>
+        </p:spPr>
+      </p:sp>
+      <p:sp>
+        <p:nvSpPr>
+          <p:cNvPr id="17" name="Shape 15"/>
+          <p:cNvSpPr/>
+          <p:nvPr/>
+        </p:nvSpPr>
+        <p:spPr>
+          <a:xfrm>
+            <a:off x="8156448" y="1828800"/>
+            <a:ext cx="3429000" cy="1874520"/>
+          </a:xfrm>
+          <a:prstGeom prst="rect">
+            <a:avLst/>
+          </a:prstGeom>
+          <a:solidFill>
+            <a:srgbClr val="F7F2E2"/>
+          </a:solidFill>
+          <a:ln w="19050">
+            <a:solidFill>
+              <a:srgbClr val="1E2340"/>
+            </a:solidFill>
+            <a:prstDash val="solid"/>
+          </a:ln>
+        </p:spPr>
+      </p:sp>
+      <p:sp>
+        <p:nvSpPr>
+          <p:cNvPr id="18" name="Text 16"/>
+          <p:cNvSpPr/>
+          <p:nvPr/>
+        </p:nvSpPr>
+        <p:spPr>
+          <a:xfrm>
+            <a:off x="8412480" y="2011680"/>
+            <a:ext cx="2926080" cy="274320"/>
+          </a:xfrm>
+          <a:prstGeom prst="rect">
+            <a:avLst/>
+          </a:prstGeom>
+          <a:noFill/>
+          <a:ln/>
+        </p:spPr>
+        <p:txBody>
+          <a:bodyPr wrap="square" lIns="0" tIns="0" rIns="0" bIns="0" rtlCol="0" anchor="t"/>
+          <a:lstStyle/>
+          <a:p>
+            <a:pPr indent="0" marL="0">
+              <a:buNone/>
+            </a:pPr>
+            <a:r>
+              <a:rPr lang="en-US" sz="1250" b="1" dirty="0">
+                <a:solidFill>
+                  <a:srgbClr val="2E5BD4"/>
+                </a:solidFill>
+                <a:latin typeface="Calibri" pitchFamily="34" charset="0"/>
+                <a:ea typeface="Calibri" pitchFamily="34" charset="-122"/>
+                <a:cs typeface="Calibri" pitchFamily="34" charset="-120"/>
+              </a:rPr>
+              <a:t>4 lessons</a:t>
+            </a:r>
+            <a:endParaRPr lang="en-US" sz="1250" dirty="0"/>
+          </a:p>
+        </p:txBody>
+      </p:sp>
+      <p:sp>
+        <p:nvSpPr>
+          <p:cNvPr id="19" name="Text 17"/>
+          <p:cNvSpPr/>
+          <p:nvPr/>
+        </p:nvSpPr>
+        <p:spPr>
+          <a:xfrm>
+            <a:off x="8412480" y="2304288"/>
+            <a:ext cx="2926080" cy="502920"/>
+          </a:xfrm>
+          <a:prstGeom prst="rect">
+            <a:avLst/>
+          </a:prstGeom>
+          <a:noFill/>
+          <a:ln/>
+        </p:spPr>
+        <p:txBody>
+          <a:bodyPr wrap="square" lIns="0" tIns="0" rIns="0" bIns="0" rtlCol="0" anchor="t"/>
+          <a:lstStyle/>
+          <a:p>
+            <a:pPr indent="0" marL="0">
+              <a:buNone/>
+            </a:pPr>
+            <a:r>
+              <a:rPr lang="en-US" sz="2000" b="1" dirty="0">
+                <a:solidFill>
+                  <a:srgbClr val="1E2340"/>
+                </a:solidFill>
+                <a:latin typeface="Arial" pitchFamily="34" charset="0"/>
+                <a:ea typeface="Arial" pitchFamily="34" charset="-122"/>
+                <a:cs typeface="Arial" pitchFamily="34" charset="-120"/>
+              </a:rPr>
+              <a:t>Force and Motion</a:t>
+            </a:r>
+            <a:endParaRPr lang="en-US" sz="2000" dirty="0"/>
+          </a:p>
+        </p:txBody>
+      </p:sp>
+      <p:sp>
+        <p:nvSpPr>
+          <p:cNvPr id="20" name="Text 18"/>
+          <p:cNvSpPr/>
+          <p:nvPr/>
+        </p:nvSpPr>
+        <p:spPr>
+          <a:xfrm>
+            <a:off x="8412480" y="2834640"/>
+            <a:ext cx="2926080" cy="731520"/>
+          </a:xfrm>
+          <a:prstGeom prst="rect">
+            <a:avLst/>
+          </a:prstGeom>
+          <a:noFill/>
+          <a:ln/>
+        </p:spPr>
+        <p:txBody>
+          <a:bodyPr wrap="square" lIns="0" tIns="0" rIns="0" bIns="0" rtlCol="0" anchor="t"/>
+          <a:lstStyle/>
+          <a:p>
+            <a:pPr indent="0" marL="0">
+              <a:buNone/>
+            </a:pPr>
+            <a:r>
+              <a:rPr lang="en-US" sz="1350" dirty="0">
+                <a:solidFill>
+                  <a:srgbClr val="6E7597"/>
+                </a:solidFill>
+                <a:latin typeface="Calibri" pitchFamily="34" charset="0"/>
+                <a:ea typeface="Calibri" pitchFamily="34" charset="-122"/>
+                <a:cs typeface="Calibri" pitchFamily="34" charset="-120"/>
+              </a:rPr>
+              <a:t>Pushes, pulls, pressure and speed</a:t>
+            </a:r>
+            <a:endParaRPr lang="en-US" sz="1350" dirty="0"/>
+          </a:p>
+        </p:txBody>
+      </p:sp>
+      <p:sp>
+        <p:nvSpPr>
+          <p:cNvPr id="21" name="Text 19"/>
+          <p:cNvSpPr/>
+          <p:nvPr/>
+        </p:nvSpPr>
+        <p:spPr>
+          <a:xfrm>
+            <a:off x="566928" y="3931920"/>
+            <a:ext cx="10515600" cy="365760"/>
+          </a:xfrm>
+          <a:prstGeom prst="rect">
+            <a:avLst/>
+          </a:prstGeom>
+          <a:noFill/>
+          <a:ln/>
+        </p:spPr>
+        <p:txBody>
+          <a:bodyPr wrap="square" lIns="0" tIns="0" rIns="0" bIns="0" rtlCol="0" anchor="t"/>
+          <a:lstStyle/>
+          <a:p>
+            <a:pPr indent="0" marL="0">
+              <a:buNone/>
+            </a:pPr>
+            <a:r>
+              <a:rPr lang="en-US" sz="1500" dirty="0">
+                <a:solidFill>
+                  <a:srgbClr val="343B5C"/>
+                </a:solidFill>
+                <a:latin typeface="Calibri" pitchFamily="34" charset="0"/>
+                <a:ea typeface="Calibri" pitchFamily="34" charset="-122"/>
+                <a:cs typeface="Calibri" pitchFamily="34" charset="-120"/>
+              </a:rPr>
+              <a:t>Aligned to the NCERT syllabus for Classes 8 and 9.</a:t>
+            </a:r>
+            <a:endParaRPr lang="en-US" sz="1500" dirty="0"/>
+          </a:p>
+        </p:txBody>
+      </p:sp>
+      <p:pic>
+        <p:nvPicPr>
+          <p:cNvPr id="22" name="Image 0" descr="/Users/ndstab/Desktop/et/docs/screens/figure.png">    </p:cNvPr>
+          <p:cNvPicPr>
+            <a:picLocks noChangeAspect="1"/>
+          </p:cNvPicPr>
+          <p:nvPr/>
+        </p:nvPicPr>
+        <p:blipFill>
+          <a:blip r:embed="rId1"/>
+          <a:stretch>
+            <a:fillRect/>
+          </a:stretch>
+        </p:blipFill>
+        <p:spPr>
+          <a:xfrm>
+            <a:off x="566928" y="4389120"/>
+            <a:ext cx="2633472" cy="2057400"/>
+          </a:xfrm>
+          <a:prstGeom prst="rect">
+            <a:avLst/>
+          </a:prstGeom>
+          <a:effectLst>
+            <a:outerShdw sx="100000" sy="100000" kx="0" ky="0" algn="bl" rotWithShape="0" blurRad="101600" dist="889" dir="2700000">
+              <a:srgbClr val="1E2340">
+                <a:alpha val="100000"/>
+              </a:srgbClr>
+            </a:outerShdw>
+          </a:effectLst>
+        </p:spPr>
+      </p:pic>
+      <p:sp>
+        <p:nvSpPr>
+          <p:cNvPr id="23" name="Text 20"/>
+          <p:cNvSpPr/>
+          <p:nvPr/>
+        </p:nvSpPr>
+        <p:spPr>
+          <a:xfrm>
+            <a:off x="3429000" y="4434840"/>
+            <a:ext cx="8138160" cy="365760"/>
+          </a:xfrm>
+          <a:prstGeom prst="rect">
+            <a:avLst/>
+          </a:prstGeom>
+          <a:noFill/>
+          <a:ln/>
+        </p:spPr>
+        <p:txBody>
+          <a:bodyPr wrap="square" lIns="0" tIns="0" rIns="0" bIns="0" rtlCol="0" anchor="t"/>
+          <a:lstStyle/>
+          <a:p>
+            <a:pPr indent="0" marL="0">
+              <a:buNone/>
+            </a:pPr>
+            <a:r>
+              <a:rPr lang="en-US" sz="1700" b="1" dirty="0">
+                <a:solidFill>
+                  <a:srgbClr val="1E2340"/>
+                </a:solidFill>
+                <a:latin typeface="Arial" pitchFamily="34" charset="0"/>
+                <a:ea typeface="Arial" pitchFamily="34" charset="-122"/>
+                <a:cs typeface="Arial" pitchFamily="34" charset="-120"/>
+              </a:rPr>
+              <a:t>Drawn, not borrowed</a:t>
+            </a:r>
+            <a:endParaRPr lang="en-US" sz="1700" dirty="0"/>
+          </a:p>
+        </p:txBody>
+      </p:sp>
+      <p:sp>
+        <p:nvSpPr>
+          <p:cNvPr id="24" name="Text 21"/>
+          <p:cNvSpPr/>
+          <p:nvPr/>
+        </p:nvSpPr>
+        <p:spPr>
+          <a:xfrm>
+            <a:off x="3429000" y="4892040"/>
+            <a:ext cx="8138160" cy="1371600"/>
+          </a:xfrm>
+          <a:prstGeom prst="rect">
+            <a:avLst/>
+          </a:prstGeom>
+          <a:noFill/>
+          <a:ln/>
+        </p:spPr>
+        <p:txBody>
+          <a:bodyPr wrap="square" lIns="0" tIns="0" rIns="0" bIns="0" rtlCol="0" anchor="t"/>
+          <a:lstStyle/>
+          <a:p>
+            <a:pPr indent="0" marL="0">
+              <a:buNone/>
+            </a:pPr>
+            <a:r>
+              <a:rPr lang="en-US" sz="1400" dirty="0">
+                <a:solidFill>
+                  <a:srgbClr val="343B5C"/>
+                </a:solidFill>
+                <a:latin typeface="Calibri" pitchFamily="34" charset="0"/>
+                <a:ea typeface="Calibri" pitchFamily="34" charset="-122"/>
+                <a:cs typeface="Calibri" pitchFamily="34" charset="-120"/>
+              </a:rPr>
+              <a:t>Twelve figures across the three courses, each built to correct geometry rather than sketched. This one traces a real ray through a glass slab: bent towards the normal going in, away from it coming out, and emerging parallel to the direction it started in, just displaced sideways.</a:t>
+            </a:r>
+            <a:endParaRPr lang="en-US" sz="1400" dirty="0"/>
           </a:p>
         </p:txBody>
       </p:sp>
@@ -6639,7 +6400,7 @@
           <a:ln/>
         </p:spPr>
         <p:txBody>
-          <a:bodyPr wrap="square" lIns="0" tIns="0" rIns="0" bIns="0" rtlCol="0" anchor="ctr"/>
+          <a:bodyPr wrap="square" lIns="0" tIns="0" rIns="0" bIns="0" rtlCol="0" anchor="t"/>
           <a:lstStyle/>
           <a:p>
             <a:pPr indent="0" marL="0">
@@ -6654,7 +6415,7 @@
                 <a:ea typeface="Calibri" pitchFamily="34" charset="-122"/>
                 <a:cs typeface="Calibri" pitchFamily="34" charset="-120"/>
               </a:rPr>
-              <a:t>The courses</a:t>
+              <a:t>Inside a lesson</a:t>
             </a:r>
             <a:endParaRPr lang="en-US" sz="1300" dirty="0"/>
           </a:p>
@@ -6669,16 +6430,16 @@
         <p:spPr>
           <a:xfrm>
             <a:off x="566928" y="841248"/>
-            <a:ext cx="11057839" cy="777240"/>
-          </a:xfrm>
-          <a:prstGeom prst="rect">
-            <a:avLst/>
-          </a:prstGeom>
-          <a:noFill/>
-          <a:ln/>
-        </p:spPr>
-        <p:txBody>
-          <a:bodyPr wrap="square" lIns="0" tIns="0" rIns="0" bIns="0" rtlCol="0" anchor="ctr"/>
+            <a:ext cx="11057839" cy="658368"/>
+          </a:xfrm>
+          <a:prstGeom prst="rect">
+            <a:avLst/>
+          </a:prstGeom>
+          <a:noFill/>
+          <a:ln/>
+        </p:spPr>
+        <p:txBody>
+          <a:bodyPr wrap="square" lIns="0" tIns="0" rIns="0" bIns="0" rtlCol="0" anchor="t"/>
           <a:lstStyle/>
           <a:p>
             <a:pPr indent="0" marL="0">
@@ -6693,7 +6454,7 @@
                 <a:ea typeface="Arial" pitchFamily="34" charset="-122"/>
                 <a:cs typeface="Arial" pitchFamily="34" charset="-120"/>
               </a:rPr>
-              <a:t>Real syllabus content, not filler</a:t>
+              <a:t>Every lesson is three things at once</a:t>
             </a:r>
             <a:endParaRPr lang="en-US" sz="3400" dirty="0"/>
           </a:p>
@@ -6701,1021 +6462,192 @@
       </p:sp>
       <p:sp>
         <p:nvSpPr>
-          <p:cNvPr id="6" name="Shape 4"/>
-          <p:cNvSpPr/>
-          <p:nvPr/>
-        </p:nvSpPr>
-        <p:spPr>
-          <a:xfrm>
-            <a:off x="630936" y="1938528"/>
-            <a:ext cx="3429000" cy="2148840"/>
-          </a:xfrm>
-          <a:prstGeom prst="rect">
-            <a:avLst/>
-          </a:prstGeom>
-          <a:solidFill>
-            <a:srgbClr val="2E5BD4"/>
-          </a:solidFill>
-          <a:ln/>
-        </p:spPr>
-      </p:sp>
-      <p:sp>
-        <p:nvSpPr>
-          <p:cNvPr id="7" name="Shape 5"/>
-          <p:cNvSpPr/>
-          <p:nvPr/>
-        </p:nvSpPr>
-        <p:spPr>
-          <a:xfrm>
-            <a:off x="566928" y="1874520"/>
-            <a:ext cx="3429000" cy="2148840"/>
-          </a:xfrm>
-          <a:prstGeom prst="rect">
-            <a:avLst/>
-          </a:prstGeom>
-          <a:solidFill>
-            <a:srgbClr val="F7F2E2"/>
-          </a:solidFill>
-          <a:ln w="19050">
-            <a:solidFill>
-              <a:srgbClr val="1E2340"/>
-            </a:solidFill>
-            <a:prstDash val="solid"/>
-          </a:ln>
-        </p:spPr>
-      </p:sp>
-      <p:sp>
-        <p:nvSpPr>
-          <p:cNvPr id="8" name="Text 6"/>
-          <p:cNvSpPr/>
-          <p:nvPr/>
-        </p:nvSpPr>
-        <p:spPr>
-          <a:xfrm>
-            <a:off x="822960" y="2103120"/>
-            <a:ext cx="2926080" cy="274320"/>
-          </a:xfrm>
-          <a:prstGeom prst="rect">
-            <a:avLst/>
-          </a:prstGeom>
-          <a:noFill/>
-          <a:ln/>
-        </p:spPr>
-        <p:txBody>
-          <a:bodyPr wrap="square" lIns="0" tIns="0" rIns="0" bIns="0" rtlCol="0" anchor="ctr"/>
-          <a:lstStyle/>
-          <a:p>
-            <a:pPr indent="0" marL="0">
-              <a:buNone/>
-            </a:pPr>
-            <a:r>
-              <a:rPr lang="en-US" sz="1250" b="1" dirty="0">
-                <a:solidFill>
-                  <a:srgbClr val="2E5BD4"/>
+          <p:cNvPr id="6" name="Text 4"/>
+          <p:cNvSpPr/>
+          <p:nvPr/>
+        </p:nvSpPr>
+        <p:spPr>
+          <a:xfrm>
+            <a:off x="566928" y="1828800"/>
+            <a:ext cx="4114800" cy="2468880"/>
+          </a:xfrm>
+          <a:prstGeom prst="rect">
+            <a:avLst/>
+          </a:prstGeom>
+          <a:noFill/>
+          <a:ln/>
+        </p:spPr>
+        <p:txBody>
+          <a:bodyPr wrap="square" lIns="0" tIns="0" rIns="0" bIns="0" rtlCol="0" anchor="t"/>
+          <a:lstStyle/>
+          <a:p>
+            <a:pPr marL="342900" indent="-342900">
+              <a:lnSpc>
+                <a:spcPts val="1980"/>
+              </a:lnSpc>
+              <a:spcAft>
+                <a:spcPts val="900"/>
+              </a:spcAft>
+              <a:buSzPct val="100000"/>
+              <a:buChar char="■"/>
+            </a:pPr>
+            <a:r>
+              <a:rPr lang="en-US" sz="1500" dirty="0">
+                <a:solidFill>
+                  <a:srgbClr val="343B5C"/>
                 </a:solidFill>
                 <a:latin typeface="Calibri" pitchFamily="34" charset="0"/>
                 <a:ea typeface="Calibri" pitchFamily="34" charset="-122"/>
                 <a:cs typeface="Calibri" pitchFamily="34" charset="-120"/>
               </a:rPr>
-              <a:t>5 lessons</a:t>
-            </a:r>
-            <a:endParaRPr lang="en-US" sz="1250" dirty="0"/>
-          </a:p>
-        </p:txBody>
-      </p:sp>
-      <p:sp>
-        <p:nvSpPr>
-          <p:cNvPr id="9" name="Text 7"/>
-          <p:cNvSpPr/>
-          <p:nvPr/>
-        </p:nvSpPr>
-        <p:spPr>
-          <a:xfrm>
-            <a:off x="822960" y="2432304"/>
-            <a:ext cx="2926080" cy="548640"/>
-          </a:xfrm>
-          <a:prstGeom prst="rect">
-            <a:avLst/>
-          </a:prstGeom>
-          <a:noFill/>
-          <a:ln/>
-        </p:spPr>
-        <p:txBody>
-          <a:bodyPr wrap="square" lIns="0" tIns="0" rIns="0" bIns="0" rtlCol="0" anchor="ctr"/>
-          <a:lstStyle/>
-          <a:p>
-            <a:pPr indent="0" marL="0">
-              <a:buNone/>
-            </a:pPr>
-            <a:r>
-              <a:rPr lang="en-US" sz="2100" b="1" dirty="0">
-                <a:solidFill>
-                  <a:srgbClr val="1E2340"/>
-                </a:solidFill>
-                <a:latin typeface="Arial" pitchFamily="34" charset="0"/>
-                <a:ea typeface="Arial" pitchFamily="34" charset="-122"/>
-                <a:cs typeface="Arial" pitchFamily="34" charset="-120"/>
-              </a:rPr>
-              <a:t>Light</a:t>
-            </a:r>
-            <a:endParaRPr lang="en-US" sz="2100" dirty="0"/>
-          </a:p>
-        </p:txBody>
-      </p:sp>
-      <p:sp>
-        <p:nvSpPr>
-          <p:cNvPr id="10" name="Text 8"/>
-          <p:cNvSpPr/>
-          <p:nvPr/>
-        </p:nvSpPr>
-        <p:spPr>
-          <a:xfrm>
-            <a:off x="822960" y="3035808"/>
-            <a:ext cx="2926080" cy="777240"/>
-          </a:xfrm>
-          <a:prstGeom prst="rect">
-            <a:avLst/>
-          </a:prstGeom>
-          <a:noFill/>
-          <a:ln/>
-        </p:spPr>
-        <p:txBody>
-          <a:bodyPr wrap="square" lIns="0" tIns="0" rIns="0" bIns="0" rtlCol="0" anchor="ctr"/>
-          <a:lstStyle/>
-          <a:p>
-            <a:pPr indent="0" marL="0">
-              <a:buNone/>
-            </a:pPr>
-            <a:r>
-              <a:rPr lang="en-US" sz="1350" dirty="0">
-                <a:solidFill>
-                  <a:srgbClr val="6E7597"/>
+              <a:t>A reading, with the figures inline where they are needed.</a:t>
+            </a:r>
+            <a:endParaRPr lang="en-US" sz="1500" dirty="0"/>
+          </a:p>
+          <a:p>
+            <a:pPr marL="342900" indent="-342900">
+              <a:lnSpc>
+                <a:spcPts val="1980"/>
+              </a:lnSpc>
+              <a:spcAft>
+                <a:spcPts val="900"/>
+              </a:spcAft>
+              <a:buSzPct val="100000"/>
+              <a:buChar char="■"/>
+            </a:pPr>
+            <a:r>
+              <a:rPr lang="en-US" sz="1500" dirty="0">
+                <a:solidFill>
+                  <a:srgbClr val="343B5C"/>
                 </a:solidFill>
                 <a:latin typeface="Calibri" pitchFamily="34" charset="0"/>
                 <a:ea typeface="Calibri" pitchFamily="34" charset="-122"/>
                 <a:cs typeface="Calibri" pitchFamily="34" charset="-120"/>
               </a:rPr>
-              <a:t>Reflection, refraction and the human eye</a:t>
-            </a:r>
-            <a:endParaRPr lang="en-US" sz="1350" dirty="0"/>
-          </a:p>
-        </p:txBody>
-      </p:sp>
-      <p:sp>
-        <p:nvSpPr>
-          <p:cNvPr id="11" name="Shape 9"/>
-          <p:cNvSpPr/>
-          <p:nvPr/>
-        </p:nvSpPr>
-        <p:spPr>
-          <a:xfrm>
-            <a:off x="4425696" y="1938528"/>
-            <a:ext cx="3429000" cy="2148840"/>
-          </a:xfrm>
-          <a:prstGeom prst="rect">
-            <a:avLst/>
-          </a:prstGeom>
-          <a:solidFill>
-            <a:srgbClr val="E8763C"/>
-          </a:solidFill>
-          <a:ln/>
-        </p:spPr>
-      </p:sp>
-      <p:sp>
-        <p:nvSpPr>
-          <p:cNvPr id="12" name="Shape 10"/>
-          <p:cNvSpPr/>
-          <p:nvPr/>
-        </p:nvSpPr>
-        <p:spPr>
-          <a:xfrm>
-            <a:off x="4361688" y="1874520"/>
-            <a:ext cx="3429000" cy="2148840"/>
-          </a:xfrm>
-          <a:prstGeom prst="rect">
-            <a:avLst/>
-          </a:prstGeom>
-          <a:solidFill>
-            <a:srgbClr val="F7F2E2"/>
-          </a:solidFill>
-          <a:ln w="19050">
-            <a:solidFill>
-              <a:srgbClr val="1E2340"/>
-            </a:solidFill>
-            <a:prstDash val="solid"/>
-          </a:ln>
-        </p:spPr>
-      </p:sp>
-      <p:sp>
-        <p:nvSpPr>
-          <p:cNvPr id="13" name="Text 11"/>
-          <p:cNvSpPr/>
-          <p:nvPr/>
-        </p:nvSpPr>
-        <p:spPr>
-          <a:xfrm>
-            <a:off x="4617720" y="2103120"/>
-            <a:ext cx="2926080" cy="274320"/>
-          </a:xfrm>
-          <a:prstGeom prst="rect">
-            <a:avLst/>
-          </a:prstGeom>
-          <a:noFill/>
-          <a:ln/>
-        </p:spPr>
-        <p:txBody>
-          <a:bodyPr wrap="square" lIns="0" tIns="0" rIns="0" bIns="0" rtlCol="0" anchor="ctr"/>
-          <a:lstStyle/>
-          <a:p>
-            <a:pPr indent="0" marL="0">
-              <a:buNone/>
-            </a:pPr>
-            <a:r>
-              <a:rPr lang="en-US" sz="1250" b="1" dirty="0">
-                <a:solidFill>
-                  <a:srgbClr val="E8763C"/>
+              <a:t>A short film, in a player built for this app.</a:t>
+            </a:r>
+            <a:endParaRPr lang="en-US" sz="1500" dirty="0"/>
+          </a:p>
+          <a:p>
+            <a:pPr marL="342900" indent="-342900">
+              <a:lnSpc>
+                <a:spcPts val="1980"/>
+              </a:lnSpc>
+              <a:spcAft>
+                <a:spcPts val="900"/>
+              </a:spcAft>
+              <a:buSzPct val="100000"/>
+              <a:buChar char="■"/>
+            </a:pPr>
+            <a:r>
+              <a:rPr lang="en-US" sz="1500" dirty="0">
+                <a:solidFill>
+                  <a:srgbClr val="343B5C"/>
                 </a:solidFill>
                 <a:latin typeface="Calibri" pitchFamily="34" charset="0"/>
                 <a:ea typeface="Calibri" pitchFamily="34" charset="-122"/>
                 <a:cs typeface="Calibri" pitchFamily="34" charset="-120"/>
               </a:rPr>
-              <a:t>4 lessons</a:t>
-            </a:r>
-            <a:endParaRPr lang="en-US" sz="1250" dirty="0"/>
-          </a:p>
-        </p:txBody>
-      </p:sp>
-      <p:sp>
-        <p:nvSpPr>
-          <p:cNvPr id="14" name="Text 12"/>
-          <p:cNvSpPr/>
-          <p:nvPr/>
-        </p:nvSpPr>
-        <p:spPr>
-          <a:xfrm>
-            <a:off x="4617720" y="2432304"/>
-            <a:ext cx="2926080" cy="548640"/>
-          </a:xfrm>
-          <a:prstGeom prst="rect">
-            <a:avLst/>
-          </a:prstGeom>
-          <a:noFill/>
-          <a:ln/>
-        </p:spPr>
-        <p:txBody>
-          <a:bodyPr wrap="square" lIns="0" tIns="0" rIns="0" bIns="0" rtlCol="0" anchor="ctr"/>
-          <a:lstStyle/>
-          <a:p>
-            <a:pPr indent="0" marL="0">
-              <a:buNone/>
-            </a:pPr>
-            <a:r>
-              <a:rPr lang="en-US" sz="2100" b="1" dirty="0">
-                <a:solidFill>
-                  <a:srgbClr val="1E2340"/>
-                </a:solidFill>
-                <a:latin typeface="Arial" pitchFamily="34" charset="0"/>
-                <a:ea typeface="Arial" pitchFamily="34" charset="-122"/>
-                <a:cs typeface="Arial" pitchFamily="34" charset="-120"/>
-              </a:rPr>
-              <a:t>The Cell</a:t>
-            </a:r>
-            <a:endParaRPr lang="en-US" sz="2100" dirty="0"/>
-          </a:p>
-        </p:txBody>
-      </p:sp>
-      <p:sp>
-        <p:nvSpPr>
-          <p:cNvPr id="15" name="Text 13"/>
-          <p:cNvSpPr/>
-          <p:nvPr/>
-        </p:nvSpPr>
-        <p:spPr>
-          <a:xfrm>
-            <a:off x="4617720" y="3035808"/>
-            <a:ext cx="2926080" cy="777240"/>
-          </a:xfrm>
-          <a:prstGeom prst="rect">
-            <a:avLst/>
-          </a:prstGeom>
-          <a:noFill/>
-          <a:ln/>
-        </p:spPr>
-        <p:txBody>
-          <a:bodyPr wrap="square" lIns="0" tIns="0" rIns="0" bIns="0" rtlCol="0" anchor="ctr"/>
-          <a:lstStyle/>
-          <a:p>
-            <a:pPr indent="0" marL="0">
-              <a:buNone/>
-            </a:pPr>
-            <a:r>
-              <a:rPr lang="en-US" sz="1350" dirty="0">
-                <a:solidFill>
-                  <a:srgbClr val="6E7597"/>
+              <a:t>A quiz, at the bottom of the same page.</a:t>
+            </a:r>
+            <a:endParaRPr lang="en-US" sz="1500" dirty="0"/>
+          </a:p>
+          <a:p>
+            <a:pPr marL="342900" indent="-342900">
+              <a:lnSpc>
+                <a:spcPts val="1980"/>
+              </a:lnSpc>
+              <a:spcAft>
+                <a:spcPts val="900"/>
+              </a:spcAft>
+              <a:buSzPct val="100000"/>
+              <a:buChar char="■"/>
+            </a:pPr>
+            <a:r>
+              <a:rPr lang="en-US" sz="1500" dirty="0">
+                <a:solidFill>
+                  <a:srgbClr val="343B5C"/>
                 </a:solidFill>
                 <a:latin typeface="Calibri" pitchFamily="34" charset="0"/>
                 <a:ea typeface="Calibri" pitchFamily="34" charset="-122"/>
                 <a:cs typeface="Calibri" pitchFamily="34" charset="-120"/>
               </a:rPr>
-              <a:t>The unit every living thing is built from</a:t>
-            </a:r>
-            <a:endParaRPr lang="en-US" sz="1350" dirty="0"/>
-          </a:p>
-        </p:txBody>
-      </p:sp>
-      <p:sp>
-        <p:nvSpPr>
-          <p:cNvPr id="16" name="Shape 14"/>
-          <p:cNvSpPr/>
-          <p:nvPr/>
-        </p:nvSpPr>
-        <p:spPr>
-          <a:xfrm>
-            <a:off x="8220456" y="1938528"/>
-            <a:ext cx="3429000" cy="2148840"/>
-          </a:xfrm>
-          <a:prstGeom prst="rect">
-            <a:avLst/>
-          </a:prstGeom>
-          <a:solidFill>
-            <a:srgbClr val="2E5BD4"/>
-          </a:solidFill>
-          <a:ln/>
-        </p:spPr>
-      </p:sp>
-      <p:sp>
-        <p:nvSpPr>
-          <p:cNvPr id="17" name="Shape 15"/>
-          <p:cNvSpPr/>
-          <p:nvPr/>
-        </p:nvSpPr>
-        <p:spPr>
-          <a:xfrm>
-            <a:off x="8156448" y="1874520"/>
-            <a:ext cx="3429000" cy="2148840"/>
-          </a:xfrm>
-          <a:prstGeom prst="rect">
-            <a:avLst/>
-          </a:prstGeom>
-          <a:solidFill>
-            <a:srgbClr val="F7F2E2"/>
-          </a:solidFill>
-          <a:ln w="19050">
-            <a:solidFill>
-              <a:srgbClr val="1E2340"/>
-            </a:solidFill>
-            <a:prstDash val="solid"/>
-          </a:ln>
-        </p:spPr>
-      </p:sp>
-      <p:sp>
-        <p:nvSpPr>
-          <p:cNvPr id="18" name="Text 16"/>
-          <p:cNvSpPr/>
-          <p:nvPr/>
-        </p:nvSpPr>
-        <p:spPr>
-          <a:xfrm>
-            <a:off x="8412480" y="2103120"/>
-            <a:ext cx="2926080" cy="274320"/>
-          </a:xfrm>
-          <a:prstGeom prst="rect">
-            <a:avLst/>
-          </a:prstGeom>
-          <a:noFill/>
-          <a:ln/>
-        </p:spPr>
-        <p:txBody>
-          <a:bodyPr wrap="square" lIns="0" tIns="0" rIns="0" bIns="0" rtlCol="0" anchor="ctr"/>
+              <a:t>A rail showing how much of the film has been watched, the best quiz score, and what still needs doing.</a:t>
+            </a:r>
+            <a:endParaRPr lang="en-US" sz="1500" dirty="0"/>
+          </a:p>
+        </p:txBody>
+      </p:sp>
+      <p:sp>
+        <p:nvSpPr>
+          <p:cNvPr id="7" name="Text 5"/>
+          <p:cNvSpPr/>
+          <p:nvPr/>
+        </p:nvSpPr>
+        <p:spPr>
+          <a:xfrm>
+            <a:off x="566928" y="4572000"/>
+            <a:ext cx="4114800" cy="822960"/>
+          </a:xfrm>
+          <a:prstGeom prst="rect">
+            <a:avLst/>
+          </a:prstGeom>
+          <a:noFill/>
+          <a:ln/>
+        </p:spPr>
+        <p:txBody>
+          <a:bodyPr wrap="square" lIns="0" tIns="0" rIns="0" bIns="0" rtlCol="0" anchor="t"/>
           <a:lstStyle/>
           <a:p>
             <a:pPr indent="0" marL="0">
               <a:buNone/>
             </a:pPr>
             <a:r>
-              <a:rPr lang="en-US" sz="1250" b="1" dirty="0">
-                <a:solidFill>
-                  <a:srgbClr val="2E5BD4"/>
+              <a:rPr lang="en-US" sz="1350" i="1" dirty="0">
+                <a:solidFill>
+                  <a:srgbClr val="6E7597"/>
                 </a:solidFill>
                 <a:latin typeface="Calibri" pitchFamily="34" charset="0"/>
                 <a:ea typeface="Calibri" pitchFamily="34" charset="-122"/>
                 <a:cs typeface="Calibri" pitchFamily="34" charset="-120"/>
               </a:rPr>
-              <a:t>4 lessons</a:t>
-            </a:r>
-            <a:endParaRPr lang="en-US" sz="1250" dirty="0"/>
-          </a:p>
-        </p:txBody>
-      </p:sp>
-      <p:sp>
-        <p:nvSpPr>
-          <p:cNvPr id="19" name="Text 17"/>
-          <p:cNvSpPr/>
-          <p:nvPr/>
-        </p:nvSpPr>
-        <p:spPr>
-          <a:xfrm>
-            <a:off x="8412480" y="2432304"/>
-            <a:ext cx="2926080" cy="548640"/>
-          </a:xfrm>
-          <a:prstGeom prst="rect">
-            <a:avLst/>
-          </a:prstGeom>
-          <a:noFill/>
-          <a:ln/>
-        </p:spPr>
-        <p:txBody>
-          <a:bodyPr wrap="square" lIns="0" tIns="0" rIns="0" bIns="0" rtlCol="0" anchor="ctr"/>
-          <a:lstStyle/>
-          <a:p>
-            <a:pPr indent="0" marL="0">
-              <a:buNone/>
-            </a:pPr>
-            <a:r>
-              <a:rPr lang="en-US" sz="2100" b="1" dirty="0">
-                <a:solidFill>
-                  <a:srgbClr val="1E2340"/>
-                </a:solidFill>
-                <a:latin typeface="Arial" pitchFamily="34" charset="0"/>
-                <a:ea typeface="Arial" pitchFamily="34" charset="-122"/>
-                <a:cs typeface="Arial" pitchFamily="34" charset="-120"/>
-              </a:rPr>
-              <a:t>Force and Motion</a:t>
-            </a:r>
-            <a:endParaRPr lang="en-US" sz="2100" dirty="0"/>
-          </a:p>
-        </p:txBody>
-      </p:sp>
-      <p:sp>
-        <p:nvSpPr>
-          <p:cNvPr id="20" name="Text 18"/>
-          <p:cNvSpPr/>
-          <p:nvPr/>
-        </p:nvSpPr>
-        <p:spPr>
-          <a:xfrm>
-            <a:off x="8412480" y="3035808"/>
-            <a:ext cx="2926080" cy="777240"/>
-          </a:xfrm>
-          <a:prstGeom prst="rect">
-            <a:avLst/>
-          </a:prstGeom>
-          <a:noFill/>
-          <a:ln/>
-        </p:spPr>
-        <p:txBody>
-          <a:bodyPr wrap="square" lIns="0" tIns="0" rIns="0" bIns="0" rtlCol="0" anchor="ctr"/>
-          <a:lstStyle/>
-          <a:p>
-            <a:pPr indent="0" marL="0">
-              <a:buNone/>
-            </a:pPr>
-            <a:r>
-              <a:rPr lang="en-US" sz="1350" dirty="0">
-                <a:solidFill>
-                  <a:srgbClr val="6E7597"/>
-                </a:solidFill>
-                <a:latin typeface="Calibri" pitchFamily="34" charset="0"/>
-                <a:ea typeface="Calibri" pitchFamily="34" charset="-122"/>
-                <a:cs typeface="Calibri" pitchFamily="34" charset="-120"/>
-              </a:rPr>
-              <a:t>Pushes, pulls, pressure and speed</a:t>
+              <a:t>Nothing is locked. Learners move freely, and that freedom is itself visible in the data.</a:t>
             </a:r>
             <a:endParaRPr lang="en-US" sz="1350" dirty="0"/>
           </a:p>
         </p:txBody>
       </p:sp>
-      <p:sp>
-        <p:nvSpPr>
-          <p:cNvPr id="21" name="Text 19"/>
-          <p:cNvSpPr/>
-          <p:nvPr/>
-        </p:nvSpPr>
-        <p:spPr>
-          <a:xfrm>
-            <a:off x="566928" y="4343400"/>
-            <a:ext cx="10515600" cy="457200"/>
-          </a:xfrm>
-          <a:prstGeom prst="rect">
-            <a:avLst/>
-          </a:prstGeom>
-          <a:noFill/>
-          <a:ln/>
-        </p:spPr>
-        <p:txBody>
-          <a:bodyPr wrap="square" lIns="0" tIns="0" rIns="0" bIns="0" rtlCol="0" anchor="ctr"/>
-          <a:lstStyle/>
-          <a:p>
-            <a:pPr indent="0" marL="0">
-              <a:buNone/>
-            </a:pPr>
-            <a:r>
-              <a:rPr lang="en-US" sz="1500" dirty="0">
-                <a:solidFill>
-                  <a:srgbClr val="343B5C"/>
-                </a:solidFill>
-                <a:latin typeface="Calibri" pitchFamily="34" charset="0"/>
-                <a:ea typeface="Calibri" pitchFamily="34" charset="-122"/>
-                <a:cs typeface="Calibri" pitchFamily="34" charset="-120"/>
-              </a:rPr>
-              <a:t>Aligned to the NCERT syllabus for Classes 8 and 9. Every lesson combines a reading with drawn figures, a video, and a quiz.</a:t>
-            </a:r>
-            <a:endParaRPr lang="en-US" sz="1500" dirty="0"/>
-          </a:p>
-        </p:txBody>
-      </p:sp>
-      <p:sp>
-        <p:nvSpPr>
-          <p:cNvPr id="22" name="Shape 20"/>
-          <p:cNvSpPr/>
-          <p:nvPr/>
-        </p:nvSpPr>
-        <p:spPr>
-          <a:xfrm>
-            <a:off x="630936" y="5093208"/>
-            <a:ext cx="2468880" cy="1170432"/>
-          </a:xfrm>
-          <a:prstGeom prst="rect">
-            <a:avLst/>
-          </a:prstGeom>
-          <a:solidFill>
-            <a:srgbClr val="E8763C"/>
-          </a:solidFill>
-          <a:ln/>
-        </p:spPr>
-      </p:sp>
-      <p:sp>
-        <p:nvSpPr>
-          <p:cNvPr id="23" name="Shape 21"/>
-          <p:cNvSpPr/>
-          <p:nvPr/>
-        </p:nvSpPr>
-        <p:spPr>
-          <a:xfrm>
-            <a:off x="566928" y="5029200"/>
-            <a:ext cx="2468880" cy="1170432"/>
-          </a:xfrm>
-          <a:prstGeom prst="rect">
-            <a:avLst/>
-          </a:prstGeom>
-          <a:solidFill>
-            <a:srgbClr val="F7F2E2"/>
-          </a:solidFill>
-          <a:ln w="19050">
-            <a:solidFill>
-              <a:srgbClr val="1E2340"/>
-            </a:solidFill>
-            <a:prstDash val="solid"/>
-          </a:ln>
-        </p:spPr>
-      </p:sp>
-      <p:sp>
-        <p:nvSpPr>
-          <p:cNvPr id="24" name="Text 22"/>
-          <p:cNvSpPr/>
-          <p:nvPr/>
-        </p:nvSpPr>
-        <p:spPr>
-          <a:xfrm>
-            <a:off x="768096" y="5157216"/>
-            <a:ext cx="2066544" cy="566928"/>
-          </a:xfrm>
-          <a:prstGeom prst="rect">
-            <a:avLst/>
-          </a:prstGeom>
-          <a:noFill/>
-          <a:ln/>
-        </p:spPr>
-        <p:txBody>
-          <a:bodyPr wrap="square" lIns="0" tIns="0" rIns="0" bIns="0" rtlCol="0" anchor="ctr"/>
-          <a:lstStyle/>
-          <a:p>
-            <a:pPr indent="0" marL="0">
-              <a:buNone/>
-            </a:pPr>
-            <a:r>
-              <a:rPr lang="en-US" sz="3000" b="1" dirty="0">
-                <a:solidFill>
-                  <a:srgbClr val="1E2340"/>
-                </a:solidFill>
-                <a:latin typeface="Arial" pitchFamily="34" charset="0"/>
-                <a:ea typeface="Arial" pitchFamily="34" charset="-122"/>
-                <a:cs typeface="Arial" pitchFamily="34" charset="-120"/>
-              </a:rPr>
-              <a:t>13</a:t>
-            </a:r>
-            <a:endParaRPr lang="en-US" sz="3000" dirty="0"/>
-          </a:p>
-        </p:txBody>
-      </p:sp>
-      <p:sp>
-        <p:nvSpPr>
-          <p:cNvPr id="25" name="Text 23"/>
-          <p:cNvSpPr/>
-          <p:nvPr/>
-        </p:nvSpPr>
-        <p:spPr>
-          <a:xfrm>
-            <a:off x="768096" y="5742432"/>
-            <a:ext cx="2066544" cy="347472"/>
-          </a:xfrm>
-          <a:prstGeom prst="rect">
-            <a:avLst/>
-          </a:prstGeom>
-          <a:noFill/>
-          <a:ln/>
-        </p:spPr>
-        <p:txBody>
-          <a:bodyPr wrap="square" lIns="0" tIns="0" rIns="0" bIns="0" rtlCol="0" anchor="ctr"/>
-          <a:lstStyle/>
-          <a:p>
-            <a:pPr indent="0" marL="0">
-              <a:buNone/>
-            </a:pPr>
-            <a:r>
-              <a:rPr lang="en-US" sz="1250" dirty="0">
-                <a:solidFill>
-                  <a:srgbClr val="6E7597"/>
-                </a:solidFill>
-                <a:latin typeface="Calibri" pitchFamily="34" charset="0"/>
-                <a:ea typeface="Calibri" pitchFamily="34" charset="-122"/>
-                <a:cs typeface="Calibri" pitchFamily="34" charset="-120"/>
-              </a:rPr>
-              <a:t>lessons</a:t>
-            </a:r>
-            <a:endParaRPr lang="en-US" sz="1250" dirty="0"/>
-          </a:p>
-        </p:txBody>
-      </p:sp>
-      <p:sp>
-        <p:nvSpPr>
-          <p:cNvPr id="26" name="Shape 24"/>
-          <p:cNvSpPr/>
-          <p:nvPr/>
-        </p:nvSpPr>
-        <p:spPr>
-          <a:xfrm>
-            <a:off x="3419856" y="5093208"/>
-            <a:ext cx="2468880" cy="1170432"/>
-          </a:xfrm>
-          <a:prstGeom prst="rect">
-            <a:avLst/>
-          </a:prstGeom>
-          <a:solidFill>
-            <a:srgbClr val="2E5BD4"/>
-          </a:solidFill>
-          <a:ln/>
-        </p:spPr>
-      </p:sp>
-      <p:sp>
-        <p:nvSpPr>
-          <p:cNvPr id="27" name="Shape 25"/>
-          <p:cNvSpPr/>
-          <p:nvPr/>
-        </p:nvSpPr>
-        <p:spPr>
-          <a:xfrm>
-            <a:off x="3355848" y="5029200"/>
-            <a:ext cx="2468880" cy="1170432"/>
-          </a:xfrm>
-          <a:prstGeom prst="rect">
-            <a:avLst/>
-          </a:prstGeom>
-          <a:solidFill>
-            <a:srgbClr val="F7F2E2"/>
-          </a:solidFill>
-          <a:ln w="19050">
-            <a:solidFill>
-              <a:srgbClr val="1E2340"/>
-            </a:solidFill>
-            <a:prstDash val="solid"/>
-          </a:ln>
-        </p:spPr>
-      </p:sp>
-      <p:sp>
-        <p:nvSpPr>
-          <p:cNvPr id="28" name="Text 26"/>
-          <p:cNvSpPr/>
-          <p:nvPr/>
-        </p:nvSpPr>
-        <p:spPr>
-          <a:xfrm>
-            <a:off x="3557016" y="5157216"/>
-            <a:ext cx="2066544" cy="566928"/>
-          </a:xfrm>
-          <a:prstGeom prst="rect">
-            <a:avLst/>
-          </a:prstGeom>
-          <a:noFill/>
-          <a:ln/>
-        </p:spPr>
-        <p:txBody>
-          <a:bodyPr wrap="square" lIns="0" tIns="0" rIns="0" bIns="0" rtlCol="0" anchor="ctr"/>
-          <a:lstStyle/>
-          <a:p>
-            <a:pPr indent="0" marL="0">
-              <a:buNone/>
-            </a:pPr>
-            <a:r>
-              <a:rPr lang="en-US" sz="3000" b="1" dirty="0">
-                <a:solidFill>
-                  <a:srgbClr val="1E2340"/>
-                </a:solidFill>
-                <a:latin typeface="Arial" pitchFamily="34" charset="0"/>
-                <a:ea typeface="Arial" pitchFamily="34" charset="-122"/>
-                <a:cs typeface="Arial" pitchFamily="34" charset="-120"/>
-              </a:rPr>
-              <a:t>70</a:t>
-            </a:r>
-            <a:endParaRPr lang="en-US" sz="3000" dirty="0"/>
-          </a:p>
-        </p:txBody>
-      </p:sp>
-      <p:sp>
-        <p:nvSpPr>
-          <p:cNvPr id="29" name="Text 27"/>
-          <p:cNvSpPr/>
-          <p:nvPr/>
-        </p:nvSpPr>
-        <p:spPr>
-          <a:xfrm>
-            <a:off x="3557016" y="5742432"/>
-            <a:ext cx="2066544" cy="347472"/>
-          </a:xfrm>
-          <a:prstGeom prst="rect">
-            <a:avLst/>
-          </a:prstGeom>
-          <a:noFill/>
-          <a:ln/>
-        </p:spPr>
-        <p:txBody>
-          <a:bodyPr wrap="square" lIns="0" tIns="0" rIns="0" bIns="0" rtlCol="0" anchor="ctr"/>
-          <a:lstStyle/>
-          <a:p>
-            <a:pPr indent="0" marL="0">
-              <a:buNone/>
-            </a:pPr>
-            <a:r>
-              <a:rPr lang="en-US" sz="1250" dirty="0">
-                <a:solidFill>
-                  <a:srgbClr val="6E7597"/>
-                </a:solidFill>
-                <a:latin typeface="Calibri" pitchFamily="34" charset="0"/>
-                <a:ea typeface="Calibri" pitchFamily="34" charset="-122"/>
-                <a:cs typeface="Calibri" pitchFamily="34" charset="-120"/>
-              </a:rPr>
-              <a:t>questions</a:t>
-            </a:r>
-            <a:endParaRPr lang="en-US" sz="1250" dirty="0"/>
-          </a:p>
-        </p:txBody>
-      </p:sp>
-      <p:sp>
-        <p:nvSpPr>
-          <p:cNvPr id="30" name="Shape 28"/>
-          <p:cNvSpPr/>
-          <p:nvPr/>
-        </p:nvSpPr>
-        <p:spPr>
-          <a:xfrm>
-            <a:off x="6208776" y="5093208"/>
-            <a:ext cx="2468880" cy="1170432"/>
-          </a:xfrm>
-          <a:prstGeom prst="rect">
-            <a:avLst/>
-          </a:prstGeom>
-          <a:solidFill>
-            <a:srgbClr val="E8763C"/>
-          </a:solidFill>
-          <a:ln/>
-        </p:spPr>
-      </p:sp>
-      <p:sp>
-        <p:nvSpPr>
-          <p:cNvPr id="31" name="Shape 29"/>
-          <p:cNvSpPr/>
-          <p:nvPr/>
-        </p:nvSpPr>
-        <p:spPr>
-          <a:xfrm>
-            <a:off x="6144768" y="5029200"/>
-            <a:ext cx="2468880" cy="1170432"/>
-          </a:xfrm>
-          <a:prstGeom prst="rect">
-            <a:avLst/>
-          </a:prstGeom>
-          <a:solidFill>
-            <a:srgbClr val="F7F2E2"/>
-          </a:solidFill>
-          <a:ln w="19050">
-            <a:solidFill>
-              <a:srgbClr val="1E2340"/>
-            </a:solidFill>
-            <a:prstDash val="solid"/>
-          </a:ln>
-        </p:spPr>
-      </p:sp>
-      <p:sp>
-        <p:nvSpPr>
-          <p:cNvPr id="32" name="Text 30"/>
-          <p:cNvSpPr/>
-          <p:nvPr/>
-        </p:nvSpPr>
-        <p:spPr>
-          <a:xfrm>
-            <a:off x="6345936" y="5157216"/>
-            <a:ext cx="2066544" cy="566928"/>
-          </a:xfrm>
-          <a:prstGeom prst="rect">
-            <a:avLst/>
-          </a:prstGeom>
-          <a:noFill/>
-          <a:ln/>
-        </p:spPr>
-        <p:txBody>
-          <a:bodyPr wrap="square" lIns="0" tIns="0" rIns="0" bIns="0" rtlCol="0" anchor="ctr"/>
-          <a:lstStyle/>
-          <a:p>
-            <a:pPr indent="0" marL="0">
-              <a:buNone/>
-            </a:pPr>
-            <a:r>
-              <a:rPr lang="en-US" sz="3000" b="1" dirty="0">
-                <a:solidFill>
-                  <a:srgbClr val="1E2340"/>
-                </a:solidFill>
-                <a:latin typeface="Arial" pitchFamily="34" charset="0"/>
-                <a:ea typeface="Arial" pitchFamily="34" charset="-122"/>
-                <a:cs typeface="Arial" pitchFamily="34" charset="-120"/>
-              </a:rPr>
-              <a:t>12</a:t>
-            </a:r>
-            <a:endParaRPr lang="en-US" sz="3000" dirty="0"/>
-          </a:p>
-        </p:txBody>
-      </p:sp>
-      <p:sp>
-        <p:nvSpPr>
-          <p:cNvPr id="33" name="Text 31"/>
-          <p:cNvSpPr/>
-          <p:nvPr/>
-        </p:nvSpPr>
-        <p:spPr>
-          <a:xfrm>
-            <a:off x="6345936" y="5742432"/>
-            <a:ext cx="2066544" cy="347472"/>
-          </a:xfrm>
-          <a:prstGeom prst="rect">
-            <a:avLst/>
-          </a:prstGeom>
-          <a:noFill/>
-          <a:ln/>
-        </p:spPr>
-        <p:txBody>
-          <a:bodyPr wrap="square" lIns="0" tIns="0" rIns="0" bIns="0" rtlCol="0" anchor="ctr"/>
-          <a:lstStyle/>
-          <a:p>
-            <a:pPr indent="0" marL="0">
-              <a:buNone/>
-            </a:pPr>
-            <a:r>
-              <a:rPr lang="en-US" sz="1250" dirty="0">
-                <a:solidFill>
-                  <a:srgbClr val="6E7597"/>
-                </a:solidFill>
-                <a:latin typeface="Calibri" pitchFamily="34" charset="0"/>
-                <a:ea typeface="Calibri" pitchFamily="34" charset="-122"/>
-                <a:cs typeface="Calibri" pitchFamily="34" charset="-120"/>
-              </a:rPr>
-              <a:t>drawn figures</a:t>
-            </a:r>
-            <a:endParaRPr lang="en-US" sz="1250" dirty="0"/>
-          </a:p>
-        </p:txBody>
-      </p:sp>
-      <p:sp>
-        <p:nvSpPr>
-          <p:cNvPr id="34" name="Shape 32"/>
-          <p:cNvSpPr/>
-          <p:nvPr/>
-        </p:nvSpPr>
-        <p:spPr>
-          <a:xfrm>
-            <a:off x="8997696" y="5093208"/>
-            <a:ext cx="2468880" cy="1170432"/>
-          </a:xfrm>
-          <a:prstGeom prst="rect">
-            <a:avLst/>
-          </a:prstGeom>
-          <a:solidFill>
-            <a:srgbClr val="2E5BD4"/>
-          </a:solidFill>
-          <a:ln/>
-        </p:spPr>
-      </p:sp>
-      <p:sp>
-        <p:nvSpPr>
-          <p:cNvPr id="35" name="Shape 33"/>
-          <p:cNvSpPr/>
-          <p:nvPr/>
-        </p:nvSpPr>
-        <p:spPr>
-          <a:xfrm>
-            <a:off x="8933688" y="5029200"/>
-            <a:ext cx="2468880" cy="1170432"/>
-          </a:xfrm>
-          <a:prstGeom prst="rect">
-            <a:avLst/>
-          </a:prstGeom>
-          <a:solidFill>
-            <a:srgbClr val="F7F2E2"/>
-          </a:solidFill>
-          <a:ln w="19050">
-            <a:solidFill>
-              <a:srgbClr val="1E2340"/>
-            </a:solidFill>
-            <a:prstDash val="solid"/>
-          </a:ln>
-        </p:spPr>
-      </p:sp>
-      <p:sp>
-        <p:nvSpPr>
-          <p:cNvPr id="36" name="Text 34"/>
-          <p:cNvSpPr/>
-          <p:nvPr/>
-        </p:nvSpPr>
-        <p:spPr>
-          <a:xfrm>
-            <a:off x="9134856" y="5157216"/>
-            <a:ext cx="2066544" cy="566928"/>
-          </a:xfrm>
-          <a:prstGeom prst="rect">
-            <a:avLst/>
-          </a:prstGeom>
-          <a:noFill/>
-          <a:ln/>
-        </p:spPr>
-        <p:txBody>
-          <a:bodyPr wrap="square" lIns="0" tIns="0" rIns="0" bIns="0" rtlCol="0" anchor="ctr"/>
-          <a:lstStyle/>
-          <a:p>
-            <a:pPr indent="0" marL="0">
-              <a:buNone/>
-            </a:pPr>
-            <a:r>
-              <a:rPr lang="en-US" sz="3000" b="1" dirty="0">
-                <a:solidFill>
-                  <a:srgbClr val="1E2340"/>
-                </a:solidFill>
-                <a:latin typeface="Arial" pitchFamily="34" charset="0"/>
-                <a:ea typeface="Arial" pitchFamily="34" charset="-122"/>
-                <a:cs typeface="Arial" pitchFamily="34" charset="-120"/>
-              </a:rPr>
-              <a:t>13</a:t>
-            </a:r>
-            <a:endParaRPr lang="en-US" sz="3000" dirty="0"/>
-          </a:p>
-        </p:txBody>
-      </p:sp>
-      <p:sp>
-        <p:nvSpPr>
-          <p:cNvPr id="37" name="Text 35"/>
-          <p:cNvSpPr/>
-          <p:nvPr/>
-        </p:nvSpPr>
-        <p:spPr>
-          <a:xfrm>
-            <a:off x="9134856" y="5742432"/>
-            <a:ext cx="2066544" cy="347472"/>
-          </a:xfrm>
-          <a:prstGeom prst="rect">
-            <a:avLst/>
-          </a:prstGeom>
-          <a:noFill/>
-          <a:ln/>
-        </p:spPr>
-        <p:txBody>
-          <a:bodyPr wrap="square" lIns="0" tIns="0" rIns="0" bIns="0" rtlCol="0" anchor="ctr"/>
-          <a:lstStyle/>
-          <a:p>
-            <a:pPr indent="0" marL="0">
-              <a:buNone/>
-            </a:pPr>
-            <a:r>
-              <a:rPr lang="en-US" sz="1250" dirty="0">
-                <a:solidFill>
-                  <a:srgbClr val="6E7597"/>
-                </a:solidFill>
-                <a:latin typeface="Calibri" pitchFamily="34" charset="0"/>
-                <a:ea typeface="Calibri" pitchFamily="34" charset="-122"/>
-                <a:cs typeface="Calibri" pitchFamily="34" charset="-120"/>
-              </a:rPr>
-              <a:t>lesson videos</a:t>
-            </a:r>
-            <a:endParaRPr lang="en-US" sz="1250" dirty="0"/>
-          </a:p>
-        </p:txBody>
-      </p:sp>
+      <p:pic>
+        <p:nvPicPr>
+          <p:cNvPr id="8" name="Image 0" descr="/Users/ndstab/Desktop/et/docs/screens/lesson.png">    </p:cNvPr>
+          <p:cNvPicPr>
+            <a:picLocks noChangeAspect="1"/>
+          </p:cNvPicPr>
+          <p:nvPr/>
+        </p:nvPicPr>
+        <p:blipFill>
+          <a:blip r:embed="rId1"/>
+          <a:stretch>
+            <a:fillRect/>
+          </a:stretch>
+        </p:blipFill>
+        <p:spPr>
+          <a:xfrm>
+            <a:off x="5074920" y="1783080"/>
+            <a:ext cx="5684955" cy="4663440"/>
+          </a:xfrm>
+          <a:prstGeom prst="rect">
+            <a:avLst/>
+          </a:prstGeom>
+          <a:effectLst>
+            <a:outerShdw sx="100000" sy="100000" kx="0" ky="0" algn="bl" rotWithShape="0" blurRad="101600" dist="889" dir="2700000">
+              <a:srgbClr val="1E2340">
+                <a:alpha val="100000"/>
+              </a:srgbClr>
+            </a:outerShdw>
+          </a:effectLst>
+        </p:spPr>
+      </p:pic>
     </p:spTree>
   </p:cSld>
   <p:clrMapOvr>
@@ -7811,7 +6743,7 @@
           <a:ln/>
         </p:spPr>
         <p:txBody>
-          <a:bodyPr wrap="square" lIns="0" tIns="0" rIns="0" bIns="0" rtlCol="0" anchor="ctr"/>
+          <a:bodyPr wrap="square" lIns="0" tIns="0" rIns="0" bIns="0" rtlCol="0" anchor="t"/>
           <a:lstStyle/>
           <a:p>
             <a:pPr indent="0" marL="0">
@@ -7826,7 +6758,7 @@
                 <a:ea typeface="Calibri" pitchFamily="34" charset="-122"/>
                 <a:cs typeface="Calibri" pitchFamily="34" charset="-120"/>
               </a:rPr>
-              <a:t>The learner view</a:t>
+              <a:t>The quiz</a:t>
             </a:r>
             <a:endParaRPr lang="en-US" sz="1300" dirty="0"/>
           </a:p>
@@ -7841,16 +6773,16 @@
         <p:spPr>
           <a:xfrm>
             <a:off x="566928" y="841248"/>
-            <a:ext cx="11057839" cy="777240"/>
-          </a:xfrm>
-          <a:prstGeom prst="rect">
-            <a:avLst/>
-          </a:prstGeom>
-          <a:noFill/>
-          <a:ln/>
-        </p:spPr>
-        <p:txBody>
-          <a:bodyPr wrap="square" lIns="0" tIns="0" rIns="0" bIns="0" rtlCol="0" anchor="ctr"/>
+            <a:ext cx="11057839" cy="658368"/>
+          </a:xfrm>
+          <a:prstGeom prst="rect">
+            <a:avLst/>
+          </a:prstGeom>
+          <a:noFill/>
+          <a:ln/>
+        </p:spPr>
+        <p:txBody>
+          <a:bodyPr wrap="square" lIns="0" tIns="0" rIns="0" bIns="0" rtlCol="0" anchor="t"/>
           <a:lstStyle/>
           <a:p>
             <a:pPr indent="0" marL="0">
@@ -7865,7 +6797,7 @@
                 <a:ea typeface="Arial" pitchFamily="34" charset="-122"/>
                 <a:cs typeface="Arial" pitchFamily="34" charset="-120"/>
               </a:rPr>
-              <a:t>A lesson is three kinds of content</a:t>
+              <a:t>Quizzes that explain, not just mark</a:t>
             </a:r>
             <a:endParaRPr lang="en-US" sz="3400" dirty="0"/>
           </a:p>
@@ -7879,17 +6811,17 @@
         </p:nvSpPr>
         <p:spPr>
           <a:xfrm>
-            <a:off x="566928" y="1874520"/>
-            <a:ext cx="4114800" cy="2377440"/>
-          </a:xfrm>
-          <a:prstGeom prst="rect">
-            <a:avLst/>
-          </a:prstGeom>
-          <a:noFill/>
-          <a:ln/>
-        </p:spPr>
-        <p:txBody>
-          <a:bodyPr wrap="square" lIns="0" tIns="0" rIns="0" bIns="0" rtlCol="0" anchor="ctr"/>
+            <a:off x="566928" y="1828800"/>
+            <a:ext cx="4206240" cy="2560320"/>
+          </a:xfrm>
+          <a:prstGeom prst="rect">
+            <a:avLst/>
+          </a:prstGeom>
+          <a:noFill/>
+          <a:ln/>
+        </p:spPr>
+        <p:txBody>
+          <a:bodyPr wrap="square" lIns="0" tIns="0" rIns="0" bIns="0" rtlCol="0" anchor="t"/>
           <a:lstStyle/>
           <a:p>
             <a:pPr marL="342900" indent="-342900">
@@ -7911,7 +6843,7 @@
                 <a:ea typeface="Calibri" pitchFamily="34" charset="-122"/>
                 <a:cs typeface="Calibri" pitchFamily="34" charset="-120"/>
               </a:rPr>
-              <a:t>A reading, with figures hand-built as SVG to correct geometry.</a:t>
+              <a:t>Three question types: single answer, select all that apply, and numeric entry.</a:t>
             </a:r>
             <a:endParaRPr lang="en-US" sz="1500" dirty="0"/>
           </a:p>
@@ -7935,7 +6867,7 @@
                 <a:ea typeface="Calibri" pitchFamily="34" charset="-122"/>
                 <a:cs typeface="Calibri" pitchFamily="34" charset="-120"/>
               </a:rPr>
-              <a:t>A video in a player written for this app, not an embed.</a:t>
+              <a:t>Graded on the server, so the answers are never sitting in the page.</a:t>
             </a:r>
             <a:endParaRPr lang="en-US" sz="1500" dirty="0"/>
           </a:p>
@@ -7959,7 +6891,7 @@
                 <a:ea typeface="Calibri" pitchFamily="34" charset="-122"/>
                 <a:cs typeface="Calibri" pitchFamily="34" charset="-120"/>
               </a:rPr>
-              <a:t>A quiz graded on the server, which explains either way.</a:t>
+              <a:t>The explanation appears whether the answer was right or wrong.</a:t>
             </a:r>
             <a:endParaRPr lang="en-US" sz="1500" dirty="0"/>
           </a:p>
@@ -7983,7 +6915,7 @@
                 <a:ea typeface="Calibri" pitchFamily="34" charset="-122"/>
                 <a:cs typeface="Calibri" pitchFamily="34" charset="-120"/>
               </a:rPr>
-              <a:t>Progress in the rail: video watched, best score, what completes the lesson.</a:t>
+              <a:t>Unlimited retakes, and every attempt is stored separately.</a:t>
             </a:r>
             <a:endParaRPr lang="en-US" sz="1500" dirty="0"/>
           </a:p>
@@ -7991,30 +6923,114 @@
       </p:sp>
       <p:sp>
         <p:nvSpPr>
-          <p:cNvPr id="7" name="Text 5"/>
-          <p:cNvSpPr/>
-          <p:nvPr/>
-        </p:nvSpPr>
-        <p:spPr>
-          <a:xfrm>
-            <a:off x="566928" y="4572000"/>
-            <a:ext cx="4114800" cy="822960"/>
-          </a:xfrm>
-          <a:prstGeom prst="rect">
-            <a:avLst/>
-          </a:prstGeom>
-          <a:noFill/>
-          <a:ln/>
-        </p:spPr>
-        <p:txBody>
-          <a:bodyPr wrap="square" lIns="0" tIns="0" rIns="0" bIns="0" rtlCol="0" anchor="ctr"/>
+          <p:cNvPr id="7" name="Shape 5"/>
+          <p:cNvSpPr/>
+          <p:nvPr/>
+        </p:nvSpPr>
+        <p:spPr>
+          <a:xfrm>
+            <a:off x="630936" y="4773168"/>
+            <a:ext cx="2011680" cy="1133856"/>
+          </a:xfrm>
+          <a:prstGeom prst="rect">
+            <a:avLst/>
+          </a:prstGeom>
+          <a:solidFill>
+            <a:srgbClr val="2E5BD4"/>
+          </a:solidFill>
+          <a:ln/>
+        </p:spPr>
+      </p:sp>
+      <p:sp>
+        <p:nvSpPr>
+          <p:cNvPr id="8" name="Shape 6"/>
+          <p:cNvSpPr/>
+          <p:nvPr/>
+        </p:nvSpPr>
+        <p:spPr>
+          <a:xfrm>
+            <a:off x="566928" y="4709160"/>
+            <a:ext cx="2011680" cy="1133856"/>
+          </a:xfrm>
+          <a:prstGeom prst="rect">
+            <a:avLst/>
+          </a:prstGeom>
+          <a:solidFill>
+            <a:srgbClr val="F7F2E2"/>
+          </a:solidFill>
+          <a:ln w="19050">
+            <a:solidFill>
+              <a:srgbClr val="1E2340"/>
+            </a:solidFill>
+            <a:prstDash val="solid"/>
+          </a:ln>
+        </p:spPr>
+      </p:sp>
+      <p:sp>
+        <p:nvSpPr>
+          <p:cNvPr id="9" name="Text 7"/>
+          <p:cNvSpPr/>
+          <p:nvPr/>
+        </p:nvSpPr>
+        <p:spPr>
+          <a:xfrm>
+            <a:off x="768096" y="4828032"/>
+            <a:ext cx="1609344" cy="548640"/>
+          </a:xfrm>
+          <a:prstGeom prst="rect">
+            <a:avLst/>
+          </a:prstGeom>
+          <a:noFill/>
+          <a:ln/>
+        </p:spPr>
+        <p:txBody>
+          <a:bodyPr wrap="square" lIns="0" tIns="0" rIns="0" bIns="0" rtlCol="0" anchor="t"/>
           <a:lstStyle/>
           <a:p>
             <a:pPr indent="0" marL="0">
               <a:buNone/>
             </a:pPr>
             <a:r>
-              <a:rPr lang="en-US" sz="1300" i="1" dirty="0">
+              <a:rPr lang="en-US" sz="2800" b="1" dirty="0">
+                <a:solidFill>
+                  <a:srgbClr val="1E2340"/>
+                </a:solidFill>
+                <a:latin typeface="Arial" pitchFamily="34" charset="0"/>
+                <a:ea typeface="Arial" pitchFamily="34" charset="-122"/>
+                <a:cs typeface="Arial" pitchFamily="34" charset="-120"/>
+              </a:rPr>
+              <a:t>88</a:t>
+            </a:r>
+            <a:endParaRPr lang="en-US" sz="2800" dirty="0"/>
+          </a:p>
+        </p:txBody>
+      </p:sp>
+      <p:sp>
+        <p:nvSpPr>
+          <p:cNvPr id="10" name="Text 8"/>
+          <p:cNvSpPr/>
+          <p:nvPr/>
+        </p:nvSpPr>
+        <p:spPr>
+          <a:xfrm>
+            <a:off x="768096" y="5404104"/>
+            <a:ext cx="1609344" cy="347472"/>
+          </a:xfrm>
+          <a:prstGeom prst="rect">
+            <a:avLst/>
+          </a:prstGeom>
+          <a:noFill/>
+          <a:ln/>
+        </p:spPr>
+        <p:txBody>
+          <a:bodyPr wrap="square" lIns="0" tIns="0" rIns="0" bIns="0" rtlCol="0" anchor="t"/>
+          <a:lstStyle/>
+          <a:p>
+            <a:pPr indent="0" marL="0">
+              <a:buNone/>
+            </a:pPr>
+            <a:r>
+              <a:rPr lang="en-US" sz="1250" dirty="0">
                 <a:solidFill>
                   <a:srgbClr val="6E7597"/>
                 </a:solidFill>
@@ -8022,15 +7038,138 @@
                 <a:ea typeface="Calibri" pitchFamily="34" charset="-122"/>
                 <a:cs typeface="Calibri" pitchFamily="34" charset="-120"/>
               </a:rPr>
-              <a:t>Free navigation. Nothing is locked, which also makes abandonment visible in the data.</a:t>
-            </a:r>
-            <a:endParaRPr lang="en-US" sz="1300" dirty="0"/>
+              <a:t>attempts recorded</a:t>
+            </a:r>
+            <a:endParaRPr lang="en-US" sz="1250" dirty="0"/>
+          </a:p>
+        </p:txBody>
+      </p:sp>
+      <p:sp>
+        <p:nvSpPr>
+          <p:cNvPr id="11" name="Shape 9"/>
+          <p:cNvSpPr/>
+          <p:nvPr/>
+        </p:nvSpPr>
+        <p:spPr>
+          <a:xfrm>
+            <a:off x="2825496" y="4773168"/>
+            <a:ext cx="2011680" cy="1133856"/>
+          </a:xfrm>
+          <a:prstGeom prst="rect">
+            <a:avLst/>
+          </a:prstGeom>
+          <a:solidFill>
+            <a:srgbClr val="E8763C"/>
+          </a:solidFill>
+          <a:ln/>
+        </p:spPr>
+      </p:sp>
+      <p:sp>
+        <p:nvSpPr>
+          <p:cNvPr id="12" name="Shape 10"/>
+          <p:cNvSpPr/>
+          <p:nvPr/>
+        </p:nvSpPr>
+        <p:spPr>
+          <a:xfrm>
+            <a:off x="2761488" y="4709160"/>
+            <a:ext cx="2011680" cy="1133856"/>
+          </a:xfrm>
+          <a:prstGeom prst="rect">
+            <a:avLst/>
+          </a:prstGeom>
+          <a:solidFill>
+            <a:srgbClr val="F7F2E2"/>
+          </a:solidFill>
+          <a:ln w="19050">
+            <a:solidFill>
+              <a:srgbClr val="1E2340"/>
+            </a:solidFill>
+            <a:prstDash val="solid"/>
+          </a:ln>
+        </p:spPr>
+      </p:sp>
+      <p:sp>
+        <p:nvSpPr>
+          <p:cNvPr id="13" name="Text 11"/>
+          <p:cNvSpPr/>
+          <p:nvPr/>
+        </p:nvSpPr>
+        <p:spPr>
+          <a:xfrm>
+            <a:off x="2962656" y="4828032"/>
+            <a:ext cx="1609344" cy="548640"/>
+          </a:xfrm>
+          <a:prstGeom prst="rect">
+            <a:avLst/>
+          </a:prstGeom>
+          <a:noFill/>
+          <a:ln/>
+        </p:spPr>
+        <p:txBody>
+          <a:bodyPr wrap="square" lIns="0" tIns="0" rIns="0" bIns="0" rtlCol="0" anchor="t"/>
+          <a:lstStyle/>
+          <a:p>
+            <a:pPr indent="0" marL="0">
+              <a:buNone/>
+            </a:pPr>
+            <a:r>
+              <a:rPr lang="en-US" sz="2800" b="1" dirty="0">
+                <a:solidFill>
+                  <a:srgbClr val="1E2340"/>
+                </a:solidFill>
+                <a:latin typeface="Arial" pitchFamily="34" charset="0"/>
+                <a:ea typeface="Arial" pitchFamily="34" charset="-122"/>
+                <a:cs typeface="Arial" pitchFamily="34" charset="-120"/>
+              </a:rPr>
+              <a:t>483</a:t>
+            </a:r>
+            <a:endParaRPr lang="en-US" sz="2800" dirty="0"/>
+          </a:p>
+        </p:txBody>
+      </p:sp>
+      <p:sp>
+        <p:nvSpPr>
+          <p:cNvPr id="14" name="Text 12"/>
+          <p:cNvSpPr/>
+          <p:nvPr/>
+        </p:nvSpPr>
+        <p:spPr>
+          <a:xfrm>
+            <a:off x="2962656" y="5404104"/>
+            <a:ext cx="1609344" cy="347472"/>
+          </a:xfrm>
+          <a:prstGeom prst="rect">
+            <a:avLst/>
+          </a:prstGeom>
+          <a:noFill/>
+          <a:ln/>
+        </p:spPr>
+        <p:txBody>
+          <a:bodyPr wrap="square" lIns="0" tIns="0" rIns="0" bIns="0" rtlCol="0" anchor="t"/>
+          <a:lstStyle/>
+          <a:p>
+            <a:pPr indent="0" marL="0">
+              <a:buNone/>
+            </a:pPr>
+            <a:r>
+              <a:rPr lang="en-US" sz="1250" dirty="0">
+                <a:solidFill>
+                  <a:srgbClr val="6E7597"/>
+                </a:solidFill>
+                <a:latin typeface="Calibri" pitchFamily="34" charset="0"/>
+                <a:ea typeface="Calibri" pitchFamily="34" charset="-122"/>
+                <a:cs typeface="Calibri" pitchFamily="34" charset="-120"/>
+              </a:rPr>
+              <a:t>answers graded</a:t>
+            </a:r>
+            <a:endParaRPr lang="en-US" sz="1250" dirty="0"/>
           </a:p>
         </p:txBody>
       </p:sp>
       <p:pic>
         <p:nvPicPr>
-          <p:cNvPr id="8" name="Image 0" descr="/Users/ndstab/Desktop/et/docs/screens/lesson.png">    </p:cNvPr>
+          <p:cNvPr id="15" name="Image 0" descr="/Users/ndstab/Desktop/et/docs/screens/quiz.png">    </p:cNvPr>
           <p:cNvPicPr>
             <a:picLocks noChangeAspect="1"/>
           </p:cNvPicPr>
@@ -8044,8 +7183,8 @@
         </p:blipFill>
         <p:spPr>
           <a:xfrm>
-            <a:off x="5074920" y="1783080"/>
-            <a:ext cx="5684955" cy="4663440"/>
+            <a:off x="5166360" y="1783080"/>
+            <a:ext cx="6372352" cy="4480560"/>
           </a:xfrm>
           <a:prstGeom prst="rect">
             <a:avLst/>
@@ -8070,6 +7209,631 @@
 <file path=ppt/slides/slide6.xml><?xml version="1.0" encoding="utf-8"?>
 <p:sld xmlns:a="http://schemas.openxmlformats.org/drawingml/2006/main" xmlns:r="http://schemas.openxmlformats.org/officeDocument/2006/relationships" xmlns:p="http://schemas.openxmlformats.org/presentationml/2006/main">
   <p:cSld name="Slide 6">
+    <p:bg>
+      <p:bgPr>
+        <a:solidFill>
+          <a:srgbClr val="1E2340"/>
+        </a:solidFill>
+      </p:bgPr>
+    </p:bg>
+    <p:spTree>
+      <p:nvGrpSpPr>
+        <p:cNvPr id="1" name=""/>
+        <p:cNvGrpSpPr/>
+        <p:nvPr/>
+      </p:nvGrpSpPr>
+      <p:grpSpPr>
+        <a:xfrm>
+          <a:off x="0" y="0"/>
+          <a:ext cx="0" cy="0"/>
+          <a:chOff x="0" y="0"/>
+          <a:chExt cx="0" cy="0"/>
+        </a:xfrm>
+      </p:grpSpPr>
+      <p:sp>
+        <p:nvSpPr>
+          <p:cNvPr id="2" name="Shape 0"/>
+          <p:cNvSpPr/>
+          <p:nvPr/>
+        </p:nvSpPr>
+        <p:spPr>
+          <a:xfrm>
+            <a:off x="607162" y="497434"/>
+            <a:ext cx="182880" cy="182880"/>
+          </a:xfrm>
+          <a:prstGeom prst="rect">
+            <a:avLst/>
+          </a:prstGeom>
+          <a:solidFill>
+            <a:srgbClr val="E8763C"/>
+          </a:solidFill>
+          <a:ln/>
+        </p:spPr>
+      </p:sp>
+      <p:sp>
+        <p:nvSpPr>
+          <p:cNvPr id="3" name="Shape 1"/>
+          <p:cNvSpPr/>
+          <p:nvPr/>
+        </p:nvSpPr>
+        <p:spPr>
+          <a:xfrm>
+            <a:off x="566928" y="457200"/>
+            <a:ext cx="182880" cy="182880"/>
+          </a:xfrm>
+          <a:prstGeom prst="rect">
+            <a:avLst/>
+          </a:prstGeom>
+          <a:solidFill>
+            <a:srgbClr val="2E5BD4"/>
+          </a:solidFill>
+          <a:ln w="15875">
+            <a:solidFill>
+              <a:srgbClr val="1E2340"/>
+            </a:solidFill>
+            <a:prstDash val="solid"/>
+          </a:ln>
+        </p:spPr>
+      </p:sp>
+      <p:sp>
+        <p:nvSpPr>
+          <p:cNvPr id="4" name="Text 2"/>
+          <p:cNvSpPr/>
+          <p:nvPr/>
+        </p:nvSpPr>
+        <p:spPr>
+          <a:xfrm>
+            <a:off x="896112" y="411480"/>
+            <a:ext cx="7315200" cy="274320"/>
+          </a:xfrm>
+          <a:prstGeom prst="rect">
+            <a:avLst/>
+          </a:prstGeom>
+          <a:noFill/>
+          <a:ln/>
+        </p:spPr>
+        <p:txBody>
+          <a:bodyPr wrap="square" lIns="0" tIns="0" rIns="0" bIns="0" rtlCol="0" anchor="t"/>
+          <a:lstStyle/>
+          <a:p>
+            <a:pPr indent="0" marL="0">
+              <a:buNone/>
+            </a:pPr>
+            <a:r>
+              <a:rPr lang="en-US" sz="1300" b="1" dirty="0">
+                <a:solidFill>
+                  <a:srgbClr val="E8763C"/>
+                </a:solidFill>
+                <a:latin typeface="Calibri" pitchFamily="34" charset="0"/>
+                <a:ea typeface="Calibri" pitchFamily="34" charset="-122"/>
+                <a:cs typeface="Calibri" pitchFamily="34" charset="-120"/>
+              </a:rPr>
+              <a:t>What the system records</a:t>
+            </a:r>
+            <a:endParaRPr lang="en-US" sz="1300" dirty="0"/>
+          </a:p>
+        </p:txBody>
+      </p:sp>
+      <p:sp>
+        <p:nvSpPr>
+          <p:cNvPr id="5" name="Text 3"/>
+          <p:cNvSpPr/>
+          <p:nvPr/>
+        </p:nvSpPr>
+        <p:spPr>
+          <a:xfrm>
+            <a:off x="566928" y="841248"/>
+            <a:ext cx="11057839" cy="566928"/>
+          </a:xfrm>
+          <a:prstGeom prst="rect">
+            <a:avLst/>
+          </a:prstGeom>
+          <a:noFill/>
+          <a:ln/>
+        </p:spPr>
+        <p:txBody>
+          <a:bodyPr wrap="square" lIns="0" tIns="0" rIns="0" bIns="0" rtlCol="0" anchor="t"/>
+          <a:lstStyle/>
+          <a:p>
+            <a:pPr indent="0" marL="0">
+              <a:buNone/>
+            </a:pPr>
+            <a:r>
+              <a:rPr lang="en-US" sz="3400" b="1" dirty="0">
+                <a:solidFill>
+                  <a:srgbClr val="F5EFDD"/>
+                </a:solidFill>
+                <a:latin typeface="Arial" pitchFamily="34" charset="0"/>
+                <a:ea typeface="Arial" pitchFamily="34" charset="-122"/>
+                <a:cs typeface="Arial" pitchFamily="34" charset="-120"/>
+              </a:rPr>
+              <a:t>Every action, in one vocabulary</a:t>
+            </a:r>
+            <a:endParaRPr lang="en-US" sz="3400" dirty="0"/>
+          </a:p>
+        </p:txBody>
+      </p:sp>
+      <p:sp>
+        <p:nvSpPr>
+          <p:cNvPr id="6" name="Text 4"/>
+          <p:cNvSpPr/>
+          <p:nvPr/>
+        </p:nvSpPr>
+        <p:spPr>
+          <a:xfrm>
+            <a:off x="566928" y="1444752"/>
+            <a:ext cx="8229600" cy="329184"/>
+          </a:xfrm>
+          <a:prstGeom prst="rect">
+            <a:avLst/>
+          </a:prstGeom>
+          <a:noFill/>
+          <a:ln/>
+        </p:spPr>
+        <p:txBody>
+          <a:bodyPr wrap="square" lIns="0" tIns="0" rIns="0" bIns="0" rtlCol="0" anchor="t"/>
+          <a:lstStyle/>
+          <a:p>
+            <a:pPr indent="0" marL="0">
+              <a:buNone/>
+            </a:pPr>
+            <a:r>
+              <a:rPr lang="en-US" sz="1600" dirty="0">
+                <a:solidFill>
+                  <a:srgbClr val="A9B0CC"/>
+                </a:solidFill>
+                <a:latin typeface="Calibri" pitchFamily="34" charset="0"/>
+                <a:ea typeface="Calibri" pitchFamily="34" charset="-122"/>
+                <a:cs typeface="Calibri" pitchFamily="34" charset="-120"/>
+              </a:rPr>
+              <a:t>22 event types across seven components.</a:t>
+            </a:r>
+            <a:endParaRPr lang="en-US" sz="1600" dirty="0"/>
+          </a:p>
+        </p:txBody>
+      </p:sp>
+      <p:sp>
+        <p:nvSpPr>
+          <p:cNvPr id="7" name="Shape 5"/>
+          <p:cNvSpPr/>
+          <p:nvPr/>
+        </p:nvSpPr>
+        <p:spPr>
+          <a:xfrm>
+            <a:off x="566928" y="2103120"/>
+            <a:ext cx="146304" cy="146304"/>
+          </a:xfrm>
+          <a:prstGeom prst="rect">
+            <a:avLst/>
+          </a:prstGeom>
+          <a:solidFill>
+            <a:srgbClr val="E8763C"/>
+          </a:solidFill>
+          <a:ln/>
+        </p:spPr>
+      </p:sp>
+      <p:sp>
+        <p:nvSpPr>
+          <p:cNvPr id="8" name="Text 6"/>
+          <p:cNvSpPr/>
+          <p:nvPr/>
+        </p:nvSpPr>
+        <p:spPr>
+          <a:xfrm>
+            <a:off x="877824" y="2057400"/>
+            <a:ext cx="2651760" cy="731520"/>
+          </a:xfrm>
+          <a:prstGeom prst="rect">
+            <a:avLst/>
+          </a:prstGeom>
+          <a:noFill/>
+          <a:ln/>
+        </p:spPr>
+        <p:txBody>
+          <a:bodyPr wrap="square" lIns="0" tIns="0" rIns="0" bIns="0" rtlCol="0" anchor="t"/>
+          <a:lstStyle/>
+          <a:p>
+            <a:pPr indent="0" marL="0">
+              <a:buNone/>
+            </a:pPr>
+            <a:r>
+              <a:rPr lang="en-US" sz="1500" b="1" dirty="0">
+                <a:solidFill>
+                  <a:srgbClr val="F5EFDD"/>
+                </a:solidFill>
+                <a:latin typeface="Calibri" pitchFamily="34" charset="0"/>
+                <a:ea typeface="Calibri" pitchFamily="34" charset="-122"/>
+                <a:cs typeface="Calibri" pitchFamily="34" charset="-120"/>
+              </a:rPr>
+              <a:t>Navigation</a:t>
+            </a:r>
+            <a:endParaRPr lang="en-US" sz="1500" dirty="0"/>
+          </a:p>
+        </p:txBody>
+      </p:sp>
+      <p:sp>
+        <p:nvSpPr>
+          <p:cNvPr id="9" name="Text 7"/>
+          <p:cNvSpPr/>
+          <p:nvPr/>
+        </p:nvSpPr>
+        <p:spPr>
+          <a:xfrm>
+            <a:off x="3584448" y="2057400"/>
+            <a:ext cx="8229600" cy="731520"/>
+          </a:xfrm>
+          <a:prstGeom prst="rect">
+            <a:avLst/>
+          </a:prstGeom>
+          <a:noFill/>
+          <a:ln/>
+        </p:spPr>
+        <p:txBody>
+          <a:bodyPr wrap="square" lIns="0" tIns="0" rIns="0" bIns="0" rtlCol="0" anchor="t"/>
+          <a:lstStyle/>
+          <a:p>
+            <a:pPr indent="0" marL="0">
+              <a:buNone/>
+            </a:pPr>
+            <a:r>
+              <a:rPr lang="en-US" sz="1250" dirty="0">
+                <a:solidFill>
+                  <a:srgbClr val="A9B0CC"/>
+                </a:solidFill>
+                <a:latin typeface="Calibri" pitchFamily="34" charset="0"/>
+                <a:ea typeface="Calibri" pitchFamily="34" charset="-122"/>
+                <a:cs typeface="Calibri" pitchFamily="34" charset="-120"/>
+              </a:rPr>
+              <a:t>Page viewed · Element clicked · Link followed · Page scrolled · Page hidden · Page shown</a:t>
+            </a:r>
+            <a:endParaRPr lang="en-US" sz="1250" dirty="0"/>
+          </a:p>
+        </p:txBody>
+      </p:sp>
+      <p:sp>
+        <p:nvSpPr>
+          <p:cNvPr id="10" name="Shape 8"/>
+          <p:cNvSpPr/>
+          <p:nvPr/>
+        </p:nvSpPr>
+        <p:spPr>
+          <a:xfrm>
+            <a:off x="566928" y="2999232"/>
+            <a:ext cx="146304" cy="146304"/>
+          </a:xfrm>
+          <a:prstGeom prst="rect">
+            <a:avLst/>
+          </a:prstGeom>
+          <a:solidFill>
+            <a:srgbClr val="E8763C"/>
+          </a:solidFill>
+          <a:ln/>
+        </p:spPr>
+      </p:sp>
+      <p:sp>
+        <p:nvSpPr>
+          <p:cNvPr id="11" name="Text 9"/>
+          <p:cNvSpPr/>
+          <p:nvPr/>
+        </p:nvSpPr>
+        <p:spPr>
+          <a:xfrm>
+            <a:off x="877824" y="2953512"/>
+            <a:ext cx="2651760" cy="731520"/>
+          </a:xfrm>
+          <a:prstGeom prst="rect">
+            <a:avLst/>
+          </a:prstGeom>
+          <a:noFill/>
+          <a:ln/>
+        </p:spPr>
+        <p:txBody>
+          <a:bodyPr wrap="square" lIns="0" tIns="0" rIns="0" bIns="0" rtlCol="0" anchor="t"/>
+          <a:lstStyle/>
+          <a:p>
+            <a:pPr indent="0" marL="0">
+              <a:buNone/>
+            </a:pPr>
+            <a:r>
+              <a:rPr lang="en-US" sz="1500" b="1" dirty="0">
+                <a:solidFill>
+                  <a:srgbClr val="F5EFDD"/>
+                </a:solidFill>
+                <a:latin typeface="Calibri" pitchFamily="34" charset="0"/>
+                <a:ea typeface="Calibri" pitchFamily="34" charset="-122"/>
+                <a:cs typeface="Calibri" pitchFamily="34" charset="-120"/>
+              </a:rPr>
+              <a:t>Video</a:t>
+            </a:r>
+            <a:endParaRPr lang="en-US" sz="1500" dirty="0"/>
+          </a:p>
+        </p:txBody>
+      </p:sp>
+      <p:sp>
+        <p:nvSpPr>
+          <p:cNvPr id="12" name="Text 10"/>
+          <p:cNvSpPr/>
+          <p:nvPr/>
+        </p:nvSpPr>
+        <p:spPr>
+          <a:xfrm>
+            <a:off x="3584448" y="2953512"/>
+            <a:ext cx="8229600" cy="731520"/>
+          </a:xfrm>
+          <a:prstGeom prst="rect">
+            <a:avLst/>
+          </a:prstGeom>
+          <a:noFill/>
+          <a:ln/>
+        </p:spPr>
+        <p:txBody>
+          <a:bodyPr wrap="square" lIns="0" tIns="0" rIns="0" bIns="0" rtlCol="0" anchor="t"/>
+          <a:lstStyle/>
+          <a:p>
+            <a:pPr indent="0" marL="0">
+              <a:buNone/>
+            </a:pPr>
+            <a:r>
+              <a:rPr lang="en-US" sz="1250" dirty="0">
+                <a:solidFill>
+                  <a:srgbClr val="A9B0CC"/>
+                </a:solidFill>
+                <a:latin typeface="Calibri" pitchFamily="34" charset="0"/>
+                <a:ea typeface="Calibri" pitchFamily="34" charset="-122"/>
+                <a:cs typeface="Calibri" pitchFamily="34" charset="-120"/>
+              </a:rPr>
+              <a:t>Started · paused · resumed · seeked · ended · rate changed · volume changed · fullscreen · buffering · milestone · heartbeat</a:t>
+            </a:r>
+            <a:endParaRPr lang="en-US" sz="1250" dirty="0"/>
+          </a:p>
+        </p:txBody>
+      </p:sp>
+      <p:sp>
+        <p:nvSpPr>
+          <p:cNvPr id="13" name="Shape 11"/>
+          <p:cNvSpPr/>
+          <p:nvPr/>
+        </p:nvSpPr>
+        <p:spPr>
+          <a:xfrm>
+            <a:off x="566928" y="3895344"/>
+            <a:ext cx="146304" cy="146304"/>
+          </a:xfrm>
+          <a:prstGeom prst="rect">
+            <a:avLst/>
+          </a:prstGeom>
+          <a:solidFill>
+            <a:srgbClr val="E8763C"/>
+          </a:solidFill>
+          <a:ln/>
+        </p:spPr>
+      </p:sp>
+      <p:sp>
+        <p:nvSpPr>
+          <p:cNvPr id="14" name="Text 12"/>
+          <p:cNvSpPr/>
+          <p:nvPr/>
+        </p:nvSpPr>
+        <p:spPr>
+          <a:xfrm>
+            <a:off x="877824" y="3849624"/>
+            <a:ext cx="2651760" cy="731520"/>
+          </a:xfrm>
+          <a:prstGeom prst="rect">
+            <a:avLst/>
+          </a:prstGeom>
+          <a:noFill/>
+          <a:ln/>
+        </p:spPr>
+        <p:txBody>
+          <a:bodyPr wrap="square" lIns="0" tIns="0" rIns="0" bIns="0" rtlCol="0" anchor="t"/>
+          <a:lstStyle/>
+          <a:p>
+            <a:pPr indent="0" marL="0">
+              <a:buNone/>
+            </a:pPr>
+            <a:r>
+              <a:rPr lang="en-US" sz="1500" b="1" dirty="0">
+                <a:solidFill>
+                  <a:srgbClr val="F5EFDD"/>
+                </a:solidFill>
+                <a:latin typeface="Calibri" pitchFamily="34" charset="0"/>
+                <a:ea typeface="Calibri" pitchFamily="34" charset="-122"/>
+                <a:cs typeface="Calibri" pitchFamily="34" charset="-120"/>
+              </a:rPr>
+              <a:t>Quiz</a:t>
+            </a:r>
+            <a:endParaRPr lang="en-US" sz="1500" dirty="0"/>
+          </a:p>
+        </p:txBody>
+      </p:sp>
+      <p:sp>
+        <p:nvSpPr>
+          <p:cNvPr id="15" name="Text 13"/>
+          <p:cNvSpPr/>
+          <p:nvPr/>
+        </p:nvSpPr>
+        <p:spPr>
+          <a:xfrm>
+            <a:off x="3584448" y="3849624"/>
+            <a:ext cx="8229600" cy="731520"/>
+          </a:xfrm>
+          <a:prstGeom prst="rect">
+            <a:avLst/>
+          </a:prstGeom>
+          <a:noFill/>
+          <a:ln/>
+        </p:spPr>
+        <p:txBody>
+          <a:bodyPr wrap="square" lIns="0" tIns="0" rIns="0" bIns="0" rtlCol="0" anchor="t"/>
+          <a:lstStyle/>
+          <a:p>
+            <a:pPr indent="0" marL="0">
+              <a:buNone/>
+            </a:pPr>
+            <a:r>
+              <a:rPr lang="en-US" sz="1250" dirty="0">
+                <a:solidFill>
+                  <a:srgbClr val="A9B0CC"/>
+                </a:solidFill>
+                <a:latin typeface="Calibri" pitchFamily="34" charset="0"/>
+                <a:ea typeface="Calibri" pitchFamily="34" charset="-122"/>
+                <a:cs typeface="Calibri" pitchFamily="34" charset="-120"/>
+              </a:rPr>
+              <a:t>Attempt started · option selected · answer cleared · question answered · attempt submitted</a:t>
+            </a:r>
+            <a:endParaRPr lang="en-US" sz="1250" dirty="0"/>
+          </a:p>
+        </p:txBody>
+      </p:sp>
+      <p:sp>
+        <p:nvSpPr>
+          <p:cNvPr id="16" name="Shape 14"/>
+          <p:cNvSpPr/>
+          <p:nvPr/>
+        </p:nvSpPr>
+        <p:spPr>
+          <a:xfrm>
+            <a:off x="566928" y="4791456"/>
+            <a:ext cx="146304" cy="146304"/>
+          </a:xfrm>
+          <a:prstGeom prst="rect">
+            <a:avLst/>
+          </a:prstGeom>
+          <a:solidFill>
+            <a:srgbClr val="E8763C"/>
+          </a:solidFill>
+          <a:ln/>
+        </p:spPr>
+      </p:sp>
+      <p:sp>
+        <p:nvSpPr>
+          <p:cNvPr id="17" name="Text 15"/>
+          <p:cNvSpPr/>
+          <p:nvPr/>
+        </p:nvSpPr>
+        <p:spPr>
+          <a:xfrm>
+            <a:off x="877824" y="4745736"/>
+            <a:ext cx="2651760" cy="731520"/>
+          </a:xfrm>
+          <a:prstGeom prst="rect">
+            <a:avLst/>
+          </a:prstGeom>
+          <a:noFill/>
+          <a:ln/>
+        </p:spPr>
+        <p:txBody>
+          <a:bodyPr wrap="square" lIns="0" tIns="0" rIns="0" bIns="0" rtlCol="0" anchor="t"/>
+          <a:lstStyle/>
+          <a:p>
+            <a:pPr indent="0" marL="0">
+              <a:buNone/>
+            </a:pPr>
+            <a:r>
+              <a:rPr lang="en-US" sz="1500" b="1" dirty="0">
+                <a:solidFill>
+                  <a:srgbClr val="F5EFDD"/>
+                </a:solidFill>
+                <a:latin typeface="Calibri" pitchFamily="34" charset="0"/>
+                <a:ea typeface="Calibri" pitchFamily="34" charset="-122"/>
+                <a:cs typeface="Calibri" pitchFamily="34" charset="-120"/>
+              </a:rPr>
+              <a:t>Lesson, Course, User, Report</a:t>
+            </a:r>
+            <a:endParaRPr lang="en-US" sz="1500" dirty="0"/>
+          </a:p>
+        </p:txBody>
+      </p:sp>
+      <p:sp>
+        <p:nvSpPr>
+          <p:cNvPr id="18" name="Text 16"/>
+          <p:cNvSpPr/>
+          <p:nvPr/>
+        </p:nvSpPr>
+        <p:spPr>
+          <a:xfrm>
+            <a:off x="3584448" y="4745736"/>
+            <a:ext cx="8229600" cy="731520"/>
+          </a:xfrm>
+          <a:prstGeom prst="rect">
+            <a:avLst/>
+          </a:prstGeom>
+          <a:noFill/>
+          <a:ln/>
+        </p:spPr>
+        <p:txBody>
+          <a:bodyPr wrap="square" lIns="0" tIns="0" rIns="0" bIns="0" rtlCol="0" anchor="t"/>
+          <a:lstStyle/>
+          <a:p>
+            <a:pPr indent="0" marL="0">
+              <a:buNone/>
+            </a:pPr>
+            <a:r>
+              <a:rPr lang="en-US" sz="1250" dirty="0">
+                <a:solidFill>
+                  <a:srgbClr val="A9B0CC"/>
+                </a:solidFill>
+                <a:latin typeface="Calibri" pitchFamily="34" charset="0"/>
+                <a:ea typeface="Calibri" pitchFamily="34" charset="-122"/>
+                <a:cs typeface="Calibri" pitchFamily="34" charset="-120"/>
+              </a:rPr>
+              <a:t>Lesson viewed · Course viewed · Catalogue viewed · Account created · Logged in and out · Reports viewed · Clickstream exported</a:t>
+            </a:r>
+            <a:endParaRPr lang="en-US" sz="1250" dirty="0"/>
+          </a:p>
+        </p:txBody>
+      </p:sp>
+      <p:sp>
+        <p:nvSpPr>
+          <p:cNvPr id="19" name="Text 17"/>
+          <p:cNvSpPr/>
+          <p:nvPr/>
+        </p:nvSpPr>
+        <p:spPr>
+          <a:xfrm>
+            <a:off x="566928" y="5669280"/>
+            <a:ext cx="11064240" cy="548640"/>
+          </a:xfrm>
+          <a:prstGeom prst="rect">
+            <a:avLst/>
+          </a:prstGeom>
+          <a:noFill/>
+          <a:ln/>
+        </p:spPr>
+        <p:txBody>
+          <a:bodyPr wrap="square" lIns="0" tIns="0" rIns="0" bIns="0" rtlCol="0" anchor="t"/>
+          <a:lstStyle/>
+          <a:p>
+            <a:pPr indent="0" marL="0">
+              <a:buNone/>
+            </a:pPr>
+            <a:r>
+              <a:rPr lang="en-US" sz="1400" i="1" dirty="0">
+                <a:solidFill>
+                  <a:srgbClr val="E8763C"/>
+                </a:solidFill>
+                <a:latin typeface="Calibri" pitchFamily="34" charset="0"/>
+                <a:ea typeface="Calibri" pitchFamily="34" charset="-122"/>
+                <a:cs typeface="Calibri" pitchFamily="34" charset="-120"/>
+              </a:rPr>
+              <a:t>Clicks are caught by a single listener on the document, so an element nobody thought to instrument is still recorded.</a:t>
+            </a:r>
+            <a:endParaRPr lang="en-US" sz="1400" dirty="0"/>
+          </a:p>
+        </p:txBody>
+      </p:sp>
+    </p:spTree>
+  </p:cSld>
+  <p:clrMapOvr>
+    <a:masterClrMapping/>
+  </p:clrMapOvr>
+</p:sld>
+</file>
+
+<file path=ppt/slides/slide7.xml><?xml version="1.0" encoding="utf-8"?>
+<p:sld xmlns:a="http://schemas.openxmlformats.org/drawingml/2006/main" xmlns:r="http://schemas.openxmlformats.org/officeDocument/2006/relationships" xmlns:p="http://schemas.openxmlformats.org/presentationml/2006/main">
+  <p:cSld name="Slide 7">
     <p:bg>
       <p:bgPr>
         <a:solidFill>
@@ -8154,7 +7918,7 @@
           <a:ln/>
         </p:spPr>
         <p:txBody>
-          <a:bodyPr wrap="square" lIns="0" tIns="0" rIns="0" bIns="0" rtlCol="0" anchor="ctr"/>
+          <a:bodyPr wrap="square" lIns="0" tIns="0" rIns="0" bIns="0" rtlCol="0" anchor="t"/>
           <a:lstStyle/>
           <a:p>
             <a:pPr indent="0" marL="0">
@@ -8169,7 +7933,7 @@
                 <a:ea typeface="Calibri" pitchFamily="34" charset="-122"/>
                 <a:cs typeface="Calibri" pitchFamily="34" charset="-120"/>
               </a:rPr>
-              <a:t>Design</a:t>
+              <a:t>How much detail</a:t>
             </a:r>
             <a:endParaRPr lang="en-US" sz="1300" dirty="0"/>
           </a:p>
@@ -8184,16 +7948,16 @@
         <p:spPr>
           <a:xfrm>
             <a:off x="566928" y="841248"/>
-            <a:ext cx="11057839" cy="777240"/>
-          </a:xfrm>
-          <a:prstGeom prst="rect">
-            <a:avLst/>
-          </a:prstGeom>
-          <a:noFill/>
-          <a:ln/>
-        </p:spPr>
-        <p:txBody>
-          <a:bodyPr wrap="square" lIns="0" tIns="0" rIns="0" bIns="0" rtlCol="0" anchor="ctr"/>
+            <a:ext cx="11057839" cy="658368"/>
+          </a:xfrm>
+          <a:prstGeom prst="rect">
+            <a:avLst/>
+          </a:prstGeom>
+          <a:noFill/>
+          <a:ln/>
+        </p:spPr>
+        <p:txBody>
+          <a:bodyPr wrap="square" lIns="0" tIns="0" rIns="0" bIns="0" rtlCol="0" anchor="t"/>
           <a:lstStyle/>
           <a:p>
             <a:pPr indent="0" marL="0">
@@ -8208,7 +7972,7 @@
                 <a:ea typeface="Arial" pitchFamily="34" charset="-122"/>
                 <a:cs typeface="Arial" pitchFamily="34" charset="-120"/>
               </a:rPr>
-              <a:t>Three directions, drawn as real screens</a:t>
+              <a:t>A seek is not just a seek</a:t>
             </a:r>
             <a:endParaRPr lang="en-US" sz="3400" dirty="0"/>
           </a:p>
@@ -8216,358 +7980,73 @@
       </p:sp>
       <p:sp>
         <p:nvSpPr>
-          <p:cNvPr id="6" name="Shape 4"/>
-          <p:cNvSpPr/>
-          <p:nvPr/>
-        </p:nvSpPr>
-        <p:spPr>
-          <a:xfrm>
-            <a:off x="630936" y="1938528"/>
-            <a:ext cx="3429000" cy="2286000"/>
-          </a:xfrm>
-          <a:prstGeom prst="rect">
-            <a:avLst/>
-          </a:prstGeom>
-          <a:solidFill>
-            <a:srgbClr val="C9C2AB"/>
-          </a:solidFill>
-          <a:ln/>
-        </p:spPr>
-      </p:sp>
-      <p:sp>
-        <p:nvSpPr>
-          <p:cNvPr id="7" name="Shape 5"/>
-          <p:cNvSpPr/>
-          <p:nvPr/>
-        </p:nvSpPr>
-        <p:spPr>
-          <a:xfrm>
-            <a:off x="566928" y="1874520"/>
-            <a:ext cx="3429000" cy="2286000"/>
-          </a:xfrm>
-          <a:prstGeom prst="rect">
-            <a:avLst/>
-          </a:prstGeom>
-          <a:solidFill>
-            <a:srgbClr val="F7F2E2"/>
-          </a:solidFill>
-          <a:ln w="19050">
-            <a:solidFill>
-              <a:srgbClr val="1E2340"/>
-            </a:solidFill>
-            <a:prstDash val="solid"/>
-          </a:ln>
-        </p:spPr>
-      </p:sp>
-      <p:sp>
-        <p:nvSpPr>
-          <p:cNvPr id="8" name="Text 6"/>
-          <p:cNvSpPr/>
-          <p:nvPr/>
-        </p:nvSpPr>
-        <p:spPr>
-          <a:xfrm>
-            <a:off x="822960" y="2103120"/>
-            <a:ext cx="2926080" cy="411480"/>
-          </a:xfrm>
-          <a:prstGeom prst="rect">
-            <a:avLst/>
-          </a:prstGeom>
-          <a:noFill/>
-          <a:ln/>
-        </p:spPr>
-        <p:txBody>
-          <a:bodyPr wrap="square" lIns="0" tIns="0" rIns="0" bIns="0" rtlCol="0" anchor="ctr"/>
+          <p:cNvPr id="6" name="Text 4"/>
+          <p:cNvSpPr/>
+          <p:nvPr/>
+        </p:nvSpPr>
+        <p:spPr>
+          <a:xfrm>
+            <a:off x="566928" y="1783080"/>
+            <a:ext cx="4206240" cy="914400"/>
+          </a:xfrm>
+          <a:prstGeom prst="rect">
+            <a:avLst/>
+          </a:prstGeom>
+          <a:noFill/>
+          <a:ln/>
+        </p:spPr>
+        <p:txBody>
+          <a:bodyPr wrap="square" lIns="0" tIns="0" rIns="0" bIns="0" rtlCol="0" anchor="t"/>
           <a:lstStyle/>
           <a:p>
             <a:pPr indent="0" marL="0">
               <a:buNone/>
             </a:pPr>
             <a:r>
-              <a:rPr lang="en-US" sz="1900" b="1" dirty="0">
+              <a:rPr lang="en-US" sz="1500" dirty="0">
                 <a:solidFill>
                   <a:srgbClr val="1E2340"/>
-                </a:solidFill>
-                <a:latin typeface="Arial" pitchFamily="34" charset="0"/>
-                <a:ea typeface="Arial" pitchFamily="34" charset="-122"/>
-                <a:cs typeface="Arial" pitchFamily="34" charset="-120"/>
-              </a:rPr>
-              <a:t>Field Notebook</a:t>
-            </a:r>
-            <a:endParaRPr lang="en-US" sz="1900" dirty="0"/>
-          </a:p>
-        </p:txBody>
-      </p:sp>
-      <p:sp>
-        <p:nvSpPr>
-          <p:cNvPr id="9" name="Text 7"/>
-          <p:cNvSpPr/>
-          <p:nvPr/>
-        </p:nvSpPr>
-        <p:spPr>
-          <a:xfrm>
-            <a:off x="822960" y="2578608"/>
-            <a:ext cx="2926080" cy="731520"/>
-          </a:xfrm>
-          <a:prstGeom prst="rect">
-            <a:avLst/>
-          </a:prstGeom>
-          <a:noFill/>
-          <a:ln/>
-        </p:spPr>
-        <p:txBody>
-          <a:bodyPr wrap="square" lIns="0" tIns="0" rIns="0" bIns="0" rtlCol="0" anchor="ctr"/>
-          <a:lstStyle/>
-          <a:p>
-            <a:pPr indent="0" marL="0">
-              <a:buNone/>
-            </a:pPr>
-            <a:r>
-              <a:rPr lang="en-US" sz="1300" dirty="0">
-                <a:solidFill>
-                  <a:srgbClr val="343B5C"/>
                 </a:solidFill>
                 <a:latin typeface="Calibri" pitchFamily="34" charset="0"/>
                 <a:ea typeface="Calibri" pitchFamily="34" charset="-122"/>
                 <a:cs typeface="Calibri" pitchFamily="34" charset="-120"/>
               </a:rPr>
-              <a:t>Serif throughout, warm paper, hairline rules.</a:t>
-            </a:r>
-            <a:endParaRPr lang="en-US" sz="1300" dirty="0"/>
-          </a:p>
-        </p:txBody>
-      </p:sp>
-      <p:sp>
-        <p:nvSpPr>
-          <p:cNvPr id="10" name="Text 8"/>
-          <p:cNvSpPr/>
-          <p:nvPr/>
-        </p:nvSpPr>
-        <p:spPr>
-          <a:xfrm>
-            <a:off x="822960" y="3310128"/>
-            <a:ext cx="2926080" cy="685800"/>
-          </a:xfrm>
-          <a:prstGeom prst="rect">
-            <a:avLst/>
-          </a:prstGeom>
-          <a:noFill/>
-          <a:ln/>
-        </p:spPr>
-        <p:txBody>
-          <a:bodyPr wrap="square" lIns="0" tIns="0" rIns="0" bIns="0" rtlCol="0" anchor="ctr"/>
-          <a:lstStyle/>
-          <a:p>
-            <a:pPr indent="0" marL="0">
-              <a:buNone/>
-            </a:pPr>
-            <a:r>
-              <a:rPr lang="en-US" sz="1250" i="1" dirty="0">
-                <a:solidFill>
-                  <a:srgbClr val="6E7597"/>
-                </a:solidFill>
-                <a:latin typeface="Calibri" pitchFamily="34" charset="0"/>
-                <a:ea typeface="Calibri" pitchFamily="34" charset="-122"/>
-                <a:cs typeface="Calibri" pitchFamily="34" charset="-120"/>
-              </a:rPr>
-              <a:t>Most intellectual. Risk: reads as quiet.</a:t>
-            </a:r>
-            <a:endParaRPr lang="en-US" sz="1250" dirty="0"/>
-          </a:p>
-        </p:txBody>
-      </p:sp>
-      <p:sp>
-        <p:nvSpPr>
-          <p:cNvPr id="11" name="Shape 9"/>
-          <p:cNvSpPr/>
-          <p:nvPr/>
-        </p:nvSpPr>
-        <p:spPr>
-          <a:xfrm>
-            <a:off x="4425696" y="1938528"/>
-            <a:ext cx="3429000" cy="2286000"/>
+              <a:t>Video is where the record goes deepest. The player is part of the app, so it reports what an embedded player cannot.</a:t>
+            </a:r>
+            <a:endParaRPr lang="en-US" sz="1500" dirty="0"/>
+          </a:p>
+        </p:txBody>
+      </p:sp>
+      <p:sp>
+        <p:nvSpPr>
+          <p:cNvPr id="7" name="Shape 5"/>
+          <p:cNvSpPr/>
+          <p:nvPr/>
+        </p:nvSpPr>
+        <p:spPr>
+          <a:xfrm>
+            <a:off x="630936" y="2852928"/>
+            <a:ext cx="4206240" cy="1371600"/>
           </a:xfrm>
           <a:prstGeom prst="rect">
             <a:avLst/>
           </a:prstGeom>
           <a:solidFill>
-            <a:srgbClr val="C9C2AB"/>
+            <a:srgbClr val="E8763C"/>
           </a:solidFill>
           <a:ln/>
         </p:spPr>
       </p:sp>
       <p:sp>
         <p:nvSpPr>
-          <p:cNvPr id="12" name="Shape 10"/>
-          <p:cNvSpPr/>
-          <p:nvPr/>
-        </p:nvSpPr>
-        <p:spPr>
-          <a:xfrm>
-            <a:off x="4361688" y="1874520"/>
-            <a:ext cx="3429000" cy="2286000"/>
-          </a:xfrm>
-          <a:prstGeom prst="rect">
-            <a:avLst/>
-          </a:prstGeom>
-          <a:solidFill>
-            <a:srgbClr val="F7F2E2"/>
-          </a:solidFill>
-          <a:ln w="19050">
-            <a:solidFill>
-              <a:srgbClr val="1E2340"/>
-            </a:solidFill>
-            <a:prstDash val="solid"/>
-          </a:ln>
-        </p:spPr>
-      </p:sp>
-      <p:sp>
-        <p:nvSpPr>
-          <p:cNvPr id="13" name="Text 11"/>
-          <p:cNvSpPr/>
-          <p:nvPr/>
-        </p:nvSpPr>
-        <p:spPr>
-          <a:xfrm>
-            <a:off x="4617720" y="2103120"/>
-            <a:ext cx="2926080" cy="411480"/>
-          </a:xfrm>
-          <a:prstGeom prst="rect">
-            <a:avLst/>
-          </a:prstGeom>
-          <a:noFill/>
-          <a:ln/>
-        </p:spPr>
-        <p:txBody>
-          <a:bodyPr wrap="square" lIns="0" tIns="0" rIns="0" bIns="0" rtlCol="0" anchor="ctr"/>
-          <a:lstStyle/>
-          <a:p>
-            <a:pPr indent="0" marL="0">
-              <a:buNone/>
-            </a:pPr>
-            <a:r>
-              <a:rPr lang="en-US" sz="1900" b="1" dirty="0">
-                <a:solidFill>
-                  <a:srgbClr val="1E2340"/>
-                </a:solidFill>
-                <a:latin typeface="Arial" pitchFamily="34" charset="0"/>
-                <a:ea typeface="Arial" pitchFamily="34" charset="-122"/>
-                <a:cs typeface="Arial" pitchFamily="34" charset="-120"/>
-              </a:rPr>
-              <a:t>Instrument</a:t>
-            </a:r>
-            <a:endParaRPr lang="en-US" sz="1900" dirty="0"/>
-          </a:p>
-        </p:txBody>
-      </p:sp>
-      <p:sp>
-        <p:nvSpPr>
-          <p:cNvPr id="14" name="Text 12"/>
-          <p:cNvSpPr/>
-          <p:nvPr/>
-        </p:nvSpPr>
-        <p:spPr>
-          <a:xfrm>
-            <a:off x="4617720" y="2578608"/>
-            <a:ext cx="2926080" cy="731520"/>
-          </a:xfrm>
-          <a:prstGeom prst="rect">
-            <a:avLst/>
-          </a:prstGeom>
-          <a:noFill/>
-          <a:ln/>
-        </p:spPr>
-        <p:txBody>
-          <a:bodyPr wrap="square" lIns="0" tIns="0" rIns="0" bIns="0" rtlCol="0" anchor="ctr"/>
-          <a:lstStyle/>
-          <a:p>
-            <a:pPr indent="0" marL="0">
-              <a:buNone/>
-            </a:pPr>
-            <a:r>
-              <a:rPr lang="en-US" sz="1300" dirty="0">
-                <a:solidFill>
-                  <a:srgbClr val="343B5C"/>
-                </a:solidFill>
-                <a:latin typeface="Calibri" pitchFamily="34" charset="0"/>
-                <a:ea typeface="Calibri" pitchFamily="34" charset="-122"/>
-                <a:cs typeface="Calibri" pitchFamily="34" charset="-120"/>
-              </a:rPr>
-              <a:t>Deep navy, cyan, technical sans.</a:t>
-            </a:r>
-            <a:endParaRPr lang="en-US" sz="1300" dirty="0"/>
-          </a:p>
-        </p:txBody>
-      </p:sp>
-      <p:sp>
-        <p:nvSpPr>
-          <p:cNvPr id="15" name="Text 13"/>
-          <p:cNvSpPr/>
-          <p:nvPr/>
-        </p:nvSpPr>
-        <p:spPr>
-          <a:xfrm>
-            <a:off x="4617720" y="3310128"/>
-            <a:ext cx="2926080" cy="685800"/>
-          </a:xfrm>
-          <a:prstGeom prst="rect">
-            <a:avLst/>
-          </a:prstGeom>
-          <a:noFill/>
-          <a:ln/>
-        </p:spPr>
-        <p:txBody>
-          <a:bodyPr wrap="square" lIns="0" tIns="0" rIns="0" bIns="0" rtlCol="0" anchor="ctr"/>
-          <a:lstStyle/>
-          <a:p>
-            <a:pPr indent="0" marL="0">
-              <a:buNone/>
-            </a:pPr>
-            <a:r>
-              <a:rPr lang="en-US" sz="1250" i="1" dirty="0">
-                <a:solidFill>
-                  <a:srgbClr val="6E7597"/>
-                </a:solidFill>
-                <a:latin typeface="Calibri" pitchFamily="34" charset="0"/>
-                <a:ea typeface="Calibri" pitchFamily="34" charset="-122"/>
-                <a:cs typeface="Calibri" pitchFamily="34" charset="-120"/>
-              </a:rPr>
-              <a:t>Best video chrome. Risk: harder to read at length.</a:t>
-            </a:r>
-            <a:endParaRPr lang="en-US" sz="1250" dirty="0"/>
-          </a:p>
-        </p:txBody>
-      </p:sp>
-      <p:sp>
-        <p:nvSpPr>
-          <p:cNvPr id="16" name="Shape 14"/>
-          <p:cNvSpPr/>
-          <p:nvPr/>
-        </p:nvSpPr>
-        <p:spPr>
-          <a:xfrm>
-            <a:off x="8220456" y="1938528"/>
-            <a:ext cx="3429000" cy="2286000"/>
-          </a:xfrm>
-          <a:prstGeom prst="rect">
-            <a:avLst/>
-          </a:prstGeom>
-          <a:solidFill>
-            <a:srgbClr val="2E5BD4"/>
-          </a:solidFill>
-          <a:ln/>
-        </p:spPr>
-      </p:sp>
-      <p:sp>
-        <p:nvSpPr>
-          <p:cNvPr id="17" name="Shape 15"/>
-          <p:cNvSpPr/>
-          <p:nvPr/>
-        </p:nvSpPr>
-        <p:spPr>
-          <a:xfrm>
-            <a:off x="8156448" y="1874520"/>
-            <a:ext cx="3429000" cy="2286000"/>
+          <p:cNvPr id="8" name="Shape 6"/>
+          <p:cNvSpPr/>
+          <p:nvPr/>
+        </p:nvSpPr>
+        <p:spPr>
+          <a:xfrm>
+            <a:off x="566928" y="2788920"/>
+            <a:ext cx="4206240" cy="1371600"/>
           </a:xfrm>
           <a:prstGeom prst="rect">
             <a:avLst/>
@@ -8585,116 +8064,128 @@
       </p:sp>
       <p:sp>
         <p:nvSpPr>
-          <p:cNvPr id="18" name="Text 16"/>
-          <p:cNvSpPr/>
-          <p:nvPr/>
-        </p:nvSpPr>
-        <p:spPr>
-          <a:xfrm>
-            <a:off x="8412480" y="2103120"/>
-            <a:ext cx="2926080" cy="411480"/>
-          </a:xfrm>
-          <a:prstGeom prst="rect">
-            <a:avLst/>
-          </a:prstGeom>
-          <a:noFill/>
-          <a:ln/>
-        </p:spPr>
-        <p:txBody>
-          <a:bodyPr wrap="square" lIns="0" tIns="0" rIns="0" bIns="0" rtlCol="0" anchor="ctr"/>
+          <p:cNvPr id="9" name="Text 7"/>
+          <p:cNvSpPr/>
+          <p:nvPr/>
+        </p:nvSpPr>
+        <p:spPr>
+          <a:xfrm>
+            <a:off x="804672" y="2926080"/>
+            <a:ext cx="3749040" cy="1097280"/>
+          </a:xfrm>
+          <a:prstGeom prst="rect">
+            <a:avLst/>
+          </a:prstGeom>
+          <a:noFill/>
+          <a:ln/>
+        </p:spPr>
+        <p:txBody>
+          <a:bodyPr wrap="square" lIns="0" tIns="0" rIns="0" bIns="0" rtlCol="0" anchor="t"/>
           <a:lstStyle/>
           <a:p>
             <a:pPr indent="0" marL="0">
               <a:buNone/>
             </a:pPr>
             <a:r>
-              <a:rPr lang="en-US" sz="1900" b="1" dirty="0">
-                <a:solidFill>
-                  <a:srgbClr val="2E5BD4"/>
-                </a:solidFill>
-                <a:latin typeface="Arial" pitchFamily="34" charset="0"/>
-                <a:ea typeface="Arial" pitchFamily="34" charset="-122"/>
-                <a:cs typeface="Arial" pitchFamily="34" charset="-120"/>
-              </a:rPr>
-              <a:t>Riso Press</a:t>
-            </a:r>
-            <a:endParaRPr lang="en-US" sz="1900" dirty="0"/>
-          </a:p>
-        </p:txBody>
-      </p:sp>
-      <p:sp>
-        <p:nvSpPr>
-          <p:cNvPr id="19" name="Text 17"/>
-          <p:cNvSpPr/>
-          <p:nvPr/>
-        </p:nvSpPr>
-        <p:spPr>
-          <a:xfrm>
-            <a:off x="8412480" y="2578608"/>
-            <a:ext cx="2926080" cy="731520"/>
-          </a:xfrm>
-          <a:prstGeom prst="rect">
-            <a:avLst/>
-          </a:prstGeom>
-          <a:noFill/>
-          <a:ln/>
-        </p:spPr>
-        <p:txBody>
-          <a:bodyPr wrap="square" lIns="0" tIns="0" rIns="0" bIns="0" rtlCol="0" anchor="ctr"/>
-          <a:lstStyle/>
+              <a:rPr lang="en-US" sz="1250" dirty="0">
+                <a:solidFill>
+                  <a:srgbClr val="1E2340"/>
+                </a:solidFill>
+                <a:latin typeface="Courier New" pitchFamily="34" charset="0"/>
+                <a:ea typeface="Courier New" pitchFamily="34" charset="-122"/>
+                <a:cs typeface="Courier New" pitchFamily="34" charset="-120"/>
+              </a:rPr>
+              <a:t>{ "from": 84.2,</a:t>
+            </a:r>
+            <a:endParaRPr lang="en-US" sz="1250" dirty="0"/>
+          </a:p>
           <a:p>
             <a:pPr indent="0" marL="0">
               <a:buNone/>
             </a:pPr>
             <a:r>
-              <a:rPr lang="en-US" sz="1300" dirty="0">
-                <a:solidFill>
-                  <a:srgbClr val="343B5C"/>
+              <a:rPr lang="en-US" sz="1250" dirty="0">
+                <a:solidFill>
+                  <a:srgbClr val="1E2340"/>
+                </a:solidFill>
+                <a:latin typeface="Courier New" pitchFamily="34" charset="0"/>
+                <a:ea typeface="Courier New" pitchFamily="34" charset="-122"/>
+                <a:cs typeface="Courier New" pitchFamily="34" charset="-120"/>
+              </a:rPr>
+              <a:t>  "to": 61.0,</a:t>
+            </a:r>
+            <a:endParaRPr lang="en-US" sz="1250" dirty="0"/>
+          </a:p>
+          <a:p>
+            <a:pPr indent="0" marL="0">
+              <a:buNone/>
+            </a:pPr>
+            <a:r>
+              <a:rPr lang="en-US" sz="1250" dirty="0">
+                <a:solidFill>
+                  <a:srgbClr val="1E2340"/>
+                </a:solidFill>
+                <a:latin typeface="Courier New" pitchFamily="34" charset="0"/>
+                <a:ea typeface="Courier New" pitchFamily="34" charset="-122"/>
+                <a:cs typeface="Courier New" pitchFamily="34" charset="-120"/>
+              </a:rPr>
+              <a:t>  "direction": "backward",</a:t>
+            </a:r>
+            <a:endParaRPr lang="en-US" sz="1250" dirty="0"/>
+          </a:p>
+          <a:p>
+            <a:pPr indent="0" marL="0">
+              <a:buNone/>
+            </a:pPr>
+            <a:r>
+              <a:rPr lang="en-US" sz="1250" dirty="0">
+                <a:solidFill>
+                  <a:srgbClr val="1E2340"/>
+                </a:solidFill>
+                <a:latin typeface="Courier New" pitchFamily="34" charset="0"/>
+                <a:ea typeface="Courier New" pitchFamily="34" charset="-122"/>
+                <a:cs typeface="Courier New" pitchFamily="34" charset="-120"/>
+              </a:rPr>
+              <a:t>  "jumpSeconds": 23.2 }</a:t>
+            </a:r>
+            <a:endParaRPr lang="en-US" sz="1250" dirty="0"/>
+          </a:p>
+        </p:txBody>
+      </p:sp>
+      <p:sp>
+        <p:nvSpPr>
+          <p:cNvPr id="10" name="Text 8"/>
+          <p:cNvSpPr/>
+          <p:nvPr/>
+        </p:nvSpPr>
+        <p:spPr>
+          <a:xfrm>
+            <a:off x="566928" y="4279392"/>
+            <a:ext cx="4206240" cy="320040"/>
+          </a:xfrm>
+          <a:prstGeom prst="rect">
+            <a:avLst/>
+          </a:prstGeom>
+          <a:noFill/>
+          <a:ln/>
+        </p:spPr>
+        <p:txBody>
+          <a:bodyPr wrap="square" lIns="0" tIns="0" rIns="0" bIns="0" rtlCol="0" anchor="t"/>
+          <a:lstStyle/>
+          <a:p>
+            <a:pPr indent="0" marL="0">
+              <a:buNone/>
+            </a:pPr>
+            <a:r>
+              <a:rPr lang="en-US" sz="1250" i="1" dirty="0">
+                <a:solidFill>
+                  <a:srgbClr val="6E7597"/>
                 </a:solidFill>
                 <a:latin typeface="Calibri" pitchFamily="34" charset="0"/>
                 <a:ea typeface="Calibri" pitchFamily="34" charset="-122"/>
                 <a:cs typeface="Calibri" pitchFamily="34" charset="-120"/>
               </a:rPr>
-              <a:t>Cream stock, blue and orange, hard offset shadows.</a:t>
-            </a:r>
-            <a:endParaRPr lang="en-US" sz="1300" dirty="0"/>
-          </a:p>
-        </p:txBody>
-      </p:sp>
-      <p:sp>
-        <p:nvSpPr>
-          <p:cNvPr id="20" name="Text 18"/>
-          <p:cNvSpPr/>
-          <p:nvPr/>
-        </p:nvSpPr>
-        <p:spPr>
-          <a:xfrm>
-            <a:off x="8412480" y="3310128"/>
-            <a:ext cx="2926080" cy="685800"/>
-          </a:xfrm>
-          <a:prstGeom prst="rect">
-            <a:avLst/>
-          </a:prstGeom>
-          <a:noFill/>
-          <a:ln/>
-        </p:spPr>
-        <p:txBody>
-          <a:bodyPr wrap="square" lIns="0" tIns="0" rIns="0" bIns="0" rtlCol="0" anchor="ctr"/>
-          <a:lstStyle/>
-          <a:p>
-            <a:pPr indent="0" marL="0">
-              <a:buNone/>
-            </a:pPr>
-            <a:r>
-              <a:rPr lang="en-US" sz="1250" i="1" dirty="0">
-                <a:solidFill>
-                  <a:srgbClr val="1E2340"/>
-                </a:solidFill>
-                <a:latin typeface="Calibri" pitchFamily="34" charset="0"/>
-                <a:ea typeface="Calibri" pitchFamily="34" charset="-122"/>
-                <a:cs typeface="Calibri" pitchFamily="34" charset="-120"/>
-              </a:rPr>
-              <a:t>Energetic without being childish. Chosen.</a:t>
+              <a:t>One learner rewinding, as stored.</a:t>
             </a:r>
             <a:endParaRPr lang="en-US" sz="1250" dirty="0"/>
           </a:p>
@@ -8702,67 +8193,28 @@
       </p:sp>
       <p:sp>
         <p:nvSpPr>
-          <p:cNvPr id="21" name="Text 19"/>
-          <p:cNvSpPr/>
-          <p:nvPr/>
-        </p:nvSpPr>
-        <p:spPr>
-          <a:xfrm>
-            <a:off x="566928" y="4434840"/>
-            <a:ext cx="10515600" cy="457200"/>
-          </a:xfrm>
-          <a:prstGeom prst="rect">
-            <a:avLst/>
-          </a:prstGeom>
-          <a:noFill/>
-          <a:ln/>
-        </p:spPr>
-        <p:txBody>
-          <a:bodyPr wrap="square" lIns="0" tIns="0" rIns="0" bIns="0" rtlCol="0" anchor="ctr"/>
-          <a:lstStyle/>
-          <a:p>
-            <a:pPr indent="0" marL="0">
-              <a:buNone/>
-            </a:pPr>
-            <a:r>
-              <a:rPr lang="en-US" sz="1500" dirty="0">
-                <a:solidFill>
-                  <a:srgbClr val="343B5C"/>
-                </a:solidFill>
-                <a:latin typeface="Calibri" pitchFamily="34" charset="0"/>
-                <a:ea typeface="Calibri" pitchFamily="34" charset="-122"/>
-                <a:cs typeface="Calibri" pitchFamily="34" charset="-120"/>
-              </a:rPr>
-              <a:t>Compared as full lesson screens rather than colour swatches, so the choice was made on how it reads, not how it samples.</a:t>
-            </a:r>
-            <a:endParaRPr lang="en-US" sz="1500" dirty="0"/>
-          </a:p>
-        </p:txBody>
-      </p:sp>
-      <p:sp>
-        <p:nvSpPr>
-          <p:cNvPr id="22" name="Text 20"/>
-          <p:cNvSpPr/>
-          <p:nvPr/>
-        </p:nvSpPr>
-        <p:spPr>
-          <a:xfrm>
-            <a:off x="566928" y="5029200"/>
-            <a:ext cx="10515600" cy="1371600"/>
-          </a:xfrm>
-          <a:prstGeom prst="rect">
-            <a:avLst/>
-          </a:prstGeom>
-          <a:noFill/>
-          <a:ln/>
-        </p:spPr>
-        <p:txBody>
-          <a:bodyPr wrap="square" lIns="0" tIns="0" rIns="0" bIns="0" rtlCol="0" anchor="ctr"/>
+          <p:cNvPr id="11" name="Text 9"/>
+          <p:cNvSpPr/>
+          <p:nvPr/>
+        </p:nvSpPr>
+        <p:spPr>
+          <a:xfrm>
+            <a:off x="566928" y="4754880"/>
+            <a:ext cx="4206240" cy="1737360"/>
+          </a:xfrm>
+          <a:prstGeom prst="rect">
+            <a:avLst/>
+          </a:prstGeom>
+          <a:noFill/>
+          <a:ln/>
+        </p:spPr>
+        <p:txBody>
+          <a:bodyPr wrap="square" lIns="0" tIns="0" rIns="0" bIns="0" rtlCol="0" anchor="t"/>
           <a:lstStyle/>
           <a:p>
             <a:pPr marL="342900" indent="-342900">
               <a:lnSpc>
-                <a:spcPts val="1848"/>
+                <a:spcPts val="1782"/>
               </a:lnSpc>
               <a:spcAft>
                 <a:spcPts val="900"/>
@@ -8771,7 +8223,7 @@
               <a:buChar char="■"/>
             </a:pPr>
             <a:r>
-              <a:rPr lang="en-US" sz="1400" dirty="0">
+              <a:rPr lang="en-US" sz="1350" dirty="0">
                 <a:solidFill>
                   <a:srgbClr val="343B5C"/>
                 </a:solidFill>
@@ -8779,14 +8231,14 @@
                 <a:ea typeface="Calibri" pitchFamily="34" charset="-122"/>
                 <a:cs typeface="Calibri" pitchFamily="34" charset="-120"/>
               </a:rPr>
-              <a:t>Two typefaces do all the work. A third appears only inside diagrams, never as interface chrome.</a:t>
-            </a:r>
-            <a:endParaRPr lang="en-US" sz="1400" dirty="0"/>
+              <a:t>Both ends of every seek, plus direction and distance</a:t>
+            </a:r>
+            <a:endParaRPr lang="en-US" sz="1350" dirty="0"/>
           </a:p>
           <a:p>
             <a:pPr marL="342900" indent="-342900">
               <a:lnSpc>
-                <a:spcPts val="1848"/>
+                <a:spcPts val="1782"/>
               </a:lnSpc>
               <a:spcAft>
                 <a:spcPts val="900"/>
@@ -8795,7 +8247,7 @@
               <a:buChar char="■"/>
             </a:pPr>
             <a:r>
-              <a:rPr lang="en-US" sz="1400" dirty="0">
+              <a:rPr lang="en-US" sz="1350" dirty="0">
                 <a:solidFill>
                   <a:srgbClr val="343B5C"/>
                 </a:solidFill>
@@ -8803,14 +8255,14 @@
                 <a:ea typeface="Calibri" pitchFamily="34" charset="-122"/>
                 <a:cs typeface="Calibri" pitchFamily="34" charset="-120"/>
               </a:rPr>
-              <a:t>Every colour is an OKLCH token. No inline colour values anywhere.</a:t>
-            </a:r>
-            <a:endParaRPr lang="en-US" sz="1400" dirty="0"/>
+              <a:t>Playback rate and volume changes</a:t>
+            </a:r>
+            <a:endParaRPr lang="en-US" sz="1350" dirty="0"/>
           </a:p>
           <a:p>
             <a:pPr marL="342900" indent="-342900">
               <a:lnSpc>
-                <a:spcPts val="1848"/>
+                <a:spcPts val="1782"/>
               </a:lnSpc>
               <a:spcAft>
                 <a:spcPts val="900"/>
@@ -8819,7 +8271,7 @@
               <a:buChar char="■"/>
             </a:pPr>
             <a:r>
-              <a:rPr lang="en-US" sz="1400" dirty="0">
+              <a:rPr lang="en-US" sz="1350" dirty="0">
                 <a:solidFill>
                   <a:srgbClr val="343B5C"/>
                 </a:solidFill>
@@ -8827,637 +8279,91 @@
                 <a:ea typeface="Calibri" pitchFamily="34" charset="-122"/>
                 <a:cs typeface="Calibri" pitchFamily="34" charset="-120"/>
               </a:rPr>
-              <a:t>No type token exists below 15px, so a smaller size cannot be reached by accident.</a:t>
-            </a:r>
-            <a:endParaRPr lang="en-US" sz="1400" dirty="0"/>
-          </a:p>
-        </p:txBody>
-      </p:sp>
-    </p:spTree>
-  </p:cSld>
-  <p:clrMapOvr>
-    <a:masterClrMapping/>
-  </p:clrMapOvr>
-</p:sld>
-</file>
-
-<file path=ppt/slides/slide7.xml><?xml version="1.0" encoding="utf-8"?>
-<p:sld xmlns:a="http://schemas.openxmlformats.org/drawingml/2006/main" xmlns:r="http://schemas.openxmlformats.org/officeDocument/2006/relationships" xmlns:p="http://schemas.openxmlformats.org/presentationml/2006/main">
-  <p:cSld name="Slide 7">
-    <p:bg>
-      <p:bgPr>
-        <a:solidFill>
-          <a:srgbClr val="1E2340"/>
-        </a:solidFill>
-      </p:bgPr>
-    </p:bg>
-    <p:spTree>
-      <p:nvGrpSpPr>
-        <p:cNvPr id="1" name=""/>
-        <p:cNvGrpSpPr/>
-        <p:nvPr/>
-      </p:nvGrpSpPr>
-      <p:grpSpPr>
-        <a:xfrm>
-          <a:off x="0" y="0"/>
-          <a:ext cx="0" cy="0"/>
-          <a:chOff x="0" y="0"/>
-          <a:chExt cx="0" cy="0"/>
-        </a:xfrm>
-      </p:grpSpPr>
-      <p:sp>
-        <p:nvSpPr>
-          <p:cNvPr id="2" name="Shape 0"/>
-          <p:cNvSpPr/>
-          <p:nvPr/>
-        </p:nvSpPr>
-        <p:spPr>
-          <a:xfrm>
-            <a:off x="607162" y="497434"/>
-            <a:ext cx="182880" cy="182880"/>
-          </a:xfrm>
-          <a:prstGeom prst="rect">
-            <a:avLst/>
-          </a:prstGeom>
-          <a:solidFill>
-            <a:srgbClr val="E8763C"/>
-          </a:solidFill>
-          <a:ln/>
-        </p:spPr>
-      </p:sp>
-      <p:sp>
-        <p:nvSpPr>
-          <p:cNvPr id="3" name="Shape 1"/>
-          <p:cNvSpPr/>
-          <p:nvPr/>
-        </p:nvSpPr>
-        <p:spPr>
-          <a:xfrm>
-            <a:off x="566928" y="457200"/>
-            <a:ext cx="182880" cy="182880"/>
-          </a:xfrm>
-          <a:prstGeom prst="rect">
-            <a:avLst/>
-          </a:prstGeom>
-          <a:solidFill>
-            <a:srgbClr val="2E5BD4"/>
-          </a:solidFill>
-          <a:ln w="15875">
-            <a:solidFill>
-              <a:srgbClr val="1E2340"/>
-            </a:solidFill>
-            <a:prstDash val="solid"/>
-          </a:ln>
-        </p:spPr>
-      </p:sp>
-      <p:sp>
-        <p:nvSpPr>
-          <p:cNvPr id="4" name="Text 2"/>
-          <p:cNvSpPr/>
-          <p:nvPr/>
-        </p:nvSpPr>
-        <p:spPr>
-          <a:xfrm>
-            <a:off x="896112" y="411480"/>
-            <a:ext cx="7315200" cy="274320"/>
-          </a:xfrm>
-          <a:prstGeom prst="rect">
-            <a:avLst/>
-          </a:prstGeom>
-          <a:noFill/>
-          <a:ln/>
-        </p:spPr>
-        <p:txBody>
-          <a:bodyPr wrap="square" lIns="0" tIns="0" rIns="0" bIns="0" rtlCol="0" anchor="ctr"/>
-          <a:lstStyle/>
-          <a:p>
-            <a:pPr indent="0" marL="0">
-              <a:buNone/>
-            </a:pPr>
-            <a:r>
-              <a:rPr lang="en-US" sz="1300" b="1" dirty="0">
-                <a:solidFill>
-                  <a:srgbClr val="E8763C"/>
+              <a:t>Buffering stalls, start and end</a:t>
+            </a:r>
+            <a:endParaRPr lang="en-US" sz="1350" dirty="0"/>
+          </a:p>
+          <a:p>
+            <a:pPr marL="342900" indent="-342900">
+              <a:lnSpc>
+                <a:spcPts val="1782"/>
+              </a:lnSpc>
+              <a:spcAft>
+                <a:spcPts val="900"/>
+              </a:spcAft>
+              <a:buSzPct val="100000"/>
+              <a:buChar char="■"/>
+            </a:pPr>
+            <a:r>
+              <a:rPr lang="en-US" sz="1350" dirty="0">
+                <a:solidFill>
+                  <a:srgbClr val="343B5C"/>
                 </a:solidFill>
                 <a:latin typeface="Calibri" pitchFamily="34" charset="0"/>
                 <a:ea typeface="Calibri" pitchFamily="34" charset="-122"/>
                 <a:cs typeface="Calibri" pitchFamily="34" charset="-120"/>
               </a:rPr>
-              <a:t>The clickstream</a:t>
-            </a:r>
-            <a:endParaRPr lang="en-US" sz="1300" dirty="0"/>
-          </a:p>
-        </p:txBody>
-      </p:sp>
-      <p:sp>
-        <p:nvSpPr>
-          <p:cNvPr id="5" name="Text 3"/>
-          <p:cNvSpPr/>
-          <p:nvPr/>
-        </p:nvSpPr>
-        <p:spPr>
-          <a:xfrm>
-            <a:off x="566928" y="841248"/>
-            <a:ext cx="11057839" cy="566928"/>
-          </a:xfrm>
-          <a:prstGeom prst="rect">
-            <a:avLst/>
-          </a:prstGeom>
-          <a:noFill/>
-          <a:ln/>
-        </p:spPr>
-        <p:txBody>
-          <a:bodyPr wrap="square" lIns="0" tIns="0" rIns="0" bIns="0" rtlCol="0" anchor="t"/>
-          <a:lstStyle/>
-          <a:p>
-            <a:pPr indent="0" marL="0">
-              <a:buNone/>
-            </a:pPr>
-            <a:r>
-              <a:rPr lang="en-US" sz="3400" b="1" dirty="0">
-                <a:solidFill>
-                  <a:srgbClr val="F5EFDD"/>
-                </a:solidFill>
-                <a:latin typeface="Arial" pitchFamily="34" charset="0"/>
-                <a:ea typeface="Arial" pitchFamily="34" charset="-122"/>
-                <a:cs typeface="Arial" pitchFamily="34" charset="-120"/>
-              </a:rPr>
-              <a:t>Everything the brief names</a:t>
-            </a:r>
-            <a:endParaRPr lang="en-US" sz="3400" dirty="0"/>
-          </a:p>
-        </p:txBody>
-      </p:sp>
-      <p:sp>
-        <p:nvSpPr>
-          <p:cNvPr id="6" name="Text 4"/>
-          <p:cNvSpPr/>
-          <p:nvPr/>
-        </p:nvSpPr>
-        <p:spPr>
-          <a:xfrm>
-            <a:off x="566928" y="1444752"/>
-            <a:ext cx="8229600" cy="329184"/>
-          </a:xfrm>
-          <a:prstGeom prst="rect">
-            <a:avLst/>
-          </a:prstGeom>
-          <a:noFill/>
-          <a:ln/>
-        </p:spPr>
-        <p:txBody>
-          <a:bodyPr wrap="square" lIns="0" tIns="0" rIns="0" bIns="0" rtlCol="0" anchor="t"/>
-          <a:lstStyle/>
-          <a:p>
-            <a:pPr indent="0" marL="0">
-              <a:buNone/>
-            </a:pPr>
-            <a:r>
-              <a:rPr lang="en-US" sz="1600" dirty="0">
-                <a:solidFill>
-                  <a:srgbClr val="A9B0CC"/>
+              <a:t>Milestones at 25, 50, 75 and 100 percent</a:t>
+            </a:r>
+            <a:endParaRPr lang="en-US" sz="1350" dirty="0"/>
+          </a:p>
+          <a:p>
+            <a:pPr marL="342900" indent="-342900">
+              <a:lnSpc>
+                <a:spcPts val="1782"/>
+              </a:lnSpc>
+              <a:spcAft>
+                <a:spcPts val="900"/>
+              </a:spcAft>
+              <a:buSzPct val="100000"/>
+              <a:buChar char="■"/>
+            </a:pPr>
+            <a:r>
+              <a:rPr lang="en-US" sz="1350" dirty="0">
+                <a:solidFill>
+                  <a:srgbClr val="343B5C"/>
                 </a:solidFill>
                 <a:latin typeface="Calibri" pitchFamily="34" charset="0"/>
                 <a:ea typeface="Calibri" pitchFamily="34" charset="-122"/>
                 <a:cs typeface="Calibri" pitchFamily="34" charset="-120"/>
               </a:rPr>
-              <a:t>Twenty-two event types, kept few enough to analyse.</a:t>
-            </a:r>
-            <a:endParaRPr lang="en-US" sz="1600" dirty="0"/>
-          </a:p>
-        </p:txBody>
-      </p:sp>
-      <p:sp>
-        <p:nvSpPr>
-          <p:cNvPr id="7" name="Shape 5"/>
-          <p:cNvSpPr/>
-          <p:nvPr/>
-        </p:nvSpPr>
-        <p:spPr>
-          <a:xfrm>
-            <a:off x="566928" y="2103120"/>
-            <a:ext cx="146304" cy="146304"/>
-          </a:xfrm>
-          <a:prstGeom prst="rect">
-            <a:avLst/>
-          </a:prstGeom>
-          <a:solidFill>
-            <a:srgbClr val="E8763C"/>
-          </a:solidFill>
-          <a:ln/>
-        </p:spPr>
-      </p:sp>
-      <p:sp>
-        <p:nvSpPr>
-          <p:cNvPr id="8" name="Text 6"/>
-          <p:cNvSpPr/>
-          <p:nvPr/>
-        </p:nvSpPr>
-        <p:spPr>
-          <a:xfrm>
-            <a:off x="877824" y="2057400"/>
-            <a:ext cx="2651760" cy="731520"/>
-          </a:xfrm>
-          <a:prstGeom prst="rect">
-            <a:avLst/>
-          </a:prstGeom>
-          <a:noFill/>
-          <a:ln/>
-        </p:spPr>
-        <p:txBody>
-          <a:bodyPr wrap="square" lIns="0" tIns="0" rIns="0" bIns="0" rtlCol="0" anchor="t"/>
-          <a:lstStyle/>
-          <a:p>
-            <a:pPr indent="0" marL="0">
-              <a:buNone/>
-            </a:pPr>
-            <a:r>
-              <a:rPr lang="en-US" sz="1500" b="1" dirty="0">
-                <a:solidFill>
-                  <a:srgbClr val="F5EFDD"/>
-                </a:solidFill>
-                <a:latin typeface="Calibri" pitchFamily="34" charset="0"/>
-                <a:ea typeface="Calibri" pitchFamily="34" charset="-122"/>
-                <a:cs typeface="Calibri" pitchFamily="34" charset="-120"/>
-              </a:rPr>
-              <a:t>Navigation</a:t>
-            </a:r>
-            <a:endParaRPr lang="en-US" sz="1500" dirty="0"/>
-          </a:p>
-        </p:txBody>
-      </p:sp>
-      <p:sp>
-        <p:nvSpPr>
-          <p:cNvPr id="9" name="Text 7"/>
-          <p:cNvSpPr/>
-          <p:nvPr/>
-        </p:nvSpPr>
-        <p:spPr>
-          <a:xfrm>
-            <a:off x="3584448" y="2057400"/>
-            <a:ext cx="8229600" cy="731520"/>
-          </a:xfrm>
-          <a:prstGeom prst="rect">
-            <a:avLst/>
-          </a:prstGeom>
-          <a:noFill/>
-          <a:ln/>
-        </p:spPr>
-        <p:txBody>
-          <a:bodyPr wrap="square" lIns="0" tIns="0" rIns="0" bIns="0" rtlCol="0" anchor="t"/>
-          <a:lstStyle/>
-          <a:p>
-            <a:pPr indent="0" marL="0">
-              <a:buNone/>
-            </a:pPr>
-            <a:r>
-              <a:rPr lang="en-US" sz="1250" dirty="0">
-                <a:solidFill>
-                  <a:srgbClr val="A9B0CC"/>
-                </a:solidFill>
-                <a:latin typeface="Calibri" pitchFamily="34" charset="0"/>
-                <a:ea typeface="Calibri" pitchFamily="34" charset="-122"/>
-                <a:cs typeface="Calibri" pitchFamily="34" charset="-120"/>
-              </a:rPr>
-              <a:t>Page viewed · Element clicked · Link followed · Page scrolled · Page hidden · Page shown</a:t>
-            </a:r>
-            <a:endParaRPr lang="en-US" sz="1250" dirty="0"/>
-          </a:p>
-        </p:txBody>
-      </p:sp>
-      <p:sp>
-        <p:nvSpPr>
-          <p:cNvPr id="10" name="Shape 8"/>
-          <p:cNvSpPr/>
-          <p:nvPr/>
-        </p:nvSpPr>
-        <p:spPr>
-          <a:xfrm>
-            <a:off x="566928" y="2999232"/>
-            <a:ext cx="146304" cy="146304"/>
-          </a:xfrm>
-          <a:prstGeom prst="rect">
-            <a:avLst/>
-          </a:prstGeom>
-          <a:solidFill>
-            <a:srgbClr val="E8763C"/>
-          </a:solidFill>
-          <a:ln/>
-        </p:spPr>
-      </p:sp>
-      <p:sp>
-        <p:nvSpPr>
-          <p:cNvPr id="11" name="Text 9"/>
-          <p:cNvSpPr/>
-          <p:nvPr/>
-        </p:nvSpPr>
-        <p:spPr>
-          <a:xfrm>
-            <a:off x="877824" y="2953512"/>
-            <a:ext cx="2651760" cy="731520"/>
-          </a:xfrm>
-          <a:prstGeom prst="rect">
-            <a:avLst/>
-          </a:prstGeom>
-          <a:noFill/>
-          <a:ln/>
-        </p:spPr>
-        <p:txBody>
-          <a:bodyPr wrap="square" lIns="0" tIns="0" rIns="0" bIns="0" rtlCol="0" anchor="t"/>
-          <a:lstStyle/>
-          <a:p>
-            <a:pPr indent="0" marL="0">
-              <a:buNone/>
-            </a:pPr>
-            <a:r>
-              <a:rPr lang="en-US" sz="1500" b="1" dirty="0">
-                <a:solidFill>
-                  <a:srgbClr val="F5EFDD"/>
-                </a:solidFill>
-                <a:latin typeface="Calibri" pitchFamily="34" charset="0"/>
-                <a:ea typeface="Calibri" pitchFamily="34" charset="-122"/>
-                <a:cs typeface="Calibri" pitchFamily="34" charset="-120"/>
-              </a:rPr>
-              <a:t>Video</a:t>
-            </a:r>
-            <a:endParaRPr lang="en-US" sz="1500" dirty="0"/>
-          </a:p>
-        </p:txBody>
-      </p:sp>
-      <p:sp>
-        <p:nvSpPr>
-          <p:cNvPr id="12" name="Text 10"/>
-          <p:cNvSpPr/>
-          <p:nvPr/>
-        </p:nvSpPr>
-        <p:spPr>
-          <a:xfrm>
-            <a:off x="3584448" y="2953512"/>
-            <a:ext cx="8229600" cy="731520"/>
-          </a:xfrm>
-          <a:prstGeom prst="rect">
-            <a:avLst/>
-          </a:prstGeom>
-          <a:noFill/>
-          <a:ln/>
-        </p:spPr>
-        <p:txBody>
-          <a:bodyPr wrap="square" lIns="0" tIns="0" rIns="0" bIns="0" rtlCol="0" anchor="t"/>
-          <a:lstStyle/>
-          <a:p>
-            <a:pPr indent="0" marL="0">
-              <a:buNone/>
-            </a:pPr>
-            <a:r>
-              <a:rPr lang="en-US" sz="1250" dirty="0">
-                <a:solidFill>
-                  <a:srgbClr val="A9B0CC"/>
-                </a:solidFill>
-                <a:latin typeface="Calibri" pitchFamily="34" charset="0"/>
-                <a:ea typeface="Calibri" pitchFamily="34" charset="-122"/>
-                <a:cs typeface="Calibri" pitchFamily="34" charset="-120"/>
-              </a:rPr>
-              <a:t>Started · paused · resumed · seeked · ended · rate changed · volume changed · fullscreen · buffering · milestone · heartbeat</a:t>
-            </a:r>
-            <a:endParaRPr lang="en-US" sz="1250" dirty="0"/>
-          </a:p>
-        </p:txBody>
-      </p:sp>
-      <p:sp>
-        <p:nvSpPr>
-          <p:cNvPr id="13" name="Shape 11"/>
-          <p:cNvSpPr/>
-          <p:nvPr/>
-        </p:nvSpPr>
-        <p:spPr>
-          <a:xfrm>
-            <a:off x="566928" y="3895344"/>
-            <a:ext cx="146304" cy="146304"/>
-          </a:xfrm>
-          <a:prstGeom prst="rect">
-            <a:avLst/>
-          </a:prstGeom>
-          <a:solidFill>
-            <a:srgbClr val="E8763C"/>
-          </a:solidFill>
-          <a:ln/>
-        </p:spPr>
-      </p:sp>
-      <p:sp>
-        <p:nvSpPr>
-          <p:cNvPr id="14" name="Text 12"/>
-          <p:cNvSpPr/>
-          <p:nvPr/>
-        </p:nvSpPr>
-        <p:spPr>
-          <a:xfrm>
-            <a:off x="877824" y="3849624"/>
-            <a:ext cx="2651760" cy="731520"/>
-          </a:xfrm>
-          <a:prstGeom prst="rect">
-            <a:avLst/>
-          </a:prstGeom>
-          <a:noFill/>
-          <a:ln/>
-        </p:spPr>
-        <p:txBody>
-          <a:bodyPr wrap="square" lIns="0" tIns="0" rIns="0" bIns="0" rtlCol="0" anchor="t"/>
-          <a:lstStyle/>
-          <a:p>
-            <a:pPr indent="0" marL="0">
-              <a:buNone/>
-            </a:pPr>
-            <a:r>
-              <a:rPr lang="en-US" sz="1500" b="1" dirty="0">
-                <a:solidFill>
-                  <a:srgbClr val="F5EFDD"/>
-                </a:solidFill>
-                <a:latin typeface="Calibri" pitchFamily="34" charset="0"/>
-                <a:ea typeface="Calibri" pitchFamily="34" charset="-122"/>
-                <a:cs typeface="Calibri" pitchFamily="34" charset="-120"/>
-              </a:rPr>
-              <a:t>Quiz</a:t>
-            </a:r>
-            <a:endParaRPr lang="en-US" sz="1500" dirty="0"/>
-          </a:p>
-        </p:txBody>
-      </p:sp>
-      <p:sp>
-        <p:nvSpPr>
-          <p:cNvPr id="15" name="Text 13"/>
-          <p:cNvSpPr/>
-          <p:nvPr/>
-        </p:nvSpPr>
-        <p:spPr>
-          <a:xfrm>
-            <a:off x="3584448" y="3849624"/>
-            <a:ext cx="8229600" cy="731520"/>
-          </a:xfrm>
-          <a:prstGeom prst="rect">
-            <a:avLst/>
-          </a:prstGeom>
-          <a:noFill/>
-          <a:ln/>
-        </p:spPr>
-        <p:txBody>
-          <a:bodyPr wrap="square" lIns="0" tIns="0" rIns="0" bIns="0" rtlCol="0" anchor="t"/>
-          <a:lstStyle/>
-          <a:p>
-            <a:pPr indent="0" marL="0">
-              <a:buNone/>
-            </a:pPr>
-            <a:r>
-              <a:rPr lang="en-US" sz="1250" dirty="0">
-                <a:solidFill>
-                  <a:srgbClr val="A9B0CC"/>
-                </a:solidFill>
-                <a:latin typeface="Calibri" pitchFamily="34" charset="0"/>
-                <a:ea typeface="Calibri" pitchFamily="34" charset="-122"/>
-                <a:cs typeface="Calibri" pitchFamily="34" charset="-120"/>
-              </a:rPr>
-              <a:t>Attempt started · option selected · answer cleared · question answered · attempt submitted</a:t>
-            </a:r>
-            <a:endParaRPr lang="en-US" sz="1250" dirty="0"/>
-          </a:p>
-        </p:txBody>
-      </p:sp>
-      <p:sp>
-        <p:nvSpPr>
-          <p:cNvPr id="16" name="Shape 14"/>
-          <p:cNvSpPr/>
-          <p:nvPr/>
-        </p:nvSpPr>
-        <p:spPr>
-          <a:xfrm>
-            <a:off x="566928" y="4791456"/>
-            <a:ext cx="146304" cy="146304"/>
-          </a:xfrm>
-          <a:prstGeom prst="rect">
-            <a:avLst/>
-          </a:prstGeom>
-          <a:solidFill>
-            <a:srgbClr val="E8763C"/>
-          </a:solidFill>
-          <a:ln/>
-        </p:spPr>
-      </p:sp>
-      <p:sp>
-        <p:nvSpPr>
-          <p:cNvPr id="17" name="Text 15"/>
-          <p:cNvSpPr/>
-          <p:nvPr/>
-        </p:nvSpPr>
-        <p:spPr>
-          <a:xfrm>
-            <a:off x="877824" y="4745736"/>
-            <a:ext cx="2651760" cy="731520"/>
-          </a:xfrm>
-          <a:prstGeom prst="rect">
-            <a:avLst/>
-          </a:prstGeom>
-          <a:noFill/>
-          <a:ln/>
-        </p:spPr>
-        <p:txBody>
-          <a:bodyPr wrap="square" lIns="0" tIns="0" rIns="0" bIns="0" rtlCol="0" anchor="t"/>
-          <a:lstStyle/>
-          <a:p>
-            <a:pPr indent="0" marL="0">
-              <a:buNone/>
-            </a:pPr>
-            <a:r>
-              <a:rPr lang="en-US" sz="1500" b="1" dirty="0">
-                <a:solidFill>
-                  <a:srgbClr val="F5EFDD"/>
-                </a:solidFill>
-                <a:latin typeface="Calibri" pitchFamily="34" charset="0"/>
-                <a:ea typeface="Calibri" pitchFamily="34" charset="-122"/>
-                <a:cs typeface="Calibri" pitchFamily="34" charset="-120"/>
-              </a:rPr>
-              <a:t>Lesson, Course, User, Report</a:t>
-            </a:r>
-            <a:endParaRPr lang="en-US" sz="1500" dirty="0"/>
-          </a:p>
-        </p:txBody>
-      </p:sp>
-      <p:sp>
-        <p:nvSpPr>
-          <p:cNvPr id="18" name="Text 16"/>
-          <p:cNvSpPr/>
-          <p:nvPr/>
-        </p:nvSpPr>
-        <p:spPr>
-          <a:xfrm>
-            <a:off x="3584448" y="4745736"/>
-            <a:ext cx="8229600" cy="731520"/>
-          </a:xfrm>
-          <a:prstGeom prst="rect">
-            <a:avLst/>
-          </a:prstGeom>
-          <a:noFill/>
-          <a:ln/>
-        </p:spPr>
-        <p:txBody>
-          <a:bodyPr wrap="square" lIns="0" tIns="0" rIns="0" bIns="0" rtlCol="0" anchor="t"/>
-          <a:lstStyle/>
-          <a:p>
-            <a:pPr indent="0" marL="0">
-              <a:buNone/>
-            </a:pPr>
-            <a:r>
-              <a:rPr lang="en-US" sz="1250" dirty="0">
-                <a:solidFill>
-                  <a:srgbClr val="A9B0CC"/>
-                </a:solidFill>
-                <a:latin typeface="Calibri" pitchFamily="34" charset="0"/>
-                <a:ea typeface="Calibri" pitchFamily="34" charset="-122"/>
-                <a:cs typeface="Calibri" pitchFamily="34" charset="-120"/>
-              </a:rPr>
-              <a:t>Lesson viewed · Course viewed · Catalogue viewed · Account created · Logged in and out · Login failed · Reports viewed · Clickstream exported</a:t>
-            </a:r>
-            <a:endParaRPr lang="en-US" sz="1250" dirty="0"/>
-          </a:p>
-        </p:txBody>
-      </p:sp>
-      <p:sp>
-        <p:nvSpPr>
-          <p:cNvPr id="19" name="Text 17"/>
-          <p:cNvSpPr/>
-          <p:nvPr/>
-        </p:nvSpPr>
-        <p:spPr>
-          <a:xfrm>
-            <a:off x="566928" y="5669280"/>
-            <a:ext cx="11064240" cy="548640"/>
-          </a:xfrm>
-          <a:prstGeom prst="rect">
-            <a:avLst/>
-          </a:prstGeom>
-          <a:noFill/>
-          <a:ln/>
-        </p:spPr>
-        <p:txBody>
-          <a:bodyPr wrap="square" lIns="0" tIns="0" rIns="0" bIns="0" rtlCol="0" anchor="ctr"/>
-          <a:lstStyle/>
-          <a:p>
-            <a:pPr indent="0" marL="0">
-              <a:buNone/>
-            </a:pPr>
-            <a:r>
-              <a:rPr lang="en-US" sz="1400" i="1" dirty="0">
-                <a:solidFill>
-                  <a:srgbClr val="E8763C"/>
-                </a:solidFill>
-                <a:latin typeface="Calibri" pitchFamily="34" charset="0"/>
-                <a:ea typeface="Calibri" pitchFamily="34" charset="-122"/>
-                <a:cs typeface="Calibri" pitchFamily="34" charset="-120"/>
-              </a:rPr>
-              <a:t>Clicks are captured by one listener on the document in the capture phase, not by handlers on the elements someone remembered to instrument.</a:t>
-            </a:r>
-            <a:endParaRPr lang="en-US" sz="1400" dirty="0"/>
-          </a:p>
-        </p:txBody>
-      </p:sp>
+              <a:t>Watch-time heartbeats while playing</a:t>
+            </a:r>
+            <a:endParaRPr lang="en-US" sz="1350" dirty="0"/>
+          </a:p>
+        </p:txBody>
+      </p:sp>
+      <p:pic>
+        <p:nvPicPr>
+          <p:cNvPr id="12" name="Image 0" descr="/Users/ndstab/Desktop/et/docs/screens/event-video.png">    </p:cNvPr>
+          <p:cNvPicPr>
+            <a:picLocks noChangeAspect="1"/>
+          </p:cNvPicPr>
+          <p:nvPr/>
+        </p:nvPicPr>
+        <p:blipFill>
+          <a:blip r:embed="rId1"/>
+          <a:stretch>
+            <a:fillRect/>
+          </a:stretch>
+        </p:blipFill>
+        <p:spPr>
+          <a:xfrm>
+            <a:off x="5166360" y="1783080"/>
+            <a:ext cx="6144768" cy="4480560"/>
+          </a:xfrm>
+          <a:prstGeom prst="rect">
+            <a:avLst/>
+          </a:prstGeom>
+          <a:effectLst>
+            <a:outerShdw sx="100000" sy="100000" kx="0" ky="0" algn="bl" rotWithShape="0" blurRad="101600" dist="889" dir="2700000">
+              <a:srgbClr val="1E2340">
+                <a:alpha val="100000"/>
+              </a:srgbClr>
+            </a:outerShdw>
+          </a:effectLst>
+        </p:spPr>
+      </p:pic>
     </p:spTree>
   </p:cSld>
   <p:clrMapOvr>
@@ -9553,7 +8459,7 @@
           <a:ln/>
         </p:spPr>
         <p:txBody>
-          <a:bodyPr wrap="square" lIns="0" tIns="0" rIns="0" bIns="0" rtlCol="0" anchor="ctr"/>
+          <a:bodyPr wrap="square" lIns="0" tIns="0" rIns="0" bIns="0" rtlCol="0" anchor="t"/>
           <a:lstStyle/>
           <a:p>
             <a:pPr indent="0" marL="0">
@@ -9568,7 +8474,7 @@
                 <a:ea typeface="Calibri" pitchFamily="34" charset="-122"/>
                 <a:cs typeface="Calibri" pitchFamily="34" charset="-120"/>
               </a:rPr>
-              <a:t>The pivotal decision</a:t>
+              <a:t>For educators</a:t>
             </a:r>
             <a:endParaRPr lang="en-US" sz="1300" dirty="0"/>
           </a:p>
@@ -9583,16 +8489,16 @@
         <p:spPr>
           <a:xfrm>
             <a:off x="566928" y="841248"/>
-            <a:ext cx="11057839" cy="777240"/>
-          </a:xfrm>
-          <a:prstGeom prst="rect">
-            <a:avLst/>
-          </a:prstGeom>
-          <a:noFill/>
-          <a:ln/>
-        </p:spPr>
-        <p:txBody>
-          <a:bodyPr wrap="square" lIns="0" tIns="0" rIns="0" bIns="0" rtlCol="0" anchor="ctr"/>
+            <a:ext cx="11057839" cy="658368"/>
+          </a:xfrm>
+          <a:prstGeom prst="rect">
+            <a:avLst/>
+          </a:prstGeom>
+          <a:noFill/>
+          <a:ln/>
+        </p:spPr>
+        <p:txBody>
+          <a:bodyPr wrap="square" lIns="0" tIns="0" rIns="0" bIns="0" rtlCol="0" anchor="t"/>
           <a:lstStyle/>
           <a:p>
             <a:pPr indent="0" marL="0">
@@ -9607,7 +8513,7 @@
                 <a:ea typeface="Arial" pitchFamily="34" charset="-122"/>
                 <a:cs typeface="Arial" pitchFamily="34" charset="-120"/>
               </a:rPr>
-              <a:t>Why the video player is written, not embedded</a:t>
+              <a:t>The whole record, live</a:t>
             </a:r>
             <a:endParaRPr lang="en-US" sz="3400" dirty="0"/>
           </a:p>
@@ -9615,112 +8521,28 @@
       </p:sp>
       <p:sp>
         <p:nvSpPr>
-          <p:cNvPr id="6" name="Shape 4"/>
-          <p:cNvSpPr/>
-          <p:nvPr/>
-        </p:nvSpPr>
-        <p:spPr>
-          <a:xfrm>
-            <a:off x="630936" y="1892808"/>
-            <a:ext cx="5212080" cy="3017520"/>
-          </a:xfrm>
-          <a:prstGeom prst="rect">
-            <a:avLst/>
-          </a:prstGeom>
-          <a:solidFill>
-            <a:srgbClr val="C9C2AB"/>
-          </a:solidFill>
-          <a:ln/>
-        </p:spPr>
-      </p:sp>
-      <p:sp>
-        <p:nvSpPr>
-          <p:cNvPr id="7" name="Shape 5"/>
+          <p:cNvPr id="6" name="Text 4"/>
           <p:cNvSpPr/>
           <p:nvPr/>
         </p:nvSpPr>
         <p:spPr>
           <a:xfrm>
             <a:off x="566928" y="1828800"/>
-            <a:ext cx="5212080" cy="3017520"/>
-          </a:xfrm>
-          <a:prstGeom prst="rect">
-            <a:avLst/>
-          </a:prstGeom>
-          <a:solidFill>
-            <a:srgbClr val="EDE6CF"/>
-          </a:solidFill>
-          <a:ln w="19050">
-            <a:solidFill>
-              <a:srgbClr val="1E2340"/>
-            </a:solidFill>
-            <a:prstDash val="solid"/>
-          </a:ln>
-        </p:spPr>
-      </p:sp>
-      <p:sp>
-        <p:nvSpPr>
-          <p:cNvPr id="8" name="Text 6"/>
-          <p:cNvSpPr/>
-          <p:nvPr/>
-        </p:nvSpPr>
-        <p:spPr>
-          <a:xfrm>
-            <a:off x="841248" y="2057400"/>
-            <a:ext cx="4663440" cy="365760"/>
-          </a:xfrm>
-          <a:prstGeom prst="rect">
-            <a:avLst/>
-          </a:prstGeom>
-          <a:noFill/>
-          <a:ln/>
-        </p:spPr>
-        <p:txBody>
-          <a:bodyPr wrap="square" lIns="0" tIns="0" rIns="0" bIns="0" rtlCol="0" anchor="ctr"/>
-          <a:lstStyle/>
-          <a:p>
-            <a:pPr indent="0" marL="0">
-              <a:buNone/>
-            </a:pPr>
-            <a:r>
-              <a:rPr lang="en-US" sz="1700" b="1" dirty="0">
-                <a:solidFill>
-                  <a:srgbClr val="6E7597"/>
-                </a:solidFill>
-                <a:latin typeface="Arial" pitchFamily="34" charset="0"/>
-                <a:ea typeface="Arial" pitchFamily="34" charset="-122"/>
-                <a:cs typeface="Arial" pitchFamily="34" charset="-120"/>
-              </a:rPr>
-              <a:t>An embedded third party player</a:t>
-            </a:r>
-            <a:endParaRPr lang="en-US" sz="1700" dirty="0"/>
-          </a:p>
-        </p:txBody>
-      </p:sp>
-      <p:sp>
-        <p:nvSpPr>
-          <p:cNvPr id="9" name="Text 7"/>
-          <p:cNvSpPr/>
-          <p:nvPr/>
-        </p:nvSpPr>
-        <p:spPr>
-          <a:xfrm>
-            <a:off x="841248" y="2560320"/>
-            <a:ext cx="4663440" cy="2103120"/>
-          </a:xfrm>
-          <a:prstGeom prst="rect">
-            <a:avLst/>
-          </a:prstGeom>
-          <a:noFill/>
-          <a:ln/>
-        </p:spPr>
-        <p:txBody>
-          <a:bodyPr wrap="square" lIns="0" tIns="0" rIns="0" bIns="0" rtlCol="0" anchor="ctr"/>
+            <a:ext cx="3931920" cy="2468880"/>
+          </a:xfrm>
+          <a:prstGeom prst="rect">
+            <a:avLst/>
+          </a:prstGeom>
+          <a:noFill/>
+          <a:ln/>
+        </p:spPr>
+        <p:txBody>
+          <a:bodyPr wrap="square" lIns="0" tIns="0" rIns="0" bIns="0" rtlCol="0" anchor="t"/>
           <a:lstStyle/>
           <a:p>
             <a:pPr marL="342900" indent="-342900">
               <a:lnSpc>
-                <a:spcPts val="1782"/>
+                <a:spcPts val="1980"/>
               </a:lnSpc>
               <a:spcAft>
                 <a:spcPts val="900"/>
@@ -9729,22 +8551,22 @@
               <a:buChar char="■"/>
             </a:pPr>
             <a:r>
-              <a:rPr lang="en-US" sz="1350" dirty="0">
-                <a:solidFill>
-                  <a:srgbClr val="6E7597"/>
+              <a:rPr lang="en-US" sz="1500" dirty="0">
+                <a:solidFill>
+                  <a:srgbClr val="343B5C"/>
                 </a:solidFill>
                 <a:latin typeface="Calibri" pitchFamily="34" charset="0"/>
                 <a:ea typeface="Calibri" pitchFamily="34" charset="-122"/>
                 <a:cs typeface="Calibri" pitchFamily="34" charset="-120"/>
               </a:rPr>
-              <a:t>play, pause, ended</a:t>
-            </a:r>
-            <a:endParaRPr lang="en-US" sz="1350" dirty="0"/>
+              <a:t>Every recorded action, newest first, refreshing on its own.</a:t>
+            </a:r>
+            <a:endParaRPr lang="en-US" sz="1500" dirty="0"/>
           </a:p>
           <a:p>
             <a:pPr marL="342900" indent="-342900">
               <a:lnSpc>
-                <a:spcPts val="1782"/>
+                <a:spcPts val="1980"/>
               </a:lnSpc>
               <a:spcAft>
                 <a:spcPts val="900"/>
@@ -9753,22 +8575,22 @@
               <a:buChar char="■"/>
             </a:pPr>
             <a:r>
-              <a:rPr lang="en-US" sz="1350" dirty="0">
-                <a:solidFill>
-                  <a:srgbClr val="6E7597"/>
+              <a:rPr lang="en-US" sz="1500" dirty="0">
+                <a:solidFill>
+                  <a:srgbClr val="343B5C"/>
                 </a:solidFill>
                 <a:latin typeface="Calibri" pitchFamily="34" charset="0"/>
                 <a:ea typeface="Calibri" pitchFamily="34" charset="-122"/>
                 <a:cs typeface="Calibri" pitchFamily="34" charset="-120"/>
               </a:rPr>
-              <a:t>seeks only by polling the clock and guessing</a:t>
-            </a:r>
-            <a:endParaRPr lang="en-US" sz="1350" dirty="0"/>
+              <a:t>Filter by learner, course, component, event name, date range or free text.</a:t>
+            </a:r>
+            <a:endParaRPr lang="en-US" sz="1500" dirty="0"/>
           </a:p>
           <a:p>
             <a:pPr marL="342900" indent="-342900">
               <a:lnSpc>
-                <a:spcPts val="1782"/>
+                <a:spcPts val="1980"/>
               </a:lnSpc>
               <a:spcAft>
                 <a:spcPts val="900"/>
@@ -9777,22 +8599,22 @@
               <a:buChar char="■"/>
             </a:pPr>
             <a:r>
-              <a:rPr lang="en-US" sz="1350" dirty="0">
-                <a:solidFill>
-                  <a:srgbClr val="6E7597"/>
+              <a:rPr lang="en-US" sz="1500" dirty="0">
+                <a:solidFill>
+                  <a:srgbClr val="343B5C"/>
                 </a:solidFill>
                 <a:latin typeface="Calibri" pitchFamily="34" charset="0"/>
                 <a:ea typeface="Calibri" pitchFamily="34" charset="-122"/>
                 <a:cs typeface="Calibri" pitchFamily="34" charset="-120"/>
               </a:rPr>
-              <a:t>no reliable buffering signal</a:t>
-            </a:r>
-            <a:endParaRPr lang="en-US" sz="1350" dirty="0"/>
+              <a:t>Descriptions read as sentences naming who did what to which lesson.</a:t>
+            </a:r>
+            <a:endParaRPr lang="en-US" sz="1500" dirty="0"/>
           </a:p>
           <a:p>
             <a:pPr marL="342900" indent="-342900">
               <a:lnSpc>
-                <a:spcPts val="1782"/>
+                <a:spcPts val="1980"/>
               </a:lnSpc>
               <a:spcAft>
                 <a:spcPts val="900"/>
@@ -9801,74 +8623,50 @@
               <a:buChar char="■"/>
             </a:pPr>
             <a:r>
-              <a:rPr lang="en-US" sz="1350" dirty="0">
-                <a:solidFill>
-                  <a:srgbClr val="6E7597"/>
+              <a:rPr lang="en-US" sz="1500" dirty="0">
+                <a:solidFill>
+                  <a:srgbClr val="343B5C"/>
                 </a:solidFill>
                 <a:latin typeface="Calibri" pitchFamily="34" charset="0"/>
                 <a:ea typeface="Calibri" pitchFamily="34" charset="-122"/>
                 <a:cs typeface="Calibri" pitchFamily="34" charset="-120"/>
               </a:rPr>
-              <a:t>no quartile milestones</a:t>
-            </a:r>
-            <a:endParaRPr lang="en-US" sz="1350" dirty="0"/>
-          </a:p>
-          <a:p>
-            <a:pPr marL="342900" indent="-342900">
-              <a:lnSpc>
-                <a:spcPts val="1782"/>
-              </a:lnSpc>
-              <a:spcAft>
-                <a:spcPts val="900"/>
-              </a:spcAft>
-              <a:buSzPct val="100000"/>
-              <a:buChar char="■"/>
-            </a:pPr>
-            <a:r>
-              <a:rPr lang="en-US" sz="1350" dirty="0">
-                <a:solidFill>
-                  <a:srgbClr val="6E7597"/>
-                </a:solidFill>
-                <a:latin typeface="Calibri" pitchFamily="34" charset="0"/>
-                <a:ea typeface="Calibri" pitchFamily="34" charset="-122"/>
-                <a:cs typeface="Calibri" pitchFamily="34" charset="-120"/>
-              </a:rPr>
-              <a:t>ads, and an escape hatch off your site</a:t>
-            </a:r>
-            <a:endParaRPr lang="en-US" sz="1350" dirty="0"/>
-          </a:p>
-        </p:txBody>
-      </p:sp>
-      <p:sp>
-        <p:nvSpPr>
-          <p:cNvPr id="10" name="Shape 8"/>
-          <p:cNvSpPr/>
-          <p:nvPr/>
-        </p:nvSpPr>
-        <p:spPr>
-          <a:xfrm>
-            <a:off x="6327648" y="1892808"/>
-            <a:ext cx="5349240" cy="3017520"/>
+              <a:t>Educator activity is recorded too, so the log never goes quiet.</a:t>
+            </a:r>
+            <a:endParaRPr lang="en-US" sz="1500" dirty="0"/>
+          </a:p>
+        </p:txBody>
+      </p:sp>
+      <p:sp>
+        <p:nvSpPr>
+          <p:cNvPr id="7" name="Shape 5"/>
+          <p:cNvSpPr/>
+          <p:nvPr/>
+        </p:nvSpPr>
+        <p:spPr>
+          <a:xfrm>
+            <a:off x="630936" y="4636008"/>
+            <a:ext cx="1874520" cy="1133856"/>
           </a:xfrm>
           <a:prstGeom prst="rect">
             <a:avLst/>
           </a:prstGeom>
           <a:solidFill>
-            <a:srgbClr val="2E5BD4"/>
+            <a:srgbClr val="E8763C"/>
           </a:solidFill>
           <a:ln/>
         </p:spPr>
       </p:sp>
       <p:sp>
         <p:nvSpPr>
-          <p:cNvPr id="11" name="Shape 9"/>
-          <p:cNvSpPr/>
-          <p:nvPr/>
-        </p:nvSpPr>
-        <p:spPr>
-          <a:xfrm>
-            <a:off x="6263640" y="1828800"/>
-            <a:ext cx="5349240" cy="3017520"/>
+          <p:cNvPr id="8" name="Shape 6"/>
+          <p:cNvSpPr/>
+          <p:nvPr/>
+        </p:nvSpPr>
+        <p:spPr>
+          <a:xfrm>
+            <a:off x="566928" y="4572000"/>
+            <a:ext cx="1874520" cy="1133856"/>
           </a:xfrm>
           <a:prstGeom prst="rect">
             <a:avLst/>
@@ -9886,224 +8684,236 @@
       </p:sp>
       <p:sp>
         <p:nvSpPr>
-          <p:cNvPr id="12" name="Text 10"/>
-          <p:cNvSpPr/>
-          <p:nvPr/>
-        </p:nvSpPr>
-        <p:spPr>
-          <a:xfrm>
-            <a:off x="6537960" y="2057400"/>
-            <a:ext cx="4800600" cy="365760"/>
-          </a:xfrm>
-          <a:prstGeom prst="rect">
-            <a:avLst/>
-          </a:prstGeom>
-          <a:noFill/>
-          <a:ln/>
-        </p:spPr>
-        <p:txBody>
-          <a:bodyPr wrap="square" lIns="0" tIns="0" rIns="0" bIns="0" rtlCol="0" anchor="ctr"/>
+          <p:cNvPr id="9" name="Text 7"/>
+          <p:cNvSpPr/>
+          <p:nvPr/>
+        </p:nvSpPr>
+        <p:spPr>
+          <a:xfrm>
+            <a:off x="768096" y="4690872"/>
+            <a:ext cx="1472184" cy="548640"/>
+          </a:xfrm>
+          <a:prstGeom prst="rect">
+            <a:avLst/>
+          </a:prstGeom>
+          <a:noFill/>
+          <a:ln/>
+        </p:spPr>
+        <p:txBody>
+          <a:bodyPr wrap="square" lIns="0" tIns="0" rIns="0" bIns="0" rtlCol="0" anchor="t"/>
           <a:lstStyle/>
           <a:p>
             <a:pPr indent="0" marL="0">
               <a:buNone/>
             </a:pPr>
             <a:r>
-              <a:rPr lang="en-US" sz="1700" b="1" dirty="0">
-                <a:solidFill>
-                  <a:srgbClr val="2E5BD4"/>
+              <a:rPr lang="en-US" sz="2800" b="1" dirty="0">
+                <a:solidFill>
+                  <a:srgbClr val="1E2340"/>
                 </a:solidFill>
                 <a:latin typeface="Arial" pitchFamily="34" charset="0"/>
                 <a:ea typeface="Arial" pitchFamily="34" charset="-122"/>
                 <a:cs typeface="Arial" pitchFamily="34" charset="-120"/>
               </a:rPr>
-              <a:t>A player written for this app</a:t>
-            </a:r>
-            <a:endParaRPr lang="en-US" sz="1700" dirty="0"/>
-          </a:p>
-        </p:txBody>
-      </p:sp>
-      <p:sp>
-        <p:nvSpPr>
-          <p:cNvPr id="13" name="Text 11"/>
-          <p:cNvSpPr/>
-          <p:nvPr/>
-        </p:nvSpPr>
-        <p:spPr>
-          <a:xfrm>
-            <a:off x="6537960" y="2560320"/>
-            <a:ext cx="4800600" cy="2103120"/>
-          </a:xfrm>
-          <a:prstGeom prst="rect">
-            <a:avLst/>
-          </a:prstGeom>
-          <a:noFill/>
-          <a:ln/>
-        </p:spPr>
-        <p:txBody>
-          <a:bodyPr wrap="square" lIns="0" tIns="0" rIns="0" bIns="0" rtlCol="0" anchor="ctr"/>
-          <a:lstStyle/>
-          <a:p>
-            <a:pPr marL="342900" indent="-342900">
-              <a:lnSpc>
-                <a:spcPts val="1782"/>
-              </a:lnSpc>
-              <a:spcAft>
-                <a:spcPts val="900"/>
-              </a:spcAft>
-              <a:buSzPct val="100000"/>
-              <a:buChar char="■"/>
-            </a:pPr>
-            <a:r>
-              <a:rPr lang="en-US" sz="1350" dirty="0">
-                <a:solidFill>
-                  <a:srgbClr val="1E2340"/>
+              <a:t>1,632</a:t>
+            </a:r>
+            <a:endParaRPr lang="en-US" sz="2800" dirty="0"/>
+          </a:p>
+        </p:txBody>
+      </p:sp>
+      <p:sp>
+        <p:nvSpPr>
+          <p:cNvPr id="10" name="Text 8"/>
+          <p:cNvSpPr/>
+          <p:nvPr/>
+        </p:nvSpPr>
+        <p:spPr>
+          <a:xfrm>
+            <a:off x="768096" y="5266944"/>
+            <a:ext cx="1472184" cy="347472"/>
+          </a:xfrm>
+          <a:prstGeom prst="rect">
+            <a:avLst/>
+          </a:prstGeom>
+          <a:noFill/>
+          <a:ln/>
+        </p:spPr>
+        <p:txBody>
+          <a:bodyPr wrap="square" lIns="0" tIns="0" rIns="0" bIns="0" rtlCol="0" anchor="t"/>
+          <a:lstStyle/>
+          <a:p>
+            <a:pPr indent="0" marL="0">
+              <a:buNone/>
+            </a:pPr>
+            <a:r>
+              <a:rPr lang="en-US" sz="1250" dirty="0">
+                <a:solidFill>
+                  <a:srgbClr val="6E7597"/>
                 </a:solidFill>
                 <a:latin typeface="Calibri" pitchFamily="34" charset="0"/>
                 <a:ea typeface="Calibri" pitchFamily="34" charset="-122"/>
                 <a:cs typeface="Calibri" pitchFamily="34" charset="-120"/>
               </a:rPr>
-              <a:t>seeks with both endpoints, direction and jump size</a:t>
-            </a:r>
-            <a:endParaRPr lang="en-US" sz="1350" dirty="0"/>
-          </a:p>
-          <a:p>
-            <a:pPr marL="342900" indent="-342900">
-              <a:lnSpc>
-                <a:spcPts val="1782"/>
-              </a:lnSpc>
-              <a:spcAft>
-                <a:spcPts val="900"/>
-              </a:spcAft>
-              <a:buSzPct val="100000"/>
-              <a:buChar char="■"/>
-            </a:pPr>
-            <a:r>
-              <a:rPr lang="en-US" sz="1350" dirty="0">
+              <a:t>events recorded</a:t>
+            </a:r>
+            <a:endParaRPr lang="en-US" sz="1250" dirty="0"/>
+          </a:p>
+        </p:txBody>
+      </p:sp>
+      <p:sp>
+        <p:nvSpPr>
+          <p:cNvPr id="11" name="Shape 9"/>
+          <p:cNvSpPr/>
+          <p:nvPr/>
+        </p:nvSpPr>
+        <p:spPr>
+          <a:xfrm>
+            <a:off x="2688336" y="4636008"/>
+            <a:ext cx="1874520" cy="1133856"/>
+          </a:xfrm>
+          <a:prstGeom prst="rect">
+            <a:avLst/>
+          </a:prstGeom>
+          <a:solidFill>
+            <a:srgbClr val="2E5BD4"/>
+          </a:solidFill>
+          <a:ln/>
+        </p:spPr>
+      </p:sp>
+      <p:sp>
+        <p:nvSpPr>
+          <p:cNvPr id="12" name="Shape 10"/>
+          <p:cNvSpPr/>
+          <p:nvPr/>
+        </p:nvSpPr>
+        <p:spPr>
+          <a:xfrm>
+            <a:off x="2624328" y="4572000"/>
+            <a:ext cx="1874520" cy="1133856"/>
+          </a:xfrm>
+          <a:prstGeom prst="rect">
+            <a:avLst/>
+          </a:prstGeom>
+          <a:solidFill>
+            <a:srgbClr val="F7F2E2"/>
+          </a:solidFill>
+          <a:ln w="19050">
+            <a:solidFill>
+              <a:srgbClr val="1E2340"/>
+            </a:solidFill>
+            <a:prstDash val="solid"/>
+          </a:ln>
+        </p:spPr>
+      </p:sp>
+      <p:sp>
+        <p:nvSpPr>
+          <p:cNvPr id="13" name="Text 11"/>
+          <p:cNvSpPr/>
+          <p:nvPr/>
+        </p:nvSpPr>
+        <p:spPr>
+          <a:xfrm>
+            <a:off x="2825496" y="4690872"/>
+            <a:ext cx="1472184" cy="548640"/>
+          </a:xfrm>
+          <a:prstGeom prst="rect">
+            <a:avLst/>
+          </a:prstGeom>
+          <a:noFill/>
+          <a:ln/>
+        </p:spPr>
+        <p:txBody>
+          <a:bodyPr wrap="square" lIns="0" tIns="0" rIns="0" bIns="0" rtlCol="0" anchor="t"/>
+          <a:lstStyle/>
+          <a:p>
+            <a:pPr indent="0" marL="0">
+              <a:buNone/>
+            </a:pPr>
+            <a:r>
+              <a:rPr lang="en-US" sz="2800" b="1" dirty="0">
                 <a:solidFill>
                   <a:srgbClr val="1E2340"/>
+                </a:solidFill>
+                <a:latin typeface="Arial" pitchFamily="34" charset="0"/>
+                <a:ea typeface="Arial" pitchFamily="34" charset="-122"/>
+                <a:cs typeface="Arial" pitchFamily="34" charset="-120"/>
+              </a:rPr>
+              <a:t>10</a:t>
+            </a:r>
+            <a:endParaRPr lang="en-US" sz="2800" dirty="0"/>
+          </a:p>
+        </p:txBody>
+      </p:sp>
+      <p:sp>
+        <p:nvSpPr>
+          <p:cNvPr id="14" name="Text 12"/>
+          <p:cNvSpPr/>
+          <p:nvPr/>
+        </p:nvSpPr>
+        <p:spPr>
+          <a:xfrm>
+            <a:off x="2825496" y="5266944"/>
+            <a:ext cx="1472184" cy="347472"/>
+          </a:xfrm>
+          <a:prstGeom prst="rect">
+            <a:avLst/>
+          </a:prstGeom>
+          <a:noFill/>
+          <a:ln/>
+        </p:spPr>
+        <p:txBody>
+          <a:bodyPr wrap="square" lIns="0" tIns="0" rIns="0" bIns="0" rtlCol="0" anchor="t"/>
+          <a:lstStyle/>
+          <a:p>
+            <a:pPr indent="0" marL="0">
+              <a:buNone/>
+            </a:pPr>
+            <a:r>
+              <a:rPr lang="en-US" sz="1250" dirty="0">
+                <a:solidFill>
+                  <a:srgbClr val="6E7597"/>
                 </a:solidFill>
                 <a:latin typeface="Calibri" pitchFamily="34" charset="0"/>
                 <a:ea typeface="Calibri" pitchFamily="34" charset="-122"/>
                 <a:cs typeface="Calibri" pitchFamily="34" charset="-120"/>
               </a:rPr>
-              <a:t>playback rate and volume changes</a:t>
-            </a:r>
-            <a:endParaRPr lang="en-US" sz="1350" dirty="0"/>
-          </a:p>
-          <a:p>
-            <a:pPr marL="342900" indent="-342900">
-              <a:lnSpc>
-                <a:spcPts val="1782"/>
-              </a:lnSpc>
-              <a:spcAft>
-                <a:spcPts val="900"/>
-              </a:spcAft>
-              <a:buSzPct val="100000"/>
-              <a:buChar char="■"/>
-            </a:pPr>
-            <a:r>
-              <a:rPr lang="en-US" sz="1350" dirty="0">
-                <a:solidFill>
-                  <a:srgbClr val="1E2340"/>
-                </a:solidFill>
-                <a:latin typeface="Calibri" pitchFamily="34" charset="0"/>
-                <a:ea typeface="Calibri" pitchFamily="34" charset="-122"/>
-                <a:cs typeface="Calibri" pitchFamily="34" charset="-120"/>
-              </a:rPr>
-              <a:t>buffering stalls, start and end</a:t>
-            </a:r>
-            <a:endParaRPr lang="en-US" sz="1350" dirty="0"/>
-          </a:p>
-          <a:p>
-            <a:pPr marL="342900" indent="-342900">
-              <a:lnSpc>
-                <a:spcPts val="1782"/>
-              </a:lnSpc>
-              <a:spcAft>
-                <a:spcPts val="900"/>
-              </a:spcAft>
-              <a:buSzPct val="100000"/>
-              <a:buChar char="■"/>
-            </a:pPr>
-            <a:r>
-              <a:rPr lang="en-US" sz="1350" dirty="0">
-                <a:solidFill>
-                  <a:srgbClr val="1E2340"/>
-                </a:solidFill>
-                <a:latin typeface="Calibri" pitchFamily="34" charset="0"/>
-                <a:ea typeface="Calibri" pitchFamily="34" charset="-122"/>
-                <a:cs typeface="Calibri" pitchFamily="34" charset="-120"/>
-              </a:rPr>
-              <a:t>milestones at 25, 50, 75 and 100 percent</a:t>
-            </a:r>
-            <a:endParaRPr lang="en-US" sz="1350" dirty="0"/>
-          </a:p>
-          <a:p>
-            <a:pPr marL="342900" indent="-342900">
-              <a:lnSpc>
-                <a:spcPts val="1782"/>
-              </a:lnSpc>
-              <a:spcAft>
-                <a:spcPts val="900"/>
-              </a:spcAft>
-              <a:buSzPct val="100000"/>
-              <a:buChar char="■"/>
-            </a:pPr>
-            <a:r>
-              <a:rPr lang="en-US" sz="1350" dirty="0">
-                <a:solidFill>
-                  <a:srgbClr val="1E2340"/>
-                </a:solidFill>
-                <a:latin typeface="Calibri" pitchFamily="34" charset="0"/>
-                <a:ea typeface="Calibri" pitchFamily="34" charset="-122"/>
-                <a:cs typeface="Calibri" pitchFamily="34" charset="-120"/>
-              </a:rPr>
-              <a:t>watch-time heartbeats during playback</a:t>
-            </a:r>
-            <a:endParaRPr lang="en-US" sz="1350" dirty="0"/>
-          </a:p>
-        </p:txBody>
-      </p:sp>
-      <p:sp>
-        <p:nvSpPr>
-          <p:cNvPr id="14" name="Text 12"/>
-          <p:cNvSpPr/>
-          <p:nvPr/>
-        </p:nvSpPr>
-        <p:spPr>
-          <a:xfrm>
-            <a:off x="566928" y="5120640"/>
-            <a:ext cx="10515600" cy="457200"/>
-          </a:xfrm>
-          <a:prstGeom prst="rect">
-            <a:avLst/>
-          </a:prstGeom>
-          <a:noFill/>
-          <a:ln/>
-        </p:spPr>
-        <p:txBody>
-          <a:bodyPr wrap="square" lIns="0" tIns="0" rIns="0" bIns="0" rtlCol="0" anchor="ctr"/>
-          <a:lstStyle/>
-          <a:p>
-            <a:pPr indent="0" marL="0">
-              <a:buNone/>
-            </a:pPr>
-            <a:r>
-              <a:rPr lang="en-US" sz="1500" b="1" dirty="0">
-                <a:solidFill>
-                  <a:srgbClr val="1E2340"/>
-                </a:solidFill>
-                <a:latin typeface="Calibri" pitchFamily="34" charset="0"/>
-                <a:ea typeface="Calibri" pitchFamily="34" charset="-122"/>
-                <a:cs typeface="Calibri" pitchFamily="34" charset="-120"/>
-              </a:rPr>
-              <a:t>The drop-off chart is only possible because of the milestone events. 360 video events recorded so far.</a:t>
-            </a:r>
-            <a:endParaRPr lang="en-US" sz="1500" dirty="0"/>
-          </a:p>
-        </p:txBody>
-      </p:sp>
+              <a:t>learners</a:t>
+            </a:r>
+            <a:endParaRPr lang="en-US" sz="1250" dirty="0"/>
+          </a:p>
+        </p:txBody>
+      </p:sp>
+      <p:pic>
+        <p:nvPicPr>
+          <p:cNvPr id="15" name="Image 0" descr="/Users/ndstab/Desktop/et/docs/screens/event-stream.png">    </p:cNvPr>
+          <p:cNvPicPr>
+            <a:picLocks noChangeAspect="1"/>
+          </p:cNvPicPr>
+          <p:nvPr/>
+        </p:nvPicPr>
+        <p:blipFill>
+          <a:blip r:embed="rId1"/>
+          <a:stretch>
+            <a:fillRect/>
+          </a:stretch>
+        </p:blipFill>
+        <p:spPr>
+          <a:xfrm>
+            <a:off x="4892040" y="1783080"/>
+            <a:ext cx="6045015" cy="4617720"/>
+          </a:xfrm>
+          <a:prstGeom prst="rect">
+            <a:avLst/>
+          </a:prstGeom>
+          <a:effectLst>
+            <a:outerShdw sx="100000" sy="100000" kx="0" ky="0" algn="bl" rotWithShape="0" blurRad="101600" dist="889" dir="2700000">
+              <a:srgbClr val="1E2340">
+                <a:alpha val="100000"/>
+              </a:srgbClr>
+            </a:outerShdw>
+          </a:effectLst>
+        </p:spPr>
+      </p:pic>
     </p:spTree>
   </p:cSld>
   <p:clrMapOvr>
@@ -10199,7 +9009,7 @@
           <a:ln/>
         </p:spPr>
         <p:txBody>
-          <a:bodyPr wrap="square" lIns="0" tIns="0" rIns="0" bIns="0" rtlCol="0" anchor="ctr"/>
+          <a:bodyPr wrap="square" lIns="0" tIns="0" rIns="0" bIns="0" rtlCol="0" anchor="t"/>
           <a:lstStyle/>
           <a:p>
             <a:pPr indent="0" marL="0">
@@ -10214,7 +9024,7 @@
                 <a:ea typeface="Calibri" pitchFamily="34" charset="-122"/>
                 <a:cs typeface="Calibri" pitchFamily="34" charset="-120"/>
               </a:rPr>
-              <a:t>The data</a:t>
+              <a:t>Taking the data out</a:t>
             </a:r>
             <a:endParaRPr lang="en-US" sz="1300" dirty="0"/>
           </a:p>
@@ -10229,16 +9039,16 @@
         <p:spPr>
           <a:xfrm>
             <a:off x="566928" y="841248"/>
-            <a:ext cx="11057839" cy="777240"/>
-          </a:xfrm>
-          <a:prstGeom prst="rect">
-            <a:avLst/>
-          </a:prstGeom>
-          <a:noFill/>
-          <a:ln/>
-        </p:spPr>
-        <p:txBody>
-          <a:bodyPr wrap="square" lIns="0" tIns="0" rIns="0" bIns="0" rtlCol="0" anchor="ctr"/>
+            <a:ext cx="11057839" cy="658368"/>
+          </a:xfrm>
+          <a:prstGeom prst="rect">
+            <a:avLst/>
+          </a:prstGeom>
+          <a:noFill/>
+          <a:ln/>
+        </p:spPr>
+        <p:txBody>
+          <a:bodyPr wrap="square" lIns="0" tIns="0" rIns="0" bIns="0" rtlCol="0" anchor="t"/>
           <a:lstStyle/>
           <a:p>
             <a:pPr indent="0" marL="0">
@@ -10253,7 +9063,7 @@
                 <a:ea typeface="Arial" pitchFamily="34" charset="-122"/>
                 <a:cs typeface="Arial" pitchFamily="34" charset="-120"/>
               </a:rPr>
-              <a:t>Stored rich, exported in the reference format</a:t>
+              <a:t>Exports in the standard log format</a:t>
             </a:r>
             <a:endParaRPr lang="en-US" sz="3400" dirty="0"/>
           </a:p>
@@ -10268,212 +9078,149 @@
         <p:spPr>
           <a:xfrm>
             <a:off x="566928" y="1783080"/>
-            <a:ext cx="5486400" cy="914400"/>
-          </a:xfrm>
-          <a:prstGeom prst="rect">
-            <a:avLst/>
-          </a:prstGeom>
-          <a:noFill/>
-          <a:ln/>
-        </p:spPr>
-        <p:txBody>
-          <a:bodyPr wrap="square" lIns="0" tIns="0" rIns="0" bIns="0" rtlCol="0" anchor="ctr"/>
+            <a:ext cx="5486400" cy="1005840"/>
+          </a:xfrm>
+          <a:prstGeom prst="rect">
+            <a:avLst/>
+          </a:prstGeom>
+          <a:noFill/>
+          <a:ln/>
+        </p:spPr>
+        <p:txBody>
+          <a:bodyPr wrap="square" lIns="0" tIns="0" rIns="0" bIns="0" rtlCol="0" anchor="t"/>
           <a:lstStyle/>
           <a:p>
             <a:pPr indent="0" marL="0">
               <a:buNone/>
             </a:pPr>
             <a:r>
-              <a:rPr lang="en-US" sz="1450" dirty="0">
-                <a:solidFill>
-                  <a:srgbClr val="343B5C"/>
+              <a:rPr lang="en-US" sz="1500" dirty="0">
+                <a:solidFill>
+                  <a:srgbClr val="1E2340"/>
                 </a:solidFill>
                 <a:latin typeface="Calibri" pitchFamily="34" charset="0"/>
                 <a:ea typeface="Calibri" pitchFamily="34" charset="-122"/>
                 <a:cs typeface="Calibri" pitchFamily="34" charset="-120"/>
               </a:rPr>
-              <a:t>Rows carry more than the export needs: user and session, course and lesson, path, user agent, and a JSON payload for the event-specific detail.</a:t>
-            </a:r>
-            <a:endParaRPr lang="en-US" sz="1450" dirty="0"/>
-          </a:p>
-        </p:txBody>
-      </p:sp>
-      <p:sp>
-        <p:nvSpPr>
-          <p:cNvPr id="7" name="Shape 5"/>
-          <p:cNvSpPr/>
-          <p:nvPr/>
-        </p:nvSpPr>
-        <p:spPr>
-          <a:xfrm>
-            <a:off x="630936" y="2852928"/>
-            <a:ext cx="5486400" cy="1600200"/>
-          </a:xfrm>
-          <a:prstGeom prst="rect">
-            <a:avLst/>
-          </a:prstGeom>
-          <a:solidFill>
-            <a:srgbClr val="E8763C"/>
-          </a:solidFill>
-          <a:ln/>
-        </p:spPr>
-      </p:sp>
-      <p:sp>
-        <p:nvSpPr>
-          <p:cNvPr id="8" name="Shape 6"/>
-          <p:cNvSpPr/>
-          <p:nvPr/>
-        </p:nvSpPr>
-        <p:spPr>
-          <a:xfrm>
-            <a:off x="566928" y="2788920"/>
-            <a:ext cx="5486400" cy="1600200"/>
-          </a:xfrm>
-          <a:prstGeom prst="rect">
-            <a:avLst/>
-          </a:prstGeom>
-          <a:solidFill>
-            <a:srgbClr val="EDE6CF"/>
-          </a:solidFill>
-          <a:ln w="19050">
-            <a:solidFill>
-              <a:srgbClr val="1E2340"/>
-            </a:solidFill>
-            <a:prstDash val="solid"/>
-          </a:ln>
-        </p:spPr>
-      </p:sp>
-      <p:sp>
-        <p:nvSpPr>
-          <p:cNvPr id="9" name="Text 7"/>
-          <p:cNvSpPr/>
-          <p:nvPr/>
-        </p:nvSpPr>
-        <p:spPr>
-          <a:xfrm>
-            <a:off x="822960" y="2999232"/>
-            <a:ext cx="4937760" cy="1188720"/>
-          </a:xfrm>
-          <a:prstGeom prst="rect">
-            <a:avLst/>
-          </a:prstGeom>
-          <a:noFill/>
-          <a:ln/>
-        </p:spPr>
-        <p:txBody>
-          <a:bodyPr wrap="square" lIns="0" tIns="0" rIns="0" bIns="0" rtlCol="0" anchor="ctr"/>
-          <a:lstStyle/>
-          <a:p>
-            <a:pPr indent="0" marL="0">
-              <a:buNone/>
-            </a:pPr>
-            <a:r>
-              <a:rPr lang="en-US" sz="1300" dirty="0">
-                <a:solidFill>
-                  <a:srgbClr val="1E2340"/>
-                </a:solidFill>
-                <a:latin typeface="Courier New" pitchFamily="34" charset="0"/>
-                <a:ea typeface="Courier New" pitchFamily="34" charset="-122"/>
-                <a:cs typeface="Courier New" pitchFamily="34" charset="-120"/>
-              </a:rPr>
-              <a:t>{ "from": 84.2, "to": 61.0,</a:t>
-            </a:r>
-            <a:endParaRPr lang="en-US" sz="1300" dirty="0"/>
-          </a:p>
-          <a:p>
-            <a:pPr indent="0" marL="0">
-              <a:buNone/>
-            </a:pPr>
-            <a:r>
-              <a:rPr lang="en-US" sz="1300" dirty="0">
-                <a:solidFill>
-                  <a:srgbClr val="1E2340"/>
-                </a:solidFill>
-                <a:latin typeface="Courier New" pitchFamily="34" charset="0"/>
-                <a:ea typeface="Courier New" pitchFamily="34" charset="-122"/>
-                <a:cs typeface="Courier New" pitchFamily="34" charset="-120"/>
-              </a:rPr>
-              <a:t>  "direction": "backward",</a:t>
-            </a:r>
-            <a:endParaRPr lang="en-US" sz="1300" dirty="0"/>
-          </a:p>
-          <a:p>
-            <a:pPr indent="0" marL="0">
-              <a:buNone/>
-            </a:pPr>
-            <a:r>
-              <a:rPr lang="en-US" sz="1300" dirty="0">
-                <a:solidFill>
-                  <a:srgbClr val="1E2340"/>
-                </a:solidFill>
-                <a:latin typeface="Courier New" pitchFamily="34" charset="0"/>
-                <a:ea typeface="Courier New" pitchFamily="34" charset="-122"/>
-                <a:cs typeface="Courier New" pitchFamily="34" charset="-120"/>
-              </a:rPr>
-              <a:t>  "jumpSeconds": 23.2 }</a:t>
-            </a:r>
-            <a:endParaRPr lang="en-US" sz="1300" dirty="0"/>
-          </a:p>
-        </p:txBody>
-      </p:sp>
-      <p:sp>
-        <p:nvSpPr>
-          <p:cNvPr id="10" name="Text 8"/>
-          <p:cNvSpPr/>
-          <p:nvPr/>
-        </p:nvSpPr>
-        <p:spPr>
-          <a:xfrm>
-            <a:off x="566928" y="4526280"/>
-            <a:ext cx="5486400" cy="320040"/>
-          </a:xfrm>
-          <a:prstGeom prst="rect">
-            <a:avLst/>
-          </a:prstGeom>
-          <a:noFill/>
-          <a:ln/>
-        </p:spPr>
-        <p:txBody>
-          <a:bodyPr wrap="square" lIns="0" tIns="0" rIns="0" bIns="0" rtlCol="0" anchor="ctr"/>
-          <a:lstStyle/>
-          <a:p>
-            <a:pPr indent="0" marL="0">
-              <a:buNone/>
-            </a:pPr>
-            <a:r>
-              <a:rPr lang="en-US" sz="1250" i="1" dirty="0">
-                <a:solidFill>
-                  <a:srgbClr val="6E7597"/>
+              <a:t>One click gives a CSV in the same seven columns as a Moodle standard log report, so the data drops straight into whatever an institution already uses.</a:t>
+            </a:r>
+            <a:endParaRPr lang="en-US" sz="1500" dirty="0"/>
+          </a:p>
+        </p:txBody>
+      </p:sp>
+      <p:sp>
+        <p:nvSpPr>
+          <p:cNvPr id="7" name="Text 5"/>
+          <p:cNvSpPr/>
+          <p:nvPr/>
+        </p:nvSpPr>
+        <p:spPr>
+          <a:xfrm>
+            <a:off x="566928" y="2971800"/>
+            <a:ext cx="5486400" cy="1828800"/>
+          </a:xfrm>
+          <a:prstGeom prst="rect">
+            <a:avLst/>
+          </a:prstGeom>
+          <a:noFill/>
+          <a:ln/>
+        </p:spPr>
+        <p:txBody>
+          <a:bodyPr wrap="square" lIns="0" tIns="0" rIns="0" bIns="0" rtlCol="0" anchor="t"/>
+          <a:lstStyle/>
+          <a:p>
+            <a:pPr marL="342900" indent="-342900">
+              <a:lnSpc>
+                <a:spcPts val="1848"/>
+              </a:lnSpc>
+              <a:spcAft>
+                <a:spcPts val="900"/>
+              </a:spcAft>
+              <a:buSzPct val="100000"/>
+              <a:buChar char="■"/>
+            </a:pPr>
+            <a:r>
+              <a:rPr lang="en-US" sz="1400" dirty="0">
+                <a:solidFill>
+                  <a:srgbClr val="343B5C"/>
                 </a:solidFill>
                 <a:latin typeface="Calibri" pitchFamily="34" charset="0"/>
                 <a:ea typeface="Calibri" pitchFamily="34" charset="-122"/>
                 <a:cs typeface="Calibri" pitchFamily="34" charset="-120"/>
               </a:rPr>
-              <a:t>One seek, as stored.</a:t>
-            </a:r>
-            <a:endParaRPr lang="en-US" sz="1250" dirty="0"/>
-          </a:p>
-        </p:txBody>
-      </p:sp>
-      <p:sp>
-        <p:nvSpPr>
-          <p:cNvPr id="11" name="Text 9"/>
-          <p:cNvSpPr/>
-          <p:nvPr/>
-        </p:nvSpPr>
-        <p:spPr>
-          <a:xfrm>
-            <a:off x="6492240" y="1783080"/>
-            <a:ext cx="5120640" cy="365760"/>
-          </a:xfrm>
-          <a:prstGeom prst="rect">
-            <a:avLst/>
-          </a:prstGeom>
-          <a:noFill/>
-          <a:ln/>
-        </p:spPr>
-        <p:txBody>
-          <a:bodyPr wrap="square" lIns="0" tIns="0" rIns="0" bIns="0" rtlCol="0" anchor="ctr"/>
+              <a:t>The on-screen table and the CSV come from the same projection, so they cannot disagree.</a:t>
+            </a:r>
+            <a:endParaRPr lang="en-US" sz="1400" dirty="0"/>
+          </a:p>
+          <a:p>
+            <a:pPr marL="342900" indent="-342900">
+              <a:lnSpc>
+                <a:spcPts val="1848"/>
+              </a:lnSpc>
+              <a:spcAft>
+                <a:spcPts val="900"/>
+              </a:spcAft>
+              <a:buSzPct val="100000"/>
+              <a:buChar char="■"/>
+            </a:pPr>
+            <a:r>
+              <a:rPr lang="en-US" sz="1400" dirty="0">
+                <a:solidFill>
+                  <a:srgbClr val="343B5C"/>
+                </a:solidFill>
+                <a:latin typeface="Calibri" pitchFamily="34" charset="0"/>
+                <a:ea typeface="Calibri" pitchFamily="34" charset="-122"/>
+                <a:cs typeface="Calibri" pitchFamily="34" charset="-120"/>
+              </a:rPr>
+              <a:t>Filters apply to the export, so an educator can pull one learner or one course.</a:t>
+            </a:r>
+            <a:endParaRPr lang="en-US" sz="1400" dirty="0"/>
+          </a:p>
+          <a:p>
+            <a:pPr marL="342900" indent="-342900">
+              <a:lnSpc>
+                <a:spcPts val="1848"/>
+              </a:lnSpc>
+              <a:spcAft>
+                <a:spcPts val="900"/>
+              </a:spcAft>
+              <a:buSzPct val="100000"/>
+              <a:buChar char="■"/>
+            </a:pPr>
+            <a:r>
+              <a:rPr lang="en-US" sz="1400" dirty="0">
+                <a:solidFill>
+                  <a:srgbClr val="343B5C"/>
+                </a:solidFill>
+                <a:latin typeface="Calibri" pitchFamily="34" charset="0"/>
+                <a:ea typeface="Calibri" pitchFamily="34" charset="-122"/>
+                <a:cs typeface="Calibri" pitchFamily="34" charset="-120"/>
+              </a:rPr>
+              <a:t>Written with a byte order mark, so Excel opens the UTF-8 correctly.</a:t>
+            </a:r>
+            <a:endParaRPr lang="en-US" sz="1400" dirty="0"/>
+          </a:p>
+        </p:txBody>
+      </p:sp>
+      <p:sp>
+        <p:nvSpPr>
+          <p:cNvPr id="8" name="Text 6"/>
+          <p:cNvSpPr/>
+          <p:nvPr/>
+        </p:nvSpPr>
+        <p:spPr>
+          <a:xfrm>
+            <a:off x="6675120" y="1783080"/>
+            <a:ext cx="4937760" cy="365760"/>
+          </a:xfrm>
+          <a:prstGeom prst="rect">
+            <a:avLst/>
+          </a:prstGeom>
+          <a:noFill/>
+          <a:ln/>
+        </p:spPr>
+        <p:txBody>
+          <a:bodyPr wrap="square" lIns="0" tIns="0" rIns="0" bIns="0" rtlCol="0" anchor="t"/>
           <a:lstStyle/>
           <a:p>
             <a:pPr indent="0" marL="0">
@@ -10488,7 +9235,7 @@
                 <a:ea typeface="Arial" pitchFamily="34" charset="-122"/>
                 <a:cs typeface="Arial" pitchFamily="34" charset="-120"/>
               </a:rPr>
-              <a:t>The seven exported columns</a:t>
+              <a:t>The seven columns</a:t>
             </a:r>
             <a:endParaRPr lang="en-US" sz="1700" dirty="0"/>
           </a:p>
@@ -10509,16 +9256,16 @@
           </p:nvPr>
         </p:nvGraphicFramePr>
         <p:xfrm>
-          <a:off x="6492240" y="2240280"/>
-          <a:ext cx="5120640" cy="914400"/>
+          <a:off x="6675120" y="2240280"/>
+          <a:ext cx="4937760" cy="914400"/>
         </p:xfrm>
         <a:graphic>
           <a:graphicData uri="http://schemas.openxmlformats.org/drawingml/2006/table">
             <a:tbl>
               <a:tblPr/>
               <a:tblGrid>
-                <a:gridCol w="2468880"/>
-                <a:gridCol w="2651760"/>
+                <a:gridCol w="2377440"/>
+                <a:gridCol w="2560320"/>
               </a:tblGrid>
               <a:tr h="329184">
                 <a:tc>
@@ -11490,129 +10237,6 @@
           </a:graphicData>
         </a:graphic>
       </p:graphicFrame>
-      <p:sp>
-        <p:nvSpPr>
-          <p:cNvPr id="13" name="Text 10"/>
-          <p:cNvSpPr/>
-          <p:nvPr/>
-        </p:nvSpPr>
-        <p:spPr>
-          <a:xfrm>
-            <a:off x="6492240" y="4709160"/>
-            <a:ext cx="5120640" cy="457200"/>
-          </a:xfrm>
-          <a:prstGeom prst="rect">
-            <a:avLst/>
-          </a:prstGeom>
-          <a:noFill/>
-          <a:ln/>
-        </p:spPr>
-        <p:txBody>
-          <a:bodyPr wrap="square" lIns="0" tIns="0" rIns="0" bIns="0" rtlCol="0" anchor="t"/>
-          <a:lstStyle/>
-          <a:p>
-            <a:pPr indent="0" marL="0">
-              <a:buNone/>
-            </a:pPr>
-            <a:r>
-              <a:rPr lang="en-US" sz="1250" i="1" dirty="0">
-                <a:solidFill>
-                  <a:srgbClr val="6E7597"/>
-                </a:solidFill>
-                <a:latin typeface="Calibri" pitchFamily="34" charset="0"/>
-                <a:ea typeface="Calibri" pitchFamily="34" charset="-122"/>
-                <a:cs typeface="Calibri" pitchFamily="34" charset="-120"/>
-              </a:rPr>
-              <a:t>Held in one module, so the on-screen report and the CSV cannot drift apart.</a:t>
-            </a:r>
-            <a:endParaRPr lang="en-US" sz="1250" dirty="0"/>
-          </a:p>
-        </p:txBody>
-      </p:sp>
-      <p:sp>
-        <p:nvSpPr>
-          <p:cNvPr id="14" name="Shape 11"/>
-          <p:cNvSpPr/>
-          <p:nvPr/>
-        </p:nvSpPr>
-        <p:spPr>
-          <a:xfrm>
-            <a:off x="630936" y="5321808"/>
-            <a:ext cx="11064240" cy="1051560"/>
-          </a:xfrm>
-          <a:prstGeom prst="rect">
-            <a:avLst/>
-          </a:prstGeom>
-          <a:solidFill>
-            <a:srgbClr val="2E5BD4"/>
-          </a:solidFill>
-          <a:ln/>
-        </p:spPr>
-      </p:sp>
-      <p:sp>
-        <p:nvSpPr>
-          <p:cNvPr id="15" name="Shape 12"/>
-          <p:cNvSpPr/>
-          <p:nvPr/>
-        </p:nvSpPr>
-        <p:spPr>
-          <a:xfrm>
-            <a:off x="566928" y="5257800"/>
-            <a:ext cx="11064240" cy="1051560"/>
-          </a:xfrm>
-          <a:prstGeom prst="rect">
-            <a:avLst/>
-          </a:prstGeom>
-          <a:solidFill>
-            <a:srgbClr val="EDE6CF"/>
-          </a:solidFill>
-          <a:ln w="19050">
-            <a:solidFill>
-              <a:srgbClr val="1E2340"/>
-            </a:solidFill>
-            <a:prstDash val="solid"/>
-          </a:ln>
-        </p:spPr>
-      </p:sp>
-      <p:sp>
-        <p:nvSpPr>
-          <p:cNvPr id="16" name="Text 13"/>
-          <p:cNvSpPr/>
-          <p:nvPr/>
-        </p:nvSpPr>
-        <p:spPr>
-          <a:xfrm>
-            <a:off x="841248" y="5468112"/>
-            <a:ext cx="10515600" cy="685800"/>
-          </a:xfrm>
-          <a:prstGeom prst="rect">
-            <a:avLst/>
-          </a:prstGeom>
-          <a:noFill/>
-          <a:ln/>
-        </p:spPr>
-        <p:txBody>
-          <a:bodyPr wrap="square" lIns="0" tIns="0" rIns="0" bIns="0" rtlCol="0" anchor="t"/>
-          <a:lstStyle/>
-          <a:p>
-            <a:pPr indent="0" marL="0">
-              <a:buNone/>
-            </a:pPr>
-            <a:r>
-              <a:rPr lang="en-US" sz="1400" dirty="0">
-                <a:solidFill>
-                  <a:srgbClr val="1E2340"/>
-                </a:solidFill>
-                <a:latin typeface="Calibri" pitchFamily="34" charset="0"/>
-                <a:ea typeface="Calibri" pitchFamily="34" charset="-122"/>
-                <a:cs typeface="Calibri" pitchFamily="34" charset="-120"/>
-              </a:rPr>
-              <a:t>2,206 rows stored so far, spanning eight days of seeded class activity. The export writes them in the reference order, with a byte order mark so Excel opens the UTF-8 correctly.</a:t>
-            </a:r>
-            <a:endParaRPr lang="en-US" sz="1400" dirty="0"/>
-          </a:p>
-        </p:txBody>
-      </p:sp>
     </p:spTree>
   </p:cSld>
   <p:clrMapOvr>
